--- a/1.7 IP, Routing Basic/1.7 IP Routing Basic.pptx
+++ b/1.7 IP, Routing Basic/1.7 IP Routing Basic.pptx
@@ -5,7 +5,7 @@
     <p:sldMasterId id="2147483678" r:id="rId1"/>
   </p:sldMasterIdLst>
   <p:notesMasterIdLst>
-    <p:notesMasterId r:id="rId72"/>
+    <p:notesMasterId r:id="rId81"/>
   </p:notesMasterIdLst>
   <p:sldIdLst>
     <p:sldId id="256" r:id="rId2"/>
@@ -78,6 +78,15 @@
     <p:sldId id="324" r:id="rId69"/>
     <p:sldId id="325" r:id="rId70"/>
     <p:sldId id="326" r:id="rId71"/>
+    <p:sldId id="327" r:id="rId72"/>
+    <p:sldId id="328" r:id="rId73"/>
+    <p:sldId id="329" r:id="rId74"/>
+    <p:sldId id="330" r:id="rId75"/>
+    <p:sldId id="331" r:id="rId76"/>
+    <p:sldId id="332" r:id="rId77"/>
+    <p:sldId id="333" r:id="rId78"/>
+    <p:sldId id="334" r:id="rId79"/>
+    <p:sldId id="335" r:id="rId80"/>
   </p:sldIdLst>
   <p:sldSz cx="12192000" cy="6858000"/>
   <p:notesSz cx="6858000" cy="9144000"/>
@@ -366,7 +375,7 @@
           <a:p>
             <a:fld id="{1BF64A1B-B33A-494C-96A5-F502129919B1}" type="datetimeFigureOut">
               <a:rPr lang="ru-RU" smtClean="0"/>
-              <a:t>28.08.2026</a:t>
+              <a:t>31.08.2026</a:t>
             </a:fld>
             <a:endParaRPr lang="ru-RU"/>
           </a:p>
@@ -909,7 +918,7 @@
           <a:noFill/>
           <a:extLst>
             <a:ext uri="{909E8E84-426E-40dd-AFC4-6F175D3DCCD1}">
-              <a14:hiddenFill xmlns="" xmlns:a14="http://schemas.microsoft.com/office/drawing/2010/main">
+              <a14:hiddenFill xmlns:a14="http://schemas.microsoft.com/office/drawing/2010/main" xmlns="">
                 <a:solidFill>
                   <a:srgbClr val="FFFFFF"/>
                 </a:solidFill>
@@ -968,7 +977,7 @@
             </a:ln>
             <a:extLst>
               <a:ext uri="{91240B29-F687-4f45-9708-019B960494DF}">
-                <a14:hiddenLine xmlns="" xmlns:a14="http://schemas.microsoft.com/office/drawing/2010/main" w="9525">
+                <a14:hiddenLine xmlns:a14="http://schemas.microsoft.com/office/drawing/2010/main" xmlns="" w="9525">
                   <a:solidFill>
                     <a:srgbClr val="000000"/>
                   </a:solidFill>
@@ -1058,7 +1067,7 @@
             </a:ln>
             <a:extLst>
               <a:ext uri="{91240B29-F687-4f45-9708-019B960494DF}">
-                <a14:hiddenLine xmlns="" xmlns:a14="http://schemas.microsoft.com/office/drawing/2010/main" w="9525">
+                <a14:hiddenLine xmlns:a14="http://schemas.microsoft.com/office/drawing/2010/main" xmlns="" w="9525">
                   <a:solidFill>
                     <a:srgbClr val="000000"/>
                   </a:solidFill>
@@ -1148,7 +1157,7 @@
             </a:ln>
             <a:extLst>
               <a:ext uri="{91240B29-F687-4f45-9708-019B960494DF}">
-                <a14:hiddenLine xmlns="" xmlns:a14="http://schemas.microsoft.com/office/drawing/2010/main" w="9525">
+                <a14:hiddenLine xmlns:a14="http://schemas.microsoft.com/office/drawing/2010/main" xmlns="" w="9525">
                   <a:solidFill>
                     <a:srgbClr val="000000"/>
                   </a:solidFill>
@@ -1182,7 +1191,7 @@
             </a:ln>
             <a:extLst>
               <a:ext uri="{91240B29-F687-4f45-9708-019B960494DF}">
-                <a14:hiddenLine xmlns="" xmlns:a14="http://schemas.microsoft.com/office/drawing/2010/main" w="9525">
+                <a14:hiddenLine xmlns:a14="http://schemas.microsoft.com/office/drawing/2010/main" xmlns="" w="9525">
                   <a:solidFill>
                     <a:srgbClr val="000000"/>
                   </a:solidFill>
@@ -1272,7 +1281,7 @@
             </a:ln>
             <a:extLst>
               <a:ext uri="{91240B29-F687-4f45-9708-019B960494DF}">
-                <a14:hiddenLine xmlns="" xmlns:a14="http://schemas.microsoft.com/office/drawing/2010/main" w="9525">
+                <a14:hiddenLine xmlns:a14="http://schemas.microsoft.com/office/drawing/2010/main" xmlns="" w="9525">
                   <a:solidFill>
                     <a:srgbClr val="000000"/>
                   </a:solidFill>
@@ -1334,7 +1343,7 @@
             </a:ln>
             <a:extLst>
               <a:ext uri="{91240B29-F687-4f45-9708-019B960494DF}">
-                <a14:hiddenLine xmlns="" xmlns:a14="http://schemas.microsoft.com/office/drawing/2010/main" w="9525">
+                <a14:hiddenLine xmlns:a14="http://schemas.microsoft.com/office/drawing/2010/main" xmlns="" w="9525">
                   <a:solidFill>
                     <a:srgbClr val="000000"/>
                   </a:solidFill>
@@ -1396,7 +1405,7 @@
             </a:ln>
             <a:extLst>
               <a:ext uri="{91240B29-F687-4f45-9708-019B960494DF}">
-                <a14:hiddenLine xmlns="" xmlns:a14="http://schemas.microsoft.com/office/drawing/2010/main" w="9525">
+                <a14:hiddenLine xmlns:a14="http://schemas.microsoft.com/office/drawing/2010/main" xmlns="" w="9525">
                   <a:solidFill>
                     <a:srgbClr val="000000"/>
                   </a:solidFill>
@@ -1486,7 +1495,7 @@
             </a:ln>
             <a:extLst>
               <a:ext uri="{91240B29-F687-4f45-9708-019B960494DF}">
-                <a14:hiddenLine xmlns="" xmlns:a14="http://schemas.microsoft.com/office/drawing/2010/main" w="9525">
+                <a14:hiddenLine xmlns:a14="http://schemas.microsoft.com/office/drawing/2010/main" xmlns="" w="9525">
                   <a:solidFill>
                     <a:srgbClr val="000000"/>
                   </a:solidFill>
@@ -1548,7 +1557,7 @@
             </a:ln>
             <a:extLst>
               <a:ext uri="{91240B29-F687-4f45-9708-019B960494DF}">
-                <a14:hiddenLine xmlns="" xmlns:a14="http://schemas.microsoft.com/office/drawing/2010/main" w="9525">
+                <a14:hiddenLine xmlns:a14="http://schemas.microsoft.com/office/drawing/2010/main" xmlns="" w="9525">
                   <a:solidFill>
                     <a:srgbClr val="000000"/>
                   </a:solidFill>
@@ -1610,7 +1619,7 @@
             </a:ln>
             <a:extLst>
               <a:ext uri="{91240B29-F687-4f45-9708-019B960494DF}">
-                <a14:hiddenLine xmlns="" xmlns:a14="http://schemas.microsoft.com/office/drawing/2010/main" w="9525">
+                <a14:hiddenLine xmlns:a14="http://schemas.microsoft.com/office/drawing/2010/main" xmlns="" w="9525">
                   <a:solidFill>
                     <a:srgbClr val="000000"/>
                   </a:solidFill>
@@ -1700,7 +1709,7 @@
             </a:ln>
             <a:extLst>
               <a:ext uri="{91240B29-F687-4f45-9708-019B960494DF}">
-                <a14:hiddenLine xmlns="" xmlns:a14="http://schemas.microsoft.com/office/drawing/2010/main" w="9525">
+                <a14:hiddenLine xmlns:a14="http://schemas.microsoft.com/office/drawing/2010/main" xmlns="" w="9525">
                   <a:solidFill>
                     <a:srgbClr val="000000"/>
                   </a:solidFill>
@@ -1790,7 +1799,7 @@
             </a:ln>
             <a:extLst>
               <a:ext uri="{91240B29-F687-4f45-9708-019B960494DF}">
-                <a14:hiddenLine xmlns="" xmlns:a14="http://schemas.microsoft.com/office/drawing/2010/main" w="9525">
+                <a14:hiddenLine xmlns:a14="http://schemas.microsoft.com/office/drawing/2010/main" xmlns="" w="9525">
                   <a:solidFill>
                     <a:srgbClr val="000000"/>
                   </a:solidFill>
@@ -1852,7 +1861,7 @@
             </a:ln>
             <a:extLst>
               <a:ext uri="{91240B29-F687-4f45-9708-019B960494DF}">
-                <a14:hiddenLine xmlns="" xmlns:a14="http://schemas.microsoft.com/office/drawing/2010/main" w="9525">
+                <a14:hiddenLine xmlns:a14="http://schemas.microsoft.com/office/drawing/2010/main" xmlns="" w="9525">
                   <a:solidFill>
                     <a:srgbClr val="000000"/>
                   </a:solidFill>
@@ -1962,7 +1971,7 @@
             </a:ln>
             <a:extLst>
               <a:ext uri="{91240B29-F687-4f45-9708-019B960494DF}">
-                <a14:hiddenLine xmlns="" xmlns:a14="http://schemas.microsoft.com/office/drawing/2010/main" w="9525">
+                <a14:hiddenLine xmlns:a14="http://schemas.microsoft.com/office/drawing/2010/main" xmlns="" w="9525">
                   <a:solidFill>
                     <a:srgbClr val="000000"/>
                   </a:solidFill>
@@ -2024,7 +2033,7 @@
             </a:ln>
             <a:extLst>
               <a:ext uri="{91240B29-F687-4f45-9708-019B960494DF}">
-                <a14:hiddenLine xmlns="" xmlns:a14="http://schemas.microsoft.com/office/drawing/2010/main" w="9525">
+                <a14:hiddenLine xmlns:a14="http://schemas.microsoft.com/office/drawing/2010/main" xmlns="" w="9525">
                   <a:solidFill>
                     <a:srgbClr val="000000"/>
                   </a:solidFill>
@@ -2114,7 +2123,7 @@
             </a:ln>
             <a:extLst>
               <a:ext uri="{91240B29-F687-4f45-9708-019B960494DF}">
-                <a14:hiddenLine xmlns="" xmlns:a14="http://schemas.microsoft.com/office/drawing/2010/main" w="9525">
+                <a14:hiddenLine xmlns:a14="http://schemas.microsoft.com/office/drawing/2010/main" xmlns="" w="9525">
                   <a:solidFill>
                     <a:srgbClr val="000000"/>
                   </a:solidFill>
@@ -2204,7 +2213,7 @@
             </a:ln>
             <a:extLst>
               <a:ext uri="{91240B29-F687-4f45-9708-019B960494DF}">
-                <a14:hiddenLine xmlns="" xmlns:a14="http://schemas.microsoft.com/office/drawing/2010/main" w="9525">
+                <a14:hiddenLine xmlns:a14="http://schemas.microsoft.com/office/drawing/2010/main" xmlns="" w="9525">
                   <a:solidFill>
                     <a:srgbClr val="000000"/>
                   </a:solidFill>
@@ -2266,7 +2275,7 @@
             </a:ln>
             <a:extLst>
               <a:ext uri="{91240B29-F687-4f45-9708-019B960494DF}">
-                <a14:hiddenLine xmlns="" xmlns:a14="http://schemas.microsoft.com/office/drawing/2010/main" w="9525">
+                <a14:hiddenLine xmlns:a14="http://schemas.microsoft.com/office/drawing/2010/main" xmlns="" w="9525">
                   <a:solidFill>
                     <a:srgbClr val="000000"/>
                   </a:solidFill>
@@ -2356,7 +2365,7 @@
             </a:ln>
             <a:extLst>
               <a:ext uri="{91240B29-F687-4f45-9708-019B960494DF}">
-                <a14:hiddenLine xmlns="" xmlns:a14="http://schemas.microsoft.com/office/drawing/2010/main" w="9525">
+                <a14:hiddenLine xmlns:a14="http://schemas.microsoft.com/office/drawing/2010/main" xmlns="" w="9525">
                   <a:solidFill>
                     <a:srgbClr val="000000"/>
                   </a:solidFill>
@@ -2446,7 +2455,7 @@
             </a:ln>
             <a:extLst>
               <a:ext uri="{91240B29-F687-4f45-9708-019B960494DF}">
-                <a14:hiddenLine xmlns="" xmlns:a14="http://schemas.microsoft.com/office/drawing/2010/main" w="9525">
+                <a14:hiddenLine xmlns:a14="http://schemas.microsoft.com/office/drawing/2010/main" xmlns="" w="9525">
                   <a:solidFill>
                     <a:srgbClr val="000000"/>
                   </a:solidFill>
@@ -2502,7 +2511,7 @@
             </a:ln>
             <a:extLst>
               <a:ext uri="{91240B29-F687-4f45-9708-019B960494DF}">
-                <a14:hiddenLine xmlns="" xmlns:a14="http://schemas.microsoft.com/office/drawing/2010/main" w="9525">
+                <a14:hiddenLine xmlns:a14="http://schemas.microsoft.com/office/drawing/2010/main" xmlns="" w="9525">
                   <a:solidFill>
                     <a:srgbClr val="000000"/>
                   </a:solidFill>
@@ -2592,7 +2601,7 @@
             </a:ln>
             <a:extLst>
               <a:ext uri="{91240B29-F687-4f45-9708-019B960494DF}">
-                <a14:hiddenLine xmlns="" xmlns:a14="http://schemas.microsoft.com/office/drawing/2010/main" w="9525">
+                <a14:hiddenLine xmlns:a14="http://schemas.microsoft.com/office/drawing/2010/main" xmlns="" w="9525">
                   <a:solidFill>
                     <a:srgbClr val="000000"/>
                   </a:solidFill>
@@ -2648,7 +2657,7 @@
             </a:ln>
             <a:extLst>
               <a:ext uri="{91240B29-F687-4f45-9708-019B960494DF}">
-                <a14:hiddenLine xmlns="" xmlns:a14="http://schemas.microsoft.com/office/drawing/2010/main" w="9525">
+                <a14:hiddenLine xmlns:a14="http://schemas.microsoft.com/office/drawing/2010/main" xmlns="" w="9525">
                   <a:solidFill>
                     <a:srgbClr val="000000"/>
                   </a:solidFill>
@@ -2738,7 +2747,7 @@
             </a:ln>
             <a:extLst>
               <a:ext uri="{91240B29-F687-4f45-9708-019B960494DF}">
-                <a14:hiddenLine xmlns="" xmlns:a14="http://schemas.microsoft.com/office/drawing/2010/main" w="9525">
+                <a14:hiddenLine xmlns:a14="http://schemas.microsoft.com/office/drawing/2010/main" xmlns="" w="9525">
                   <a:solidFill>
                     <a:srgbClr val="000000"/>
                   </a:solidFill>
@@ -2806,7 +2815,7 @@
             </a:ln>
             <a:extLst>
               <a:ext uri="{91240B29-F687-4f45-9708-019B960494DF}">
-                <a14:hiddenLine xmlns="" xmlns:a14="http://schemas.microsoft.com/office/drawing/2010/main" w="9525">
+                <a14:hiddenLine xmlns:a14="http://schemas.microsoft.com/office/drawing/2010/main" xmlns="" w="9525">
                   <a:solidFill>
                     <a:srgbClr val="000000"/>
                   </a:solidFill>
@@ -2896,7 +2905,7 @@
             </a:ln>
             <a:extLst>
               <a:ext uri="{91240B29-F687-4f45-9708-019B960494DF}">
-                <a14:hiddenLine xmlns="" xmlns:a14="http://schemas.microsoft.com/office/drawing/2010/main" w="9525">
+                <a14:hiddenLine xmlns:a14="http://schemas.microsoft.com/office/drawing/2010/main" xmlns="" w="9525">
                   <a:solidFill>
                     <a:srgbClr val="000000"/>
                   </a:solidFill>
@@ -2964,7 +2973,7 @@
             </a:ln>
             <a:extLst>
               <a:ext uri="{91240B29-F687-4f45-9708-019B960494DF}">
-                <a14:hiddenLine xmlns="" xmlns:a14="http://schemas.microsoft.com/office/drawing/2010/main" w="9525">
+                <a14:hiddenLine xmlns:a14="http://schemas.microsoft.com/office/drawing/2010/main" xmlns="" w="9525">
                   <a:solidFill>
                     <a:srgbClr val="000000"/>
                   </a:solidFill>
@@ -3054,7 +3063,7 @@
             </a:ln>
             <a:extLst>
               <a:ext uri="{91240B29-F687-4f45-9708-019B960494DF}">
-                <a14:hiddenLine xmlns="" xmlns:a14="http://schemas.microsoft.com/office/drawing/2010/main" w="9525">
+                <a14:hiddenLine xmlns:a14="http://schemas.microsoft.com/office/drawing/2010/main" xmlns="" w="9525">
                   <a:solidFill>
                     <a:srgbClr val="000000"/>
                   </a:solidFill>
@@ -3088,7 +3097,7 @@
             </a:ln>
             <a:extLst>
               <a:ext uri="{91240B29-F687-4f45-9708-019B960494DF}">
-                <a14:hiddenLine xmlns="" xmlns:a14="http://schemas.microsoft.com/office/drawing/2010/main" w="9525">
+                <a14:hiddenLine xmlns:a14="http://schemas.microsoft.com/office/drawing/2010/main" xmlns="" w="9525">
                   <a:solidFill>
                     <a:srgbClr val="000000"/>
                   </a:solidFill>
@@ -3178,7 +3187,7 @@
             </a:ln>
             <a:extLst>
               <a:ext uri="{91240B29-F687-4f45-9708-019B960494DF}">
-                <a14:hiddenLine xmlns="" xmlns:a14="http://schemas.microsoft.com/office/drawing/2010/main" w="9525">
+                <a14:hiddenLine xmlns:a14="http://schemas.microsoft.com/office/drawing/2010/main" xmlns="" w="9525">
                   <a:solidFill>
                     <a:srgbClr val="000000"/>
                   </a:solidFill>
@@ -3240,7 +3249,7 @@
             </a:ln>
             <a:extLst>
               <a:ext uri="{91240B29-F687-4f45-9708-019B960494DF}">
-                <a14:hiddenLine xmlns="" xmlns:a14="http://schemas.microsoft.com/office/drawing/2010/main" w="9525">
+                <a14:hiddenLine xmlns:a14="http://schemas.microsoft.com/office/drawing/2010/main" xmlns="" w="9525">
                   <a:solidFill>
                     <a:srgbClr val="000000"/>
                   </a:solidFill>
@@ -3302,7 +3311,7 @@
             </a:ln>
             <a:extLst>
               <a:ext uri="{91240B29-F687-4f45-9708-019B960494DF}">
-                <a14:hiddenLine xmlns="" xmlns:a14="http://schemas.microsoft.com/office/drawing/2010/main" w="9525">
+                <a14:hiddenLine xmlns:a14="http://schemas.microsoft.com/office/drawing/2010/main" xmlns="" w="9525">
                   <a:solidFill>
                     <a:srgbClr val="000000"/>
                   </a:solidFill>
@@ -3392,7 +3401,7 @@
             </a:ln>
             <a:extLst>
               <a:ext uri="{91240B29-F687-4f45-9708-019B960494DF}">
-                <a14:hiddenLine xmlns="" xmlns:a14="http://schemas.microsoft.com/office/drawing/2010/main" w="9525">
+                <a14:hiddenLine xmlns:a14="http://schemas.microsoft.com/office/drawing/2010/main" xmlns="" w="9525">
                   <a:solidFill>
                     <a:srgbClr val="000000"/>
                   </a:solidFill>
@@ -3460,7 +3469,7 @@
             </a:ln>
             <a:extLst>
               <a:ext uri="{91240B29-F687-4f45-9708-019B960494DF}">
-                <a14:hiddenLine xmlns="" xmlns:a14="http://schemas.microsoft.com/office/drawing/2010/main" w="9525">
+                <a14:hiddenLine xmlns:a14="http://schemas.microsoft.com/office/drawing/2010/main" xmlns="" w="9525">
                   <a:solidFill>
                     <a:srgbClr val="000000"/>
                   </a:solidFill>
@@ -3522,7 +3531,7 @@
             </a:ln>
             <a:extLst>
               <a:ext uri="{91240B29-F687-4f45-9708-019B960494DF}">
-                <a14:hiddenLine xmlns="" xmlns:a14="http://schemas.microsoft.com/office/drawing/2010/main" w="9525">
+                <a14:hiddenLine xmlns:a14="http://schemas.microsoft.com/office/drawing/2010/main" xmlns="" w="9525">
                   <a:solidFill>
                     <a:srgbClr val="000000"/>
                   </a:solidFill>
@@ -3612,7 +3621,7 @@
             </a:ln>
             <a:extLst>
               <a:ext uri="{91240B29-F687-4f45-9708-019B960494DF}">
-                <a14:hiddenLine xmlns="" xmlns:a14="http://schemas.microsoft.com/office/drawing/2010/main" w="9525">
+                <a14:hiddenLine xmlns:a14="http://schemas.microsoft.com/office/drawing/2010/main" xmlns="" w="9525">
                   <a:solidFill>
                     <a:srgbClr val="000000"/>
                   </a:solidFill>
@@ -3674,7 +3683,7 @@
             </a:ln>
             <a:extLst>
               <a:ext uri="{91240B29-F687-4f45-9708-019B960494DF}">
-                <a14:hiddenLine xmlns="" xmlns:a14="http://schemas.microsoft.com/office/drawing/2010/main" w="9525">
+                <a14:hiddenLine xmlns:a14="http://schemas.microsoft.com/office/drawing/2010/main" xmlns="" w="9525">
                   <a:solidFill>
                     <a:srgbClr val="000000"/>
                   </a:solidFill>
@@ -3764,7 +3773,7 @@
             </a:ln>
             <a:extLst>
               <a:ext uri="{91240B29-F687-4f45-9708-019B960494DF}">
-                <a14:hiddenLine xmlns="" xmlns:a14="http://schemas.microsoft.com/office/drawing/2010/main" w="9525">
+                <a14:hiddenLine xmlns:a14="http://schemas.microsoft.com/office/drawing/2010/main" xmlns="" w="9525">
                   <a:solidFill>
                     <a:srgbClr val="000000"/>
                   </a:solidFill>
@@ -3826,7 +3835,7 @@
             </a:ln>
             <a:extLst>
               <a:ext uri="{91240B29-F687-4f45-9708-019B960494DF}">
-                <a14:hiddenLine xmlns="" xmlns:a14="http://schemas.microsoft.com/office/drawing/2010/main" w="9525">
+                <a14:hiddenLine xmlns:a14="http://schemas.microsoft.com/office/drawing/2010/main" xmlns="" w="9525">
                   <a:solidFill>
                     <a:srgbClr val="000000"/>
                   </a:solidFill>
@@ -3916,7 +3925,7 @@
             </a:ln>
             <a:extLst>
               <a:ext uri="{91240B29-F687-4f45-9708-019B960494DF}">
-                <a14:hiddenLine xmlns="" xmlns:a14="http://schemas.microsoft.com/office/drawing/2010/main" w="9525">
+                <a14:hiddenLine xmlns:a14="http://schemas.microsoft.com/office/drawing/2010/main" xmlns="" w="9525">
                   <a:solidFill>
                     <a:srgbClr val="000000"/>
                   </a:solidFill>
@@ -3950,7 +3959,7 @@
             </a:ln>
             <a:extLst>
               <a:ext uri="{91240B29-F687-4f45-9708-019B960494DF}">
-                <a14:hiddenLine xmlns="" xmlns:a14="http://schemas.microsoft.com/office/drawing/2010/main" w="9525">
+                <a14:hiddenLine xmlns:a14="http://schemas.microsoft.com/office/drawing/2010/main" xmlns="" w="9525">
                   <a:solidFill>
                     <a:srgbClr val="000000"/>
                   </a:solidFill>
@@ -4015,7 +4024,7 @@
             </a:ln>
             <a:extLst>
               <a:ext uri="{91240B29-F687-4f45-9708-019B960494DF}">
-                <a14:hiddenLine xmlns="" xmlns:a14="http://schemas.microsoft.com/office/drawing/2010/main" w="9525">
+                <a14:hiddenLine xmlns:a14="http://schemas.microsoft.com/office/drawing/2010/main" xmlns="" w="9525">
                   <a:solidFill>
                     <a:srgbClr val="000000"/>
                   </a:solidFill>
@@ -4105,7 +4114,7 @@
             </a:ln>
             <a:extLst>
               <a:ext uri="{91240B29-F687-4f45-9708-019B960494DF}">
-                <a14:hiddenLine xmlns="" xmlns:a14="http://schemas.microsoft.com/office/drawing/2010/main" w="9525">
+                <a14:hiddenLine xmlns:a14="http://schemas.microsoft.com/office/drawing/2010/main" xmlns="" w="9525">
                   <a:solidFill>
                     <a:srgbClr val="000000"/>
                   </a:solidFill>
@@ -4167,7 +4176,7 @@
             </a:ln>
             <a:extLst>
               <a:ext uri="{91240B29-F687-4f45-9708-019B960494DF}">
-                <a14:hiddenLine xmlns="" xmlns:a14="http://schemas.microsoft.com/office/drawing/2010/main" w="9525">
+                <a14:hiddenLine xmlns:a14="http://schemas.microsoft.com/office/drawing/2010/main" xmlns="" w="9525">
                   <a:solidFill>
                     <a:srgbClr val="000000"/>
                   </a:solidFill>
@@ -4257,7 +4266,7 @@
             </a:ln>
             <a:extLst>
               <a:ext uri="{91240B29-F687-4f45-9708-019B960494DF}">
-                <a14:hiddenLine xmlns="" xmlns:a14="http://schemas.microsoft.com/office/drawing/2010/main" w="9525">
+                <a14:hiddenLine xmlns:a14="http://schemas.microsoft.com/office/drawing/2010/main" xmlns="" w="9525">
                   <a:solidFill>
                     <a:srgbClr val="000000"/>
                   </a:solidFill>
@@ -4347,7 +4356,7 @@
             </a:ln>
             <a:extLst>
               <a:ext uri="{91240B29-F687-4f45-9708-019B960494DF}">
-                <a14:hiddenLine xmlns="" xmlns:a14="http://schemas.microsoft.com/office/drawing/2010/main" w="9525">
+                <a14:hiddenLine xmlns:a14="http://schemas.microsoft.com/office/drawing/2010/main" xmlns="" w="9525">
                   <a:solidFill>
                     <a:srgbClr val="000000"/>
                   </a:solidFill>
@@ -4412,7 +4421,7 @@
             </a:ln>
             <a:extLst>
               <a:ext uri="{91240B29-F687-4f45-9708-019B960494DF}">
-                <a14:hiddenLine xmlns="" xmlns:a14="http://schemas.microsoft.com/office/drawing/2010/main" w="9525">
+                <a14:hiddenLine xmlns:a14="http://schemas.microsoft.com/office/drawing/2010/main" xmlns="" w="9525">
                   <a:solidFill>
                     <a:srgbClr val="000000"/>
                   </a:solidFill>
@@ -4474,7 +4483,7 @@
             </a:ln>
             <a:extLst>
               <a:ext uri="{91240B29-F687-4f45-9708-019B960494DF}">
-                <a14:hiddenLine xmlns="" xmlns:a14="http://schemas.microsoft.com/office/drawing/2010/main" w="9525">
+                <a14:hiddenLine xmlns:a14="http://schemas.microsoft.com/office/drawing/2010/main" xmlns="" w="9525">
                   <a:solidFill>
                     <a:srgbClr val="000000"/>
                   </a:solidFill>
@@ -4564,7 +4573,7 @@
             </a:ln>
             <a:extLst>
               <a:ext uri="{91240B29-F687-4f45-9708-019B960494DF}">
-                <a14:hiddenLine xmlns="" xmlns:a14="http://schemas.microsoft.com/office/drawing/2010/main" w="9525">
+                <a14:hiddenLine xmlns:a14="http://schemas.microsoft.com/office/drawing/2010/main" xmlns="" w="9525">
                   <a:solidFill>
                     <a:srgbClr val="000000"/>
                   </a:solidFill>
@@ -4654,7 +4663,7 @@
             </a:ln>
             <a:extLst>
               <a:ext uri="{91240B29-F687-4f45-9708-019B960494DF}">
-                <a14:hiddenLine xmlns="" xmlns:a14="http://schemas.microsoft.com/office/drawing/2010/main" w="9525">
+                <a14:hiddenLine xmlns:a14="http://schemas.microsoft.com/office/drawing/2010/main" xmlns="" w="9525">
                   <a:solidFill>
                     <a:srgbClr val="000000"/>
                   </a:solidFill>
@@ -4716,7 +4725,7 @@
             </a:ln>
             <a:extLst>
               <a:ext uri="{91240B29-F687-4f45-9708-019B960494DF}">
-                <a14:hiddenLine xmlns="" xmlns:a14="http://schemas.microsoft.com/office/drawing/2010/main" w="9525">
+                <a14:hiddenLine xmlns:a14="http://schemas.microsoft.com/office/drawing/2010/main" xmlns="" w="9525">
                   <a:solidFill>
                     <a:srgbClr val="000000"/>
                   </a:solidFill>
@@ -4836,7 +4845,7 @@
             </a:ln>
             <a:extLst>
               <a:ext uri="{91240B29-F687-4f45-9708-019B960494DF}">
-                <a14:hiddenLine xmlns="" xmlns:a14="http://schemas.microsoft.com/office/drawing/2010/main" w="9525">
+                <a14:hiddenLine xmlns:a14="http://schemas.microsoft.com/office/drawing/2010/main" xmlns="" w="9525">
                   <a:solidFill>
                     <a:srgbClr val="000000"/>
                   </a:solidFill>
@@ -4904,7 +4913,7 @@
             </a:ln>
             <a:extLst>
               <a:ext uri="{91240B29-F687-4f45-9708-019B960494DF}">
-                <a14:hiddenLine xmlns="" xmlns:a14="http://schemas.microsoft.com/office/drawing/2010/main" w="9525">
+                <a14:hiddenLine xmlns:a14="http://schemas.microsoft.com/office/drawing/2010/main" xmlns="" w="9525">
                   <a:solidFill>
                     <a:srgbClr val="000000"/>
                   </a:solidFill>
@@ -4994,7 +5003,7 @@
             </a:ln>
             <a:extLst>
               <a:ext uri="{91240B29-F687-4f45-9708-019B960494DF}">
-                <a14:hiddenLine xmlns="" xmlns:a14="http://schemas.microsoft.com/office/drawing/2010/main" w="9525">
+                <a14:hiddenLine xmlns:a14="http://schemas.microsoft.com/office/drawing/2010/main" xmlns="" w="9525">
                   <a:solidFill>
                     <a:srgbClr val="000000"/>
                   </a:solidFill>
@@ -5134,7 +5143,7 @@
           <a:p>
             <a:fld id="{4EA4CA9E-41A0-4A25-A87E-B4F1E3C13C9C}" type="datetimeFigureOut">
               <a:rPr lang="ru-RU" smtClean="0"/>
-              <a:t>28.08.2026</a:t>
+              <a:t>31.08.2026</a:t>
             </a:fld>
             <a:endParaRPr lang="ru-RU"/>
           </a:p>
@@ -5401,7 +5410,7 @@
           <a:p>
             <a:fld id="{4EA4CA9E-41A0-4A25-A87E-B4F1E3C13C9C}" type="datetimeFigureOut">
               <a:rPr lang="ru-RU" smtClean="0"/>
-              <a:t>28.08.2026</a:t>
+              <a:t>31.08.2026</a:t>
             </a:fld>
             <a:endParaRPr lang="ru-RU"/>
           </a:p>
@@ -5597,7 +5606,7 @@
           <a:p>
             <a:fld id="{4EA4CA9E-41A0-4A25-A87E-B4F1E3C13C9C}" type="datetimeFigureOut">
               <a:rPr lang="ru-RU" smtClean="0"/>
-              <a:t>28.08.2026</a:t>
+              <a:t>31.08.2026</a:t>
             </a:fld>
             <a:endParaRPr lang="ru-RU"/>
           </a:p>
@@ -5860,7 +5869,7 @@
           <a:p>
             <a:fld id="{4EA4CA9E-41A0-4A25-A87E-B4F1E3C13C9C}" type="datetimeFigureOut">
               <a:rPr lang="ru-RU" smtClean="0"/>
-              <a:t>28.08.2026</a:t>
+              <a:t>31.08.2026</a:t>
             </a:fld>
             <a:endParaRPr lang="ru-RU"/>
           </a:p>
@@ -6294,7 +6303,7 @@
           <a:p>
             <a:fld id="{4EA4CA9E-41A0-4A25-A87E-B4F1E3C13C9C}" type="datetimeFigureOut">
               <a:rPr lang="ru-RU" smtClean="0"/>
-              <a:t>28.08.2026</a:t>
+              <a:t>31.08.2026</a:t>
             </a:fld>
             <a:endParaRPr lang="ru-RU"/>
           </a:p>
@@ -6840,7 +6849,7 @@
           <a:p>
             <a:fld id="{4EA4CA9E-41A0-4A25-A87E-B4F1E3C13C9C}" type="datetimeFigureOut">
               <a:rPr lang="ru-RU" smtClean="0"/>
-              <a:t>28.08.2026</a:t>
+              <a:t>31.08.2026</a:t>
             </a:fld>
             <a:endParaRPr lang="ru-RU"/>
           </a:p>
@@ -7560,7 +7569,7 @@
           <a:p>
             <a:fld id="{4EA4CA9E-41A0-4A25-A87E-B4F1E3C13C9C}" type="datetimeFigureOut">
               <a:rPr lang="ru-RU" smtClean="0"/>
-              <a:t>28.08.2026</a:t>
+              <a:t>31.08.2026</a:t>
             </a:fld>
             <a:endParaRPr lang="ru-RU"/>
           </a:p>
@@ -7730,7 +7739,7 @@
           <a:p>
             <a:fld id="{4EA4CA9E-41A0-4A25-A87E-B4F1E3C13C9C}" type="datetimeFigureOut">
               <a:rPr lang="ru-RU" smtClean="0"/>
-              <a:t>28.08.2026</a:t>
+              <a:t>31.08.2026</a:t>
             </a:fld>
             <a:endParaRPr lang="ru-RU"/>
           </a:p>
@@ -7910,7 +7919,7 @@
           <a:p>
             <a:fld id="{4EA4CA9E-41A0-4A25-A87E-B4F1E3C13C9C}" type="datetimeFigureOut">
               <a:rPr lang="ru-RU" smtClean="0"/>
-              <a:t>28.08.2026</a:t>
+              <a:t>31.08.2026</a:t>
             </a:fld>
             <a:endParaRPr lang="ru-RU"/>
           </a:p>
@@ -8439,7 +8448,7 @@
           <a:p>
             <a:fld id="{4EA4CA9E-41A0-4A25-A87E-B4F1E3C13C9C}" type="datetimeFigureOut">
               <a:rPr lang="ru-RU" smtClean="0"/>
-              <a:t>28.08.2026</a:t>
+              <a:t>31.08.2026</a:t>
             </a:fld>
             <a:endParaRPr lang="ru-RU"/>
           </a:p>
@@ -8689,7 +8698,7 @@
           <a:p>
             <a:fld id="{4EA4CA9E-41A0-4A25-A87E-B4F1E3C13C9C}" type="datetimeFigureOut">
               <a:rPr lang="ru-RU" smtClean="0"/>
-              <a:t>28.08.2026</a:t>
+              <a:t>31.08.2026</a:t>
             </a:fld>
             <a:endParaRPr lang="ru-RU"/>
           </a:p>
@@ -8921,7 +8930,7 @@
           <a:p>
             <a:fld id="{4EA4CA9E-41A0-4A25-A87E-B4F1E3C13C9C}" type="datetimeFigureOut">
               <a:rPr lang="ru-RU" smtClean="0"/>
-              <a:t>28.08.2026</a:t>
+              <a:t>31.08.2026</a:t>
             </a:fld>
             <a:endParaRPr lang="ru-RU"/>
           </a:p>
@@ -9302,7 +9311,7 @@
           <a:p>
             <a:fld id="{4EA4CA9E-41A0-4A25-A87E-B4F1E3C13C9C}" type="datetimeFigureOut">
               <a:rPr lang="ru-RU" smtClean="0"/>
-              <a:t>28.08.2026</a:t>
+              <a:t>31.08.2026</a:t>
             </a:fld>
             <a:endParaRPr lang="ru-RU"/>
           </a:p>
@@ -9420,7 +9429,7 @@
           <a:p>
             <a:fld id="{4EA4CA9E-41A0-4A25-A87E-B4F1E3C13C9C}" type="datetimeFigureOut">
               <a:rPr lang="ru-RU" smtClean="0"/>
-              <a:t>28.08.2026</a:t>
+              <a:t>31.08.2026</a:t>
             </a:fld>
             <a:endParaRPr lang="ru-RU"/>
           </a:p>
@@ -9515,7 +9524,7 @@
           <a:p>
             <a:fld id="{4EA4CA9E-41A0-4A25-A87E-B4F1E3C13C9C}" type="datetimeFigureOut">
               <a:rPr lang="ru-RU" smtClean="0"/>
-              <a:t>28.08.2026</a:t>
+              <a:t>31.08.2026</a:t>
             </a:fld>
             <a:endParaRPr lang="ru-RU"/>
           </a:p>
@@ -9764,7 +9773,7 @@
           <a:p>
             <a:fld id="{4EA4CA9E-41A0-4A25-A87E-B4F1E3C13C9C}" type="datetimeFigureOut">
               <a:rPr lang="ru-RU" smtClean="0"/>
-              <a:t>28.08.2026</a:t>
+              <a:t>31.08.2026</a:t>
             </a:fld>
             <a:endParaRPr lang="ru-RU"/>
           </a:p>
@@ -10044,7 +10053,7 @@
           <a:p>
             <a:fld id="{4EA4CA9E-41A0-4A25-A87E-B4F1E3C13C9C}" type="datetimeFigureOut">
               <a:rPr lang="ru-RU" smtClean="0"/>
-              <a:t>28.08.2026</a:t>
+              <a:t>31.08.2026</a:t>
             </a:fld>
             <a:endParaRPr lang="ru-RU"/>
           </a:p>
@@ -10167,7 +10176,7 @@
           <a:noFill/>
           <a:extLst>
             <a:ext uri="{909E8E84-426E-40dd-AFC4-6F175D3DCCD1}">
-              <a14:hiddenFill xmlns="" xmlns:a14="http://schemas.microsoft.com/office/drawing/2010/main">
+              <a14:hiddenFill xmlns:a14="http://schemas.microsoft.com/office/drawing/2010/main" xmlns="">
                 <a:solidFill>
                   <a:srgbClr val="FFFFFF"/>
                 </a:solidFill>
@@ -10241,7 +10250,7 @@
               </a:ln>
               <a:extLst>
                 <a:ext uri="{91240B29-F687-4f45-9708-019B960494DF}">
-                  <a14:hiddenLine xmlns="" xmlns:a14="http://schemas.microsoft.com/office/drawing/2010/main" w="9525">
+                  <a14:hiddenLine xmlns:a14="http://schemas.microsoft.com/office/drawing/2010/main" xmlns="" w="9525">
                     <a:solidFill>
                       <a:srgbClr val="000000"/>
                     </a:solidFill>
@@ -10331,7 +10340,7 @@
               </a:ln>
               <a:extLst>
                 <a:ext uri="{91240B29-F687-4f45-9708-019B960494DF}">
-                  <a14:hiddenLine xmlns="" xmlns:a14="http://schemas.microsoft.com/office/drawing/2010/main" w="9525">
+                  <a14:hiddenLine xmlns:a14="http://schemas.microsoft.com/office/drawing/2010/main" xmlns="" w="9525">
                     <a:solidFill>
                       <a:srgbClr val="000000"/>
                     </a:solidFill>
@@ -10421,7 +10430,7 @@
               </a:ln>
               <a:extLst>
                 <a:ext uri="{91240B29-F687-4f45-9708-019B960494DF}">
-                  <a14:hiddenLine xmlns="" xmlns:a14="http://schemas.microsoft.com/office/drawing/2010/main" w="9525">
+                  <a14:hiddenLine xmlns:a14="http://schemas.microsoft.com/office/drawing/2010/main" xmlns="" w="9525">
                     <a:solidFill>
                       <a:srgbClr val="000000"/>
                     </a:solidFill>
@@ -10483,7 +10492,7 @@
               </a:ln>
               <a:extLst>
                 <a:ext uri="{91240B29-F687-4f45-9708-019B960494DF}">
-                  <a14:hiddenLine xmlns="" xmlns:a14="http://schemas.microsoft.com/office/drawing/2010/main" w="9525">
+                  <a14:hiddenLine xmlns:a14="http://schemas.microsoft.com/office/drawing/2010/main" xmlns="" w="9525">
                     <a:solidFill>
                       <a:srgbClr val="000000"/>
                     </a:solidFill>
@@ -10573,7 +10582,7 @@
               </a:ln>
               <a:extLst>
                 <a:ext uri="{91240B29-F687-4f45-9708-019B960494DF}">
-                  <a14:hiddenLine xmlns="" xmlns:a14="http://schemas.microsoft.com/office/drawing/2010/main" w="9525">
+                  <a14:hiddenLine xmlns:a14="http://schemas.microsoft.com/office/drawing/2010/main" xmlns="" w="9525">
                     <a:solidFill>
                       <a:srgbClr val="000000"/>
                     </a:solidFill>
@@ -10635,7 +10644,7 @@
               </a:ln>
               <a:extLst>
                 <a:ext uri="{91240B29-F687-4f45-9708-019B960494DF}">
-                  <a14:hiddenLine xmlns="" xmlns:a14="http://schemas.microsoft.com/office/drawing/2010/main" w="9525">
+                  <a14:hiddenLine xmlns:a14="http://schemas.microsoft.com/office/drawing/2010/main" xmlns="" w="9525">
                     <a:solidFill>
                       <a:srgbClr val="000000"/>
                     </a:solidFill>
@@ -10697,7 +10706,7 @@
               </a:ln>
               <a:extLst>
                 <a:ext uri="{91240B29-F687-4f45-9708-019B960494DF}">
-                  <a14:hiddenLine xmlns="" xmlns:a14="http://schemas.microsoft.com/office/drawing/2010/main" w="9525">
+                  <a14:hiddenLine xmlns:a14="http://schemas.microsoft.com/office/drawing/2010/main" xmlns="" w="9525">
                     <a:solidFill>
                       <a:srgbClr val="000000"/>
                     </a:solidFill>
@@ -10787,7 +10796,7 @@
               </a:ln>
               <a:extLst>
                 <a:ext uri="{91240B29-F687-4f45-9708-019B960494DF}">
-                  <a14:hiddenLine xmlns="" xmlns:a14="http://schemas.microsoft.com/office/drawing/2010/main" w="9525">
+                  <a14:hiddenLine xmlns:a14="http://schemas.microsoft.com/office/drawing/2010/main" xmlns="" w="9525">
                     <a:solidFill>
                       <a:srgbClr val="000000"/>
                     </a:solidFill>
@@ -10877,7 +10886,7 @@
               </a:ln>
               <a:extLst>
                 <a:ext uri="{91240B29-F687-4f45-9708-019B960494DF}">
-                  <a14:hiddenLine xmlns="" xmlns:a14="http://schemas.microsoft.com/office/drawing/2010/main" w="9525">
+                  <a14:hiddenLine xmlns:a14="http://schemas.microsoft.com/office/drawing/2010/main" xmlns="" w="9525">
                     <a:solidFill>
                       <a:srgbClr val="000000"/>
                     </a:solidFill>
@@ -10939,7 +10948,7 @@
               </a:ln>
               <a:extLst>
                 <a:ext uri="{91240B29-F687-4f45-9708-019B960494DF}">
-                  <a14:hiddenLine xmlns="" xmlns:a14="http://schemas.microsoft.com/office/drawing/2010/main" w="9525">
+                  <a14:hiddenLine xmlns:a14="http://schemas.microsoft.com/office/drawing/2010/main" xmlns="" w="9525">
                     <a:solidFill>
                       <a:srgbClr val="000000"/>
                     </a:solidFill>
@@ -11049,7 +11058,7 @@
               </a:ln>
               <a:extLst>
                 <a:ext uri="{91240B29-F687-4f45-9708-019B960494DF}">
-                  <a14:hiddenLine xmlns="" xmlns:a14="http://schemas.microsoft.com/office/drawing/2010/main" w="9525">
+                  <a14:hiddenLine xmlns:a14="http://schemas.microsoft.com/office/drawing/2010/main" xmlns="" w="9525">
                     <a:solidFill>
                       <a:srgbClr val="000000"/>
                     </a:solidFill>
@@ -11133,7 +11142,7 @@
               </a:ln>
               <a:extLst>
                 <a:ext uri="{91240B29-F687-4f45-9708-019B960494DF}">
-                  <a14:hiddenLine xmlns="" xmlns:a14="http://schemas.microsoft.com/office/drawing/2010/main" w="9525">
+                  <a14:hiddenLine xmlns:a14="http://schemas.microsoft.com/office/drawing/2010/main" xmlns="" w="9525">
                     <a:solidFill>
                       <a:srgbClr val="000000"/>
                     </a:solidFill>
@@ -11195,7 +11204,7 @@
               </a:ln>
               <a:extLst>
                 <a:ext uri="{91240B29-F687-4f45-9708-019B960494DF}">
-                  <a14:hiddenLine xmlns="" xmlns:a14="http://schemas.microsoft.com/office/drawing/2010/main" w="9525">
+                  <a14:hiddenLine xmlns:a14="http://schemas.microsoft.com/office/drawing/2010/main" xmlns="" w="9525">
                     <a:solidFill>
                       <a:srgbClr val="000000"/>
                     </a:solidFill>
@@ -11257,7 +11266,7 @@
               </a:ln>
               <a:extLst>
                 <a:ext uri="{91240B29-F687-4f45-9708-019B960494DF}">
-                  <a14:hiddenLine xmlns="" xmlns:a14="http://schemas.microsoft.com/office/drawing/2010/main" w="9525">
+                  <a14:hiddenLine xmlns:a14="http://schemas.microsoft.com/office/drawing/2010/main" xmlns="" w="9525">
                     <a:solidFill>
                       <a:srgbClr val="000000"/>
                     </a:solidFill>
@@ -11347,7 +11356,7 @@
               </a:ln>
               <a:extLst>
                 <a:ext uri="{91240B29-F687-4f45-9708-019B960494DF}">
-                  <a14:hiddenLine xmlns="" xmlns:a14="http://schemas.microsoft.com/office/drawing/2010/main" w="9525">
+                  <a14:hiddenLine xmlns:a14="http://schemas.microsoft.com/office/drawing/2010/main" xmlns="" w="9525">
                     <a:solidFill>
                       <a:srgbClr val="000000"/>
                     </a:solidFill>
@@ -11381,7 +11390,7 @@
               </a:ln>
               <a:extLst>
                 <a:ext uri="{91240B29-F687-4f45-9708-019B960494DF}">
-                  <a14:hiddenLine xmlns="" xmlns:a14="http://schemas.microsoft.com/office/drawing/2010/main" w="9525">
+                  <a14:hiddenLine xmlns:a14="http://schemas.microsoft.com/office/drawing/2010/main" xmlns="" w="9525">
                     <a:solidFill>
                       <a:srgbClr val="000000"/>
                     </a:solidFill>
@@ -11446,7 +11455,7 @@
               </a:ln>
               <a:extLst>
                 <a:ext uri="{91240B29-F687-4f45-9708-019B960494DF}">
-                  <a14:hiddenLine xmlns="" xmlns:a14="http://schemas.microsoft.com/office/drawing/2010/main" w="9525">
+                  <a14:hiddenLine xmlns:a14="http://schemas.microsoft.com/office/drawing/2010/main" xmlns="" w="9525">
                     <a:solidFill>
                       <a:srgbClr val="000000"/>
                     </a:solidFill>
@@ -11536,7 +11545,7 @@
               </a:ln>
               <a:extLst>
                 <a:ext uri="{91240B29-F687-4f45-9708-019B960494DF}">
-                  <a14:hiddenLine xmlns="" xmlns:a14="http://schemas.microsoft.com/office/drawing/2010/main" w="9525">
+                  <a14:hiddenLine xmlns:a14="http://schemas.microsoft.com/office/drawing/2010/main" xmlns="" w="9525">
                     <a:solidFill>
                       <a:srgbClr val="000000"/>
                     </a:solidFill>
@@ -11598,7 +11607,7 @@
               </a:ln>
               <a:extLst>
                 <a:ext uri="{91240B29-F687-4f45-9708-019B960494DF}">
-                  <a14:hiddenLine xmlns="" xmlns:a14="http://schemas.microsoft.com/office/drawing/2010/main" w="9525">
+                  <a14:hiddenLine xmlns:a14="http://schemas.microsoft.com/office/drawing/2010/main" xmlns="" w="9525">
                     <a:solidFill>
                       <a:srgbClr val="000000"/>
                     </a:solidFill>
@@ -11688,7 +11697,7 @@
               </a:ln>
               <a:extLst>
                 <a:ext uri="{91240B29-F687-4f45-9708-019B960494DF}">
-                  <a14:hiddenLine xmlns="" xmlns:a14="http://schemas.microsoft.com/office/drawing/2010/main" w="9525">
+                  <a14:hiddenLine xmlns:a14="http://schemas.microsoft.com/office/drawing/2010/main" xmlns="" w="9525">
                     <a:solidFill>
                       <a:srgbClr val="000000"/>
                     </a:solidFill>
@@ -11753,7 +11762,7 @@
               </a:ln>
               <a:extLst>
                 <a:ext uri="{91240B29-F687-4f45-9708-019B960494DF}">
-                  <a14:hiddenLine xmlns="" xmlns:a14="http://schemas.microsoft.com/office/drawing/2010/main" w="9525">
+                  <a14:hiddenLine xmlns:a14="http://schemas.microsoft.com/office/drawing/2010/main" xmlns="" w="9525">
                     <a:solidFill>
                       <a:srgbClr val="000000"/>
                     </a:solidFill>
@@ -11815,7 +11824,7 @@
               </a:ln>
               <a:extLst>
                 <a:ext uri="{91240B29-F687-4f45-9708-019B960494DF}">
-                  <a14:hiddenLine xmlns="" xmlns:a14="http://schemas.microsoft.com/office/drawing/2010/main" w="9525">
+                  <a14:hiddenLine xmlns:a14="http://schemas.microsoft.com/office/drawing/2010/main" xmlns="" w="9525">
                     <a:solidFill>
                       <a:srgbClr val="000000"/>
                     </a:solidFill>
@@ -11905,7 +11914,7 @@
               </a:ln>
               <a:extLst>
                 <a:ext uri="{91240B29-F687-4f45-9708-019B960494DF}">
-                  <a14:hiddenLine xmlns="" xmlns:a14="http://schemas.microsoft.com/office/drawing/2010/main" w="9525">
+                  <a14:hiddenLine xmlns:a14="http://schemas.microsoft.com/office/drawing/2010/main" xmlns="" w="9525">
                     <a:solidFill>
                       <a:srgbClr val="000000"/>
                     </a:solidFill>
@@ -11995,7 +12004,7 @@
               </a:ln>
               <a:extLst>
                 <a:ext uri="{91240B29-F687-4f45-9708-019B960494DF}">
-                  <a14:hiddenLine xmlns="" xmlns:a14="http://schemas.microsoft.com/office/drawing/2010/main" w="9525">
+                  <a14:hiddenLine xmlns:a14="http://schemas.microsoft.com/office/drawing/2010/main" xmlns="" w="9525">
                     <a:solidFill>
                       <a:srgbClr val="000000"/>
                     </a:solidFill>
@@ -12060,7 +12069,7 @@
               </a:ln>
               <a:extLst>
                 <a:ext uri="{91240B29-F687-4f45-9708-019B960494DF}">
-                  <a14:hiddenLine xmlns="" xmlns:a14="http://schemas.microsoft.com/office/drawing/2010/main" w="9525">
+                  <a14:hiddenLine xmlns:a14="http://schemas.microsoft.com/office/drawing/2010/main" xmlns="" w="9525">
                     <a:solidFill>
                       <a:srgbClr val="000000"/>
                     </a:solidFill>
@@ -12180,7 +12189,7 @@
               </a:ln>
               <a:extLst>
                 <a:ext uri="{91240B29-F687-4f45-9708-019B960494DF}">
-                  <a14:hiddenLine xmlns="" xmlns:a14="http://schemas.microsoft.com/office/drawing/2010/main" w="9525">
+                  <a14:hiddenLine xmlns:a14="http://schemas.microsoft.com/office/drawing/2010/main" xmlns="" w="9525">
                     <a:solidFill>
                       <a:srgbClr val="000000"/>
                     </a:solidFill>
@@ -12261,7 +12270,7 @@
               </a:ln>
               <a:extLst>
                 <a:ext uri="{91240B29-F687-4f45-9708-019B960494DF}">
-                  <a14:hiddenLine xmlns="" xmlns:a14="http://schemas.microsoft.com/office/drawing/2010/main" w="9525">
+                  <a14:hiddenLine xmlns:a14="http://schemas.microsoft.com/office/drawing/2010/main" xmlns="" w="9525">
                     <a:solidFill>
                       <a:srgbClr val="000000"/>
                     </a:solidFill>
@@ -12376,7 +12385,7 @@
               </a:ln>
               <a:extLst>
                 <a:ext uri="{91240B29-F687-4f45-9708-019B960494DF}">
-                  <a14:hiddenLine xmlns="" xmlns:a14="http://schemas.microsoft.com/office/drawing/2010/main" w="9525">
+                  <a14:hiddenLine xmlns:a14="http://schemas.microsoft.com/office/drawing/2010/main" xmlns="" w="9525">
                     <a:solidFill>
                       <a:srgbClr val="000000"/>
                     </a:solidFill>
@@ -12466,7 +12475,7 @@
               </a:ln>
               <a:extLst>
                 <a:ext uri="{91240B29-F687-4f45-9708-019B960494DF}">
-                  <a14:hiddenLine xmlns="" xmlns:a14="http://schemas.microsoft.com/office/drawing/2010/main" w="9525">
+                  <a14:hiddenLine xmlns:a14="http://schemas.microsoft.com/office/drawing/2010/main" xmlns="" w="9525">
                     <a:solidFill>
                       <a:srgbClr val="000000"/>
                     </a:solidFill>
@@ -12531,7 +12540,7 @@
               </a:ln>
               <a:extLst>
                 <a:ext uri="{91240B29-F687-4f45-9708-019B960494DF}">
-                  <a14:hiddenLine xmlns="" xmlns:a14="http://schemas.microsoft.com/office/drawing/2010/main" w="9525">
+                  <a14:hiddenLine xmlns:a14="http://schemas.microsoft.com/office/drawing/2010/main" xmlns="" w="9525">
                     <a:solidFill>
                       <a:srgbClr val="000000"/>
                     </a:solidFill>
@@ -12621,7 +12630,7 @@
               </a:ln>
               <a:extLst>
                 <a:ext uri="{91240B29-F687-4f45-9708-019B960494DF}">
-                  <a14:hiddenLine xmlns="" xmlns:a14="http://schemas.microsoft.com/office/drawing/2010/main" w="9525">
+                  <a14:hiddenLine xmlns:a14="http://schemas.microsoft.com/office/drawing/2010/main" xmlns="" w="9525">
                     <a:solidFill>
                       <a:srgbClr val="000000"/>
                     </a:solidFill>
@@ -12689,7 +12698,7 @@
               </a:ln>
               <a:extLst>
                 <a:ext uri="{91240B29-F687-4f45-9708-019B960494DF}">
-                  <a14:hiddenLine xmlns="" xmlns:a14="http://schemas.microsoft.com/office/drawing/2010/main" w="9525">
+                  <a14:hiddenLine xmlns:a14="http://schemas.microsoft.com/office/drawing/2010/main" xmlns="" w="9525">
                     <a:solidFill>
                       <a:srgbClr val="000000"/>
                     </a:solidFill>
@@ -12779,7 +12788,7 @@
               </a:ln>
               <a:extLst>
                 <a:ext uri="{91240B29-F687-4f45-9708-019B960494DF}">
-                  <a14:hiddenLine xmlns="" xmlns:a14="http://schemas.microsoft.com/office/drawing/2010/main" w="9525">
+                  <a14:hiddenLine xmlns:a14="http://schemas.microsoft.com/office/drawing/2010/main" xmlns="" w="9525">
                     <a:solidFill>
                       <a:srgbClr val="000000"/>
                     </a:solidFill>
@@ -12847,7 +12856,7 @@
               </a:ln>
               <a:extLst>
                 <a:ext uri="{91240B29-F687-4f45-9708-019B960494DF}">
-                  <a14:hiddenLine xmlns="" xmlns:a14="http://schemas.microsoft.com/office/drawing/2010/main" w="9525">
+                  <a14:hiddenLine xmlns:a14="http://schemas.microsoft.com/office/drawing/2010/main" xmlns="" w="9525">
                     <a:solidFill>
                       <a:srgbClr val="000000"/>
                     </a:solidFill>
@@ -12937,7 +12946,7 @@
               </a:ln>
               <a:extLst>
                 <a:ext uri="{91240B29-F687-4f45-9708-019B960494DF}">
-                  <a14:hiddenLine xmlns="" xmlns:a14="http://schemas.microsoft.com/office/drawing/2010/main" w="9525">
+                  <a14:hiddenLine xmlns:a14="http://schemas.microsoft.com/office/drawing/2010/main" xmlns="" w="9525">
                     <a:solidFill>
                       <a:srgbClr val="000000"/>
                     </a:solidFill>
@@ -12971,7 +12980,7 @@
               </a:ln>
               <a:extLst>
                 <a:ext uri="{91240B29-F687-4f45-9708-019B960494DF}">
-                  <a14:hiddenLine xmlns="" xmlns:a14="http://schemas.microsoft.com/office/drawing/2010/main" w="9525">
+                  <a14:hiddenLine xmlns:a14="http://schemas.microsoft.com/office/drawing/2010/main" xmlns="" w="9525">
                     <a:solidFill>
                       <a:srgbClr val="000000"/>
                     </a:solidFill>
@@ -13111,7 +13120,7 @@
           <a:p>
             <a:fld id="{4EA4CA9E-41A0-4A25-A87E-B4F1E3C13C9C}" type="datetimeFigureOut">
               <a:rPr lang="ru-RU" smtClean="0"/>
-              <a:t>28.08.2026</a:t>
+              <a:t>31.08.2026</a:t>
             </a:fld>
             <a:endParaRPr lang="ru-RU"/>
           </a:p>
@@ -27638,11 +27647,7 @@
             </a:r>
             <a:r>
               <a:rPr lang="ru-RU" sz="2400" dirty="0" smtClean="0"/>
-              <a:t>Находим подходящую строк, адрес </a:t>
-            </a:r>
-            <a:r>
-              <a:rPr lang="ru-RU" sz="2400" dirty="0" smtClean="0"/>
-              <a:t>следующего перехода – </a:t>
+              <a:t>Находим подходящую строк, адрес следующего перехода – </a:t>
             </a:r>
             <a:r>
               <a:rPr lang="ru-RU" sz="2400" b="1" dirty="0" smtClean="0"/>
@@ -30171,7 +30176,6 @@
               <a:rPr lang="ru-RU" dirty="0"/>
               <a:t> истёк и никто не продлил адрес, устройство отказывается от него и начинает процедуру получения нового с нуля.</a:t>
             </a:r>
-            <a:endParaRPr lang="ru-RU" dirty="0"/>
           </a:p>
         </p:txBody>
       </p:sp>
@@ -30491,6 +30495,2016 @@
     <p:extLst>
       <p:ext uri="{BB962C8B-B14F-4D97-AF65-F5344CB8AC3E}">
         <p14:creationId xmlns:p14="http://schemas.microsoft.com/office/powerpoint/2010/main" val="1346469508"/>
+      </p:ext>
+    </p:extLst>
+  </p:cSld>
+  <p:clrMapOvr>
+    <a:masterClrMapping/>
+  </p:clrMapOvr>
+</p:sld>
+</file>
+
+<file path=ppt/slides/slide71.xml><?xml version="1.0" encoding="utf-8"?>
+<p:sld xmlns:a="http://schemas.openxmlformats.org/drawingml/2006/main" xmlns:r="http://schemas.openxmlformats.org/officeDocument/2006/relationships" xmlns:p="http://schemas.openxmlformats.org/presentationml/2006/main">
+  <p:cSld>
+    <p:spTree>
+      <p:nvGrpSpPr>
+        <p:cNvPr id="1" name=""/>
+        <p:cNvGrpSpPr/>
+        <p:nvPr/>
+      </p:nvGrpSpPr>
+      <p:grpSpPr>
+        <a:xfrm>
+          <a:off x="0" y="0"/>
+          <a:ext cx="0" cy="0"/>
+          <a:chOff x="0" y="0"/>
+          <a:chExt cx="0" cy="0"/>
+        </a:xfrm>
+      </p:grpSpPr>
+      <p:sp>
+        <p:nvSpPr>
+          <p:cNvPr id="2" name="Заголовок 1"/>
+          <p:cNvSpPr>
+            <a:spLocks noGrp="1"/>
+          </p:cNvSpPr>
+          <p:nvPr>
+            <p:ph type="title"/>
+          </p:nvPr>
+        </p:nvSpPr>
+        <p:spPr/>
+        <p:txBody>
+          <a:bodyPr>
+            <a:normAutofit fontScale="90000"/>
+          </a:bodyPr>
+          <a:lstStyle/>
+          <a:p>
+            <a:r>
+              <a:rPr lang="ru-RU" dirty="0"/>
+              <a:t>На какой </a:t>
+            </a:r>
+            <a:r>
+              <a:rPr lang="ru-RU" dirty="0" err="1"/>
+              <a:t>Next-hop</a:t>
+            </a:r>
+            <a:r>
+              <a:rPr lang="ru-RU" dirty="0"/>
+              <a:t> роутер отправит пакет </a:t>
+            </a:r>
+            <a:r>
+              <a:rPr lang="ru-RU" dirty="0" smtClean="0"/>
+              <a:t>с </a:t>
+            </a:r>
+            <a:r>
+              <a:rPr lang="en-US" dirty="0" smtClean="0"/>
+              <a:t>IP-</a:t>
+            </a:r>
+            <a:r>
+              <a:rPr lang="ru-RU" dirty="0" smtClean="0"/>
+              <a:t>адресом назначения 172.16.12.50 и </a:t>
+            </a:r>
+            <a:r>
+              <a:rPr lang="ru-RU" dirty="0"/>
+              <a:t>почему?</a:t>
+            </a:r>
+            <a:endParaRPr lang="ru-RU" dirty="0"/>
+          </a:p>
+        </p:txBody>
+      </p:sp>
+      <p:sp>
+        <p:nvSpPr>
+          <p:cNvPr id="3" name="Объект 2"/>
+          <p:cNvSpPr>
+            <a:spLocks noGrp="1"/>
+          </p:cNvSpPr>
+          <p:nvPr>
+            <p:ph idx="1"/>
+          </p:nvPr>
+        </p:nvSpPr>
+        <p:spPr/>
+        <p:txBody>
+          <a:bodyPr/>
+          <a:lstStyle/>
+          <a:p>
+            <a:r>
+              <a:rPr lang="af-ZA" dirty="0"/>
+              <a:t>0.0.0.0/0 → Next-hop: 10.0.0.1 (</a:t>
+            </a:r>
+            <a:r>
+              <a:rPr lang="ru-RU" dirty="0"/>
+              <a:t>Шлюз по умолчанию)</a:t>
+            </a:r>
+          </a:p>
+          <a:p>
+            <a:r>
+              <a:rPr lang="ru-RU" dirty="0"/>
+              <a:t>172.16.0.0/16 → </a:t>
+            </a:r>
+            <a:r>
+              <a:rPr lang="af-ZA" dirty="0"/>
+              <a:t>Next-hop: 10.0.0.2</a:t>
+            </a:r>
+          </a:p>
+          <a:p>
+            <a:r>
+              <a:rPr lang="af-ZA" dirty="0"/>
+              <a:t>172.16.12.0/24 → Next-hop: 10.0.0.3</a:t>
+            </a:r>
+          </a:p>
+          <a:p>
+            <a:r>
+              <a:rPr lang="af-ZA" dirty="0"/>
+              <a:t>172.16.12.0/25 → Next-hop: 10.0.0.4</a:t>
+            </a:r>
+            <a:endParaRPr lang="ru-RU" dirty="0"/>
+          </a:p>
+        </p:txBody>
+      </p:sp>
+    </p:spTree>
+    <p:extLst>
+      <p:ext uri="{BB962C8B-B14F-4D97-AF65-F5344CB8AC3E}">
+        <p14:creationId xmlns:p14="http://schemas.microsoft.com/office/powerpoint/2010/main" val="1573879043"/>
+      </p:ext>
+    </p:extLst>
+  </p:cSld>
+  <p:clrMapOvr>
+    <a:masterClrMapping/>
+  </p:clrMapOvr>
+</p:sld>
+</file>
+
+<file path=ppt/slides/slide72.xml><?xml version="1.0" encoding="utf-8"?>
+<p:sld xmlns:a="http://schemas.openxmlformats.org/drawingml/2006/main" xmlns:r="http://schemas.openxmlformats.org/officeDocument/2006/relationships" xmlns:p="http://schemas.openxmlformats.org/presentationml/2006/main">
+  <p:cSld>
+    <p:spTree>
+      <p:nvGrpSpPr>
+        <p:cNvPr id="1" name=""/>
+        <p:cNvGrpSpPr/>
+        <p:nvPr/>
+      </p:nvGrpSpPr>
+      <p:grpSpPr>
+        <a:xfrm>
+          <a:off x="0" y="0"/>
+          <a:ext cx="0" cy="0"/>
+          <a:chOff x="0" y="0"/>
+          <a:chExt cx="0" cy="0"/>
+        </a:xfrm>
+      </p:grpSpPr>
+      <p:sp>
+        <p:nvSpPr>
+          <p:cNvPr id="3" name="Объект 2"/>
+          <p:cNvSpPr>
+            <a:spLocks noGrp="1"/>
+          </p:cNvSpPr>
+          <p:nvPr>
+            <p:ph idx="1"/>
+          </p:nvPr>
+        </p:nvSpPr>
+        <p:spPr>
+          <a:xfrm>
+            <a:off x="1141412" y="422031"/>
+            <a:ext cx="9905999" cy="6066692"/>
+          </a:xfrm>
+        </p:spPr>
+        <p:txBody>
+          <a:bodyPr>
+            <a:normAutofit/>
+          </a:bodyPr>
+          <a:lstStyle/>
+          <a:p>
+            <a:pPr marL="0" indent="0">
+              <a:buNone/>
+            </a:pPr>
+            <a:r>
+              <a:rPr lang="ru-RU" dirty="0"/>
+              <a:t>Компьютер </a:t>
+            </a:r>
+            <a:r>
+              <a:rPr lang="af-ZA" dirty="0"/>
+              <a:t>PC-1 </a:t>
+            </a:r>
+            <a:r>
+              <a:rPr lang="ru-RU" dirty="0"/>
+              <a:t>отправляет </a:t>
+            </a:r>
+            <a:r>
+              <a:rPr lang="af-ZA" dirty="0"/>
+              <a:t>HTTP-</a:t>
+            </a:r>
+            <a:r>
+              <a:rPr lang="ru-RU" dirty="0"/>
+              <a:t>запрос на </a:t>
+            </a:r>
+            <a:r>
+              <a:rPr lang="af-ZA" dirty="0"/>
+              <a:t>Web-Server </a:t>
+            </a:r>
+            <a:r>
+              <a:rPr lang="ru-RU" dirty="0"/>
+              <a:t>через шлюз </a:t>
+            </a:r>
+            <a:r>
+              <a:rPr lang="af-ZA" dirty="0" smtClean="0"/>
+              <a:t>Router-1</a:t>
+            </a:r>
+            <a:r>
+              <a:rPr lang="ru-RU" dirty="0"/>
+              <a:t>:</a:t>
+            </a:r>
+            <a:endParaRPr lang="af-ZA" dirty="0"/>
+          </a:p>
+          <a:p>
+            <a:r>
+              <a:rPr lang="af-ZA" dirty="0"/>
+              <a:t>PC-1: IP 192.168.1.10, MAC 11:11:11:11:11:11</a:t>
+            </a:r>
+          </a:p>
+          <a:p>
+            <a:r>
+              <a:rPr lang="af-ZA" dirty="0"/>
+              <a:t>Router-1 (</a:t>
+            </a:r>
+            <a:r>
+              <a:rPr lang="ru-RU" dirty="0"/>
+              <a:t>внутренний интерфейс): </a:t>
+            </a:r>
+            <a:r>
+              <a:rPr lang="af-ZA" dirty="0"/>
+              <a:t>IP 192.168.1.1, MAC 22:22:22:22:22:22</a:t>
+            </a:r>
+          </a:p>
+          <a:p>
+            <a:r>
+              <a:rPr lang="af-ZA" dirty="0"/>
+              <a:t>Router-1 (</a:t>
+            </a:r>
+            <a:r>
+              <a:rPr lang="ru-RU" dirty="0"/>
+              <a:t>внешний интерфейс): </a:t>
+            </a:r>
+            <a:r>
+              <a:rPr lang="af-ZA" dirty="0"/>
+              <a:t>IP 203.0.113.1, MAC 33:33:33:33:33:33</a:t>
+            </a:r>
+          </a:p>
+          <a:p>
+            <a:r>
+              <a:rPr lang="af-ZA" dirty="0"/>
+              <a:t>Web-Server: IP 93.184.216.34, MAC </a:t>
+            </a:r>
+            <a:r>
+              <a:rPr lang="af-ZA" dirty="0" smtClean="0"/>
+              <a:t>44:44:44:44:44:44</a:t>
+            </a:r>
+            <a:endParaRPr lang="ru-RU" dirty="0" smtClean="0"/>
+          </a:p>
+          <a:p>
+            <a:pPr marL="0" indent="0">
+              <a:buNone/>
+            </a:pPr>
+            <a:r>
+              <a:rPr lang="ru-RU" dirty="0"/>
+              <a:t>Заполните значения полей заголовков в кадре на участке между </a:t>
+            </a:r>
+            <a:r>
+              <a:rPr lang="af-ZA" dirty="0"/>
+              <a:t>PC-1 </a:t>
+            </a:r>
+            <a:r>
+              <a:rPr lang="ru-RU" dirty="0"/>
+              <a:t>и </a:t>
+            </a:r>
+            <a:r>
+              <a:rPr lang="af-ZA" dirty="0"/>
+              <a:t>Router-1</a:t>
+            </a:r>
+            <a:r>
+              <a:rPr lang="af-ZA" dirty="0" smtClean="0"/>
+              <a:t>:</a:t>
+            </a:r>
+            <a:endParaRPr lang="af-ZA" dirty="0"/>
+          </a:p>
+          <a:p>
+            <a:pPr marL="457200" lvl="1" indent="0">
+              <a:buNone/>
+            </a:pPr>
+            <a:r>
+              <a:rPr lang="af-ZA" dirty="0"/>
+              <a:t>Source IP: _______________________</a:t>
+            </a:r>
+          </a:p>
+          <a:p>
+            <a:pPr marL="457200" lvl="1" indent="0">
+              <a:buNone/>
+            </a:pPr>
+            <a:r>
+              <a:rPr lang="af-ZA" dirty="0"/>
+              <a:t>Destination IP: _______________________</a:t>
+            </a:r>
+          </a:p>
+          <a:p>
+            <a:pPr marL="457200" lvl="1" indent="0">
+              <a:buNone/>
+            </a:pPr>
+            <a:r>
+              <a:rPr lang="af-ZA" dirty="0"/>
+              <a:t>Source MAC: _______________________</a:t>
+            </a:r>
+          </a:p>
+          <a:p>
+            <a:pPr marL="457200" lvl="1" indent="0">
+              <a:buNone/>
+            </a:pPr>
+            <a:r>
+              <a:rPr lang="af-ZA" dirty="0"/>
+              <a:t>Destination MAC: _______________________</a:t>
+            </a:r>
+            <a:endParaRPr lang="ru-RU" dirty="0"/>
+          </a:p>
+        </p:txBody>
+      </p:sp>
+    </p:spTree>
+    <p:extLst>
+      <p:ext uri="{BB962C8B-B14F-4D97-AF65-F5344CB8AC3E}">
+        <p14:creationId xmlns:p14="http://schemas.microsoft.com/office/powerpoint/2010/main" val="1054257194"/>
+      </p:ext>
+    </p:extLst>
+  </p:cSld>
+  <p:clrMapOvr>
+    <a:masterClrMapping/>
+  </p:clrMapOvr>
+</p:sld>
+</file>
+
+<file path=ppt/slides/slide73.xml><?xml version="1.0" encoding="utf-8"?>
+<p:sld xmlns:a="http://schemas.openxmlformats.org/drawingml/2006/main" xmlns:r="http://schemas.openxmlformats.org/officeDocument/2006/relationships" xmlns:p="http://schemas.openxmlformats.org/presentationml/2006/main">
+  <p:cSld>
+    <p:spTree>
+      <p:nvGrpSpPr>
+        <p:cNvPr id="1" name=""/>
+        <p:cNvGrpSpPr/>
+        <p:nvPr/>
+      </p:nvGrpSpPr>
+      <p:grpSpPr>
+        <a:xfrm>
+          <a:off x="0" y="0"/>
+          <a:ext cx="0" cy="0"/>
+          <a:chOff x="0" y="0"/>
+          <a:chExt cx="0" cy="0"/>
+        </a:xfrm>
+      </p:grpSpPr>
+      <p:sp>
+        <p:nvSpPr>
+          <p:cNvPr id="3" name="Объект 2"/>
+          <p:cNvSpPr>
+            <a:spLocks noGrp="1"/>
+          </p:cNvSpPr>
+          <p:nvPr>
+            <p:ph idx="1"/>
+          </p:nvPr>
+        </p:nvSpPr>
+        <p:spPr>
+          <a:xfrm>
+            <a:off x="1141412" y="712176"/>
+            <a:ext cx="9905999" cy="5521569"/>
+          </a:xfrm>
+        </p:spPr>
+        <p:txBody>
+          <a:bodyPr>
+            <a:normAutofit/>
+          </a:bodyPr>
+          <a:lstStyle/>
+          <a:p>
+            <a:pPr marL="0" indent="0">
+              <a:buNone/>
+            </a:pPr>
+            <a:r>
+              <a:rPr lang="ru-RU" dirty="0"/>
+              <a:t>В офисной сети 192.168.1.0/24 находятся</a:t>
+            </a:r>
+            <a:r>
+              <a:rPr lang="ru-RU" dirty="0" smtClean="0"/>
+              <a:t>:</a:t>
+            </a:r>
+            <a:endParaRPr lang="ru-RU" dirty="0"/>
+          </a:p>
+          <a:p>
+            <a:pPr lvl="1"/>
+            <a:r>
+              <a:rPr lang="ru-RU" dirty="0"/>
+              <a:t>ПК сотрудника (192.168.1.15)</a:t>
+            </a:r>
+          </a:p>
+          <a:p>
+            <a:pPr lvl="1"/>
+            <a:r>
+              <a:rPr lang="ru-RU" dirty="0"/>
+              <a:t>Локальный файловый сервер (192.168.1.200)</a:t>
+            </a:r>
+          </a:p>
+          <a:p>
+            <a:pPr lvl="1"/>
+            <a:r>
+              <a:rPr lang="ru-RU" dirty="0"/>
+              <a:t>Основной шлюз / маршрутизатор (192.168.1.1</a:t>
+            </a:r>
+            <a:r>
+              <a:rPr lang="ru-RU" dirty="0" smtClean="0"/>
+              <a:t>)</a:t>
+            </a:r>
+          </a:p>
+          <a:p>
+            <a:pPr marL="0" indent="0">
+              <a:buNone/>
+            </a:pPr>
+            <a:r>
+              <a:rPr lang="ru-RU" dirty="0"/>
+              <a:t>Внезапно шлюз 192.168.1.1 полностью вышел из строя (отключилось питание).</a:t>
+            </a:r>
+          </a:p>
+          <a:p>
+            <a:pPr marL="0" indent="0">
+              <a:buNone/>
+            </a:pPr>
+            <a:endParaRPr lang="ru-RU" dirty="0"/>
+          </a:p>
+          <a:p>
+            <a:pPr marL="0" indent="0">
+              <a:buNone/>
+            </a:pPr>
+            <a:r>
+              <a:rPr lang="ru-RU" b="1" dirty="0"/>
+              <a:t>Вопрос</a:t>
+            </a:r>
+            <a:r>
+              <a:rPr lang="ru-RU" dirty="0"/>
+              <a:t>: Сможет ли сотрудник продолжить скачивать файлы с локального сервера 192.168.1.200? Обоснуйте ответ, опираясь на концепцию прямой/косвенной доставки.</a:t>
+            </a:r>
+            <a:endParaRPr lang="ru-RU" dirty="0" smtClean="0"/>
+          </a:p>
+        </p:txBody>
+      </p:sp>
+    </p:spTree>
+    <p:extLst>
+      <p:ext uri="{BB962C8B-B14F-4D97-AF65-F5344CB8AC3E}">
+        <p14:creationId xmlns:p14="http://schemas.microsoft.com/office/powerpoint/2010/main" val="1069553754"/>
+      </p:ext>
+    </p:extLst>
+  </p:cSld>
+  <p:clrMapOvr>
+    <a:masterClrMapping/>
+  </p:clrMapOvr>
+</p:sld>
+</file>
+
+<file path=ppt/slides/slide74.xml><?xml version="1.0" encoding="utf-8"?>
+<p:sld xmlns:a="http://schemas.openxmlformats.org/drawingml/2006/main" xmlns:r="http://schemas.openxmlformats.org/officeDocument/2006/relationships" xmlns:p="http://schemas.openxmlformats.org/presentationml/2006/main">
+  <p:cSld>
+    <p:spTree>
+      <p:nvGrpSpPr>
+        <p:cNvPr id="1" name=""/>
+        <p:cNvGrpSpPr/>
+        <p:nvPr/>
+      </p:nvGrpSpPr>
+      <p:grpSpPr>
+        <a:xfrm>
+          <a:off x="0" y="0"/>
+          <a:ext cx="0" cy="0"/>
+          <a:chOff x="0" y="0"/>
+          <a:chExt cx="0" cy="0"/>
+        </a:xfrm>
+      </p:grpSpPr>
+      <p:sp>
+        <p:nvSpPr>
+          <p:cNvPr id="2" name="Заголовок 1"/>
+          <p:cNvSpPr>
+            <a:spLocks noGrp="1"/>
+          </p:cNvSpPr>
+          <p:nvPr>
+            <p:ph type="title"/>
+          </p:nvPr>
+        </p:nvSpPr>
+        <p:spPr/>
+        <p:txBody>
+          <a:bodyPr>
+            <a:normAutofit fontScale="90000"/>
+          </a:bodyPr>
+          <a:lstStyle/>
+          <a:p>
+            <a:r>
+              <a:rPr lang="ru-RU" dirty="0"/>
+              <a:t>Расставьте события жизненного цикла IP-адреса в хронологическом порядке (от 1 до 6):</a:t>
+            </a:r>
+            <a:endParaRPr lang="ru-RU" dirty="0"/>
+          </a:p>
+        </p:txBody>
+      </p:sp>
+      <p:sp>
+        <p:nvSpPr>
+          <p:cNvPr id="3" name="Объект 2"/>
+          <p:cNvSpPr>
+            <a:spLocks noGrp="1"/>
+          </p:cNvSpPr>
+          <p:nvPr>
+            <p:ph idx="1"/>
+          </p:nvPr>
+        </p:nvSpPr>
+        <p:spPr/>
+        <p:txBody>
+          <a:bodyPr>
+            <a:normAutofit fontScale="92500" lnSpcReduction="20000"/>
+          </a:bodyPr>
+          <a:lstStyle/>
+          <a:p>
+            <a:r>
+              <a:rPr lang="ru-RU" b="1" dirty="0" smtClean="0"/>
+              <a:t>[ </a:t>
+            </a:r>
+            <a:r>
+              <a:rPr lang="ru-RU" b="1" dirty="0"/>
+              <a:t>]</a:t>
+            </a:r>
+            <a:r>
+              <a:rPr lang="ru-RU" dirty="0"/>
+              <a:t> Клиент отправляет </a:t>
+            </a:r>
+            <a:r>
+              <a:rPr lang="ru-RU" b="1" dirty="0"/>
+              <a:t>DHCPDISCOVER</a:t>
+            </a:r>
+            <a:r>
+              <a:rPr lang="ru-RU" dirty="0"/>
+              <a:t> (широковещательно).</a:t>
+            </a:r>
+          </a:p>
+          <a:p>
+            <a:r>
+              <a:rPr lang="ru-RU" b="1" dirty="0"/>
+              <a:t>[ ]</a:t>
+            </a:r>
+            <a:r>
+              <a:rPr lang="ru-RU" dirty="0"/>
+              <a:t> Сервер отвечает подтверждением </a:t>
+            </a:r>
+            <a:r>
+              <a:rPr lang="ru-RU" b="1" dirty="0"/>
+              <a:t>DHCPACK</a:t>
+            </a:r>
+            <a:r>
+              <a:rPr lang="ru-RU" dirty="0"/>
+              <a:t>.</a:t>
+            </a:r>
+          </a:p>
+          <a:p>
+            <a:r>
+              <a:rPr lang="ru-RU" b="1" dirty="0"/>
+              <a:t>[ ]</a:t>
+            </a:r>
+            <a:r>
+              <a:rPr lang="ru-RU" dirty="0"/>
+              <a:t> Сервер отправляет предложение </a:t>
+            </a:r>
+            <a:r>
+              <a:rPr lang="ru-RU" b="1" dirty="0"/>
+              <a:t>DHCPOFFER</a:t>
+            </a:r>
+            <a:r>
+              <a:rPr lang="ru-RU" dirty="0"/>
+              <a:t>.</a:t>
+            </a:r>
+          </a:p>
+          <a:p>
+            <a:r>
+              <a:rPr lang="ru-RU" b="1" dirty="0"/>
+              <a:t>[ ]</a:t>
+            </a:r>
+            <a:r>
+              <a:rPr lang="ru-RU" dirty="0"/>
+              <a:t> Наступает таймер </a:t>
+            </a:r>
+            <a:r>
+              <a:rPr lang="ru-RU" b="1" dirty="0"/>
+              <a:t>T1 (50% времени)</a:t>
+            </a:r>
+            <a:r>
+              <a:rPr lang="ru-RU" dirty="0"/>
+              <a:t>: клиент отправляет одноадресный запрос продления.</a:t>
+            </a:r>
+          </a:p>
+          <a:p>
+            <a:r>
+              <a:rPr lang="ru-RU" b="1" dirty="0"/>
+              <a:t>[ ]</a:t>
+            </a:r>
+            <a:r>
+              <a:rPr lang="ru-RU" dirty="0"/>
+              <a:t> Клиент отправляет </a:t>
+            </a:r>
+            <a:r>
+              <a:rPr lang="ru-RU" b="1" dirty="0"/>
+              <a:t>DHCPREQUEST</a:t>
+            </a:r>
+            <a:r>
+              <a:rPr lang="ru-RU" dirty="0"/>
+              <a:t> (принимает предложение).</a:t>
+            </a:r>
+          </a:p>
+          <a:p>
+            <a:r>
+              <a:rPr lang="ru-RU" b="1" dirty="0"/>
+              <a:t>[ ]</a:t>
+            </a:r>
+            <a:r>
+              <a:rPr lang="ru-RU" dirty="0"/>
+              <a:t> Наступает таймер </a:t>
+            </a:r>
+            <a:r>
+              <a:rPr lang="ru-RU" b="1" dirty="0"/>
+              <a:t>T2 (87.5% времени)</a:t>
+            </a:r>
+            <a:r>
+              <a:rPr lang="ru-RU" dirty="0"/>
+              <a:t>: клиент рассылает широковещательный запрос на продление всем серверам.</a:t>
+            </a:r>
+          </a:p>
+          <a:p>
+            <a:endParaRPr lang="ru-RU" dirty="0"/>
+          </a:p>
+        </p:txBody>
+      </p:sp>
+    </p:spTree>
+    <p:extLst>
+      <p:ext uri="{BB962C8B-B14F-4D97-AF65-F5344CB8AC3E}">
+        <p14:creationId xmlns:p14="http://schemas.microsoft.com/office/powerpoint/2010/main" val="3662088361"/>
+      </p:ext>
+    </p:extLst>
+  </p:cSld>
+  <p:clrMapOvr>
+    <a:masterClrMapping/>
+  </p:clrMapOvr>
+</p:sld>
+</file>
+
+<file path=ppt/slides/slide75.xml><?xml version="1.0" encoding="utf-8"?>
+<p:sld xmlns:a="http://schemas.openxmlformats.org/drawingml/2006/main" xmlns:r="http://schemas.openxmlformats.org/officeDocument/2006/relationships" xmlns:p="http://schemas.openxmlformats.org/presentationml/2006/main">
+  <p:cSld>
+    <p:spTree>
+      <p:nvGrpSpPr>
+        <p:cNvPr id="1" name=""/>
+        <p:cNvGrpSpPr/>
+        <p:nvPr/>
+      </p:nvGrpSpPr>
+      <p:grpSpPr>
+        <a:xfrm>
+          <a:off x="0" y="0"/>
+          <a:ext cx="0" cy="0"/>
+          <a:chOff x="0" y="0"/>
+          <a:chExt cx="0" cy="0"/>
+        </a:xfrm>
+      </p:grpSpPr>
+      <p:sp>
+        <p:nvSpPr>
+          <p:cNvPr id="2" name="Заголовок 1"/>
+          <p:cNvSpPr>
+            <a:spLocks noGrp="1"/>
+          </p:cNvSpPr>
+          <p:nvPr>
+            <p:ph type="title"/>
+          </p:nvPr>
+        </p:nvSpPr>
+        <p:spPr/>
+        <p:txBody>
+          <a:bodyPr/>
+          <a:lstStyle/>
+          <a:p>
+            <a:r>
+              <a:rPr lang="ru-RU" b="1" dirty="0"/>
+              <a:t>«Рекурсивный поиск» (Маршрутизация</a:t>
+            </a:r>
+            <a:r>
+              <a:rPr lang="ru-RU" b="1" dirty="0" smtClean="0"/>
+              <a:t>)</a:t>
+            </a:r>
+            <a:endParaRPr lang="ru-RU" dirty="0"/>
+          </a:p>
+        </p:txBody>
+      </p:sp>
+      <p:sp>
+        <p:nvSpPr>
+          <p:cNvPr id="3" name="Объект 2"/>
+          <p:cNvSpPr>
+            <a:spLocks noGrp="1"/>
+          </p:cNvSpPr>
+          <p:nvPr>
+            <p:ph idx="1"/>
+          </p:nvPr>
+        </p:nvSpPr>
+        <p:spPr>
+          <a:xfrm>
+            <a:off x="1143000" y="1704364"/>
+            <a:ext cx="9905999" cy="2946767"/>
+          </a:xfrm>
+        </p:spPr>
+        <p:txBody>
+          <a:bodyPr/>
+          <a:lstStyle/>
+          <a:p>
+            <a:pPr marL="0" indent="0">
+              <a:buNone/>
+            </a:pPr>
+            <a:r>
+              <a:rPr lang="ru-RU" dirty="0"/>
+              <a:t>Узел анализирует свою таблицу маршрутизации для отправки пакета на адрес </a:t>
+            </a:r>
+            <a:r>
+              <a:rPr lang="ru-RU" dirty="0" smtClean="0"/>
+              <a:t>10.5.5.5.</a:t>
+            </a:r>
+          </a:p>
+          <a:p>
+            <a:pPr marL="0" indent="0">
+              <a:buNone/>
+            </a:pPr>
+            <a:r>
+              <a:rPr lang="ru-RU" b="1" dirty="0"/>
+              <a:t>Вопрос</a:t>
+            </a:r>
+            <a:r>
+              <a:rPr lang="ru-RU" dirty="0"/>
+              <a:t>: Через какой физический интерфейс (Eth0 или другой) и на какой MAC-адрес (шлюза по умолчанию 192.168.1.1 или маршрутизатора 192.168.1.254) в итоге будет отправлен кадр? Опишите логику двух шагов поиска.</a:t>
+            </a:r>
+          </a:p>
+        </p:txBody>
+      </p:sp>
+      <p:graphicFrame>
+        <p:nvGraphicFramePr>
+          <p:cNvPr id="6" name="Таблица 5"/>
+          <p:cNvGraphicFramePr>
+            <a:graphicFrameLocks noGrp="1"/>
+          </p:cNvGraphicFramePr>
+          <p:nvPr>
+            <p:extLst>
+              <p:ext uri="{D42A27DB-BD31-4B8C-83A1-F6EECF244321}">
+                <p14:modId xmlns:p14="http://schemas.microsoft.com/office/powerpoint/2010/main" val="1431573168"/>
+              </p:ext>
+            </p:extLst>
+          </p:nvPr>
+        </p:nvGraphicFramePr>
+        <p:xfrm>
+          <a:off x="1220544" y="4651131"/>
+          <a:ext cx="9906000" cy="1478280"/>
+        </p:xfrm>
+        <a:graphic>
+          <a:graphicData uri="http://schemas.openxmlformats.org/drawingml/2006/table">
+            <a:tbl>
+              <a:tblPr/>
+              <a:tblGrid>
+                <a:gridCol w="3302000">
+                  <a:extLst>
+                    <a:ext uri="{9D8B030D-6E8A-4147-A177-3AD203B41FA5}">
+                      <a16:colId xmlns:a16="http://schemas.microsoft.com/office/drawing/2014/main" val="3456183535"/>
+                    </a:ext>
+                  </a:extLst>
+                </a:gridCol>
+                <a:gridCol w="3302000">
+                  <a:extLst>
+                    <a:ext uri="{9D8B030D-6E8A-4147-A177-3AD203B41FA5}">
+                      <a16:colId xmlns:a16="http://schemas.microsoft.com/office/drawing/2014/main" val="987054999"/>
+                    </a:ext>
+                  </a:extLst>
+                </a:gridCol>
+                <a:gridCol w="3302000">
+                  <a:extLst>
+                    <a:ext uri="{9D8B030D-6E8A-4147-A177-3AD203B41FA5}">
+                      <a16:colId xmlns:a16="http://schemas.microsoft.com/office/drawing/2014/main" val="686877496"/>
+                    </a:ext>
+                  </a:extLst>
+                </a:gridCol>
+              </a:tblGrid>
+              <a:tr h="0">
+                <a:tc>
+                  <a:txBody>
+                    <a:bodyPr/>
+                    <a:lstStyle/>
+                    <a:p>
+                      <a:pPr algn="l"/>
+                      <a:r>
+                        <a:rPr lang="ru-RU" b="1" dirty="0">
+                          <a:effectLst/>
+                        </a:rPr>
+                        <a:t>Сеть назначения</a:t>
+                      </a:r>
+                    </a:p>
+                  </a:txBody>
+                  <a:tcPr marL="95250" marR="95250" marT="47625" marB="47625" anchor="ctr">
+                    <a:lnL w="12700" cap="flat" cmpd="sng" algn="ctr">
+                      <a:solidFill>
+                        <a:schemeClr val="tx1"/>
+                      </a:solidFill>
+                      <a:prstDash val="solid"/>
+                      <a:round/>
+                      <a:headEnd type="none" w="med" len="med"/>
+                      <a:tailEnd type="none" w="med" len="med"/>
+                    </a:lnL>
+                    <a:lnR w="12700" cap="flat" cmpd="sng" algn="ctr">
+                      <a:solidFill>
+                        <a:schemeClr val="tx1"/>
+                      </a:solidFill>
+                      <a:prstDash val="solid"/>
+                      <a:round/>
+                      <a:headEnd type="none" w="med" len="med"/>
+                      <a:tailEnd type="none" w="med" len="med"/>
+                    </a:lnR>
+                    <a:lnT w="12700" cap="flat" cmpd="sng" algn="ctr">
+                      <a:solidFill>
+                        <a:schemeClr val="tx1"/>
+                      </a:solidFill>
+                      <a:prstDash val="solid"/>
+                      <a:round/>
+                      <a:headEnd type="none" w="med" len="med"/>
+                      <a:tailEnd type="none" w="med" len="med"/>
+                    </a:lnT>
+                    <a:lnB w="12700" cap="flat" cmpd="sng" algn="ctr">
+                      <a:solidFill>
+                        <a:schemeClr val="tx1"/>
+                      </a:solidFill>
+                      <a:prstDash val="solid"/>
+                      <a:round/>
+                      <a:headEnd type="none" w="med" len="med"/>
+                      <a:tailEnd type="none" w="med" len="med"/>
+                    </a:lnB>
+                  </a:tcPr>
+                </a:tc>
+                <a:tc>
+                  <a:txBody>
+                    <a:bodyPr/>
+                    <a:lstStyle/>
+                    <a:p>
+                      <a:pPr algn="l"/>
+                      <a:r>
+                        <a:rPr lang="ru-RU" b="1" dirty="0">
+                          <a:effectLst/>
+                        </a:rPr>
+                        <a:t>Маска</a:t>
+                      </a:r>
+                    </a:p>
+                  </a:txBody>
+                  <a:tcPr marL="95250" marR="95250" marT="47625" marB="47625" anchor="ctr">
+                    <a:lnL w="12700" cap="flat" cmpd="sng" algn="ctr">
+                      <a:solidFill>
+                        <a:schemeClr val="tx1"/>
+                      </a:solidFill>
+                      <a:prstDash val="solid"/>
+                      <a:round/>
+                      <a:headEnd type="none" w="med" len="med"/>
+                      <a:tailEnd type="none" w="med" len="med"/>
+                    </a:lnL>
+                    <a:lnR w="12700" cap="flat" cmpd="sng" algn="ctr">
+                      <a:solidFill>
+                        <a:schemeClr val="tx1"/>
+                      </a:solidFill>
+                      <a:prstDash val="solid"/>
+                      <a:round/>
+                      <a:headEnd type="none" w="med" len="med"/>
+                      <a:tailEnd type="none" w="med" len="med"/>
+                    </a:lnR>
+                    <a:lnT w="12700" cap="flat" cmpd="sng" algn="ctr">
+                      <a:solidFill>
+                        <a:schemeClr val="tx1"/>
+                      </a:solidFill>
+                      <a:prstDash val="solid"/>
+                      <a:round/>
+                      <a:headEnd type="none" w="med" len="med"/>
+                      <a:tailEnd type="none" w="med" len="med"/>
+                    </a:lnT>
+                    <a:lnB w="12700" cap="flat" cmpd="sng" algn="ctr">
+                      <a:solidFill>
+                        <a:schemeClr val="tx1"/>
+                      </a:solidFill>
+                      <a:prstDash val="solid"/>
+                      <a:round/>
+                      <a:headEnd type="none" w="med" len="med"/>
+                      <a:tailEnd type="none" w="med" len="med"/>
+                    </a:lnB>
+                  </a:tcPr>
+                </a:tc>
+                <a:tc>
+                  <a:txBody>
+                    <a:bodyPr/>
+                    <a:lstStyle/>
+                    <a:p>
+                      <a:pPr algn="l"/>
+                      <a:r>
+                        <a:rPr lang="af-ZA" b="1" dirty="0">
+                          <a:effectLst/>
+                        </a:rPr>
+                        <a:t>Next-hop</a:t>
+                      </a:r>
+                    </a:p>
+                  </a:txBody>
+                  <a:tcPr marL="95250" marR="95250" marT="47625" marB="47625" anchor="ctr">
+                    <a:lnL w="12700" cap="flat" cmpd="sng" algn="ctr">
+                      <a:solidFill>
+                        <a:schemeClr val="tx1"/>
+                      </a:solidFill>
+                      <a:prstDash val="solid"/>
+                      <a:round/>
+                      <a:headEnd type="none" w="med" len="med"/>
+                      <a:tailEnd type="none" w="med" len="med"/>
+                    </a:lnL>
+                    <a:lnR w="12700" cap="flat" cmpd="sng" algn="ctr">
+                      <a:solidFill>
+                        <a:schemeClr val="tx1"/>
+                      </a:solidFill>
+                      <a:prstDash val="solid"/>
+                      <a:round/>
+                      <a:headEnd type="none" w="med" len="med"/>
+                      <a:tailEnd type="none" w="med" len="med"/>
+                    </a:lnR>
+                    <a:lnT w="12700" cap="flat" cmpd="sng" algn="ctr">
+                      <a:solidFill>
+                        <a:schemeClr val="tx1"/>
+                      </a:solidFill>
+                      <a:prstDash val="solid"/>
+                      <a:round/>
+                      <a:headEnd type="none" w="med" len="med"/>
+                      <a:tailEnd type="none" w="med" len="med"/>
+                    </a:lnT>
+                    <a:lnB w="12700" cap="flat" cmpd="sng" algn="ctr">
+                      <a:solidFill>
+                        <a:schemeClr val="tx1"/>
+                      </a:solidFill>
+                      <a:prstDash val="solid"/>
+                      <a:round/>
+                      <a:headEnd type="none" w="med" len="med"/>
+                      <a:tailEnd type="none" w="med" len="med"/>
+                    </a:lnB>
+                  </a:tcPr>
+                </a:tc>
+                <a:extLst>
+                  <a:ext uri="{0D108BD9-81ED-4DB2-BD59-A6C34878D82A}">
+                    <a16:rowId xmlns:a16="http://schemas.microsoft.com/office/drawing/2014/main" val="3591108820"/>
+                  </a:ext>
+                </a:extLst>
+              </a:tr>
+              <a:tr h="0">
+                <a:tc>
+                  <a:txBody>
+                    <a:bodyPr/>
+                    <a:lstStyle/>
+                    <a:p>
+                      <a:pPr algn="l"/>
+                      <a:r>
+                        <a:rPr lang="ru-RU" dirty="0">
+                          <a:effectLst/>
+                        </a:rPr>
+                        <a:t>192.168.1.0</a:t>
+                      </a:r>
+                    </a:p>
+                  </a:txBody>
+                  <a:tcPr marL="95250" marR="95250" marT="47625" marB="47625" anchor="ctr">
+                    <a:lnL w="12700" cap="flat" cmpd="sng" algn="ctr">
+                      <a:solidFill>
+                        <a:schemeClr val="tx1"/>
+                      </a:solidFill>
+                      <a:prstDash val="solid"/>
+                      <a:round/>
+                      <a:headEnd type="none" w="med" len="med"/>
+                      <a:tailEnd type="none" w="med" len="med"/>
+                    </a:lnL>
+                    <a:lnR w="12700" cap="flat" cmpd="sng" algn="ctr">
+                      <a:solidFill>
+                        <a:schemeClr val="tx1"/>
+                      </a:solidFill>
+                      <a:prstDash val="solid"/>
+                      <a:round/>
+                      <a:headEnd type="none" w="med" len="med"/>
+                      <a:tailEnd type="none" w="med" len="med"/>
+                    </a:lnR>
+                    <a:lnT w="12700" cap="flat" cmpd="sng" algn="ctr">
+                      <a:solidFill>
+                        <a:schemeClr val="tx1"/>
+                      </a:solidFill>
+                      <a:prstDash val="solid"/>
+                      <a:round/>
+                      <a:headEnd type="none" w="med" len="med"/>
+                      <a:tailEnd type="none" w="med" len="med"/>
+                    </a:lnT>
+                    <a:lnB w="12700" cap="flat" cmpd="sng" algn="ctr">
+                      <a:solidFill>
+                        <a:schemeClr val="tx1"/>
+                      </a:solidFill>
+                      <a:prstDash val="solid"/>
+                      <a:round/>
+                      <a:headEnd type="none" w="med" len="med"/>
+                      <a:tailEnd type="none" w="med" len="med"/>
+                    </a:lnB>
+                  </a:tcPr>
+                </a:tc>
+                <a:tc>
+                  <a:txBody>
+                    <a:bodyPr/>
+                    <a:lstStyle/>
+                    <a:p>
+                      <a:pPr algn="l"/>
+                      <a:r>
+                        <a:rPr lang="ru-RU" dirty="0">
+                          <a:effectLst/>
+                        </a:rPr>
+                        <a:t>255.255.255.0</a:t>
+                      </a:r>
+                    </a:p>
+                  </a:txBody>
+                  <a:tcPr marL="95250" marR="95250" marT="47625" marB="47625" anchor="ctr">
+                    <a:lnL w="12700" cap="flat" cmpd="sng" algn="ctr">
+                      <a:solidFill>
+                        <a:schemeClr val="tx1"/>
+                      </a:solidFill>
+                      <a:prstDash val="solid"/>
+                      <a:round/>
+                      <a:headEnd type="none" w="med" len="med"/>
+                      <a:tailEnd type="none" w="med" len="med"/>
+                    </a:lnL>
+                    <a:lnR w="12700" cap="flat" cmpd="sng" algn="ctr">
+                      <a:solidFill>
+                        <a:schemeClr val="tx1"/>
+                      </a:solidFill>
+                      <a:prstDash val="solid"/>
+                      <a:round/>
+                      <a:headEnd type="none" w="med" len="med"/>
+                      <a:tailEnd type="none" w="med" len="med"/>
+                    </a:lnR>
+                    <a:lnT w="12700" cap="flat" cmpd="sng" algn="ctr">
+                      <a:solidFill>
+                        <a:schemeClr val="tx1"/>
+                      </a:solidFill>
+                      <a:prstDash val="solid"/>
+                      <a:round/>
+                      <a:headEnd type="none" w="med" len="med"/>
+                      <a:tailEnd type="none" w="med" len="med"/>
+                    </a:lnT>
+                    <a:lnB w="12700" cap="flat" cmpd="sng" algn="ctr">
+                      <a:solidFill>
+                        <a:schemeClr val="tx1"/>
+                      </a:solidFill>
+                      <a:prstDash val="solid"/>
+                      <a:round/>
+                      <a:headEnd type="none" w="med" len="med"/>
+                      <a:tailEnd type="none" w="med" len="med"/>
+                    </a:lnB>
+                  </a:tcPr>
+                </a:tc>
+                <a:tc>
+                  <a:txBody>
+                    <a:bodyPr/>
+                    <a:lstStyle/>
+                    <a:p>
+                      <a:pPr algn="l"/>
+                      <a:r>
+                        <a:rPr lang="af-ZA" dirty="0">
+                          <a:effectLst/>
+                        </a:rPr>
+                        <a:t>Eth0</a:t>
+                      </a:r>
+                    </a:p>
+                  </a:txBody>
+                  <a:tcPr marL="95250" marR="95250" marT="47625" marB="47625" anchor="ctr">
+                    <a:lnL w="12700" cap="flat" cmpd="sng" algn="ctr">
+                      <a:solidFill>
+                        <a:schemeClr val="tx1"/>
+                      </a:solidFill>
+                      <a:prstDash val="solid"/>
+                      <a:round/>
+                      <a:headEnd type="none" w="med" len="med"/>
+                      <a:tailEnd type="none" w="med" len="med"/>
+                    </a:lnL>
+                    <a:lnR w="12700" cap="flat" cmpd="sng" algn="ctr">
+                      <a:solidFill>
+                        <a:schemeClr val="tx1"/>
+                      </a:solidFill>
+                      <a:prstDash val="solid"/>
+                      <a:round/>
+                      <a:headEnd type="none" w="med" len="med"/>
+                      <a:tailEnd type="none" w="med" len="med"/>
+                    </a:lnR>
+                    <a:lnT w="12700" cap="flat" cmpd="sng" algn="ctr">
+                      <a:solidFill>
+                        <a:schemeClr val="tx1"/>
+                      </a:solidFill>
+                      <a:prstDash val="solid"/>
+                      <a:round/>
+                      <a:headEnd type="none" w="med" len="med"/>
+                      <a:tailEnd type="none" w="med" len="med"/>
+                    </a:lnT>
+                    <a:lnB w="12700" cap="flat" cmpd="sng" algn="ctr">
+                      <a:solidFill>
+                        <a:schemeClr val="tx1"/>
+                      </a:solidFill>
+                      <a:prstDash val="solid"/>
+                      <a:round/>
+                      <a:headEnd type="none" w="med" len="med"/>
+                      <a:tailEnd type="none" w="med" len="med"/>
+                    </a:lnB>
+                  </a:tcPr>
+                </a:tc>
+                <a:extLst>
+                  <a:ext uri="{0D108BD9-81ED-4DB2-BD59-A6C34878D82A}">
+                    <a16:rowId xmlns:a16="http://schemas.microsoft.com/office/drawing/2014/main" val="4034943144"/>
+                  </a:ext>
+                </a:extLst>
+              </a:tr>
+              <a:tr h="0">
+                <a:tc>
+                  <a:txBody>
+                    <a:bodyPr/>
+                    <a:lstStyle/>
+                    <a:p>
+                      <a:pPr algn="l"/>
+                      <a:r>
+                        <a:rPr lang="ru-RU">
+                          <a:effectLst/>
+                        </a:rPr>
+                        <a:t>10.5.5.0</a:t>
+                      </a:r>
+                    </a:p>
+                  </a:txBody>
+                  <a:tcPr marL="95250" marR="95250" marT="47625" marB="47625" anchor="ctr">
+                    <a:lnL w="12700" cap="flat" cmpd="sng" algn="ctr">
+                      <a:solidFill>
+                        <a:schemeClr val="tx1"/>
+                      </a:solidFill>
+                      <a:prstDash val="solid"/>
+                      <a:round/>
+                      <a:headEnd type="none" w="med" len="med"/>
+                      <a:tailEnd type="none" w="med" len="med"/>
+                    </a:lnL>
+                    <a:lnR w="12700" cap="flat" cmpd="sng" algn="ctr">
+                      <a:solidFill>
+                        <a:schemeClr val="tx1"/>
+                      </a:solidFill>
+                      <a:prstDash val="solid"/>
+                      <a:round/>
+                      <a:headEnd type="none" w="med" len="med"/>
+                      <a:tailEnd type="none" w="med" len="med"/>
+                    </a:lnR>
+                    <a:lnT w="12700" cap="flat" cmpd="sng" algn="ctr">
+                      <a:solidFill>
+                        <a:schemeClr val="tx1"/>
+                      </a:solidFill>
+                      <a:prstDash val="solid"/>
+                      <a:round/>
+                      <a:headEnd type="none" w="med" len="med"/>
+                      <a:tailEnd type="none" w="med" len="med"/>
+                    </a:lnT>
+                    <a:lnB w="12700" cap="flat" cmpd="sng" algn="ctr">
+                      <a:solidFill>
+                        <a:schemeClr val="tx1"/>
+                      </a:solidFill>
+                      <a:prstDash val="solid"/>
+                      <a:round/>
+                      <a:headEnd type="none" w="med" len="med"/>
+                      <a:tailEnd type="none" w="med" len="med"/>
+                    </a:lnB>
+                  </a:tcPr>
+                </a:tc>
+                <a:tc>
+                  <a:txBody>
+                    <a:bodyPr/>
+                    <a:lstStyle/>
+                    <a:p>
+                      <a:pPr algn="l"/>
+                      <a:r>
+                        <a:rPr lang="ru-RU">
+                          <a:effectLst/>
+                        </a:rPr>
+                        <a:t>255.255.255.0</a:t>
+                      </a:r>
+                    </a:p>
+                  </a:txBody>
+                  <a:tcPr marL="95250" marR="95250" marT="47625" marB="47625" anchor="ctr">
+                    <a:lnL w="12700" cap="flat" cmpd="sng" algn="ctr">
+                      <a:solidFill>
+                        <a:schemeClr val="tx1"/>
+                      </a:solidFill>
+                      <a:prstDash val="solid"/>
+                      <a:round/>
+                      <a:headEnd type="none" w="med" len="med"/>
+                      <a:tailEnd type="none" w="med" len="med"/>
+                    </a:lnL>
+                    <a:lnR w="12700" cap="flat" cmpd="sng" algn="ctr">
+                      <a:solidFill>
+                        <a:schemeClr val="tx1"/>
+                      </a:solidFill>
+                      <a:prstDash val="solid"/>
+                      <a:round/>
+                      <a:headEnd type="none" w="med" len="med"/>
+                      <a:tailEnd type="none" w="med" len="med"/>
+                    </a:lnR>
+                    <a:lnT w="12700" cap="flat" cmpd="sng" algn="ctr">
+                      <a:solidFill>
+                        <a:schemeClr val="tx1"/>
+                      </a:solidFill>
+                      <a:prstDash val="solid"/>
+                      <a:round/>
+                      <a:headEnd type="none" w="med" len="med"/>
+                      <a:tailEnd type="none" w="med" len="med"/>
+                    </a:lnT>
+                    <a:lnB w="12700" cap="flat" cmpd="sng" algn="ctr">
+                      <a:solidFill>
+                        <a:schemeClr val="tx1"/>
+                      </a:solidFill>
+                      <a:prstDash val="solid"/>
+                      <a:round/>
+                      <a:headEnd type="none" w="med" len="med"/>
+                      <a:tailEnd type="none" w="med" len="med"/>
+                    </a:lnB>
+                  </a:tcPr>
+                </a:tc>
+                <a:tc>
+                  <a:txBody>
+                    <a:bodyPr/>
+                    <a:lstStyle/>
+                    <a:p>
+                      <a:pPr algn="l"/>
+                      <a:r>
+                        <a:rPr lang="ru-RU" dirty="0">
+                          <a:effectLst/>
+                        </a:rPr>
+                        <a:t>192.168.1.254</a:t>
+                      </a:r>
+                    </a:p>
+                  </a:txBody>
+                  <a:tcPr marL="95250" marR="95250" marT="47625" marB="47625" anchor="ctr">
+                    <a:lnL w="12700" cap="flat" cmpd="sng" algn="ctr">
+                      <a:solidFill>
+                        <a:schemeClr val="tx1"/>
+                      </a:solidFill>
+                      <a:prstDash val="solid"/>
+                      <a:round/>
+                      <a:headEnd type="none" w="med" len="med"/>
+                      <a:tailEnd type="none" w="med" len="med"/>
+                    </a:lnL>
+                    <a:lnR w="12700" cap="flat" cmpd="sng" algn="ctr">
+                      <a:solidFill>
+                        <a:schemeClr val="tx1"/>
+                      </a:solidFill>
+                      <a:prstDash val="solid"/>
+                      <a:round/>
+                      <a:headEnd type="none" w="med" len="med"/>
+                      <a:tailEnd type="none" w="med" len="med"/>
+                    </a:lnR>
+                    <a:lnT w="12700" cap="flat" cmpd="sng" algn="ctr">
+                      <a:solidFill>
+                        <a:schemeClr val="tx1"/>
+                      </a:solidFill>
+                      <a:prstDash val="solid"/>
+                      <a:round/>
+                      <a:headEnd type="none" w="med" len="med"/>
+                      <a:tailEnd type="none" w="med" len="med"/>
+                    </a:lnT>
+                    <a:lnB w="12700" cap="flat" cmpd="sng" algn="ctr">
+                      <a:solidFill>
+                        <a:schemeClr val="tx1"/>
+                      </a:solidFill>
+                      <a:prstDash val="solid"/>
+                      <a:round/>
+                      <a:headEnd type="none" w="med" len="med"/>
+                      <a:tailEnd type="none" w="med" len="med"/>
+                    </a:lnB>
+                  </a:tcPr>
+                </a:tc>
+                <a:extLst>
+                  <a:ext uri="{0D108BD9-81ED-4DB2-BD59-A6C34878D82A}">
+                    <a16:rowId xmlns:a16="http://schemas.microsoft.com/office/drawing/2014/main" val="13590242"/>
+                  </a:ext>
+                </a:extLst>
+              </a:tr>
+              <a:tr h="0">
+                <a:tc>
+                  <a:txBody>
+                    <a:bodyPr/>
+                    <a:lstStyle/>
+                    <a:p>
+                      <a:pPr algn="l"/>
+                      <a:r>
+                        <a:rPr lang="ru-RU">
+                          <a:effectLst/>
+                        </a:rPr>
+                        <a:t>0.0.0.0</a:t>
+                      </a:r>
+                    </a:p>
+                  </a:txBody>
+                  <a:tcPr marL="95250" marR="95250" marT="47625" marB="47625" anchor="ctr">
+                    <a:lnL w="12700" cap="flat" cmpd="sng" algn="ctr">
+                      <a:solidFill>
+                        <a:schemeClr val="tx1"/>
+                      </a:solidFill>
+                      <a:prstDash val="solid"/>
+                      <a:round/>
+                      <a:headEnd type="none" w="med" len="med"/>
+                      <a:tailEnd type="none" w="med" len="med"/>
+                    </a:lnL>
+                    <a:lnR w="12700" cap="flat" cmpd="sng" algn="ctr">
+                      <a:solidFill>
+                        <a:schemeClr val="tx1"/>
+                      </a:solidFill>
+                      <a:prstDash val="solid"/>
+                      <a:round/>
+                      <a:headEnd type="none" w="med" len="med"/>
+                      <a:tailEnd type="none" w="med" len="med"/>
+                    </a:lnR>
+                    <a:lnT w="12700" cap="flat" cmpd="sng" algn="ctr">
+                      <a:solidFill>
+                        <a:schemeClr val="tx1"/>
+                      </a:solidFill>
+                      <a:prstDash val="solid"/>
+                      <a:round/>
+                      <a:headEnd type="none" w="med" len="med"/>
+                      <a:tailEnd type="none" w="med" len="med"/>
+                    </a:lnT>
+                    <a:lnB w="12700" cap="flat" cmpd="sng" algn="ctr">
+                      <a:solidFill>
+                        <a:schemeClr val="tx1"/>
+                      </a:solidFill>
+                      <a:prstDash val="solid"/>
+                      <a:round/>
+                      <a:headEnd type="none" w="med" len="med"/>
+                      <a:tailEnd type="none" w="med" len="med"/>
+                    </a:lnB>
+                  </a:tcPr>
+                </a:tc>
+                <a:tc>
+                  <a:txBody>
+                    <a:bodyPr/>
+                    <a:lstStyle/>
+                    <a:p>
+                      <a:pPr algn="l"/>
+                      <a:r>
+                        <a:rPr lang="ru-RU">
+                          <a:effectLst/>
+                        </a:rPr>
+                        <a:t>0.0.0.0</a:t>
+                      </a:r>
+                    </a:p>
+                  </a:txBody>
+                  <a:tcPr marL="95250" marR="95250" marT="47625" marB="47625" anchor="ctr">
+                    <a:lnL w="12700" cap="flat" cmpd="sng" algn="ctr">
+                      <a:solidFill>
+                        <a:schemeClr val="tx1"/>
+                      </a:solidFill>
+                      <a:prstDash val="solid"/>
+                      <a:round/>
+                      <a:headEnd type="none" w="med" len="med"/>
+                      <a:tailEnd type="none" w="med" len="med"/>
+                    </a:lnL>
+                    <a:lnR w="12700" cap="flat" cmpd="sng" algn="ctr">
+                      <a:solidFill>
+                        <a:schemeClr val="tx1"/>
+                      </a:solidFill>
+                      <a:prstDash val="solid"/>
+                      <a:round/>
+                      <a:headEnd type="none" w="med" len="med"/>
+                      <a:tailEnd type="none" w="med" len="med"/>
+                    </a:lnR>
+                    <a:lnT w="12700" cap="flat" cmpd="sng" algn="ctr">
+                      <a:solidFill>
+                        <a:schemeClr val="tx1"/>
+                      </a:solidFill>
+                      <a:prstDash val="solid"/>
+                      <a:round/>
+                      <a:headEnd type="none" w="med" len="med"/>
+                      <a:tailEnd type="none" w="med" len="med"/>
+                    </a:lnT>
+                    <a:lnB w="12700" cap="flat" cmpd="sng" algn="ctr">
+                      <a:solidFill>
+                        <a:schemeClr val="tx1"/>
+                      </a:solidFill>
+                      <a:prstDash val="solid"/>
+                      <a:round/>
+                      <a:headEnd type="none" w="med" len="med"/>
+                      <a:tailEnd type="none" w="med" len="med"/>
+                    </a:lnB>
+                  </a:tcPr>
+                </a:tc>
+                <a:tc>
+                  <a:txBody>
+                    <a:bodyPr/>
+                    <a:lstStyle/>
+                    <a:p>
+                      <a:pPr algn="l"/>
+                      <a:r>
+                        <a:rPr lang="ru-RU" dirty="0">
+                          <a:effectLst/>
+                        </a:rPr>
+                        <a:t>192.168.1.1</a:t>
+                      </a:r>
+                    </a:p>
+                  </a:txBody>
+                  <a:tcPr marL="95250" marR="95250" marT="47625" marB="47625" anchor="ctr">
+                    <a:lnL w="12700" cap="flat" cmpd="sng" algn="ctr">
+                      <a:solidFill>
+                        <a:schemeClr val="tx1"/>
+                      </a:solidFill>
+                      <a:prstDash val="solid"/>
+                      <a:round/>
+                      <a:headEnd type="none" w="med" len="med"/>
+                      <a:tailEnd type="none" w="med" len="med"/>
+                    </a:lnL>
+                    <a:lnR w="12700" cap="flat" cmpd="sng" algn="ctr">
+                      <a:solidFill>
+                        <a:schemeClr val="tx1"/>
+                      </a:solidFill>
+                      <a:prstDash val="solid"/>
+                      <a:round/>
+                      <a:headEnd type="none" w="med" len="med"/>
+                      <a:tailEnd type="none" w="med" len="med"/>
+                    </a:lnR>
+                    <a:lnT w="12700" cap="flat" cmpd="sng" algn="ctr">
+                      <a:solidFill>
+                        <a:schemeClr val="tx1"/>
+                      </a:solidFill>
+                      <a:prstDash val="solid"/>
+                      <a:round/>
+                      <a:headEnd type="none" w="med" len="med"/>
+                      <a:tailEnd type="none" w="med" len="med"/>
+                    </a:lnT>
+                    <a:lnB w="12700" cap="flat" cmpd="sng" algn="ctr">
+                      <a:solidFill>
+                        <a:schemeClr val="tx1"/>
+                      </a:solidFill>
+                      <a:prstDash val="solid"/>
+                      <a:round/>
+                      <a:headEnd type="none" w="med" len="med"/>
+                      <a:tailEnd type="none" w="med" len="med"/>
+                    </a:lnB>
+                  </a:tcPr>
+                </a:tc>
+                <a:extLst>
+                  <a:ext uri="{0D108BD9-81ED-4DB2-BD59-A6C34878D82A}">
+                    <a16:rowId xmlns:a16="http://schemas.microsoft.com/office/drawing/2014/main" val="1742308837"/>
+                  </a:ext>
+                </a:extLst>
+              </a:tr>
+            </a:tbl>
+          </a:graphicData>
+        </a:graphic>
+      </p:graphicFrame>
+    </p:spTree>
+    <p:extLst>
+      <p:ext uri="{BB962C8B-B14F-4D97-AF65-F5344CB8AC3E}">
+        <p14:creationId xmlns:p14="http://schemas.microsoft.com/office/powerpoint/2010/main" val="922657544"/>
+      </p:ext>
+    </p:extLst>
+  </p:cSld>
+  <p:clrMapOvr>
+    <a:masterClrMapping/>
+  </p:clrMapOvr>
+</p:sld>
+</file>
+
+<file path=ppt/slides/slide76.xml><?xml version="1.0" encoding="utf-8"?>
+<p:sld xmlns:a="http://schemas.openxmlformats.org/drawingml/2006/main" xmlns:r="http://schemas.openxmlformats.org/officeDocument/2006/relationships" xmlns:p="http://schemas.openxmlformats.org/presentationml/2006/main">
+  <p:cSld>
+    <p:spTree>
+      <p:nvGrpSpPr>
+        <p:cNvPr id="1" name=""/>
+        <p:cNvGrpSpPr/>
+        <p:nvPr/>
+      </p:nvGrpSpPr>
+      <p:grpSpPr>
+        <a:xfrm>
+          <a:off x="0" y="0"/>
+          <a:ext cx="0" cy="0"/>
+          <a:chOff x="0" y="0"/>
+          <a:chExt cx="0" cy="0"/>
+        </a:xfrm>
+      </p:grpSpPr>
+      <p:sp>
+        <p:nvSpPr>
+          <p:cNvPr id="2" name="Заголовок 1"/>
+          <p:cNvSpPr>
+            <a:spLocks noGrp="1"/>
+          </p:cNvSpPr>
+          <p:nvPr>
+            <p:ph type="title"/>
+          </p:nvPr>
+        </p:nvSpPr>
+        <p:spPr/>
+        <p:txBody>
+          <a:bodyPr>
+            <a:normAutofit fontScale="90000"/>
+          </a:bodyPr>
+          <a:lstStyle/>
+          <a:p>
+            <a:r>
+              <a:rPr lang="ru-RU" dirty="0"/>
+              <a:t>Для каждой ситуации определите, какой тип ARP-сообщения будет сгенерирован (</a:t>
+            </a:r>
+            <a:r>
+              <a:rPr lang="ru-RU" b="1" dirty="0"/>
+              <a:t>Обычный ARP </a:t>
+            </a:r>
+            <a:r>
+              <a:rPr lang="ru-RU" b="1" dirty="0" err="1"/>
+              <a:t>Request</a:t>
+            </a:r>
+            <a:r>
+              <a:rPr lang="ru-RU" dirty="0"/>
+              <a:t> или </a:t>
+            </a:r>
+            <a:r>
+              <a:rPr lang="ru-RU" b="1" dirty="0" err="1"/>
+              <a:t>Gratuitous</a:t>
+            </a:r>
+            <a:r>
+              <a:rPr lang="ru-RU" b="1" dirty="0"/>
+              <a:t> ARP</a:t>
+            </a:r>
+            <a:r>
+              <a:rPr lang="ru-RU" dirty="0"/>
+              <a:t>):</a:t>
+            </a:r>
+            <a:endParaRPr lang="ru-RU" dirty="0"/>
+          </a:p>
+        </p:txBody>
+      </p:sp>
+      <p:sp>
+        <p:nvSpPr>
+          <p:cNvPr id="3" name="Объект 2"/>
+          <p:cNvSpPr>
+            <a:spLocks noGrp="1"/>
+          </p:cNvSpPr>
+          <p:nvPr>
+            <p:ph idx="1"/>
+          </p:nvPr>
+        </p:nvSpPr>
+        <p:spPr/>
+        <p:txBody>
+          <a:bodyPr>
+            <a:normAutofit fontScale="85000" lnSpcReduction="10000"/>
+          </a:bodyPr>
+          <a:lstStyle/>
+          <a:p>
+            <a:pPr marL="0" indent="0">
+              <a:buNone/>
+            </a:pPr>
+            <a:r>
+              <a:rPr lang="ru-RU" dirty="0"/>
+              <a:t>Компьютер только что включился и хочет убедиться, что его статический IP не занят кем-то другим в сети. </a:t>
+            </a:r>
+          </a:p>
+          <a:p>
+            <a:pPr marL="0" indent="0">
+              <a:buNone/>
+            </a:pPr>
+            <a:r>
+              <a:rPr lang="ru-RU" dirty="0"/>
+              <a:t>→ [ ____________ ]</a:t>
+            </a:r>
+          </a:p>
+          <a:p>
+            <a:pPr marL="0" indent="0">
+              <a:buNone/>
+            </a:pPr>
+            <a:r>
+              <a:rPr lang="ru-RU" dirty="0"/>
+              <a:t>Компьютер хочет отправить пакет на IP 192.168.1.50, но не знает его MAC-адрес. </a:t>
+            </a:r>
+          </a:p>
+          <a:p>
+            <a:pPr marL="0" indent="0">
+              <a:buNone/>
+            </a:pPr>
+            <a:r>
+              <a:rPr lang="ru-RU" dirty="0"/>
+              <a:t>→ [ ____________ ]</a:t>
+            </a:r>
+          </a:p>
+          <a:p>
+            <a:pPr marL="0" indent="0">
+              <a:buNone/>
+            </a:pPr>
+            <a:r>
+              <a:rPr lang="ru-RU" dirty="0"/>
+              <a:t>На сервере заменили сетевую карту (изменился MAC-адрес при сохранении прежнего IP), и нужно немедленно обновить кэш соседей. </a:t>
+            </a:r>
+          </a:p>
+          <a:p>
+            <a:pPr marL="0" indent="0">
+              <a:buNone/>
+            </a:pPr>
+            <a:r>
+              <a:rPr lang="ru-RU" dirty="0"/>
+              <a:t>→ [ ____________ ]</a:t>
+            </a:r>
+          </a:p>
+        </p:txBody>
+      </p:sp>
+    </p:spTree>
+    <p:extLst>
+      <p:ext uri="{BB962C8B-B14F-4D97-AF65-F5344CB8AC3E}">
+        <p14:creationId xmlns:p14="http://schemas.microsoft.com/office/powerpoint/2010/main" val="3302600423"/>
+      </p:ext>
+    </p:extLst>
+  </p:cSld>
+  <p:clrMapOvr>
+    <a:masterClrMapping/>
+  </p:clrMapOvr>
+</p:sld>
+</file>
+
+<file path=ppt/slides/slide77.xml><?xml version="1.0" encoding="utf-8"?>
+<p:sld xmlns:a="http://schemas.openxmlformats.org/drawingml/2006/main" xmlns:r="http://schemas.openxmlformats.org/officeDocument/2006/relationships" xmlns:p="http://schemas.openxmlformats.org/presentationml/2006/main">
+  <p:cSld>
+    <p:spTree>
+      <p:nvGrpSpPr>
+        <p:cNvPr id="1" name=""/>
+        <p:cNvGrpSpPr/>
+        <p:nvPr/>
+      </p:nvGrpSpPr>
+      <p:grpSpPr>
+        <a:xfrm>
+          <a:off x="0" y="0"/>
+          <a:ext cx="0" cy="0"/>
+          <a:chOff x="0" y="0"/>
+          <a:chExt cx="0" cy="0"/>
+        </a:xfrm>
+      </p:grpSpPr>
+      <p:sp>
+        <p:nvSpPr>
+          <p:cNvPr id="2" name="Заголовок 1"/>
+          <p:cNvSpPr>
+            <a:spLocks noGrp="1"/>
+          </p:cNvSpPr>
+          <p:nvPr>
+            <p:ph type="title"/>
+          </p:nvPr>
+        </p:nvSpPr>
+        <p:spPr/>
+        <p:txBody>
+          <a:bodyPr>
+            <a:normAutofit fontScale="90000"/>
+          </a:bodyPr>
+          <a:lstStyle/>
+          <a:p>
+            <a:r>
+              <a:rPr lang="ru-RU" b="1" dirty="0"/>
+              <a:t>Маршрутизатор получил пакет общего размера 3000 байт (заголовок IP = 20 байт, полезная нагрузка = 2980 байт).</a:t>
+            </a:r>
+            <a:br>
+              <a:rPr lang="ru-RU" b="1" dirty="0"/>
+            </a:br>
+            <a:r>
+              <a:rPr lang="ru-RU" b="1" dirty="0"/>
+              <a:t>Следующий канал связи имеет MTU = 1500 байт.</a:t>
+            </a:r>
+          </a:p>
+        </p:txBody>
+      </p:sp>
+      <p:sp>
+        <p:nvSpPr>
+          <p:cNvPr id="3" name="Объект 2"/>
+          <p:cNvSpPr>
+            <a:spLocks noGrp="1"/>
+          </p:cNvSpPr>
+          <p:nvPr>
+            <p:ph idx="1"/>
+          </p:nvPr>
+        </p:nvSpPr>
+        <p:spPr>
+          <a:xfrm>
+            <a:off x="1143000" y="2636349"/>
+            <a:ext cx="9905999" cy="3541714"/>
+          </a:xfrm>
+        </p:spPr>
+        <p:txBody>
+          <a:bodyPr>
+            <a:normAutofit lnSpcReduction="10000"/>
+          </a:bodyPr>
+          <a:lstStyle/>
+          <a:p>
+            <a:pPr marL="0" indent="0">
+              <a:buNone/>
+            </a:pPr>
+            <a:r>
+              <a:rPr lang="ru-RU" dirty="0"/>
+              <a:t>Ответьте на вопросы</a:t>
+            </a:r>
+            <a:r>
+              <a:rPr lang="ru-RU" dirty="0" smtClean="0"/>
+              <a:t>:</a:t>
+            </a:r>
+            <a:endParaRPr lang="ru-RU" dirty="0"/>
+          </a:p>
+          <a:p>
+            <a:r>
+              <a:rPr lang="ru-RU" dirty="0"/>
+              <a:t>На сколько фрагментов маршрутизатор разобьёт этот пакет?</a:t>
+            </a:r>
+          </a:p>
+          <a:p>
+            <a:r>
+              <a:rPr lang="ru-RU" dirty="0"/>
+              <a:t>Какое значение флага MF (</a:t>
+            </a:r>
+            <a:r>
+              <a:rPr lang="ru-RU" dirty="0" err="1"/>
+              <a:t>More</a:t>
+            </a:r>
+            <a:r>
+              <a:rPr lang="ru-RU" dirty="0"/>
+              <a:t> </a:t>
+            </a:r>
+            <a:r>
+              <a:rPr lang="ru-RU" dirty="0" err="1"/>
+              <a:t>Fragments</a:t>
+            </a:r>
+            <a:r>
+              <a:rPr lang="ru-RU" dirty="0"/>
+              <a:t>) будет у первого фрагмента (0 или 1)?</a:t>
+            </a:r>
+          </a:p>
+          <a:p>
+            <a:r>
+              <a:rPr lang="ru-RU" dirty="0"/>
+              <a:t>Какое значение флага MF будет у последнего фрагмента (0 или 1)?</a:t>
+            </a:r>
+          </a:p>
+          <a:p>
+            <a:r>
+              <a:rPr lang="ru-RU" dirty="0"/>
+              <a:t>Что произойдёт с пакетом, если в его заголовке изначально был установлен флаг DF = 1 (</a:t>
+            </a:r>
+            <a:r>
+              <a:rPr lang="ru-RU" dirty="0" err="1"/>
+              <a:t>Do</a:t>
+            </a:r>
+            <a:r>
+              <a:rPr lang="ru-RU" dirty="0"/>
+              <a:t> </a:t>
+            </a:r>
+            <a:r>
+              <a:rPr lang="ru-RU" dirty="0" err="1"/>
+              <a:t>not</a:t>
+            </a:r>
+            <a:r>
+              <a:rPr lang="ru-RU" dirty="0"/>
+              <a:t> </a:t>
+            </a:r>
+            <a:r>
+              <a:rPr lang="ru-RU" dirty="0" err="1"/>
+              <a:t>Fragment</a:t>
+            </a:r>
+            <a:r>
+              <a:rPr lang="ru-RU" dirty="0"/>
+              <a:t>)?</a:t>
+            </a:r>
+          </a:p>
+        </p:txBody>
+      </p:sp>
+    </p:spTree>
+    <p:extLst>
+      <p:ext uri="{BB962C8B-B14F-4D97-AF65-F5344CB8AC3E}">
+        <p14:creationId xmlns:p14="http://schemas.microsoft.com/office/powerpoint/2010/main" val="2982011540"/>
+      </p:ext>
+    </p:extLst>
+  </p:cSld>
+  <p:clrMapOvr>
+    <a:masterClrMapping/>
+  </p:clrMapOvr>
+</p:sld>
+</file>
+
+<file path=ppt/slides/slide78.xml><?xml version="1.0" encoding="utf-8"?>
+<p:sld xmlns:a="http://schemas.openxmlformats.org/drawingml/2006/main" xmlns:r="http://schemas.openxmlformats.org/officeDocument/2006/relationships" xmlns:p="http://schemas.openxmlformats.org/presentationml/2006/main">
+  <p:cSld>
+    <p:spTree>
+      <p:nvGrpSpPr>
+        <p:cNvPr id="1" name=""/>
+        <p:cNvGrpSpPr/>
+        <p:nvPr/>
+      </p:nvGrpSpPr>
+      <p:grpSpPr>
+        <a:xfrm>
+          <a:off x="0" y="0"/>
+          <a:ext cx="0" cy="0"/>
+          <a:chOff x="0" y="0"/>
+          <a:chExt cx="0" cy="0"/>
+        </a:xfrm>
+      </p:grpSpPr>
+      <p:sp>
+        <p:nvSpPr>
+          <p:cNvPr id="2" name="Заголовок 1"/>
+          <p:cNvSpPr>
+            <a:spLocks noGrp="1"/>
+          </p:cNvSpPr>
+          <p:nvPr>
+            <p:ph type="title"/>
+          </p:nvPr>
+        </p:nvSpPr>
+        <p:spPr>
+          <a:xfrm>
+            <a:off x="1143000" y="970210"/>
+            <a:ext cx="9905998" cy="1478570"/>
+          </a:xfrm>
+        </p:spPr>
+        <p:txBody>
+          <a:bodyPr>
+            <a:normAutofit fontScale="90000"/>
+          </a:bodyPr>
+          <a:lstStyle/>
+          <a:p>
+            <a:r>
+              <a:rPr lang="ru-RU" dirty="0"/>
+              <a:t>Какой </a:t>
+            </a:r>
+            <a:r>
+              <a:rPr lang="ru-RU" b="1" dirty="0"/>
+              <a:t>одной</a:t>
+            </a:r>
+            <a:r>
+              <a:rPr lang="ru-RU" dirty="0"/>
+              <a:t> агрегированной записью (адрес сети и префикс маски) центральный маршрутизатор может описать все четыре подсети сразу, чтобы минимизировать размер таблицы маршрутизации?</a:t>
+            </a:r>
+            <a:endParaRPr lang="ru-RU" dirty="0"/>
+          </a:p>
+        </p:txBody>
+      </p:sp>
+      <p:sp>
+        <p:nvSpPr>
+          <p:cNvPr id="3" name="Объект 2"/>
+          <p:cNvSpPr>
+            <a:spLocks noGrp="1"/>
+          </p:cNvSpPr>
+          <p:nvPr>
+            <p:ph idx="1"/>
+          </p:nvPr>
+        </p:nvSpPr>
+        <p:spPr>
+          <a:xfrm>
+            <a:off x="1143000" y="3190263"/>
+            <a:ext cx="9905999" cy="2656621"/>
+          </a:xfrm>
+        </p:spPr>
+        <p:txBody>
+          <a:bodyPr/>
+          <a:lstStyle/>
+          <a:p>
+            <a:r>
+              <a:rPr lang="ru-RU" dirty="0"/>
+              <a:t>10.20.0.0/24</a:t>
+            </a:r>
+          </a:p>
+          <a:p>
+            <a:r>
+              <a:rPr lang="ru-RU" dirty="0"/>
+              <a:t>10.20.1.0/24</a:t>
+            </a:r>
+          </a:p>
+          <a:p>
+            <a:r>
+              <a:rPr lang="ru-RU" dirty="0"/>
+              <a:t>10.20.2.0/24</a:t>
+            </a:r>
+          </a:p>
+          <a:p>
+            <a:r>
+              <a:rPr lang="ru-RU" dirty="0"/>
+              <a:t>10.20.3.0/24</a:t>
+            </a:r>
+          </a:p>
+        </p:txBody>
+      </p:sp>
+    </p:spTree>
+    <p:extLst>
+      <p:ext uri="{BB962C8B-B14F-4D97-AF65-F5344CB8AC3E}">
+        <p14:creationId xmlns:p14="http://schemas.microsoft.com/office/powerpoint/2010/main" val="1062254496"/>
+      </p:ext>
+    </p:extLst>
+  </p:cSld>
+  <p:clrMapOvr>
+    <a:masterClrMapping/>
+  </p:clrMapOvr>
+</p:sld>
+</file>
+
+<file path=ppt/slides/slide79.xml><?xml version="1.0" encoding="utf-8"?>
+<p:sld xmlns:a="http://schemas.openxmlformats.org/drawingml/2006/main" xmlns:r="http://schemas.openxmlformats.org/officeDocument/2006/relationships" xmlns:p="http://schemas.openxmlformats.org/presentationml/2006/main">
+  <p:cSld>
+    <p:spTree>
+      <p:nvGrpSpPr>
+        <p:cNvPr id="1" name=""/>
+        <p:cNvGrpSpPr/>
+        <p:nvPr/>
+      </p:nvGrpSpPr>
+      <p:grpSpPr>
+        <a:xfrm>
+          <a:off x="0" y="0"/>
+          <a:ext cx="0" cy="0"/>
+          <a:chOff x="0" y="0"/>
+          <a:chExt cx="0" cy="0"/>
+        </a:xfrm>
+      </p:grpSpPr>
+      <p:sp>
+        <p:nvSpPr>
+          <p:cNvPr id="2" name="Заголовок 1"/>
+          <p:cNvSpPr>
+            <a:spLocks noGrp="1"/>
+          </p:cNvSpPr>
+          <p:nvPr>
+            <p:ph type="title"/>
+          </p:nvPr>
+        </p:nvSpPr>
+        <p:spPr/>
+        <p:txBody>
+          <a:bodyPr>
+            <a:normAutofit fontScale="90000"/>
+          </a:bodyPr>
+          <a:lstStyle/>
+          <a:p>
+            <a:r>
+              <a:rPr lang="ru-RU" dirty="0"/>
+              <a:t>Распределите устройства по двум группам (</a:t>
+            </a:r>
+            <a:r>
+              <a:rPr lang="ru-RU" b="1" dirty="0"/>
+              <a:t>Группа А: Только статический IP</a:t>
+            </a:r>
+            <a:r>
+              <a:rPr lang="ru-RU" dirty="0"/>
+              <a:t> / </a:t>
+            </a:r>
+            <a:r>
+              <a:rPr lang="ru-RU" b="1" dirty="0"/>
+              <a:t>Группа Б: Рекомендуется DHCP</a:t>
+            </a:r>
+            <a:r>
+              <a:rPr lang="ru-RU" dirty="0"/>
+              <a:t>):</a:t>
+            </a:r>
+            <a:endParaRPr lang="ru-RU" dirty="0"/>
+          </a:p>
+        </p:txBody>
+      </p:sp>
+      <p:sp>
+        <p:nvSpPr>
+          <p:cNvPr id="3" name="Объект 2"/>
+          <p:cNvSpPr>
+            <a:spLocks noGrp="1"/>
+          </p:cNvSpPr>
+          <p:nvPr>
+            <p:ph idx="1"/>
+          </p:nvPr>
+        </p:nvSpPr>
+        <p:spPr/>
+        <p:txBody>
+          <a:bodyPr/>
+          <a:lstStyle/>
+          <a:p>
+            <a:r>
+              <a:rPr lang="ru-RU" dirty="0"/>
+              <a:t>Сетевое хранилище компании (NAS с базами данных)</a:t>
+            </a:r>
+          </a:p>
+          <a:p>
+            <a:r>
+              <a:rPr lang="ru-RU" dirty="0"/>
+              <a:t>Смартфон посетителя в гостевом </a:t>
+            </a:r>
+            <a:r>
+              <a:rPr lang="ru-RU" dirty="0" err="1"/>
+              <a:t>Wi-Fi</a:t>
+            </a:r>
+            <a:endParaRPr lang="ru-RU" dirty="0"/>
+          </a:p>
+          <a:p>
+            <a:r>
+              <a:rPr lang="ru-RU" dirty="0"/>
+              <a:t>Основной офисный сетевой принтер/МФУ</a:t>
+            </a:r>
+          </a:p>
+          <a:p>
+            <a:r>
+              <a:rPr lang="ru-RU" dirty="0"/>
+              <a:t>Ноутбук менеджера по продажам</a:t>
+            </a:r>
+          </a:p>
+          <a:p>
+            <a:r>
+              <a:rPr lang="ru-RU" dirty="0"/>
+              <a:t>Камера видеонаблюдения, пишущая поток на </a:t>
+            </a:r>
+            <a:r>
+              <a:rPr lang="ru-RU" dirty="0" smtClean="0"/>
+              <a:t>видеорегистратор</a:t>
+            </a:r>
+            <a:endParaRPr lang="ru-RU" dirty="0"/>
+          </a:p>
+        </p:txBody>
+      </p:sp>
+    </p:spTree>
+    <p:extLst>
+      <p:ext uri="{BB962C8B-B14F-4D97-AF65-F5344CB8AC3E}">
+        <p14:creationId xmlns:p14="http://schemas.microsoft.com/office/powerpoint/2010/main" val="170768346"/>
       </p:ext>
     </p:extLst>
   </p:cSld>

--- a/1.7 IP, Routing Basic/1.7 IP Routing Basic.pptx
+++ b/1.7 IP, Routing Basic/1.7 IP Routing Basic.pptx
@@ -5,7 +5,7 @@
     <p:sldMasterId id="2147483678" r:id="rId1"/>
   </p:sldMasterIdLst>
   <p:notesMasterIdLst>
-    <p:notesMasterId r:id="rId81"/>
+    <p:notesMasterId r:id="rId83"/>
   </p:notesMasterIdLst>
   <p:sldIdLst>
     <p:sldId id="256" r:id="rId2"/>
@@ -36,57 +36,59 @@
     <p:sldId id="281" r:id="rId27"/>
     <p:sldId id="313" r:id="rId28"/>
     <p:sldId id="282" r:id="rId29"/>
-    <p:sldId id="284" r:id="rId30"/>
-    <p:sldId id="283" r:id="rId31"/>
-    <p:sldId id="314" r:id="rId32"/>
-    <p:sldId id="286" r:id="rId33"/>
-    <p:sldId id="287" r:id="rId34"/>
-    <p:sldId id="288" r:id="rId35"/>
-    <p:sldId id="289" r:id="rId36"/>
-    <p:sldId id="290" r:id="rId37"/>
-    <p:sldId id="291" r:id="rId38"/>
-    <p:sldId id="292" r:id="rId39"/>
-    <p:sldId id="293" r:id="rId40"/>
-    <p:sldId id="294" r:id="rId41"/>
-    <p:sldId id="295" r:id="rId42"/>
-    <p:sldId id="296" r:id="rId43"/>
-    <p:sldId id="297" r:id="rId44"/>
-    <p:sldId id="298" r:id="rId45"/>
+    <p:sldId id="283" r:id="rId30"/>
+    <p:sldId id="314" r:id="rId31"/>
+    <p:sldId id="286" r:id="rId32"/>
+    <p:sldId id="287" r:id="rId33"/>
+    <p:sldId id="288" r:id="rId34"/>
+    <p:sldId id="289" r:id="rId35"/>
+    <p:sldId id="290" r:id="rId36"/>
+    <p:sldId id="291" r:id="rId37"/>
+    <p:sldId id="292" r:id="rId38"/>
+    <p:sldId id="293" r:id="rId39"/>
+    <p:sldId id="294" r:id="rId40"/>
+    <p:sldId id="295" r:id="rId41"/>
+    <p:sldId id="296" r:id="rId42"/>
+    <p:sldId id="297" r:id="rId43"/>
+    <p:sldId id="298" r:id="rId44"/>
+    <p:sldId id="303" r:id="rId45"/>
     <p:sldId id="299" r:id="rId46"/>
     <p:sldId id="300" r:id="rId47"/>
     <p:sldId id="301" r:id="rId48"/>
     <p:sldId id="302" r:id="rId49"/>
-    <p:sldId id="303" r:id="rId50"/>
+    <p:sldId id="336" r:id="rId50"/>
     <p:sldId id="315" r:id="rId51"/>
-    <p:sldId id="304" r:id="rId52"/>
-    <p:sldId id="305" r:id="rId53"/>
-    <p:sldId id="306" r:id="rId54"/>
-    <p:sldId id="307" r:id="rId55"/>
-    <p:sldId id="308" r:id="rId56"/>
-    <p:sldId id="309" r:id="rId57"/>
-    <p:sldId id="310" r:id="rId58"/>
-    <p:sldId id="316" r:id="rId59"/>
-    <p:sldId id="311" r:id="rId60"/>
-    <p:sldId id="312" r:id="rId61"/>
-    <p:sldId id="317" r:id="rId62"/>
-    <p:sldId id="318" r:id="rId63"/>
-    <p:sldId id="319" r:id="rId64"/>
-    <p:sldId id="320" r:id="rId65"/>
-    <p:sldId id="321" r:id="rId66"/>
-    <p:sldId id="322" r:id="rId67"/>
-    <p:sldId id="323" r:id="rId68"/>
-    <p:sldId id="324" r:id="rId69"/>
-    <p:sldId id="325" r:id="rId70"/>
-    <p:sldId id="326" r:id="rId71"/>
-    <p:sldId id="327" r:id="rId72"/>
-    <p:sldId id="328" r:id="rId73"/>
-    <p:sldId id="329" r:id="rId74"/>
-    <p:sldId id="330" r:id="rId75"/>
-    <p:sldId id="331" r:id="rId76"/>
-    <p:sldId id="332" r:id="rId77"/>
-    <p:sldId id="333" r:id="rId78"/>
-    <p:sldId id="334" r:id="rId79"/>
-    <p:sldId id="335" r:id="rId80"/>
+    <p:sldId id="284" r:id="rId52"/>
+    <p:sldId id="304" r:id="rId53"/>
+    <p:sldId id="305" r:id="rId54"/>
+    <p:sldId id="306" r:id="rId55"/>
+    <p:sldId id="307" r:id="rId56"/>
+    <p:sldId id="308" r:id="rId57"/>
+    <p:sldId id="309" r:id="rId58"/>
+    <p:sldId id="310" r:id="rId59"/>
+    <p:sldId id="316" r:id="rId60"/>
+    <p:sldId id="311" r:id="rId61"/>
+    <p:sldId id="312" r:id="rId62"/>
+    <p:sldId id="317" r:id="rId63"/>
+    <p:sldId id="318" r:id="rId64"/>
+    <p:sldId id="319" r:id="rId65"/>
+    <p:sldId id="320" r:id="rId66"/>
+    <p:sldId id="321" r:id="rId67"/>
+    <p:sldId id="322" r:id="rId68"/>
+    <p:sldId id="323" r:id="rId69"/>
+    <p:sldId id="324" r:id="rId70"/>
+    <p:sldId id="337" r:id="rId71"/>
+    <p:sldId id="325" r:id="rId72"/>
+    <p:sldId id="326" r:id="rId73"/>
+    <p:sldId id="327" r:id="rId74"/>
+    <p:sldId id="328" r:id="rId75"/>
+    <p:sldId id="329" r:id="rId76"/>
+    <p:sldId id="330" r:id="rId77"/>
+    <p:sldId id="331" r:id="rId78"/>
+    <p:sldId id="332" r:id="rId79"/>
+    <p:sldId id="333" r:id="rId80"/>
+    <p:sldId id="334" r:id="rId81"/>
+    <p:sldId id="335" r:id="rId82"/>
   </p:sldIdLst>
   <p:sldSz cx="12192000" cy="6858000"/>
   <p:notesSz cx="6858000" cy="9144000"/>
@@ -375,7 +377,7 @@
           <a:p>
             <a:fld id="{1BF64A1B-B33A-494C-96A5-F502129919B1}" type="datetimeFigureOut">
               <a:rPr lang="ru-RU" smtClean="0"/>
-              <a:t>31.08.2026</a:t>
+              <a:t>02.09.2026</a:t>
             </a:fld>
             <a:endParaRPr lang="ru-RU"/>
           </a:p>
@@ -918,7 +920,7 @@
           <a:noFill/>
           <a:extLst>
             <a:ext uri="{909E8E84-426E-40dd-AFC4-6F175D3DCCD1}">
-              <a14:hiddenFill xmlns:a14="http://schemas.microsoft.com/office/drawing/2010/main" xmlns="">
+              <a14:hiddenFill xmlns="" xmlns:a14="http://schemas.microsoft.com/office/drawing/2010/main">
                 <a:solidFill>
                   <a:srgbClr val="FFFFFF"/>
                 </a:solidFill>
@@ -977,7 +979,7 @@
             </a:ln>
             <a:extLst>
               <a:ext uri="{91240B29-F687-4f45-9708-019B960494DF}">
-                <a14:hiddenLine xmlns:a14="http://schemas.microsoft.com/office/drawing/2010/main" xmlns="" w="9525">
+                <a14:hiddenLine xmlns="" xmlns:a14="http://schemas.microsoft.com/office/drawing/2010/main" w="9525">
                   <a:solidFill>
                     <a:srgbClr val="000000"/>
                   </a:solidFill>
@@ -1067,7 +1069,7 @@
             </a:ln>
             <a:extLst>
               <a:ext uri="{91240B29-F687-4f45-9708-019B960494DF}">
-                <a14:hiddenLine xmlns:a14="http://schemas.microsoft.com/office/drawing/2010/main" xmlns="" w="9525">
+                <a14:hiddenLine xmlns="" xmlns:a14="http://schemas.microsoft.com/office/drawing/2010/main" w="9525">
                   <a:solidFill>
                     <a:srgbClr val="000000"/>
                   </a:solidFill>
@@ -1157,7 +1159,7 @@
             </a:ln>
             <a:extLst>
               <a:ext uri="{91240B29-F687-4f45-9708-019B960494DF}">
-                <a14:hiddenLine xmlns:a14="http://schemas.microsoft.com/office/drawing/2010/main" xmlns="" w="9525">
+                <a14:hiddenLine xmlns="" xmlns:a14="http://schemas.microsoft.com/office/drawing/2010/main" w="9525">
                   <a:solidFill>
                     <a:srgbClr val="000000"/>
                   </a:solidFill>
@@ -1191,7 +1193,7 @@
             </a:ln>
             <a:extLst>
               <a:ext uri="{91240B29-F687-4f45-9708-019B960494DF}">
-                <a14:hiddenLine xmlns:a14="http://schemas.microsoft.com/office/drawing/2010/main" xmlns="" w="9525">
+                <a14:hiddenLine xmlns="" xmlns:a14="http://schemas.microsoft.com/office/drawing/2010/main" w="9525">
                   <a:solidFill>
                     <a:srgbClr val="000000"/>
                   </a:solidFill>
@@ -1281,7 +1283,7 @@
             </a:ln>
             <a:extLst>
               <a:ext uri="{91240B29-F687-4f45-9708-019B960494DF}">
-                <a14:hiddenLine xmlns:a14="http://schemas.microsoft.com/office/drawing/2010/main" xmlns="" w="9525">
+                <a14:hiddenLine xmlns="" xmlns:a14="http://schemas.microsoft.com/office/drawing/2010/main" w="9525">
                   <a:solidFill>
                     <a:srgbClr val="000000"/>
                   </a:solidFill>
@@ -1343,7 +1345,7 @@
             </a:ln>
             <a:extLst>
               <a:ext uri="{91240B29-F687-4f45-9708-019B960494DF}">
-                <a14:hiddenLine xmlns:a14="http://schemas.microsoft.com/office/drawing/2010/main" xmlns="" w="9525">
+                <a14:hiddenLine xmlns="" xmlns:a14="http://schemas.microsoft.com/office/drawing/2010/main" w="9525">
                   <a:solidFill>
                     <a:srgbClr val="000000"/>
                   </a:solidFill>
@@ -1405,7 +1407,7 @@
             </a:ln>
             <a:extLst>
               <a:ext uri="{91240B29-F687-4f45-9708-019B960494DF}">
-                <a14:hiddenLine xmlns:a14="http://schemas.microsoft.com/office/drawing/2010/main" xmlns="" w="9525">
+                <a14:hiddenLine xmlns="" xmlns:a14="http://schemas.microsoft.com/office/drawing/2010/main" w="9525">
                   <a:solidFill>
                     <a:srgbClr val="000000"/>
                   </a:solidFill>
@@ -1495,7 +1497,7 @@
             </a:ln>
             <a:extLst>
               <a:ext uri="{91240B29-F687-4f45-9708-019B960494DF}">
-                <a14:hiddenLine xmlns:a14="http://schemas.microsoft.com/office/drawing/2010/main" xmlns="" w="9525">
+                <a14:hiddenLine xmlns="" xmlns:a14="http://schemas.microsoft.com/office/drawing/2010/main" w="9525">
                   <a:solidFill>
                     <a:srgbClr val="000000"/>
                   </a:solidFill>
@@ -1557,7 +1559,7 @@
             </a:ln>
             <a:extLst>
               <a:ext uri="{91240B29-F687-4f45-9708-019B960494DF}">
-                <a14:hiddenLine xmlns:a14="http://schemas.microsoft.com/office/drawing/2010/main" xmlns="" w="9525">
+                <a14:hiddenLine xmlns="" xmlns:a14="http://schemas.microsoft.com/office/drawing/2010/main" w="9525">
                   <a:solidFill>
                     <a:srgbClr val="000000"/>
                   </a:solidFill>
@@ -1619,7 +1621,7 @@
             </a:ln>
             <a:extLst>
               <a:ext uri="{91240B29-F687-4f45-9708-019B960494DF}">
-                <a14:hiddenLine xmlns:a14="http://schemas.microsoft.com/office/drawing/2010/main" xmlns="" w="9525">
+                <a14:hiddenLine xmlns="" xmlns:a14="http://schemas.microsoft.com/office/drawing/2010/main" w="9525">
                   <a:solidFill>
                     <a:srgbClr val="000000"/>
                   </a:solidFill>
@@ -1709,7 +1711,7 @@
             </a:ln>
             <a:extLst>
               <a:ext uri="{91240B29-F687-4f45-9708-019B960494DF}">
-                <a14:hiddenLine xmlns:a14="http://schemas.microsoft.com/office/drawing/2010/main" xmlns="" w="9525">
+                <a14:hiddenLine xmlns="" xmlns:a14="http://schemas.microsoft.com/office/drawing/2010/main" w="9525">
                   <a:solidFill>
                     <a:srgbClr val="000000"/>
                   </a:solidFill>
@@ -1799,7 +1801,7 @@
             </a:ln>
             <a:extLst>
               <a:ext uri="{91240B29-F687-4f45-9708-019B960494DF}">
-                <a14:hiddenLine xmlns:a14="http://schemas.microsoft.com/office/drawing/2010/main" xmlns="" w="9525">
+                <a14:hiddenLine xmlns="" xmlns:a14="http://schemas.microsoft.com/office/drawing/2010/main" w="9525">
                   <a:solidFill>
                     <a:srgbClr val="000000"/>
                   </a:solidFill>
@@ -1861,7 +1863,7 @@
             </a:ln>
             <a:extLst>
               <a:ext uri="{91240B29-F687-4f45-9708-019B960494DF}">
-                <a14:hiddenLine xmlns:a14="http://schemas.microsoft.com/office/drawing/2010/main" xmlns="" w="9525">
+                <a14:hiddenLine xmlns="" xmlns:a14="http://schemas.microsoft.com/office/drawing/2010/main" w="9525">
                   <a:solidFill>
                     <a:srgbClr val="000000"/>
                   </a:solidFill>
@@ -1971,7 +1973,7 @@
             </a:ln>
             <a:extLst>
               <a:ext uri="{91240B29-F687-4f45-9708-019B960494DF}">
-                <a14:hiddenLine xmlns:a14="http://schemas.microsoft.com/office/drawing/2010/main" xmlns="" w="9525">
+                <a14:hiddenLine xmlns="" xmlns:a14="http://schemas.microsoft.com/office/drawing/2010/main" w="9525">
                   <a:solidFill>
                     <a:srgbClr val="000000"/>
                   </a:solidFill>
@@ -2033,7 +2035,7 @@
             </a:ln>
             <a:extLst>
               <a:ext uri="{91240B29-F687-4f45-9708-019B960494DF}">
-                <a14:hiddenLine xmlns:a14="http://schemas.microsoft.com/office/drawing/2010/main" xmlns="" w="9525">
+                <a14:hiddenLine xmlns="" xmlns:a14="http://schemas.microsoft.com/office/drawing/2010/main" w="9525">
                   <a:solidFill>
                     <a:srgbClr val="000000"/>
                   </a:solidFill>
@@ -2123,7 +2125,7 @@
             </a:ln>
             <a:extLst>
               <a:ext uri="{91240B29-F687-4f45-9708-019B960494DF}">
-                <a14:hiddenLine xmlns:a14="http://schemas.microsoft.com/office/drawing/2010/main" xmlns="" w="9525">
+                <a14:hiddenLine xmlns="" xmlns:a14="http://schemas.microsoft.com/office/drawing/2010/main" w="9525">
                   <a:solidFill>
                     <a:srgbClr val="000000"/>
                   </a:solidFill>
@@ -2213,7 +2215,7 @@
             </a:ln>
             <a:extLst>
               <a:ext uri="{91240B29-F687-4f45-9708-019B960494DF}">
-                <a14:hiddenLine xmlns:a14="http://schemas.microsoft.com/office/drawing/2010/main" xmlns="" w="9525">
+                <a14:hiddenLine xmlns="" xmlns:a14="http://schemas.microsoft.com/office/drawing/2010/main" w="9525">
                   <a:solidFill>
                     <a:srgbClr val="000000"/>
                   </a:solidFill>
@@ -2275,7 +2277,7 @@
             </a:ln>
             <a:extLst>
               <a:ext uri="{91240B29-F687-4f45-9708-019B960494DF}">
-                <a14:hiddenLine xmlns:a14="http://schemas.microsoft.com/office/drawing/2010/main" xmlns="" w="9525">
+                <a14:hiddenLine xmlns="" xmlns:a14="http://schemas.microsoft.com/office/drawing/2010/main" w="9525">
                   <a:solidFill>
                     <a:srgbClr val="000000"/>
                   </a:solidFill>
@@ -2365,7 +2367,7 @@
             </a:ln>
             <a:extLst>
               <a:ext uri="{91240B29-F687-4f45-9708-019B960494DF}">
-                <a14:hiddenLine xmlns:a14="http://schemas.microsoft.com/office/drawing/2010/main" xmlns="" w="9525">
+                <a14:hiddenLine xmlns="" xmlns:a14="http://schemas.microsoft.com/office/drawing/2010/main" w="9525">
                   <a:solidFill>
                     <a:srgbClr val="000000"/>
                   </a:solidFill>
@@ -2455,7 +2457,7 @@
             </a:ln>
             <a:extLst>
               <a:ext uri="{91240B29-F687-4f45-9708-019B960494DF}">
-                <a14:hiddenLine xmlns:a14="http://schemas.microsoft.com/office/drawing/2010/main" xmlns="" w="9525">
+                <a14:hiddenLine xmlns="" xmlns:a14="http://schemas.microsoft.com/office/drawing/2010/main" w="9525">
                   <a:solidFill>
                     <a:srgbClr val="000000"/>
                   </a:solidFill>
@@ -2511,7 +2513,7 @@
             </a:ln>
             <a:extLst>
               <a:ext uri="{91240B29-F687-4f45-9708-019B960494DF}">
-                <a14:hiddenLine xmlns:a14="http://schemas.microsoft.com/office/drawing/2010/main" xmlns="" w="9525">
+                <a14:hiddenLine xmlns="" xmlns:a14="http://schemas.microsoft.com/office/drawing/2010/main" w="9525">
                   <a:solidFill>
                     <a:srgbClr val="000000"/>
                   </a:solidFill>
@@ -2601,7 +2603,7 @@
             </a:ln>
             <a:extLst>
               <a:ext uri="{91240B29-F687-4f45-9708-019B960494DF}">
-                <a14:hiddenLine xmlns:a14="http://schemas.microsoft.com/office/drawing/2010/main" xmlns="" w="9525">
+                <a14:hiddenLine xmlns="" xmlns:a14="http://schemas.microsoft.com/office/drawing/2010/main" w="9525">
                   <a:solidFill>
                     <a:srgbClr val="000000"/>
                   </a:solidFill>
@@ -2657,7 +2659,7 @@
             </a:ln>
             <a:extLst>
               <a:ext uri="{91240B29-F687-4f45-9708-019B960494DF}">
-                <a14:hiddenLine xmlns:a14="http://schemas.microsoft.com/office/drawing/2010/main" xmlns="" w="9525">
+                <a14:hiddenLine xmlns="" xmlns:a14="http://schemas.microsoft.com/office/drawing/2010/main" w="9525">
                   <a:solidFill>
                     <a:srgbClr val="000000"/>
                   </a:solidFill>
@@ -2747,7 +2749,7 @@
             </a:ln>
             <a:extLst>
               <a:ext uri="{91240B29-F687-4f45-9708-019B960494DF}">
-                <a14:hiddenLine xmlns:a14="http://schemas.microsoft.com/office/drawing/2010/main" xmlns="" w="9525">
+                <a14:hiddenLine xmlns="" xmlns:a14="http://schemas.microsoft.com/office/drawing/2010/main" w="9525">
                   <a:solidFill>
                     <a:srgbClr val="000000"/>
                   </a:solidFill>
@@ -2815,7 +2817,7 @@
             </a:ln>
             <a:extLst>
               <a:ext uri="{91240B29-F687-4f45-9708-019B960494DF}">
-                <a14:hiddenLine xmlns:a14="http://schemas.microsoft.com/office/drawing/2010/main" xmlns="" w="9525">
+                <a14:hiddenLine xmlns="" xmlns:a14="http://schemas.microsoft.com/office/drawing/2010/main" w="9525">
                   <a:solidFill>
                     <a:srgbClr val="000000"/>
                   </a:solidFill>
@@ -2905,7 +2907,7 @@
             </a:ln>
             <a:extLst>
               <a:ext uri="{91240B29-F687-4f45-9708-019B960494DF}">
-                <a14:hiddenLine xmlns:a14="http://schemas.microsoft.com/office/drawing/2010/main" xmlns="" w="9525">
+                <a14:hiddenLine xmlns="" xmlns:a14="http://schemas.microsoft.com/office/drawing/2010/main" w="9525">
                   <a:solidFill>
                     <a:srgbClr val="000000"/>
                   </a:solidFill>
@@ -2973,7 +2975,7 @@
             </a:ln>
             <a:extLst>
               <a:ext uri="{91240B29-F687-4f45-9708-019B960494DF}">
-                <a14:hiddenLine xmlns:a14="http://schemas.microsoft.com/office/drawing/2010/main" xmlns="" w="9525">
+                <a14:hiddenLine xmlns="" xmlns:a14="http://schemas.microsoft.com/office/drawing/2010/main" w="9525">
                   <a:solidFill>
                     <a:srgbClr val="000000"/>
                   </a:solidFill>
@@ -3063,7 +3065,7 @@
             </a:ln>
             <a:extLst>
               <a:ext uri="{91240B29-F687-4f45-9708-019B960494DF}">
-                <a14:hiddenLine xmlns:a14="http://schemas.microsoft.com/office/drawing/2010/main" xmlns="" w="9525">
+                <a14:hiddenLine xmlns="" xmlns:a14="http://schemas.microsoft.com/office/drawing/2010/main" w="9525">
                   <a:solidFill>
                     <a:srgbClr val="000000"/>
                   </a:solidFill>
@@ -3097,7 +3099,7 @@
             </a:ln>
             <a:extLst>
               <a:ext uri="{91240B29-F687-4f45-9708-019B960494DF}">
-                <a14:hiddenLine xmlns:a14="http://schemas.microsoft.com/office/drawing/2010/main" xmlns="" w="9525">
+                <a14:hiddenLine xmlns="" xmlns:a14="http://schemas.microsoft.com/office/drawing/2010/main" w="9525">
                   <a:solidFill>
                     <a:srgbClr val="000000"/>
                   </a:solidFill>
@@ -3187,7 +3189,7 @@
             </a:ln>
             <a:extLst>
               <a:ext uri="{91240B29-F687-4f45-9708-019B960494DF}">
-                <a14:hiddenLine xmlns:a14="http://schemas.microsoft.com/office/drawing/2010/main" xmlns="" w="9525">
+                <a14:hiddenLine xmlns="" xmlns:a14="http://schemas.microsoft.com/office/drawing/2010/main" w="9525">
                   <a:solidFill>
                     <a:srgbClr val="000000"/>
                   </a:solidFill>
@@ -3249,7 +3251,7 @@
             </a:ln>
             <a:extLst>
               <a:ext uri="{91240B29-F687-4f45-9708-019B960494DF}">
-                <a14:hiddenLine xmlns:a14="http://schemas.microsoft.com/office/drawing/2010/main" xmlns="" w="9525">
+                <a14:hiddenLine xmlns="" xmlns:a14="http://schemas.microsoft.com/office/drawing/2010/main" w="9525">
                   <a:solidFill>
                     <a:srgbClr val="000000"/>
                   </a:solidFill>
@@ -3311,7 +3313,7 @@
             </a:ln>
             <a:extLst>
               <a:ext uri="{91240B29-F687-4f45-9708-019B960494DF}">
-                <a14:hiddenLine xmlns:a14="http://schemas.microsoft.com/office/drawing/2010/main" xmlns="" w="9525">
+                <a14:hiddenLine xmlns="" xmlns:a14="http://schemas.microsoft.com/office/drawing/2010/main" w="9525">
                   <a:solidFill>
                     <a:srgbClr val="000000"/>
                   </a:solidFill>
@@ -3401,7 +3403,7 @@
             </a:ln>
             <a:extLst>
               <a:ext uri="{91240B29-F687-4f45-9708-019B960494DF}">
-                <a14:hiddenLine xmlns:a14="http://schemas.microsoft.com/office/drawing/2010/main" xmlns="" w="9525">
+                <a14:hiddenLine xmlns="" xmlns:a14="http://schemas.microsoft.com/office/drawing/2010/main" w="9525">
                   <a:solidFill>
                     <a:srgbClr val="000000"/>
                   </a:solidFill>
@@ -3469,7 +3471,7 @@
             </a:ln>
             <a:extLst>
               <a:ext uri="{91240B29-F687-4f45-9708-019B960494DF}">
-                <a14:hiddenLine xmlns:a14="http://schemas.microsoft.com/office/drawing/2010/main" xmlns="" w="9525">
+                <a14:hiddenLine xmlns="" xmlns:a14="http://schemas.microsoft.com/office/drawing/2010/main" w="9525">
                   <a:solidFill>
                     <a:srgbClr val="000000"/>
                   </a:solidFill>
@@ -3531,7 +3533,7 @@
             </a:ln>
             <a:extLst>
               <a:ext uri="{91240B29-F687-4f45-9708-019B960494DF}">
-                <a14:hiddenLine xmlns:a14="http://schemas.microsoft.com/office/drawing/2010/main" xmlns="" w="9525">
+                <a14:hiddenLine xmlns="" xmlns:a14="http://schemas.microsoft.com/office/drawing/2010/main" w="9525">
                   <a:solidFill>
                     <a:srgbClr val="000000"/>
                   </a:solidFill>
@@ -3621,7 +3623,7 @@
             </a:ln>
             <a:extLst>
               <a:ext uri="{91240B29-F687-4f45-9708-019B960494DF}">
-                <a14:hiddenLine xmlns:a14="http://schemas.microsoft.com/office/drawing/2010/main" xmlns="" w="9525">
+                <a14:hiddenLine xmlns="" xmlns:a14="http://schemas.microsoft.com/office/drawing/2010/main" w="9525">
                   <a:solidFill>
                     <a:srgbClr val="000000"/>
                   </a:solidFill>
@@ -3683,7 +3685,7 @@
             </a:ln>
             <a:extLst>
               <a:ext uri="{91240B29-F687-4f45-9708-019B960494DF}">
-                <a14:hiddenLine xmlns:a14="http://schemas.microsoft.com/office/drawing/2010/main" xmlns="" w="9525">
+                <a14:hiddenLine xmlns="" xmlns:a14="http://schemas.microsoft.com/office/drawing/2010/main" w="9525">
                   <a:solidFill>
                     <a:srgbClr val="000000"/>
                   </a:solidFill>
@@ -3773,7 +3775,7 @@
             </a:ln>
             <a:extLst>
               <a:ext uri="{91240B29-F687-4f45-9708-019B960494DF}">
-                <a14:hiddenLine xmlns:a14="http://schemas.microsoft.com/office/drawing/2010/main" xmlns="" w="9525">
+                <a14:hiddenLine xmlns="" xmlns:a14="http://schemas.microsoft.com/office/drawing/2010/main" w="9525">
                   <a:solidFill>
                     <a:srgbClr val="000000"/>
                   </a:solidFill>
@@ -3835,7 +3837,7 @@
             </a:ln>
             <a:extLst>
               <a:ext uri="{91240B29-F687-4f45-9708-019B960494DF}">
-                <a14:hiddenLine xmlns:a14="http://schemas.microsoft.com/office/drawing/2010/main" xmlns="" w="9525">
+                <a14:hiddenLine xmlns="" xmlns:a14="http://schemas.microsoft.com/office/drawing/2010/main" w="9525">
                   <a:solidFill>
                     <a:srgbClr val="000000"/>
                   </a:solidFill>
@@ -3925,7 +3927,7 @@
             </a:ln>
             <a:extLst>
               <a:ext uri="{91240B29-F687-4f45-9708-019B960494DF}">
-                <a14:hiddenLine xmlns:a14="http://schemas.microsoft.com/office/drawing/2010/main" xmlns="" w="9525">
+                <a14:hiddenLine xmlns="" xmlns:a14="http://schemas.microsoft.com/office/drawing/2010/main" w="9525">
                   <a:solidFill>
                     <a:srgbClr val="000000"/>
                   </a:solidFill>
@@ -3959,7 +3961,7 @@
             </a:ln>
             <a:extLst>
               <a:ext uri="{91240B29-F687-4f45-9708-019B960494DF}">
-                <a14:hiddenLine xmlns:a14="http://schemas.microsoft.com/office/drawing/2010/main" xmlns="" w="9525">
+                <a14:hiddenLine xmlns="" xmlns:a14="http://schemas.microsoft.com/office/drawing/2010/main" w="9525">
                   <a:solidFill>
                     <a:srgbClr val="000000"/>
                   </a:solidFill>
@@ -4024,7 +4026,7 @@
             </a:ln>
             <a:extLst>
               <a:ext uri="{91240B29-F687-4f45-9708-019B960494DF}">
-                <a14:hiddenLine xmlns:a14="http://schemas.microsoft.com/office/drawing/2010/main" xmlns="" w="9525">
+                <a14:hiddenLine xmlns="" xmlns:a14="http://schemas.microsoft.com/office/drawing/2010/main" w="9525">
                   <a:solidFill>
                     <a:srgbClr val="000000"/>
                   </a:solidFill>
@@ -4114,7 +4116,7 @@
             </a:ln>
             <a:extLst>
               <a:ext uri="{91240B29-F687-4f45-9708-019B960494DF}">
-                <a14:hiddenLine xmlns:a14="http://schemas.microsoft.com/office/drawing/2010/main" xmlns="" w="9525">
+                <a14:hiddenLine xmlns="" xmlns:a14="http://schemas.microsoft.com/office/drawing/2010/main" w="9525">
                   <a:solidFill>
                     <a:srgbClr val="000000"/>
                   </a:solidFill>
@@ -4176,7 +4178,7 @@
             </a:ln>
             <a:extLst>
               <a:ext uri="{91240B29-F687-4f45-9708-019B960494DF}">
-                <a14:hiddenLine xmlns:a14="http://schemas.microsoft.com/office/drawing/2010/main" xmlns="" w="9525">
+                <a14:hiddenLine xmlns="" xmlns:a14="http://schemas.microsoft.com/office/drawing/2010/main" w="9525">
                   <a:solidFill>
                     <a:srgbClr val="000000"/>
                   </a:solidFill>
@@ -4266,7 +4268,7 @@
             </a:ln>
             <a:extLst>
               <a:ext uri="{91240B29-F687-4f45-9708-019B960494DF}">
-                <a14:hiddenLine xmlns:a14="http://schemas.microsoft.com/office/drawing/2010/main" xmlns="" w="9525">
+                <a14:hiddenLine xmlns="" xmlns:a14="http://schemas.microsoft.com/office/drawing/2010/main" w="9525">
                   <a:solidFill>
                     <a:srgbClr val="000000"/>
                   </a:solidFill>
@@ -4356,7 +4358,7 @@
             </a:ln>
             <a:extLst>
               <a:ext uri="{91240B29-F687-4f45-9708-019B960494DF}">
-                <a14:hiddenLine xmlns:a14="http://schemas.microsoft.com/office/drawing/2010/main" xmlns="" w="9525">
+                <a14:hiddenLine xmlns="" xmlns:a14="http://schemas.microsoft.com/office/drawing/2010/main" w="9525">
                   <a:solidFill>
                     <a:srgbClr val="000000"/>
                   </a:solidFill>
@@ -4421,7 +4423,7 @@
             </a:ln>
             <a:extLst>
               <a:ext uri="{91240B29-F687-4f45-9708-019B960494DF}">
-                <a14:hiddenLine xmlns:a14="http://schemas.microsoft.com/office/drawing/2010/main" xmlns="" w="9525">
+                <a14:hiddenLine xmlns="" xmlns:a14="http://schemas.microsoft.com/office/drawing/2010/main" w="9525">
                   <a:solidFill>
                     <a:srgbClr val="000000"/>
                   </a:solidFill>
@@ -4483,7 +4485,7 @@
             </a:ln>
             <a:extLst>
               <a:ext uri="{91240B29-F687-4f45-9708-019B960494DF}">
-                <a14:hiddenLine xmlns:a14="http://schemas.microsoft.com/office/drawing/2010/main" xmlns="" w="9525">
+                <a14:hiddenLine xmlns="" xmlns:a14="http://schemas.microsoft.com/office/drawing/2010/main" w="9525">
                   <a:solidFill>
                     <a:srgbClr val="000000"/>
                   </a:solidFill>
@@ -4573,7 +4575,7 @@
             </a:ln>
             <a:extLst>
               <a:ext uri="{91240B29-F687-4f45-9708-019B960494DF}">
-                <a14:hiddenLine xmlns:a14="http://schemas.microsoft.com/office/drawing/2010/main" xmlns="" w="9525">
+                <a14:hiddenLine xmlns="" xmlns:a14="http://schemas.microsoft.com/office/drawing/2010/main" w="9525">
                   <a:solidFill>
                     <a:srgbClr val="000000"/>
                   </a:solidFill>
@@ -4663,7 +4665,7 @@
             </a:ln>
             <a:extLst>
               <a:ext uri="{91240B29-F687-4f45-9708-019B960494DF}">
-                <a14:hiddenLine xmlns:a14="http://schemas.microsoft.com/office/drawing/2010/main" xmlns="" w="9525">
+                <a14:hiddenLine xmlns="" xmlns:a14="http://schemas.microsoft.com/office/drawing/2010/main" w="9525">
                   <a:solidFill>
                     <a:srgbClr val="000000"/>
                   </a:solidFill>
@@ -4725,7 +4727,7 @@
             </a:ln>
             <a:extLst>
               <a:ext uri="{91240B29-F687-4f45-9708-019B960494DF}">
-                <a14:hiddenLine xmlns:a14="http://schemas.microsoft.com/office/drawing/2010/main" xmlns="" w="9525">
+                <a14:hiddenLine xmlns="" xmlns:a14="http://schemas.microsoft.com/office/drawing/2010/main" w="9525">
                   <a:solidFill>
                     <a:srgbClr val="000000"/>
                   </a:solidFill>
@@ -4845,7 +4847,7 @@
             </a:ln>
             <a:extLst>
               <a:ext uri="{91240B29-F687-4f45-9708-019B960494DF}">
-                <a14:hiddenLine xmlns:a14="http://schemas.microsoft.com/office/drawing/2010/main" xmlns="" w="9525">
+                <a14:hiddenLine xmlns="" xmlns:a14="http://schemas.microsoft.com/office/drawing/2010/main" w="9525">
                   <a:solidFill>
                     <a:srgbClr val="000000"/>
                   </a:solidFill>
@@ -4913,7 +4915,7 @@
             </a:ln>
             <a:extLst>
               <a:ext uri="{91240B29-F687-4f45-9708-019B960494DF}">
-                <a14:hiddenLine xmlns:a14="http://schemas.microsoft.com/office/drawing/2010/main" xmlns="" w="9525">
+                <a14:hiddenLine xmlns="" xmlns:a14="http://schemas.microsoft.com/office/drawing/2010/main" w="9525">
                   <a:solidFill>
                     <a:srgbClr val="000000"/>
                   </a:solidFill>
@@ -5003,7 +5005,7 @@
             </a:ln>
             <a:extLst>
               <a:ext uri="{91240B29-F687-4f45-9708-019B960494DF}">
-                <a14:hiddenLine xmlns:a14="http://schemas.microsoft.com/office/drawing/2010/main" xmlns="" w="9525">
+                <a14:hiddenLine xmlns="" xmlns:a14="http://schemas.microsoft.com/office/drawing/2010/main" w="9525">
                   <a:solidFill>
                     <a:srgbClr val="000000"/>
                   </a:solidFill>
@@ -5143,7 +5145,7 @@
           <a:p>
             <a:fld id="{4EA4CA9E-41A0-4A25-A87E-B4F1E3C13C9C}" type="datetimeFigureOut">
               <a:rPr lang="ru-RU" smtClean="0"/>
-              <a:t>31.08.2026</a:t>
+              <a:t>02.09.2026</a:t>
             </a:fld>
             <a:endParaRPr lang="ru-RU"/>
           </a:p>
@@ -5410,7 +5412,7 @@
           <a:p>
             <a:fld id="{4EA4CA9E-41A0-4A25-A87E-B4F1E3C13C9C}" type="datetimeFigureOut">
               <a:rPr lang="ru-RU" smtClean="0"/>
-              <a:t>31.08.2026</a:t>
+              <a:t>02.09.2026</a:t>
             </a:fld>
             <a:endParaRPr lang="ru-RU"/>
           </a:p>
@@ -5606,7 +5608,7 @@
           <a:p>
             <a:fld id="{4EA4CA9E-41A0-4A25-A87E-B4F1E3C13C9C}" type="datetimeFigureOut">
               <a:rPr lang="ru-RU" smtClean="0"/>
-              <a:t>31.08.2026</a:t>
+              <a:t>02.09.2026</a:t>
             </a:fld>
             <a:endParaRPr lang="ru-RU"/>
           </a:p>
@@ -5869,7 +5871,7 @@
           <a:p>
             <a:fld id="{4EA4CA9E-41A0-4A25-A87E-B4F1E3C13C9C}" type="datetimeFigureOut">
               <a:rPr lang="ru-RU" smtClean="0"/>
-              <a:t>31.08.2026</a:t>
+              <a:t>02.09.2026</a:t>
             </a:fld>
             <a:endParaRPr lang="ru-RU"/>
           </a:p>
@@ -6303,7 +6305,7 @@
           <a:p>
             <a:fld id="{4EA4CA9E-41A0-4A25-A87E-B4F1E3C13C9C}" type="datetimeFigureOut">
               <a:rPr lang="ru-RU" smtClean="0"/>
-              <a:t>31.08.2026</a:t>
+              <a:t>02.09.2026</a:t>
             </a:fld>
             <a:endParaRPr lang="ru-RU"/>
           </a:p>
@@ -6849,7 +6851,7 @@
           <a:p>
             <a:fld id="{4EA4CA9E-41A0-4A25-A87E-B4F1E3C13C9C}" type="datetimeFigureOut">
               <a:rPr lang="ru-RU" smtClean="0"/>
-              <a:t>31.08.2026</a:t>
+              <a:t>02.09.2026</a:t>
             </a:fld>
             <a:endParaRPr lang="ru-RU"/>
           </a:p>
@@ -7569,7 +7571,7 @@
           <a:p>
             <a:fld id="{4EA4CA9E-41A0-4A25-A87E-B4F1E3C13C9C}" type="datetimeFigureOut">
               <a:rPr lang="ru-RU" smtClean="0"/>
-              <a:t>31.08.2026</a:t>
+              <a:t>02.09.2026</a:t>
             </a:fld>
             <a:endParaRPr lang="ru-RU"/>
           </a:p>
@@ -7739,7 +7741,7 @@
           <a:p>
             <a:fld id="{4EA4CA9E-41A0-4A25-A87E-B4F1E3C13C9C}" type="datetimeFigureOut">
               <a:rPr lang="ru-RU" smtClean="0"/>
-              <a:t>31.08.2026</a:t>
+              <a:t>02.09.2026</a:t>
             </a:fld>
             <a:endParaRPr lang="ru-RU"/>
           </a:p>
@@ -7919,7 +7921,7 @@
           <a:p>
             <a:fld id="{4EA4CA9E-41A0-4A25-A87E-B4F1E3C13C9C}" type="datetimeFigureOut">
               <a:rPr lang="ru-RU" smtClean="0"/>
-              <a:t>31.08.2026</a:t>
+              <a:t>02.09.2026</a:t>
             </a:fld>
             <a:endParaRPr lang="ru-RU"/>
           </a:p>
@@ -8448,7 +8450,7 @@
           <a:p>
             <a:fld id="{4EA4CA9E-41A0-4A25-A87E-B4F1E3C13C9C}" type="datetimeFigureOut">
               <a:rPr lang="ru-RU" smtClean="0"/>
-              <a:t>31.08.2026</a:t>
+              <a:t>02.09.2026</a:t>
             </a:fld>
             <a:endParaRPr lang="ru-RU"/>
           </a:p>
@@ -8698,7 +8700,7 @@
           <a:p>
             <a:fld id="{4EA4CA9E-41A0-4A25-A87E-B4F1E3C13C9C}" type="datetimeFigureOut">
               <a:rPr lang="ru-RU" smtClean="0"/>
-              <a:t>31.08.2026</a:t>
+              <a:t>02.09.2026</a:t>
             </a:fld>
             <a:endParaRPr lang="ru-RU"/>
           </a:p>
@@ -8930,7 +8932,7 @@
           <a:p>
             <a:fld id="{4EA4CA9E-41A0-4A25-A87E-B4F1E3C13C9C}" type="datetimeFigureOut">
               <a:rPr lang="ru-RU" smtClean="0"/>
-              <a:t>31.08.2026</a:t>
+              <a:t>02.09.2026</a:t>
             </a:fld>
             <a:endParaRPr lang="ru-RU"/>
           </a:p>
@@ -9311,7 +9313,7 @@
           <a:p>
             <a:fld id="{4EA4CA9E-41A0-4A25-A87E-B4F1E3C13C9C}" type="datetimeFigureOut">
               <a:rPr lang="ru-RU" smtClean="0"/>
-              <a:t>31.08.2026</a:t>
+              <a:t>02.09.2026</a:t>
             </a:fld>
             <a:endParaRPr lang="ru-RU"/>
           </a:p>
@@ -9429,7 +9431,7 @@
           <a:p>
             <a:fld id="{4EA4CA9E-41A0-4A25-A87E-B4F1E3C13C9C}" type="datetimeFigureOut">
               <a:rPr lang="ru-RU" smtClean="0"/>
-              <a:t>31.08.2026</a:t>
+              <a:t>02.09.2026</a:t>
             </a:fld>
             <a:endParaRPr lang="ru-RU"/>
           </a:p>
@@ -9524,7 +9526,7 @@
           <a:p>
             <a:fld id="{4EA4CA9E-41A0-4A25-A87E-B4F1E3C13C9C}" type="datetimeFigureOut">
               <a:rPr lang="ru-RU" smtClean="0"/>
-              <a:t>31.08.2026</a:t>
+              <a:t>02.09.2026</a:t>
             </a:fld>
             <a:endParaRPr lang="ru-RU"/>
           </a:p>
@@ -9773,7 +9775,7 @@
           <a:p>
             <a:fld id="{4EA4CA9E-41A0-4A25-A87E-B4F1E3C13C9C}" type="datetimeFigureOut">
               <a:rPr lang="ru-RU" smtClean="0"/>
-              <a:t>31.08.2026</a:t>
+              <a:t>02.09.2026</a:t>
             </a:fld>
             <a:endParaRPr lang="ru-RU"/>
           </a:p>
@@ -10053,7 +10055,7 @@
           <a:p>
             <a:fld id="{4EA4CA9E-41A0-4A25-A87E-B4F1E3C13C9C}" type="datetimeFigureOut">
               <a:rPr lang="ru-RU" smtClean="0"/>
-              <a:t>31.08.2026</a:t>
+              <a:t>02.09.2026</a:t>
             </a:fld>
             <a:endParaRPr lang="ru-RU"/>
           </a:p>
@@ -10176,7 +10178,7 @@
           <a:noFill/>
           <a:extLst>
             <a:ext uri="{909E8E84-426E-40dd-AFC4-6F175D3DCCD1}">
-              <a14:hiddenFill xmlns:a14="http://schemas.microsoft.com/office/drawing/2010/main" xmlns="">
+              <a14:hiddenFill xmlns="" xmlns:a14="http://schemas.microsoft.com/office/drawing/2010/main">
                 <a:solidFill>
                   <a:srgbClr val="FFFFFF"/>
                 </a:solidFill>
@@ -10250,7 +10252,7 @@
               </a:ln>
               <a:extLst>
                 <a:ext uri="{91240B29-F687-4f45-9708-019B960494DF}">
-                  <a14:hiddenLine xmlns:a14="http://schemas.microsoft.com/office/drawing/2010/main" xmlns="" w="9525">
+                  <a14:hiddenLine xmlns="" xmlns:a14="http://schemas.microsoft.com/office/drawing/2010/main" w="9525">
                     <a:solidFill>
                       <a:srgbClr val="000000"/>
                     </a:solidFill>
@@ -10340,7 +10342,7 @@
               </a:ln>
               <a:extLst>
                 <a:ext uri="{91240B29-F687-4f45-9708-019B960494DF}">
-                  <a14:hiddenLine xmlns:a14="http://schemas.microsoft.com/office/drawing/2010/main" xmlns="" w="9525">
+                  <a14:hiddenLine xmlns="" xmlns:a14="http://schemas.microsoft.com/office/drawing/2010/main" w="9525">
                     <a:solidFill>
                       <a:srgbClr val="000000"/>
                     </a:solidFill>
@@ -10430,7 +10432,7 @@
               </a:ln>
               <a:extLst>
                 <a:ext uri="{91240B29-F687-4f45-9708-019B960494DF}">
-                  <a14:hiddenLine xmlns:a14="http://schemas.microsoft.com/office/drawing/2010/main" xmlns="" w="9525">
+                  <a14:hiddenLine xmlns="" xmlns:a14="http://schemas.microsoft.com/office/drawing/2010/main" w="9525">
                     <a:solidFill>
                       <a:srgbClr val="000000"/>
                     </a:solidFill>
@@ -10492,7 +10494,7 @@
               </a:ln>
               <a:extLst>
                 <a:ext uri="{91240B29-F687-4f45-9708-019B960494DF}">
-                  <a14:hiddenLine xmlns:a14="http://schemas.microsoft.com/office/drawing/2010/main" xmlns="" w="9525">
+                  <a14:hiddenLine xmlns="" xmlns:a14="http://schemas.microsoft.com/office/drawing/2010/main" w="9525">
                     <a:solidFill>
                       <a:srgbClr val="000000"/>
                     </a:solidFill>
@@ -10582,7 +10584,7 @@
               </a:ln>
               <a:extLst>
                 <a:ext uri="{91240B29-F687-4f45-9708-019B960494DF}">
-                  <a14:hiddenLine xmlns:a14="http://schemas.microsoft.com/office/drawing/2010/main" xmlns="" w="9525">
+                  <a14:hiddenLine xmlns="" xmlns:a14="http://schemas.microsoft.com/office/drawing/2010/main" w="9525">
                     <a:solidFill>
                       <a:srgbClr val="000000"/>
                     </a:solidFill>
@@ -10644,7 +10646,7 @@
               </a:ln>
               <a:extLst>
                 <a:ext uri="{91240B29-F687-4f45-9708-019B960494DF}">
-                  <a14:hiddenLine xmlns:a14="http://schemas.microsoft.com/office/drawing/2010/main" xmlns="" w="9525">
+                  <a14:hiddenLine xmlns="" xmlns:a14="http://schemas.microsoft.com/office/drawing/2010/main" w="9525">
                     <a:solidFill>
                       <a:srgbClr val="000000"/>
                     </a:solidFill>
@@ -10706,7 +10708,7 @@
               </a:ln>
               <a:extLst>
                 <a:ext uri="{91240B29-F687-4f45-9708-019B960494DF}">
-                  <a14:hiddenLine xmlns:a14="http://schemas.microsoft.com/office/drawing/2010/main" xmlns="" w="9525">
+                  <a14:hiddenLine xmlns="" xmlns:a14="http://schemas.microsoft.com/office/drawing/2010/main" w="9525">
                     <a:solidFill>
                       <a:srgbClr val="000000"/>
                     </a:solidFill>
@@ -10796,7 +10798,7 @@
               </a:ln>
               <a:extLst>
                 <a:ext uri="{91240B29-F687-4f45-9708-019B960494DF}">
-                  <a14:hiddenLine xmlns:a14="http://schemas.microsoft.com/office/drawing/2010/main" xmlns="" w="9525">
+                  <a14:hiddenLine xmlns="" xmlns:a14="http://schemas.microsoft.com/office/drawing/2010/main" w="9525">
                     <a:solidFill>
                       <a:srgbClr val="000000"/>
                     </a:solidFill>
@@ -10886,7 +10888,7 @@
               </a:ln>
               <a:extLst>
                 <a:ext uri="{91240B29-F687-4f45-9708-019B960494DF}">
-                  <a14:hiddenLine xmlns:a14="http://schemas.microsoft.com/office/drawing/2010/main" xmlns="" w="9525">
+                  <a14:hiddenLine xmlns="" xmlns:a14="http://schemas.microsoft.com/office/drawing/2010/main" w="9525">
                     <a:solidFill>
                       <a:srgbClr val="000000"/>
                     </a:solidFill>
@@ -10948,7 +10950,7 @@
               </a:ln>
               <a:extLst>
                 <a:ext uri="{91240B29-F687-4f45-9708-019B960494DF}">
-                  <a14:hiddenLine xmlns:a14="http://schemas.microsoft.com/office/drawing/2010/main" xmlns="" w="9525">
+                  <a14:hiddenLine xmlns="" xmlns:a14="http://schemas.microsoft.com/office/drawing/2010/main" w="9525">
                     <a:solidFill>
                       <a:srgbClr val="000000"/>
                     </a:solidFill>
@@ -11058,7 +11060,7 @@
               </a:ln>
               <a:extLst>
                 <a:ext uri="{91240B29-F687-4f45-9708-019B960494DF}">
-                  <a14:hiddenLine xmlns:a14="http://schemas.microsoft.com/office/drawing/2010/main" xmlns="" w="9525">
+                  <a14:hiddenLine xmlns="" xmlns:a14="http://schemas.microsoft.com/office/drawing/2010/main" w="9525">
                     <a:solidFill>
                       <a:srgbClr val="000000"/>
                     </a:solidFill>
@@ -11142,7 +11144,7 @@
               </a:ln>
               <a:extLst>
                 <a:ext uri="{91240B29-F687-4f45-9708-019B960494DF}">
-                  <a14:hiddenLine xmlns:a14="http://schemas.microsoft.com/office/drawing/2010/main" xmlns="" w="9525">
+                  <a14:hiddenLine xmlns="" xmlns:a14="http://schemas.microsoft.com/office/drawing/2010/main" w="9525">
                     <a:solidFill>
                       <a:srgbClr val="000000"/>
                     </a:solidFill>
@@ -11204,7 +11206,7 @@
               </a:ln>
               <a:extLst>
                 <a:ext uri="{91240B29-F687-4f45-9708-019B960494DF}">
-                  <a14:hiddenLine xmlns:a14="http://schemas.microsoft.com/office/drawing/2010/main" xmlns="" w="9525">
+                  <a14:hiddenLine xmlns="" xmlns:a14="http://schemas.microsoft.com/office/drawing/2010/main" w="9525">
                     <a:solidFill>
                       <a:srgbClr val="000000"/>
                     </a:solidFill>
@@ -11266,7 +11268,7 @@
               </a:ln>
               <a:extLst>
                 <a:ext uri="{91240B29-F687-4f45-9708-019B960494DF}">
-                  <a14:hiddenLine xmlns:a14="http://schemas.microsoft.com/office/drawing/2010/main" xmlns="" w="9525">
+                  <a14:hiddenLine xmlns="" xmlns:a14="http://schemas.microsoft.com/office/drawing/2010/main" w="9525">
                     <a:solidFill>
                       <a:srgbClr val="000000"/>
                     </a:solidFill>
@@ -11356,7 +11358,7 @@
               </a:ln>
               <a:extLst>
                 <a:ext uri="{91240B29-F687-4f45-9708-019B960494DF}">
-                  <a14:hiddenLine xmlns:a14="http://schemas.microsoft.com/office/drawing/2010/main" xmlns="" w="9525">
+                  <a14:hiddenLine xmlns="" xmlns:a14="http://schemas.microsoft.com/office/drawing/2010/main" w="9525">
                     <a:solidFill>
                       <a:srgbClr val="000000"/>
                     </a:solidFill>
@@ -11390,7 +11392,7 @@
               </a:ln>
               <a:extLst>
                 <a:ext uri="{91240B29-F687-4f45-9708-019B960494DF}">
-                  <a14:hiddenLine xmlns:a14="http://schemas.microsoft.com/office/drawing/2010/main" xmlns="" w="9525">
+                  <a14:hiddenLine xmlns="" xmlns:a14="http://schemas.microsoft.com/office/drawing/2010/main" w="9525">
                     <a:solidFill>
                       <a:srgbClr val="000000"/>
                     </a:solidFill>
@@ -11455,7 +11457,7 @@
               </a:ln>
               <a:extLst>
                 <a:ext uri="{91240B29-F687-4f45-9708-019B960494DF}">
-                  <a14:hiddenLine xmlns:a14="http://schemas.microsoft.com/office/drawing/2010/main" xmlns="" w="9525">
+                  <a14:hiddenLine xmlns="" xmlns:a14="http://schemas.microsoft.com/office/drawing/2010/main" w="9525">
                     <a:solidFill>
                       <a:srgbClr val="000000"/>
                     </a:solidFill>
@@ -11545,7 +11547,7 @@
               </a:ln>
               <a:extLst>
                 <a:ext uri="{91240B29-F687-4f45-9708-019B960494DF}">
-                  <a14:hiddenLine xmlns:a14="http://schemas.microsoft.com/office/drawing/2010/main" xmlns="" w="9525">
+                  <a14:hiddenLine xmlns="" xmlns:a14="http://schemas.microsoft.com/office/drawing/2010/main" w="9525">
                     <a:solidFill>
                       <a:srgbClr val="000000"/>
                     </a:solidFill>
@@ -11607,7 +11609,7 @@
               </a:ln>
               <a:extLst>
                 <a:ext uri="{91240B29-F687-4f45-9708-019B960494DF}">
-                  <a14:hiddenLine xmlns:a14="http://schemas.microsoft.com/office/drawing/2010/main" xmlns="" w="9525">
+                  <a14:hiddenLine xmlns="" xmlns:a14="http://schemas.microsoft.com/office/drawing/2010/main" w="9525">
                     <a:solidFill>
                       <a:srgbClr val="000000"/>
                     </a:solidFill>
@@ -11697,7 +11699,7 @@
               </a:ln>
               <a:extLst>
                 <a:ext uri="{91240B29-F687-4f45-9708-019B960494DF}">
-                  <a14:hiddenLine xmlns:a14="http://schemas.microsoft.com/office/drawing/2010/main" xmlns="" w="9525">
+                  <a14:hiddenLine xmlns="" xmlns:a14="http://schemas.microsoft.com/office/drawing/2010/main" w="9525">
                     <a:solidFill>
                       <a:srgbClr val="000000"/>
                     </a:solidFill>
@@ -11762,7 +11764,7 @@
               </a:ln>
               <a:extLst>
                 <a:ext uri="{91240B29-F687-4f45-9708-019B960494DF}">
-                  <a14:hiddenLine xmlns:a14="http://schemas.microsoft.com/office/drawing/2010/main" xmlns="" w="9525">
+                  <a14:hiddenLine xmlns="" xmlns:a14="http://schemas.microsoft.com/office/drawing/2010/main" w="9525">
                     <a:solidFill>
                       <a:srgbClr val="000000"/>
                     </a:solidFill>
@@ -11824,7 +11826,7 @@
               </a:ln>
               <a:extLst>
                 <a:ext uri="{91240B29-F687-4f45-9708-019B960494DF}">
-                  <a14:hiddenLine xmlns:a14="http://schemas.microsoft.com/office/drawing/2010/main" xmlns="" w="9525">
+                  <a14:hiddenLine xmlns="" xmlns:a14="http://schemas.microsoft.com/office/drawing/2010/main" w="9525">
                     <a:solidFill>
                       <a:srgbClr val="000000"/>
                     </a:solidFill>
@@ -11914,7 +11916,7 @@
               </a:ln>
               <a:extLst>
                 <a:ext uri="{91240B29-F687-4f45-9708-019B960494DF}">
-                  <a14:hiddenLine xmlns:a14="http://schemas.microsoft.com/office/drawing/2010/main" xmlns="" w="9525">
+                  <a14:hiddenLine xmlns="" xmlns:a14="http://schemas.microsoft.com/office/drawing/2010/main" w="9525">
                     <a:solidFill>
                       <a:srgbClr val="000000"/>
                     </a:solidFill>
@@ -12004,7 +12006,7 @@
               </a:ln>
               <a:extLst>
                 <a:ext uri="{91240B29-F687-4f45-9708-019B960494DF}">
-                  <a14:hiddenLine xmlns:a14="http://schemas.microsoft.com/office/drawing/2010/main" xmlns="" w="9525">
+                  <a14:hiddenLine xmlns="" xmlns:a14="http://schemas.microsoft.com/office/drawing/2010/main" w="9525">
                     <a:solidFill>
                       <a:srgbClr val="000000"/>
                     </a:solidFill>
@@ -12069,7 +12071,7 @@
               </a:ln>
               <a:extLst>
                 <a:ext uri="{91240B29-F687-4f45-9708-019B960494DF}">
-                  <a14:hiddenLine xmlns:a14="http://schemas.microsoft.com/office/drawing/2010/main" xmlns="" w="9525">
+                  <a14:hiddenLine xmlns="" xmlns:a14="http://schemas.microsoft.com/office/drawing/2010/main" w="9525">
                     <a:solidFill>
                       <a:srgbClr val="000000"/>
                     </a:solidFill>
@@ -12189,7 +12191,7 @@
               </a:ln>
               <a:extLst>
                 <a:ext uri="{91240B29-F687-4f45-9708-019B960494DF}">
-                  <a14:hiddenLine xmlns:a14="http://schemas.microsoft.com/office/drawing/2010/main" xmlns="" w="9525">
+                  <a14:hiddenLine xmlns="" xmlns:a14="http://schemas.microsoft.com/office/drawing/2010/main" w="9525">
                     <a:solidFill>
                       <a:srgbClr val="000000"/>
                     </a:solidFill>
@@ -12270,7 +12272,7 @@
               </a:ln>
               <a:extLst>
                 <a:ext uri="{91240B29-F687-4f45-9708-019B960494DF}">
-                  <a14:hiddenLine xmlns:a14="http://schemas.microsoft.com/office/drawing/2010/main" xmlns="" w="9525">
+                  <a14:hiddenLine xmlns="" xmlns:a14="http://schemas.microsoft.com/office/drawing/2010/main" w="9525">
                     <a:solidFill>
                       <a:srgbClr val="000000"/>
                     </a:solidFill>
@@ -12385,7 +12387,7 @@
               </a:ln>
               <a:extLst>
                 <a:ext uri="{91240B29-F687-4f45-9708-019B960494DF}">
-                  <a14:hiddenLine xmlns:a14="http://schemas.microsoft.com/office/drawing/2010/main" xmlns="" w="9525">
+                  <a14:hiddenLine xmlns="" xmlns:a14="http://schemas.microsoft.com/office/drawing/2010/main" w="9525">
                     <a:solidFill>
                       <a:srgbClr val="000000"/>
                     </a:solidFill>
@@ -12475,7 +12477,7 @@
               </a:ln>
               <a:extLst>
                 <a:ext uri="{91240B29-F687-4f45-9708-019B960494DF}">
-                  <a14:hiddenLine xmlns:a14="http://schemas.microsoft.com/office/drawing/2010/main" xmlns="" w="9525">
+                  <a14:hiddenLine xmlns="" xmlns:a14="http://schemas.microsoft.com/office/drawing/2010/main" w="9525">
                     <a:solidFill>
                       <a:srgbClr val="000000"/>
                     </a:solidFill>
@@ -12540,7 +12542,7 @@
               </a:ln>
               <a:extLst>
                 <a:ext uri="{91240B29-F687-4f45-9708-019B960494DF}">
-                  <a14:hiddenLine xmlns:a14="http://schemas.microsoft.com/office/drawing/2010/main" xmlns="" w="9525">
+                  <a14:hiddenLine xmlns="" xmlns:a14="http://schemas.microsoft.com/office/drawing/2010/main" w="9525">
                     <a:solidFill>
                       <a:srgbClr val="000000"/>
                     </a:solidFill>
@@ -12630,7 +12632,7 @@
               </a:ln>
               <a:extLst>
                 <a:ext uri="{91240B29-F687-4f45-9708-019B960494DF}">
-                  <a14:hiddenLine xmlns:a14="http://schemas.microsoft.com/office/drawing/2010/main" xmlns="" w="9525">
+                  <a14:hiddenLine xmlns="" xmlns:a14="http://schemas.microsoft.com/office/drawing/2010/main" w="9525">
                     <a:solidFill>
                       <a:srgbClr val="000000"/>
                     </a:solidFill>
@@ -12698,7 +12700,7 @@
               </a:ln>
               <a:extLst>
                 <a:ext uri="{91240B29-F687-4f45-9708-019B960494DF}">
-                  <a14:hiddenLine xmlns:a14="http://schemas.microsoft.com/office/drawing/2010/main" xmlns="" w="9525">
+                  <a14:hiddenLine xmlns="" xmlns:a14="http://schemas.microsoft.com/office/drawing/2010/main" w="9525">
                     <a:solidFill>
                       <a:srgbClr val="000000"/>
                     </a:solidFill>
@@ -12788,7 +12790,7 @@
               </a:ln>
               <a:extLst>
                 <a:ext uri="{91240B29-F687-4f45-9708-019B960494DF}">
-                  <a14:hiddenLine xmlns:a14="http://schemas.microsoft.com/office/drawing/2010/main" xmlns="" w="9525">
+                  <a14:hiddenLine xmlns="" xmlns:a14="http://schemas.microsoft.com/office/drawing/2010/main" w="9525">
                     <a:solidFill>
                       <a:srgbClr val="000000"/>
                     </a:solidFill>
@@ -12856,7 +12858,7 @@
               </a:ln>
               <a:extLst>
                 <a:ext uri="{91240B29-F687-4f45-9708-019B960494DF}">
-                  <a14:hiddenLine xmlns:a14="http://schemas.microsoft.com/office/drawing/2010/main" xmlns="" w="9525">
+                  <a14:hiddenLine xmlns="" xmlns:a14="http://schemas.microsoft.com/office/drawing/2010/main" w="9525">
                     <a:solidFill>
                       <a:srgbClr val="000000"/>
                     </a:solidFill>
@@ -12946,7 +12948,7 @@
               </a:ln>
               <a:extLst>
                 <a:ext uri="{91240B29-F687-4f45-9708-019B960494DF}">
-                  <a14:hiddenLine xmlns:a14="http://schemas.microsoft.com/office/drawing/2010/main" xmlns="" w="9525">
+                  <a14:hiddenLine xmlns="" xmlns:a14="http://schemas.microsoft.com/office/drawing/2010/main" w="9525">
                     <a:solidFill>
                       <a:srgbClr val="000000"/>
                     </a:solidFill>
@@ -12980,7 +12982,7 @@
               </a:ln>
               <a:extLst>
                 <a:ext uri="{91240B29-F687-4f45-9708-019B960494DF}">
-                  <a14:hiddenLine xmlns:a14="http://schemas.microsoft.com/office/drawing/2010/main" xmlns="" w="9525">
+                  <a14:hiddenLine xmlns="" xmlns:a14="http://schemas.microsoft.com/office/drawing/2010/main" w="9525">
                     <a:solidFill>
                       <a:srgbClr val="000000"/>
                     </a:solidFill>
@@ -13120,7 +13122,7 @@
           <a:p>
             <a:fld id="{4EA4CA9E-41A0-4A25-A87E-B4F1E3C13C9C}" type="datetimeFigureOut">
               <a:rPr lang="ru-RU" smtClean="0"/>
-              <a:t>31.08.2026</a:t>
+              <a:t>02.09.2026</a:t>
             </a:fld>
             <a:endParaRPr lang="ru-RU"/>
           </a:p>
@@ -17633,238 +17635,6 @@
           <a:lstStyle/>
           <a:p>
             <a:r>
-              <a:rPr lang="en-US" dirty="0" smtClean="0"/>
-              <a:t>TTL – Time to live</a:t>
-            </a:r>
-            <a:endParaRPr lang="ru-RU" dirty="0"/>
-          </a:p>
-        </p:txBody>
-      </p:sp>
-      <p:pic>
-        <p:nvPicPr>
-          <p:cNvPr id="4" name="Объект 3"/>
-          <p:cNvPicPr>
-            <a:picLocks noGrp="1" noChangeAspect="1"/>
-          </p:cNvPicPr>
-          <p:nvPr>
-            <p:ph idx="1"/>
-          </p:nvPr>
-        </p:nvPicPr>
-        <p:blipFill>
-          <a:blip r:embed="rId2"/>
-          <a:stretch>
-            <a:fillRect/>
-          </a:stretch>
-        </p:blipFill>
-        <p:spPr>
-          <a:xfrm>
-            <a:off x="2289743" y="2249488"/>
-            <a:ext cx="7609339" cy="3541712"/>
-          </a:xfrm>
-          <a:prstGeom prst="rect">
-            <a:avLst/>
-          </a:prstGeom>
-        </p:spPr>
-      </p:pic>
-    </p:spTree>
-    <p:extLst>
-      <p:ext uri="{BB962C8B-B14F-4D97-AF65-F5344CB8AC3E}">
-        <p14:creationId xmlns:p14="http://schemas.microsoft.com/office/powerpoint/2010/main" val="662635192"/>
-      </p:ext>
-    </p:extLst>
-  </p:cSld>
-  <p:clrMapOvr>
-    <a:masterClrMapping/>
-  </p:clrMapOvr>
-  <p:timing>
-    <p:tnLst>
-      <p:par>
-        <p:cTn id="1" dur="indefinite" restart="never" nodeType="tmRoot"/>
-      </p:par>
-    </p:tnLst>
-  </p:timing>
-</p:sld>
-</file>
-
-<file path=ppt/slides/slide3.xml><?xml version="1.0" encoding="utf-8"?>
-<p:sld xmlns:a="http://schemas.openxmlformats.org/drawingml/2006/main" xmlns:r="http://schemas.openxmlformats.org/officeDocument/2006/relationships" xmlns:p="http://schemas.openxmlformats.org/presentationml/2006/main">
-  <p:cSld>
-    <p:spTree>
-      <p:nvGrpSpPr>
-        <p:cNvPr id="1" name=""/>
-        <p:cNvGrpSpPr/>
-        <p:nvPr/>
-      </p:nvGrpSpPr>
-      <p:grpSpPr>
-        <a:xfrm>
-          <a:off x="0" y="0"/>
-          <a:ext cx="0" cy="0"/>
-          <a:chOff x="0" y="0"/>
-          <a:chExt cx="0" cy="0"/>
-        </a:xfrm>
-      </p:grpSpPr>
-      <p:sp>
-        <p:nvSpPr>
-          <p:cNvPr id="2" name="Заголовок 1"/>
-          <p:cNvSpPr>
-            <a:spLocks noGrp="1"/>
-          </p:cNvSpPr>
-          <p:nvPr>
-            <p:ph type="title"/>
-          </p:nvPr>
-        </p:nvSpPr>
-        <p:spPr/>
-        <p:txBody>
-          <a:bodyPr/>
-          <a:lstStyle/>
-          <a:p>
-            <a:r>
-              <a:rPr lang="ru-RU" b="1" dirty="0" smtClean="0"/>
-              <a:t>Функции сетевого уровня</a:t>
-            </a:r>
-            <a:endParaRPr lang="ru-RU" dirty="0"/>
-          </a:p>
-        </p:txBody>
-      </p:sp>
-      <p:sp>
-        <p:nvSpPr>
-          <p:cNvPr id="3" name="Объект 2"/>
-          <p:cNvSpPr>
-            <a:spLocks noGrp="1"/>
-          </p:cNvSpPr>
-          <p:nvPr>
-            <p:ph idx="1"/>
-          </p:nvPr>
-        </p:nvSpPr>
-        <p:spPr/>
-        <p:txBody>
-          <a:bodyPr>
-            <a:normAutofit fontScale="92500" lnSpcReduction="10000"/>
-          </a:bodyPr>
-          <a:lstStyle/>
-          <a:p>
-            <a:pPr marL="0" indent="0">
-              <a:buNone/>
-            </a:pPr>
-            <a:r>
-              <a:rPr lang="ru-RU" b="1" dirty="0"/>
-              <a:t>L3 обеспечивает межсетевое взаимодействие, глобальную логическую адресацию и изоляцию широковещательных доменов.</a:t>
-            </a:r>
-            <a:endParaRPr lang="en-US" b="1" dirty="0" smtClean="0"/>
-          </a:p>
-          <a:p>
-            <a:r>
-              <a:rPr lang="ru-RU" b="1" dirty="0" smtClean="0"/>
-              <a:t>Услуга </a:t>
-            </a:r>
-            <a:r>
-              <a:rPr lang="ru-RU" b="1" dirty="0"/>
-              <a:t>связи «узел-узел». </a:t>
-            </a:r>
-            <a:r>
-              <a:rPr lang="ru-RU" dirty="0" smtClean="0"/>
-              <a:t>Сетевой </a:t>
-            </a:r>
-            <a:r>
-              <a:rPr lang="ru-RU" dirty="0"/>
-              <a:t>уровень должен обеспечивать связь между узлами, не имеющими возможности связаться напрямую</a:t>
-            </a:r>
-            <a:r>
-              <a:rPr lang="ru-RU" dirty="0" smtClean="0"/>
-              <a:t>.</a:t>
-            </a:r>
-          </a:p>
-          <a:p>
-            <a:r>
-              <a:rPr lang="ru-RU" b="1" dirty="0"/>
-              <a:t>Адресация оконечных устройств</a:t>
-            </a:r>
-            <a:r>
-              <a:rPr lang="ru-RU" dirty="0"/>
-              <a:t> - Оконечным устройствам необходимо назначить уникальный </a:t>
-            </a:r>
-            <a:r>
-              <a:rPr lang="ru-RU" dirty="0" smtClean="0"/>
-              <a:t>адрес </a:t>
-            </a:r>
-            <a:r>
-              <a:rPr lang="ru-RU" dirty="0"/>
-              <a:t>для возможности их идентификации в сети.</a:t>
-            </a:r>
-          </a:p>
-          <a:p>
-            <a:r>
-              <a:rPr lang="ru-RU" b="1" dirty="0"/>
-              <a:t>Маршрутизация</a:t>
-            </a:r>
-            <a:r>
-              <a:rPr lang="ru-RU" dirty="0"/>
-              <a:t> - Сетевой уровень предоставляет сервисы, с помощью которых пакеты направляются к узлу назначения в другой </a:t>
-            </a:r>
-            <a:r>
-              <a:rPr lang="ru-RU" dirty="0" smtClean="0"/>
-              <a:t>сети.</a:t>
-            </a:r>
-            <a:endParaRPr lang="ru-RU" dirty="0"/>
-          </a:p>
-          <a:p>
-            <a:endParaRPr lang="ru-RU" dirty="0"/>
-          </a:p>
-        </p:txBody>
-      </p:sp>
-    </p:spTree>
-    <p:extLst>
-      <p:ext uri="{BB962C8B-B14F-4D97-AF65-F5344CB8AC3E}">
-        <p14:creationId xmlns:p14="http://schemas.microsoft.com/office/powerpoint/2010/main" val="577373664"/>
-      </p:ext>
-    </p:extLst>
-  </p:cSld>
-  <p:clrMapOvr>
-    <a:masterClrMapping/>
-  </p:clrMapOvr>
-  <p:timing>
-    <p:tnLst>
-      <p:par>
-        <p:cTn id="1" dur="indefinite" restart="never" nodeType="tmRoot"/>
-      </p:par>
-    </p:tnLst>
-  </p:timing>
-</p:sld>
-</file>
-
-<file path=ppt/slides/slide30.xml><?xml version="1.0" encoding="utf-8"?>
-<p:sld xmlns:a="http://schemas.openxmlformats.org/drawingml/2006/main" xmlns:r="http://schemas.openxmlformats.org/officeDocument/2006/relationships" xmlns:p="http://schemas.openxmlformats.org/presentationml/2006/main">
-  <p:cSld>
-    <p:spTree>
-      <p:nvGrpSpPr>
-        <p:cNvPr id="1" name=""/>
-        <p:cNvGrpSpPr/>
-        <p:nvPr/>
-      </p:nvGrpSpPr>
-      <p:grpSpPr>
-        <a:xfrm>
-          <a:off x="0" y="0"/>
-          <a:ext cx="0" cy="0"/>
-          <a:chOff x="0" y="0"/>
-          <a:chExt cx="0" cy="0"/>
-        </a:xfrm>
-      </p:grpSpPr>
-      <p:sp>
-        <p:nvSpPr>
-          <p:cNvPr id="2" name="Заголовок 1"/>
-          <p:cNvSpPr>
-            <a:spLocks noGrp="1"/>
-          </p:cNvSpPr>
-          <p:nvPr>
-            <p:ph type="title"/>
-          </p:nvPr>
-        </p:nvSpPr>
-        <p:spPr/>
-        <p:txBody>
-          <a:bodyPr/>
-          <a:lstStyle/>
-          <a:p>
-            <a:r>
               <a:rPr lang="ru-RU" dirty="0" smtClean="0"/>
               <a:t>Таблица маршрутизации</a:t>
             </a:r>
@@ -18026,7 +17796,153 @@
 </p:sld>
 </file>
 
-<file path=ppt/slides/slide31.xml><?xml version="1.0" encoding="utf-8"?>
+<file path=ppt/slides/slide3.xml><?xml version="1.0" encoding="utf-8"?>
+<p:sld xmlns:a="http://schemas.openxmlformats.org/drawingml/2006/main" xmlns:r="http://schemas.openxmlformats.org/officeDocument/2006/relationships" xmlns:p="http://schemas.openxmlformats.org/presentationml/2006/main">
+  <p:cSld>
+    <p:spTree>
+      <p:nvGrpSpPr>
+        <p:cNvPr id="1" name=""/>
+        <p:cNvGrpSpPr/>
+        <p:nvPr/>
+      </p:nvGrpSpPr>
+      <p:grpSpPr>
+        <a:xfrm>
+          <a:off x="0" y="0"/>
+          <a:ext cx="0" cy="0"/>
+          <a:chOff x="0" y="0"/>
+          <a:chExt cx="0" cy="0"/>
+        </a:xfrm>
+      </p:grpSpPr>
+      <p:sp>
+        <p:nvSpPr>
+          <p:cNvPr id="2" name="Заголовок 1"/>
+          <p:cNvSpPr>
+            <a:spLocks noGrp="1"/>
+          </p:cNvSpPr>
+          <p:nvPr>
+            <p:ph type="title"/>
+          </p:nvPr>
+        </p:nvSpPr>
+        <p:spPr/>
+        <p:txBody>
+          <a:bodyPr/>
+          <a:lstStyle/>
+          <a:p>
+            <a:r>
+              <a:rPr lang="ru-RU" b="1" dirty="0" smtClean="0"/>
+              <a:t>Функции сетевого уровня</a:t>
+            </a:r>
+            <a:endParaRPr lang="ru-RU" dirty="0"/>
+          </a:p>
+        </p:txBody>
+      </p:sp>
+      <p:sp>
+        <p:nvSpPr>
+          <p:cNvPr id="3" name="Объект 2"/>
+          <p:cNvSpPr>
+            <a:spLocks noGrp="1"/>
+          </p:cNvSpPr>
+          <p:nvPr>
+            <p:ph idx="1"/>
+          </p:nvPr>
+        </p:nvSpPr>
+        <p:spPr/>
+        <p:txBody>
+          <a:bodyPr>
+            <a:normAutofit fontScale="92500" lnSpcReduction="10000"/>
+          </a:bodyPr>
+          <a:lstStyle/>
+          <a:p>
+            <a:pPr marL="0" indent="0">
+              <a:buNone/>
+            </a:pPr>
+            <a:r>
+              <a:rPr lang="ru-RU" b="1" dirty="0"/>
+              <a:t>L3 обеспечивает межсетевое взаимодействие, глобальную логическую адресацию и изоляцию широковещательных доменов.</a:t>
+            </a:r>
+            <a:endParaRPr lang="en-US" b="1" dirty="0" smtClean="0"/>
+          </a:p>
+          <a:p>
+            <a:r>
+              <a:rPr lang="ru-RU" b="1" dirty="0" smtClean="0"/>
+              <a:t>Услуга </a:t>
+            </a:r>
+            <a:r>
+              <a:rPr lang="ru-RU" b="1" dirty="0"/>
+              <a:t>связи «узел-узел». </a:t>
+            </a:r>
+            <a:r>
+              <a:rPr lang="ru-RU" dirty="0" smtClean="0"/>
+              <a:t>Сетевой </a:t>
+            </a:r>
+            <a:r>
+              <a:rPr lang="ru-RU" dirty="0"/>
+              <a:t>уровень должен обеспечивать связь между узлами, не имеющими возможности связаться напрямую</a:t>
+            </a:r>
+            <a:r>
+              <a:rPr lang="ru-RU" dirty="0" smtClean="0"/>
+              <a:t>.</a:t>
+            </a:r>
+          </a:p>
+          <a:p>
+            <a:r>
+              <a:rPr lang="ru-RU" b="1" dirty="0"/>
+              <a:t>Адресация оконечных устройств</a:t>
+            </a:r>
+            <a:r>
+              <a:rPr lang="ru-RU" dirty="0"/>
+              <a:t> - Оконечным устройствам необходимо назначить уникальный </a:t>
+            </a:r>
+            <a:r>
+              <a:rPr lang="ru-RU" dirty="0" smtClean="0"/>
+              <a:t>адрес </a:t>
+            </a:r>
+            <a:r>
+              <a:rPr lang="ru-RU" dirty="0"/>
+              <a:t>для возможности их идентификации в сети.</a:t>
+            </a:r>
+          </a:p>
+          <a:p>
+            <a:r>
+              <a:rPr lang="ru-RU" b="1" dirty="0"/>
+              <a:t>Маршрутизация</a:t>
+            </a:r>
+            <a:r>
+              <a:rPr lang="ru-RU" dirty="0"/>
+              <a:t> - Сетевой уровень предоставляет сервисы, с помощью которых пакеты направляются к узлу назначения в другой </a:t>
+            </a:r>
+            <a:r>
+              <a:rPr lang="ru-RU" dirty="0" smtClean="0"/>
+              <a:t>сети.</a:t>
+            </a:r>
+            <a:endParaRPr lang="ru-RU" dirty="0"/>
+          </a:p>
+          <a:p>
+            <a:endParaRPr lang="ru-RU" dirty="0"/>
+          </a:p>
+        </p:txBody>
+      </p:sp>
+    </p:spTree>
+    <p:extLst>
+      <p:ext uri="{BB962C8B-B14F-4D97-AF65-F5344CB8AC3E}">
+        <p14:creationId xmlns:p14="http://schemas.microsoft.com/office/powerpoint/2010/main" val="577373664"/>
+      </p:ext>
+    </p:extLst>
+  </p:cSld>
+  <p:clrMapOvr>
+    <a:masterClrMapping/>
+  </p:clrMapOvr>
+  <p:timing>
+    <p:tnLst>
+      <p:par>
+        <p:cTn id="1" dur="indefinite" restart="never" nodeType="tmRoot"/>
+      </p:par>
+    </p:tnLst>
+  </p:timing>
+</p:sld>
+</file>
+
+<file path=ppt/slides/slide30.xml><?xml version="1.0" encoding="utf-8"?>
 <p:sld xmlns:a="http://schemas.openxmlformats.org/drawingml/2006/main" xmlns:r="http://schemas.openxmlformats.org/officeDocument/2006/relationships" xmlns:p="http://schemas.openxmlformats.org/presentationml/2006/main">
   <p:cSld>
     <p:spTree>
@@ -18096,6 +18012,211 @@
     <p:extLst>
       <p:ext uri="{BB962C8B-B14F-4D97-AF65-F5344CB8AC3E}">
         <p14:creationId xmlns:p14="http://schemas.microsoft.com/office/powerpoint/2010/main" val="2845266309"/>
+      </p:ext>
+    </p:extLst>
+  </p:cSld>
+  <p:clrMapOvr>
+    <a:masterClrMapping/>
+  </p:clrMapOvr>
+  <p:timing>
+    <p:tnLst>
+      <p:par>
+        <p:cTn id="1" dur="indefinite" restart="never" nodeType="tmRoot"/>
+      </p:par>
+    </p:tnLst>
+  </p:timing>
+</p:sld>
+</file>
+
+<file path=ppt/slides/slide31.xml><?xml version="1.0" encoding="utf-8"?>
+<p:sld xmlns:a="http://schemas.openxmlformats.org/drawingml/2006/main" xmlns:r="http://schemas.openxmlformats.org/officeDocument/2006/relationships" xmlns:p="http://schemas.openxmlformats.org/presentationml/2006/main">
+  <p:cSld>
+    <p:spTree>
+      <p:nvGrpSpPr>
+        <p:cNvPr id="1" name="Shape 171"/>
+        <p:cNvGrpSpPr/>
+        <p:nvPr/>
+      </p:nvGrpSpPr>
+      <p:grpSpPr>
+        <a:xfrm>
+          <a:off x="0" y="0"/>
+          <a:ext cx="0" cy="0"/>
+          <a:chOff x="0" y="0"/>
+          <a:chExt cx="0" cy="0"/>
+        </a:xfrm>
+      </p:grpSpPr>
+      <p:sp>
+        <p:nvSpPr>
+          <p:cNvPr id="172" name="Google Shape;172;p33"/>
+          <p:cNvSpPr txBox="1">
+            <a:spLocks noGrp="1"/>
+          </p:cNvSpPr>
+          <p:nvPr>
+            <p:ph type="title"/>
+          </p:nvPr>
+        </p:nvSpPr>
+        <p:spPr>
+          <a:xfrm>
+            <a:off x="415600" y="593367"/>
+            <a:ext cx="11360800" cy="763600"/>
+          </a:xfrm>
+          <a:prstGeom prst="rect">
+            <a:avLst/>
+          </a:prstGeom>
+        </p:spPr>
+        <p:txBody>
+          <a:bodyPr spcFirstLastPara="1" vert="horz" wrap="square" lIns="121900" tIns="121900" rIns="121900" bIns="121900" rtlCol="0" anchor="t" anchorCtr="0">
+            <a:normAutofit fontScale="90000"/>
+          </a:bodyPr>
+          <a:lstStyle/>
+          <a:p>
+            <a:r>
+              <a:rPr lang="ru" dirty="0"/>
+              <a:t>Использование сетевой маски</a:t>
+            </a:r>
+            <a:r>
+              <a:rPr lang="en-US" dirty="0"/>
+              <a:t> </a:t>
+            </a:r>
+            <a:r>
+              <a:rPr lang="ru-RU" dirty="0"/>
+              <a:t>для определения принадлежности узла к сети</a:t>
+            </a:r>
+            <a:endParaRPr dirty="0"/>
+          </a:p>
+        </p:txBody>
+      </p:sp>
+      <p:sp>
+        <p:nvSpPr>
+          <p:cNvPr id="173" name="Google Shape;173;p33"/>
+          <p:cNvSpPr txBox="1"/>
+          <p:nvPr/>
+        </p:nvSpPr>
+        <p:spPr>
+          <a:xfrm>
+            <a:off x="2397133" y="2058300"/>
+            <a:ext cx="72800" cy="27200"/>
+          </a:xfrm>
+          <a:prstGeom prst="rect">
+            <a:avLst/>
+          </a:prstGeom>
+          <a:noFill/>
+          <a:ln>
+            <a:noFill/>
+          </a:ln>
+        </p:spPr>
+        <p:txBody>
+          <a:bodyPr spcFirstLastPara="1" wrap="square" lIns="121900" tIns="121900" rIns="121900" bIns="121900" anchor="t" anchorCtr="0">
+            <a:noAutofit/>
+          </a:bodyPr>
+          <a:lstStyle/>
+          <a:p>
+            <a:endParaRPr sz="2400">
+              <a:solidFill>
+                <a:schemeClr val="dk2"/>
+              </a:solidFill>
+            </a:endParaRPr>
+          </a:p>
+        </p:txBody>
+      </p:sp>
+      <p:sp>
+        <p:nvSpPr>
+          <p:cNvPr id="174" name="Google Shape;174;p33"/>
+          <p:cNvSpPr txBox="1"/>
+          <p:nvPr/>
+        </p:nvSpPr>
+        <p:spPr>
+          <a:xfrm>
+            <a:off x="415600" y="1785801"/>
+            <a:ext cx="11360800" cy="1682600"/>
+          </a:xfrm>
+          <a:prstGeom prst="rect">
+            <a:avLst/>
+          </a:prstGeom>
+          <a:noFill/>
+          <a:ln>
+            <a:noFill/>
+          </a:ln>
+        </p:spPr>
+        <p:txBody>
+          <a:bodyPr spcFirstLastPara="1" wrap="square" lIns="121900" tIns="121900" rIns="121900" bIns="121900" anchor="t" anchorCtr="0">
+            <a:spAutoFit/>
+          </a:bodyPr>
+          <a:lstStyle/>
+          <a:p>
+            <a:pPr algn="just"/>
+            <a:r>
+              <a:rPr lang="ru" sz="4667" b="1" dirty="0"/>
+              <a:t>     192     .     168     .      10      .      </a:t>
+            </a:r>
+            <a:r>
+              <a:rPr lang="ru" sz="4667" b="1" dirty="0" smtClean="0"/>
+              <a:t>0      </a:t>
+            </a:r>
+            <a:r>
+              <a:rPr lang="en-US" sz="4667" b="1" dirty="0" smtClean="0"/>
+              <a:t>/24</a:t>
+            </a:r>
+            <a:endParaRPr sz="4667" b="1" dirty="0"/>
+          </a:p>
+          <a:p>
+            <a:r>
+              <a:rPr lang="ru" sz="4667" b="1" dirty="0"/>
+              <a:t>11000000 10101000 00001010 </a:t>
+            </a:r>
+            <a:r>
+              <a:rPr lang="ru" sz="4667" b="1" dirty="0" smtClean="0"/>
+              <a:t>00000000</a:t>
+            </a:r>
+            <a:endParaRPr sz="4667" b="1" dirty="0"/>
+          </a:p>
+        </p:txBody>
+      </p:sp>
+      <p:sp>
+        <p:nvSpPr>
+          <p:cNvPr id="175" name="Google Shape;175;p33"/>
+          <p:cNvSpPr txBox="1"/>
+          <p:nvPr/>
+        </p:nvSpPr>
+        <p:spPr>
+          <a:xfrm>
+            <a:off x="415600" y="4314367"/>
+            <a:ext cx="11360800" cy="1682600"/>
+          </a:xfrm>
+          <a:prstGeom prst="rect">
+            <a:avLst/>
+          </a:prstGeom>
+          <a:noFill/>
+          <a:ln>
+            <a:noFill/>
+          </a:ln>
+        </p:spPr>
+        <p:txBody>
+          <a:bodyPr spcFirstLastPara="1" wrap="square" lIns="121900" tIns="121900" rIns="121900" bIns="121900" anchor="t" anchorCtr="0">
+            <a:spAutoFit/>
+          </a:bodyPr>
+          <a:lstStyle/>
+          <a:p>
+            <a:pPr algn="just"/>
+            <a:r>
+              <a:rPr lang="ru" sz="4667" b="1" dirty="0"/>
+              <a:t>     172     .      20      .       1      .       7</a:t>
+            </a:r>
+            <a:endParaRPr sz="4667" b="1" dirty="0"/>
+          </a:p>
+          <a:p>
+            <a:r>
+              <a:rPr lang="ru" sz="4667" b="1" dirty="0"/>
+              <a:t>10101100 00010100 00000001 00000111</a:t>
+            </a:r>
+            <a:endParaRPr sz="4667" b="1" dirty="0"/>
+          </a:p>
+        </p:txBody>
+      </p:sp>
+    </p:spTree>
+    <p:extLst>
+      <p:ext uri="{BB962C8B-B14F-4D97-AF65-F5344CB8AC3E}">
+        <p14:creationId xmlns:p14="http://schemas.microsoft.com/office/powerpoint/2010/main" val="4019066618"/>
       </p:ext>
     </p:extLst>
   </p:cSld>
@@ -18297,211 +18418,6 @@
           </a:p>
         </p:txBody>
       </p:sp>
-    </p:spTree>
-    <p:extLst>
-      <p:ext uri="{BB962C8B-B14F-4D97-AF65-F5344CB8AC3E}">
-        <p14:creationId xmlns:p14="http://schemas.microsoft.com/office/powerpoint/2010/main" val="4019066618"/>
-      </p:ext>
-    </p:extLst>
-  </p:cSld>
-  <p:clrMapOvr>
-    <a:masterClrMapping/>
-  </p:clrMapOvr>
-  <p:timing>
-    <p:tnLst>
-      <p:par>
-        <p:cTn id="1" dur="indefinite" restart="never" nodeType="tmRoot"/>
-      </p:par>
-    </p:tnLst>
-  </p:timing>
-</p:sld>
-</file>
-
-<file path=ppt/slides/slide33.xml><?xml version="1.0" encoding="utf-8"?>
-<p:sld xmlns:a="http://schemas.openxmlformats.org/drawingml/2006/main" xmlns:r="http://schemas.openxmlformats.org/officeDocument/2006/relationships" xmlns:p="http://schemas.openxmlformats.org/presentationml/2006/main">
-  <p:cSld>
-    <p:spTree>
-      <p:nvGrpSpPr>
-        <p:cNvPr id="1" name="Shape 171"/>
-        <p:cNvGrpSpPr/>
-        <p:nvPr/>
-      </p:nvGrpSpPr>
-      <p:grpSpPr>
-        <a:xfrm>
-          <a:off x="0" y="0"/>
-          <a:ext cx="0" cy="0"/>
-          <a:chOff x="0" y="0"/>
-          <a:chExt cx="0" cy="0"/>
-        </a:xfrm>
-      </p:grpSpPr>
-      <p:sp>
-        <p:nvSpPr>
-          <p:cNvPr id="172" name="Google Shape;172;p33"/>
-          <p:cNvSpPr txBox="1">
-            <a:spLocks noGrp="1"/>
-          </p:cNvSpPr>
-          <p:nvPr>
-            <p:ph type="title"/>
-          </p:nvPr>
-        </p:nvSpPr>
-        <p:spPr>
-          <a:xfrm>
-            <a:off x="415600" y="593367"/>
-            <a:ext cx="11360800" cy="763600"/>
-          </a:xfrm>
-          <a:prstGeom prst="rect">
-            <a:avLst/>
-          </a:prstGeom>
-        </p:spPr>
-        <p:txBody>
-          <a:bodyPr spcFirstLastPara="1" vert="horz" wrap="square" lIns="121900" tIns="121900" rIns="121900" bIns="121900" rtlCol="0" anchor="t" anchorCtr="0">
-            <a:normAutofit fontScale="90000"/>
-          </a:bodyPr>
-          <a:lstStyle/>
-          <a:p>
-            <a:r>
-              <a:rPr lang="ru" dirty="0"/>
-              <a:t>Использование сетевой маски</a:t>
-            </a:r>
-            <a:r>
-              <a:rPr lang="en-US" dirty="0"/>
-              <a:t> </a:t>
-            </a:r>
-            <a:r>
-              <a:rPr lang="ru-RU" dirty="0"/>
-              <a:t>для определения принадлежности узла к сети</a:t>
-            </a:r>
-            <a:endParaRPr dirty="0"/>
-          </a:p>
-        </p:txBody>
-      </p:sp>
-      <p:sp>
-        <p:nvSpPr>
-          <p:cNvPr id="173" name="Google Shape;173;p33"/>
-          <p:cNvSpPr txBox="1"/>
-          <p:nvPr/>
-        </p:nvSpPr>
-        <p:spPr>
-          <a:xfrm>
-            <a:off x="2397133" y="2058300"/>
-            <a:ext cx="72800" cy="27200"/>
-          </a:xfrm>
-          <a:prstGeom prst="rect">
-            <a:avLst/>
-          </a:prstGeom>
-          <a:noFill/>
-          <a:ln>
-            <a:noFill/>
-          </a:ln>
-        </p:spPr>
-        <p:txBody>
-          <a:bodyPr spcFirstLastPara="1" wrap="square" lIns="121900" tIns="121900" rIns="121900" bIns="121900" anchor="t" anchorCtr="0">
-            <a:noAutofit/>
-          </a:bodyPr>
-          <a:lstStyle/>
-          <a:p>
-            <a:endParaRPr sz="2400">
-              <a:solidFill>
-                <a:schemeClr val="dk2"/>
-              </a:solidFill>
-            </a:endParaRPr>
-          </a:p>
-        </p:txBody>
-      </p:sp>
-      <p:sp>
-        <p:nvSpPr>
-          <p:cNvPr id="174" name="Google Shape;174;p33"/>
-          <p:cNvSpPr txBox="1"/>
-          <p:nvPr/>
-        </p:nvSpPr>
-        <p:spPr>
-          <a:xfrm>
-            <a:off x="415600" y="1785801"/>
-            <a:ext cx="11360800" cy="1682600"/>
-          </a:xfrm>
-          <a:prstGeom prst="rect">
-            <a:avLst/>
-          </a:prstGeom>
-          <a:noFill/>
-          <a:ln>
-            <a:noFill/>
-          </a:ln>
-        </p:spPr>
-        <p:txBody>
-          <a:bodyPr spcFirstLastPara="1" wrap="square" lIns="121900" tIns="121900" rIns="121900" bIns="121900" anchor="t" anchorCtr="0">
-            <a:spAutoFit/>
-          </a:bodyPr>
-          <a:lstStyle/>
-          <a:p>
-            <a:pPr algn="just"/>
-            <a:r>
-              <a:rPr lang="ru" sz="4667" b="1" dirty="0"/>
-              <a:t>     192     .     168     .      10      .      </a:t>
-            </a:r>
-            <a:r>
-              <a:rPr lang="ru" sz="4667" b="1" dirty="0" smtClean="0"/>
-              <a:t>0      </a:t>
-            </a:r>
-            <a:r>
-              <a:rPr lang="en-US" sz="4667" b="1" dirty="0" smtClean="0"/>
-              <a:t>/24</a:t>
-            </a:r>
-            <a:endParaRPr sz="4667" b="1" dirty="0"/>
-          </a:p>
-          <a:p>
-            <a:r>
-              <a:rPr lang="ru" sz="4667" b="1" dirty="0"/>
-              <a:t>11000000 10101000 00001010 </a:t>
-            </a:r>
-            <a:r>
-              <a:rPr lang="ru" sz="4667" b="1" dirty="0" smtClean="0"/>
-              <a:t>00000000</a:t>
-            </a:r>
-            <a:endParaRPr sz="4667" b="1" dirty="0"/>
-          </a:p>
-        </p:txBody>
-      </p:sp>
-      <p:sp>
-        <p:nvSpPr>
-          <p:cNvPr id="175" name="Google Shape;175;p33"/>
-          <p:cNvSpPr txBox="1"/>
-          <p:nvPr/>
-        </p:nvSpPr>
-        <p:spPr>
-          <a:xfrm>
-            <a:off x="415600" y="4314367"/>
-            <a:ext cx="11360800" cy="1682600"/>
-          </a:xfrm>
-          <a:prstGeom prst="rect">
-            <a:avLst/>
-          </a:prstGeom>
-          <a:noFill/>
-          <a:ln>
-            <a:noFill/>
-          </a:ln>
-        </p:spPr>
-        <p:txBody>
-          <a:bodyPr spcFirstLastPara="1" wrap="square" lIns="121900" tIns="121900" rIns="121900" bIns="121900" anchor="t" anchorCtr="0">
-            <a:spAutoFit/>
-          </a:bodyPr>
-          <a:lstStyle/>
-          <a:p>
-            <a:pPr algn="just"/>
-            <a:r>
-              <a:rPr lang="ru" sz="4667" b="1" dirty="0"/>
-              <a:t>     172     .      20      .       1      .       7</a:t>
-            </a:r>
-            <a:endParaRPr sz="4667" b="1" dirty="0"/>
-          </a:p>
-          <a:p>
-            <a:r>
-              <a:rPr lang="ru" sz="4667" b="1" dirty="0"/>
-              <a:t>10101100 00010100 00000001 00000111</a:t>
-            </a:r>
-            <a:endParaRPr sz="4667" b="1" dirty="0"/>
-          </a:p>
-        </p:txBody>
-      </p:sp>
       <p:pic>
         <p:nvPicPr>
           <p:cNvPr id="6" name="Google Shape;184;p34"/>
@@ -18600,7 +18516,7 @@
 </p:sld>
 </file>
 
-<file path=ppt/slides/slide34.xml><?xml version="1.0" encoding="utf-8"?>
+<file path=ppt/slides/slide33.xml><?xml version="1.0" encoding="utf-8"?>
 <p:sld xmlns:a="http://schemas.openxmlformats.org/drawingml/2006/main" xmlns:r="http://schemas.openxmlformats.org/officeDocument/2006/relationships" xmlns:p="http://schemas.openxmlformats.org/presentationml/2006/main">
   <p:cSld>
     <p:spTree>
@@ -18688,7 +18604,7 @@
 </p:sld>
 </file>
 
-<file path=ppt/slides/slide35.xml><?xml version="1.0" encoding="utf-8"?>
+<file path=ppt/slides/slide34.xml><?xml version="1.0" encoding="utf-8"?>
 <p:sld xmlns:a="http://schemas.openxmlformats.org/drawingml/2006/main" xmlns:r="http://schemas.openxmlformats.org/officeDocument/2006/relationships" xmlns:p="http://schemas.openxmlformats.org/presentationml/2006/main">
   <p:cSld>
     <p:spTree>
@@ -18940,7 +18856,7 @@
 </p:sld>
 </file>
 
-<file path=ppt/slides/slide36.xml><?xml version="1.0" encoding="utf-8"?>
+<file path=ppt/slides/slide35.xml><?xml version="1.0" encoding="utf-8"?>
 <p:sld xmlns:a="http://schemas.openxmlformats.org/drawingml/2006/main" xmlns:r="http://schemas.openxmlformats.org/officeDocument/2006/relationships" xmlns:p="http://schemas.openxmlformats.org/presentationml/2006/main">
   <p:cSld>
     <p:spTree>
@@ -19036,7 +18952,7 @@
 </p:sld>
 </file>
 
-<file path=ppt/slides/slide37.xml><?xml version="1.0" encoding="utf-8"?>
+<file path=ppt/slides/slide36.xml><?xml version="1.0" encoding="utf-8"?>
 <p:sld xmlns:a="http://schemas.openxmlformats.org/drawingml/2006/main" xmlns:r="http://schemas.openxmlformats.org/officeDocument/2006/relationships" xmlns:p="http://schemas.openxmlformats.org/presentationml/2006/main">
   <p:cSld>
     <p:spTree>
@@ -19263,7 +19179,7 @@
 </p:sld>
 </file>
 
-<file path=ppt/slides/slide38.xml><?xml version="1.0" encoding="utf-8"?>
+<file path=ppt/slides/slide37.xml><?xml version="1.0" encoding="utf-8"?>
 <p:sld xmlns:a="http://schemas.openxmlformats.org/drawingml/2006/main" xmlns:r="http://schemas.openxmlformats.org/officeDocument/2006/relationships" xmlns:p="http://schemas.openxmlformats.org/presentationml/2006/main">
   <p:cSld>
     <p:spTree>
@@ -19618,7 +19534,7 @@
 </p:sld>
 </file>
 
-<file path=ppt/slides/slide39.xml><?xml version="1.0" encoding="utf-8"?>
+<file path=ppt/slides/slide38.xml><?xml version="1.0" encoding="utf-8"?>
 <p:sld xmlns:a="http://schemas.openxmlformats.org/drawingml/2006/main" xmlns:r="http://schemas.openxmlformats.org/officeDocument/2006/relationships" xmlns:p="http://schemas.openxmlformats.org/presentationml/2006/main">
   <p:cSld>
     <p:spTree>
@@ -20070,7 +19986,19 @@
           <a:p>
             <a:r>
               <a:rPr lang="ru-RU" sz="1600" b="1" dirty="0"/>
-              <a:t>2) Находим адрес сети назначения и адрес сети из таблицы:</a:t>
+              <a:t>2) </a:t>
+            </a:r>
+            <a:r>
+              <a:rPr lang="ru-RU" sz="1600" b="1" dirty="0" smtClean="0"/>
+              <a:t>Сравниваем</a:t>
+            </a:r>
+            <a:r>
+              <a:rPr lang="ru-RU" sz="1600" b="1" dirty="0" smtClean="0"/>
+              <a:t> </a:t>
+            </a:r>
+            <a:r>
+              <a:rPr lang="ru-RU" sz="1600" b="1" dirty="0"/>
+              <a:t>адрес сети назначения и адрес сети из таблицы:</a:t>
             </a:r>
             <a:endParaRPr lang="ru-RU" sz="1600" dirty="0"/>
           </a:p>
@@ -20283,142 +20211,7 @@
 </p:sld>
 </file>
 
-<file path=ppt/slides/slide4.xml><?xml version="1.0" encoding="utf-8"?>
-<p:sld xmlns:a="http://schemas.openxmlformats.org/drawingml/2006/main" xmlns:r="http://schemas.openxmlformats.org/officeDocument/2006/relationships" xmlns:p="http://schemas.openxmlformats.org/presentationml/2006/main">
-  <p:cSld>
-    <p:spTree>
-      <p:nvGrpSpPr>
-        <p:cNvPr id="1" name=""/>
-        <p:cNvGrpSpPr/>
-        <p:nvPr/>
-      </p:nvGrpSpPr>
-      <p:grpSpPr>
-        <a:xfrm>
-          <a:off x="0" y="0"/>
-          <a:ext cx="0" cy="0"/>
-          <a:chOff x="0" y="0"/>
-          <a:chExt cx="0" cy="0"/>
-        </a:xfrm>
-      </p:grpSpPr>
-      <p:sp>
-        <p:nvSpPr>
-          <p:cNvPr id="2" name="Заголовок 1"/>
-          <p:cNvSpPr>
-            <a:spLocks noGrp="1"/>
-          </p:cNvSpPr>
-          <p:nvPr>
-            <p:ph type="title"/>
-          </p:nvPr>
-        </p:nvSpPr>
-        <p:spPr/>
-        <p:txBody>
-          <a:bodyPr/>
-          <a:lstStyle/>
-          <a:p>
-            <a:r>
-              <a:rPr lang="af-ZA" b="1" dirty="0"/>
-              <a:t>IP — Internet </a:t>
-            </a:r>
-            <a:r>
-              <a:rPr lang="af-ZA" b="1" dirty="0" smtClean="0"/>
-              <a:t>Protocol</a:t>
-            </a:r>
-            <a:endParaRPr lang="ru-RU" dirty="0"/>
-          </a:p>
-        </p:txBody>
-      </p:sp>
-      <p:pic>
-        <p:nvPicPr>
-          <p:cNvPr id="4" name="Объект 3"/>
-          <p:cNvPicPr>
-            <a:picLocks noGrp="1" noChangeAspect="1"/>
-          </p:cNvPicPr>
-          <p:nvPr>
-            <p:ph idx="1"/>
-          </p:nvPr>
-        </p:nvPicPr>
-        <p:blipFill>
-          <a:blip r:embed="rId2"/>
-          <a:stretch>
-            <a:fillRect/>
-          </a:stretch>
-        </p:blipFill>
-        <p:spPr>
-          <a:xfrm>
-            <a:off x="5874258" y="2398957"/>
-            <a:ext cx="5451924" cy="3541712"/>
-          </a:xfrm>
-          <a:prstGeom prst="rect">
-            <a:avLst/>
-          </a:prstGeom>
-        </p:spPr>
-      </p:pic>
-      <p:sp>
-        <p:nvSpPr>
-          <p:cNvPr id="5" name="TextBox 4"/>
-          <p:cNvSpPr txBox="1"/>
-          <p:nvPr/>
-        </p:nvSpPr>
-        <p:spPr>
-          <a:xfrm>
-            <a:off x="536332" y="2954215"/>
-            <a:ext cx="4806634" cy="2308324"/>
-          </a:xfrm>
-          <a:prstGeom prst="rect">
-            <a:avLst/>
-          </a:prstGeom>
-          <a:noFill/>
-        </p:spPr>
-        <p:txBody>
-          <a:bodyPr wrap="square" rtlCol="0">
-            <a:spAutoFit/>
-          </a:bodyPr>
-          <a:lstStyle/>
-          <a:p>
-            <a:r>
-              <a:rPr lang="ru-RU" dirty="0"/>
-              <a:t>Протокол IP (</a:t>
-            </a:r>
-            <a:r>
-              <a:rPr lang="ru-RU" dirty="0" err="1"/>
-              <a:t>Internet</a:t>
-            </a:r>
-            <a:r>
-              <a:rPr lang="ru-RU" dirty="0"/>
-              <a:t> </a:t>
-            </a:r>
-            <a:r>
-              <a:rPr lang="ru-RU" dirty="0" err="1"/>
-              <a:t>Protocol</a:t>
-            </a:r>
-            <a:r>
-              <a:rPr lang="ru-RU" dirty="0"/>
-              <a:t>) — это "почтальон" интернета, отвечающий за маршрутизацию пакетов данных. Он был создан в 70-х, а в 1983 году стал общеобязательным стандартом, запустив глобальный рост сети. Сегодня мир переходит с версии IPv4 на версию IPv6 из-за нехватки адресов.</a:t>
-            </a:r>
-          </a:p>
-        </p:txBody>
-      </p:sp>
-    </p:spTree>
-    <p:extLst>
-      <p:ext uri="{BB962C8B-B14F-4D97-AF65-F5344CB8AC3E}">
-        <p14:creationId xmlns:p14="http://schemas.microsoft.com/office/powerpoint/2010/main" val="1332780250"/>
-      </p:ext>
-    </p:extLst>
-  </p:cSld>
-  <p:clrMapOvr>
-    <a:masterClrMapping/>
-  </p:clrMapOvr>
-  <p:timing>
-    <p:tnLst>
-      <p:par>
-        <p:cTn id="1" dur="indefinite" restart="never" nodeType="tmRoot"/>
-      </p:par>
-    </p:tnLst>
-  </p:timing>
-</p:sld>
-</file>
-
-<file path=ppt/slides/slide40.xml><?xml version="1.0" encoding="utf-8"?>
+<file path=ppt/slides/slide39.xml><?xml version="1.0" encoding="utf-8"?>
 <p:sld xmlns:a="http://schemas.openxmlformats.org/drawingml/2006/main" xmlns:r="http://schemas.openxmlformats.org/officeDocument/2006/relationships" xmlns:p="http://schemas.openxmlformats.org/presentationml/2006/main">
   <p:cSld>
     <p:spTree>
@@ -21214,7 +21007,142 @@
 </p:sld>
 </file>
 
-<file path=ppt/slides/slide41.xml><?xml version="1.0" encoding="utf-8"?>
+<file path=ppt/slides/slide4.xml><?xml version="1.0" encoding="utf-8"?>
+<p:sld xmlns:a="http://schemas.openxmlformats.org/drawingml/2006/main" xmlns:r="http://schemas.openxmlformats.org/officeDocument/2006/relationships" xmlns:p="http://schemas.openxmlformats.org/presentationml/2006/main">
+  <p:cSld>
+    <p:spTree>
+      <p:nvGrpSpPr>
+        <p:cNvPr id="1" name=""/>
+        <p:cNvGrpSpPr/>
+        <p:nvPr/>
+      </p:nvGrpSpPr>
+      <p:grpSpPr>
+        <a:xfrm>
+          <a:off x="0" y="0"/>
+          <a:ext cx="0" cy="0"/>
+          <a:chOff x="0" y="0"/>
+          <a:chExt cx="0" cy="0"/>
+        </a:xfrm>
+      </p:grpSpPr>
+      <p:sp>
+        <p:nvSpPr>
+          <p:cNvPr id="2" name="Заголовок 1"/>
+          <p:cNvSpPr>
+            <a:spLocks noGrp="1"/>
+          </p:cNvSpPr>
+          <p:nvPr>
+            <p:ph type="title"/>
+          </p:nvPr>
+        </p:nvSpPr>
+        <p:spPr/>
+        <p:txBody>
+          <a:bodyPr/>
+          <a:lstStyle/>
+          <a:p>
+            <a:r>
+              <a:rPr lang="af-ZA" b="1" dirty="0"/>
+              <a:t>IP — Internet </a:t>
+            </a:r>
+            <a:r>
+              <a:rPr lang="af-ZA" b="1" dirty="0" smtClean="0"/>
+              <a:t>Protocol</a:t>
+            </a:r>
+            <a:endParaRPr lang="ru-RU" dirty="0"/>
+          </a:p>
+        </p:txBody>
+      </p:sp>
+      <p:pic>
+        <p:nvPicPr>
+          <p:cNvPr id="4" name="Объект 3"/>
+          <p:cNvPicPr>
+            <a:picLocks noGrp="1" noChangeAspect="1"/>
+          </p:cNvPicPr>
+          <p:nvPr>
+            <p:ph idx="1"/>
+          </p:nvPr>
+        </p:nvPicPr>
+        <p:blipFill>
+          <a:blip r:embed="rId2"/>
+          <a:stretch>
+            <a:fillRect/>
+          </a:stretch>
+        </p:blipFill>
+        <p:spPr>
+          <a:xfrm>
+            <a:off x="5874258" y="2398957"/>
+            <a:ext cx="5451924" cy="3541712"/>
+          </a:xfrm>
+          <a:prstGeom prst="rect">
+            <a:avLst/>
+          </a:prstGeom>
+        </p:spPr>
+      </p:pic>
+      <p:sp>
+        <p:nvSpPr>
+          <p:cNvPr id="5" name="TextBox 4"/>
+          <p:cNvSpPr txBox="1"/>
+          <p:nvPr/>
+        </p:nvSpPr>
+        <p:spPr>
+          <a:xfrm>
+            <a:off x="536332" y="2954215"/>
+            <a:ext cx="4806634" cy="2308324"/>
+          </a:xfrm>
+          <a:prstGeom prst="rect">
+            <a:avLst/>
+          </a:prstGeom>
+          <a:noFill/>
+        </p:spPr>
+        <p:txBody>
+          <a:bodyPr wrap="square" rtlCol="0">
+            <a:spAutoFit/>
+          </a:bodyPr>
+          <a:lstStyle/>
+          <a:p>
+            <a:r>
+              <a:rPr lang="ru-RU" dirty="0"/>
+              <a:t>Протокол IP (</a:t>
+            </a:r>
+            <a:r>
+              <a:rPr lang="ru-RU" dirty="0" err="1"/>
+              <a:t>Internet</a:t>
+            </a:r>
+            <a:r>
+              <a:rPr lang="ru-RU" dirty="0"/>
+              <a:t> </a:t>
+            </a:r>
+            <a:r>
+              <a:rPr lang="ru-RU" dirty="0" err="1"/>
+              <a:t>Protocol</a:t>
+            </a:r>
+            <a:r>
+              <a:rPr lang="ru-RU" dirty="0"/>
+              <a:t>) — это "почтальон" интернета, отвечающий за маршрутизацию пакетов данных. Он был создан в 70-х, а в 1983 году стал общеобязательным стандартом, запустив глобальный рост сети. Сегодня мир переходит с версии IPv4 на версию IPv6 из-за нехватки адресов.</a:t>
+            </a:r>
+          </a:p>
+        </p:txBody>
+      </p:sp>
+    </p:spTree>
+    <p:extLst>
+      <p:ext uri="{BB962C8B-B14F-4D97-AF65-F5344CB8AC3E}">
+        <p14:creationId xmlns:p14="http://schemas.microsoft.com/office/powerpoint/2010/main" val="1332780250"/>
+      </p:ext>
+    </p:extLst>
+  </p:cSld>
+  <p:clrMapOvr>
+    <a:masterClrMapping/>
+  </p:clrMapOvr>
+  <p:timing>
+    <p:tnLst>
+      <p:par>
+        <p:cTn id="1" dur="indefinite" restart="never" nodeType="tmRoot"/>
+      </p:par>
+    </p:tnLst>
+  </p:timing>
+</p:sld>
+</file>
+
+<file path=ppt/slides/slide40.xml><?xml version="1.0" encoding="utf-8"?>
 <p:sld xmlns:a="http://schemas.openxmlformats.org/drawingml/2006/main" xmlns:r="http://schemas.openxmlformats.org/officeDocument/2006/relationships" xmlns:p="http://schemas.openxmlformats.org/presentationml/2006/main">
   <p:cSld>
     <p:spTree>
@@ -22033,7 +21961,7 @@
 </p:sld>
 </file>
 
-<file path=ppt/slides/slide42.xml><?xml version="1.0" encoding="utf-8"?>
+<file path=ppt/slides/slide41.xml><?xml version="1.0" encoding="utf-8"?>
 <p:sld xmlns:a="http://schemas.openxmlformats.org/drawingml/2006/main" xmlns:r="http://schemas.openxmlformats.org/officeDocument/2006/relationships" xmlns:p="http://schemas.openxmlformats.org/presentationml/2006/main">
   <p:cSld>
     <p:spTree>
@@ -22708,7 +22636,7 @@
 </p:sld>
 </file>
 
-<file path=ppt/slides/slide43.xml><?xml version="1.0" encoding="utf-8"?>
+<file path=ppt/slides/slide42.xml><?xml version="1.0" encoding="utf-8"?>
 <p:sld xmlns:a="http://schemas.openxmlformats.org/drawingml/2006/main" xmlns:r="http://schemas.openxmlformats.org/officeDocument/2006/relationships" xmlns:p="http://schemas.openxmlformats.org/presentationml/2006/main">
   <p:cSld>
     <p:spTree>
@@ -23419,7 +23347,7 @@
 </p:sld>
 </file>
 
-<file path=ppt/slides/slide44.xml><?xml version="1.0" encoding="utf-8"?>
+<file path=ppt/slides/slide43.xml><?xml version="1.0" encoding="utf-8"?>
 <p:sld xmlns:a="http://schemas.openxmlformats.org/drawingml/2006/main" xmlns:r="http://schemas.openxmlformats.org/officeDocument/2006/relationships" xmlns:p="http://schemas.openxmlformats.org/presentationml/2006/main">
   <p:cSld>
     <p:spTree>
@@ -24179,6 +24107,715 @@
     <p:extLst>
       <p:ext uri="{BB962C8B-B14F-4D97-AF65-F5344CB8AC3E}">
         <p14:creationId xmlns:p14="http://schemas.microsoft.com/office/powerpoint/2010/main" val="2042966901"/>
+      </p:ext>
+    </p:extLst>
+  </p:cSld>
+  <p:clrMapOvr>
+    <a:masterClrMapping/>
+  </p:clrMapOvr>
+  <p:timing>
+    <p:tnLst>
+      <p:par>
+        <p:cTn id="1" dur="indefinite" restart="never" nodeType="tmRoot"/>
+      </p:par>
+    </p:tnLst>
+  </p:timing>
+</p:sld>
+</file>
+
+<file path=ppt/slides/slide44.xml><?xml version="1.0" encoding="utf-8"?>
+<p:sld xmlns:a="http://schemas.openxmlformats.org/drawingml/2006/main" xmlns:r="http://schemas.openxmlformats.org/officeDocument/2006/relationships" xmlns:p="http://schemas.openxmlformats.org/presentationml/2006/main">
+  <p:cSld>
+    <p:spTree>
+      <p:nvGrpSpPr>
+        <p:cNvPr id="1" name=""/>
+        <p:cNvGrpSpPr/>
+        <p:nvPr/>
+      </p:nvGrpSpPr>
+      <p:grpSpPr>
+        <a:xfrm>
+          <a:off x="0" y="0"/>
+          <a:ext cx="0" cy="0"/>
+          <a:chOff x="0" y="0"/>
+          <a:chExt cx="0" cy="0"/>
+        </a:xfrm>
+      </p:grpSpPr>
+      <p:sp>
+        <p:nvSpPr>
+          <p:cNvPr id="2" name="Заголовок 1"/>
+          <p:cNvSpPr>
+            <a:spLocks noGrp="1"/>
+          </p:cNvSpPr>
+          <p:nvPr>
+            <p:ph type="title"/>
+          </p:nvPr>
+        </p:nvSpPr>
+        <p:spPr/>
+        <p:txBody>
+          <a:bodyPr/>
+          <a:lstStyle/>
+          <a:p>
+            <a:r>
+              <a:rPr lang="ru-RU" dirty="0" smtClean="0"/>
+              <a:t>Рекурсивная маршрутизация</a:t>
+            </a:r>
+            <a:endParaRPr lang="ru-RU" dirty="0"/>
+          </a:p>
+        </p:txBody>
+      </p:sp>
+      <p:graphicFrame>
+        <p:nvGraphicFramePr>
+          <p:cNvPr id="4" name="Таблица 3">
+            <a:extLst>
+              <a:ext uri="{FF2B5EF4-FFF2-40B4-BE49-F238E27FC236}">
+                <a16:creationId xmlns:a16="http://schemas.microsoft.com/office/drawing/2014/main" id="{0EA89000-41E3-4BAE-9E14-C9E85237F2C4}"/>
+              </a:ext>
+            </a:extLst>
+          </p:cNvPr>
+          <p:cNvGraphicFramePr>
+            <a:graphicFrameLocks noGrp="1"/>
+          </p:cNvGraphicFramePr>
+          <p:nvPr>
+            <p:extLst>
+              <p:ext uri="{D42A27DB-BD31-4B8C-83A1-F6EECF244321}">
+                <p14:modId xmlns:p14="http://schemas.microsoft.com/office/powerpoint/2010/main" val="2701208118"/>
+              </p:ext>
+            </p:extLst>
+          </p:nvPr>
+        </p:nvGraphicFramePr>
+        <p:xfrm>
+          <a:off x="415600" y="1465007"/>
+          <a:ext cx="5680400" cy="1765215"/>
+        </p:xfrm>
+        <a:graphic>
+          <a:graphicData uri="http://schemas.openxmlformats.org/drawingml/2006/table">
+            <a:tbl>
+              <a:tblPr firstRow="1" bandRow="1">
+                <a:tableStyleId>{5C22544A-7EE6-4342-B048-85BDC9FD1C3A}</a:tableStyleId>
+              </a:tblPr>
+              <a:tblGrid>
+                <a:gridCol w="1887880">
+                  <a:extLst>
+                    <a:ext uri="{9D8B030D-6E8A-4147-A177-3AD203B41FA5}">
+                      <a16:colId xmlns:a16="http://schemas.microsoft.com/office/drawing/2014/main" val="3472456190"/>
+                    </a:ext>
+                  </a:extLst>
+                </a:gridCol>
+                <a:gridCol w="1896260">
+                  <a:extLst>
+                    <a:ext uri="{9D8B030D-6E8A-4147-A177-3AD203B41FA5}">
+                      <a16:colId xmlns:a16="http://schemas.microsoft.com/office/drawing/2014/main" val="984340672"/>
+                    </a:ext>
+                  </a:extLst>
+                </a:gridCol>
+                <a:gridCol w="1896260">
+                  <a:extLst>
+                    <a:ext uri="{9D8B030D-6E8A-4147-A177-3AD203B41FA5}">
+                      <a16:colId xmlns:a16="http://schemas.microsoft.com/office/drawing/2014/main" val="4087065278"/>
+                    </a:ext>
+                  </a:extLst>
+                </a:gridCol>
+              </a:tblGrid>
+              <a:tr h="353043">
+                <a:tc>
+                  <a:txBody>
+                    <a:bodyPr/>
+                    <a:lstStyle/>
+                    <a:p>
+                      <a:r>
+                        <a:rPr lang="ru-RU" sz="1700" b="1" dirty="0"/>
+                        <a:t>Адрес сети</a:t>
+                      </a:r>
+                    </a:p>
+                  </a:txBody>
+                  <a:tcPr marL="88884" marR="88884" marT="44441" marB="44441"/>
+                </a:tc>
+                <a:tc>
+                  <a:txBody>
+                    <a:bodyPr/>
+                    <a:lstStyle/>
+                    <a:p>
+                      <a:r>
+                        <a:rPr lang="ru-RU" sz="1700" b="1" dirty="0"/>
+                        <a:t>Маска сети</a:t>
+                      </a:r>
+                    </a:p>
+                  </a:txBody>
+                  <a:tcPr marL="88884" marR="88884" marT="44441" marB="44441"/>
+                </a:tc>
+                <a:tc>
+                  <a:txBody>
+                    <a:bodyPr/>
+                    <a:lstStyle/>
+                    <a:p>
+                      <a:r>
+                        <a:rPr lang="ru-RU" sz="1700" b="1" dirty="0"/>
+                        <a:t>Шлюз</a:t>
+                      </a:r>
+                    </a:p>
+                  </a:txBody>
+                  <a:tcPr marL="88884" marR="88884" marT="44441" marB="44441"/>
+                </a:tc>
+                <a:extLst>
+                  <a:ext uri="{0D108BD9-81ED-4DB2-BD59-A6C34878D82A}">
+                    <a16:rowId xmlns:a16="http://schemas.microsoft.com/office/drawing/2014/main" val="3356922305"/>
+                  </a:ext>
+                </a:extLst>
+              </a:tr>
+              <a:tr h="353043">
+                <a:tc>
+                  <a:txBody>
+                    <a:bodyPr/>
+                    <a:lstStyle/>
+                    <a:p>
+                      <a:r>
+                        <a:rPr lang="en-US" sz="1700" b="1" dirty="0" smtClean="0"/>
+                        <a:t>10.10.10.1</a:t>
+                      </a:r>
+                      <a:endParaRPr lang="ru-RU" sz="1700" b="1" dirty="0"/>
+                    </a:p>
+                  </a:txBody>
+                  <a:tcPr marL="88884" marR="88884" marT="44441" marB="44441"/>
+                </a:tc>
+                <a:tc>
+                  <a:txBody>
+                    <a:bodyPr/>
+                    <a:lstStyle/>
+                    <a:p>
+                      <a:r>
+                        <a:rPr lang="en-US" sz="1700" b="1" dirty="0" smtClean="0"/>
+                        <a:t>255.255.255.255</a:t>
+                      </a:r>
+                      <a:endParaRPr lang="ru-RU" sz="1700" b="1" dirty="0"/>
+                    </a:p>
+                  </a:txBody>
+                  <a:tcPr marL="88884" marR="88884" marT="44441" marB="44441"/>
+                </a:tc>
+                <a:tc>
+                  <a:txBody>
+                    <a:bodyPr/>
+                    <a:lstStyle/>
+                    <a:p>
+                      <a:pPr marL="0" marR="0" lvl="0" indent="0" algn="l" defTabSz="914400" rtl="0" eaLnBrk="1" fontAlgn="auto" latinLnBrk="0" hangingPunct="1">
+                        <a:lnSpc>
+                          <a:spcPct val="100000"/>
+                        </a:lnSpc>
+                        <a:spcBef>
+                          <a:spcPts val="0"/>
+                        </a:spcBef>
+                        <a:spcAft>
+                          <a:spcPts val="0"/>
+                        </a:spcAft>
+                        <a:buClrTx/>
+                        <a:buSzTx/>
+                        <a:buFontTx/>
+                        <a:buNone/>
+                        <a:tabLst/>
+                        <a:defRPr/>
+                      </a:pPr>
+                      <a:r>
+                        <a:rPr lang="en-US" sz="1700" b="1" dirty="0" smtClean="0"/>
+                        <a:t>192.168.10.1</a:t>
+                      </a:r>
+                      <a:endParaRPr lang="ru-RU" sz="1700" b="1" dirty="0" smtClean="0"/>
+                    </a:p>
+                  </a:txBody>
+                  <a:tcPr marL="88884" marR="88884" marT="44441" marB="44441"/>
+                </a:tc>
+                <a:extLst>
+                  <a:ext uri="{0D108BD9-81ED-4DB2-BD59-A6C34878D82A}">
+                    <a16:rowId xmlns:a16="http://schemas.microsoft.com/office/drawing/2014/main" val="4204986752"/>
+                  </a:ext>
+                </a:extLst>
+              </a:tr>
+              <a:tr h="353043">
+                <a:tc>
+                  <a:txBody>
+                    <a:bodyPr/>
+                    <a:lstStyle/>
+                    <a:p>
+                      <a:r>
+                        <a:rPr lang="en-US" sz="1700" b="1" dirty="0"/>
+                        <a:t>192.168.10.0</a:t>
+                      </a:r>
+                      <a:endParaRPr lang="ru-RU" sz="1700" b="1" dirty="0"/>
+                    </a:p>
+                  </a:txBody>
+                  <a:tcPr marL="88884" marR="88884" marT="44441" marB="44441"/>
+                </a:tc>
+                <a:tc>
+                  <a:txBody>
+                    <a:bodyPr/>
+                    <a:lstStyle/>
+                    <a:p>
+                      <a:r>
+                        <a:rPr lang="en-US" sz="1700" b="1" dirty="0"/>
+                        <a:t>255.255.255.0</a:t>
+                      </a:r>
+                      <a:endParaRPr lang="ru-RU" sz="1700" b="1" dirty="0"/>
+                    </a:p>
+                  </a:txBody>
+                  <a:tcPr marL="88884" marR="88884" marT="44441" marB="44441"/>
+                </a:tc>
+                <a:tc>
+                  <a:txBody>
+                    <a:bodyPr/>
+                    <a:lstStyle/>
+                    <a:p>
+                      <a:r>
+                        <a:rPr lang="en-US" sz="1700" b="1" dirty="0"/>
+                        <a:t>On-Link</a:t>
+                      </a:r>
+                      <a:endParaRPr lang="ru-RU" sz="1700" b="1" dirty="0"/>
+                    </a:p>
+                  </a:txBody>
+                  <a:tcPr marL="88884" marR="88884" marT="44441" marB="44441"/>
+                </a:tc>
+                <a:extLst>
+                  <a:ext uri="{0D108BD9-81ED-4DB2-BD59-A6C34878D82A}">
+                    <a16:rowId xmlns:a16="http://schemas.microsoft.com/office/drawing/2014/main" val="1294112736"/>
+                  </a:ext>
+                </a:extLst>
+              </a:tr>
+              <a:tr h="353043">
+                <a:tc>
+                  <a:txBody>
+                    <a:bodyPr/>
+                    <a:lstStyle/>
+                    <a:p>
+                      <a:r>
+                        <a:rPr lang="en-US" sz="1700" b="1" dirty="0"/>
+                        <a:t>172.20.20.0</a:t>
+                      </a:r>
+                      <a:endParaRPr lang="ru-RU" sz="1700" b="1" dirty="0"/>
+                    </a:p>
+                  </a:txBody>
+                  <a:tcPr marL="88884" marR="88884" marT="44441" marB="44441"/>
+                </a:tc>
+                <a:tc>
+                  <a:txBody>
+                    <a:bodyPr/>
+                    <a:lstStyle/>
+                    <a:p>
+                      <a:r>
+                        <a:rPr lang="en-US" sz="1700" b="1" dirty="0"/>
+                        <a:t>255.255.240.0</a:t>
+                      </a:r>
+                      <a:endParaRPr lang="ru-RU" sz="1700" b="1" dirty="0"/>
+                    </a:p>
+                  </a:txBody>
+                  <a:tcPr marL="88884" marR="88884" marT="44441" marB="44441"/>
+                </a:tc>
+                <a:tc>
+                  <a:txBody>
+                    <a:bodyPr/>
+                    <a:lstStyle/>
+                    <a:p>
+                      <a:r>
+                        <a:rPr lang="en-US" sz="1700" b="1" dirty="0" smtClean="0"/>
+                        <a:t>10.10.10.1</a:t>
+                      </a:r>
+                      <a:endParaRPr lang="ru-RU" sz="1700" b="1" dirty="0"/>
+                    </a:p>
+                  </a:txBody>
+                  <a:tcPr marL="88884" marR="88884" marT="44441" marB="44441"/>
+                </a:tc>
+                <a:extLst>
+                  <a:ext uri="{0D108BD9-81ED-4DB2-BD59-A6C34878D82A}">
+                    <a16:rowId xmlns:a16="http://schemas.microsoft.com/office/drawing/2014/main" val="945439413"/>
+                  </a:ext>
+                </a:extLst>
+              </a:tr>
+              <a:tr h="353043">
+                <a:tc>
+                  <a:txBody>
+                    <a:bodyPr/>
+                    <a:lstStyle/>
+                    <a:p>
+                      <a:r>
+                        <a:rPr lang="ru-RU" sz="1700" b="1" dirty="0"/>
+                        <a:t>0</a:t>
+                      </a:r>
+                      <a:r>
+                        <a:rPr lang="en-US" sz="1700" b="1" dirty="0"/>
+                        <a:t>.0.0.0</a:t>
+                      </a:r>
+                      <a:endParaRPr lang="ru-RU" sz="1700" b="1" dirty="0"/>
+                    </a:p>
+                  </a:txBody>
+                  <a:tcPr marL="88884" marR="88884" marT="44441" marB="44441"/>
+                </a:tc>
+                <a:tc>
+                  <a:txBody>
+                    <a:bodyPr/>
+                    <a:lstStyle/>
+                    <a:p>
+                      <a:pPr marL="0" marR="0" lvl="0" indent="0" algn="l" defTabSz="914400" rtl="0" eaLnBrk="1" fontAlgn="auto" latinLnBrk="0" hangingPunct="1">
+                        <a:lnSpc>
+                          <a:spcPct val="100000"/>
+                        </a:lnSpc>
+                        <a:spcBef>
+                          <a:spcPts val="0"/>
+                        </a:spcBef>
+                        <a:spcAft>
+                          <a:spcPts val="0"/>
+                        </a:spcAft>
+                        <a:buClr>
+                          <a:srgbClr val="000000"/>
+                        </a:buClr>
+                        <a:buSzTx/>
+                        <a:buFont typeface="Arial"/>
+                        <a:buNone/>
+                        <a:tabLst/>
+                        <a:defRPr/>
+                      </a:pPr>
+                      <a:r>
+                        <a:rPr lang="ru-RU" sz="1700" b="1" dirty="0"/>
+                        <a:t>0</a:t>
+                      </a:r>
+                      <a:r>
+                        <a:rPr lang="en-US" sz="1700" b="1" dirty="0"/>
+                        <a:t>.0.0.0</a:t>
+                      </a:r>
+                      <a:endParaRPr lang="ru-RU" sz="1700" b="1" dirty="0"/>
+                    </a:p>
+                  </a:txBody>
+                  <a:tcPr marL="88884" marR="88884" marT="44441" marB="44441"/>
+                </a:tc>
+                <a:tc>
+                  <a:txBody>
+                    <a:bodyPr/>
+                    <a:lstStyle/>
+                    <a:p>
+                      <a:pPr marL="0" marR="0" lvl="0" indent="0" algn="l" defTabSz="914400" rtl="0" eaLnBrk="1" fontAlgn="auto" latinLnBrk="0" hangingPunct="1">
+                        <a:lnSpc>
+                          <a:spcPct val="100000"/>
+                        </a:lnSpc>
+                        <a:spcBef>
+                          <a:spcPts val="0"/>
+                        </a:spcBef>
+                        <a:spcAft>
+                          <a:spcPts val="0"/>
+                        </a:spcAft>
+                        <a:buClr>
+                          <a:srgbClr val="000000"/>
+                        </a:buClr>
+                        <a:buSzTx/>
+                        <a:buFont typeface="Arial"/>
+                        <a:buNone/>
+                        <a:tabLst/>
+                        <a:defRPr/>
+                      </a:pPr>
+                      <a:r>
+                        <a:rPr lang="en-US" sz="1700" b="1" dirty="0"/>
+                        <a:t>192.168.10.1</a:t>
+                      </a:r>
+                      <a:endParaRPr lang="ru-RU" sz="1700" b="1" dirty="0"/>
+                    </a:p>
+                  </a:txBody>
+                  <a:tcPr marL="88884" marR="88884" marT="44441" marB="44441"/>
+                </a:tc>
+                <a:extLst>
+                  <a:ext uri="{0D108BD9-81ED-4DB2-BD59-A6C34878D82A}">
+                    <a16:rowId xmlns:a16="http://schemas.microsoft.com/office/drawing/2014/main" val="3352960580"/>
+                  </a:ext>
+                </a:extLst>
+              </a:tr>
+            </a:tbl>
+          </a:graphicData>
+        </a:graphic>
+      </p:graphicFrame>
+      <p:sp>
+        <p:nvSpPr>
+          <p:cNvPr id="5" name="TextBox 4">
+            <a:extLst>
+              <a:ext uri="{FF2B5EF4-FFF2-40B4-BE49-F238E27FC236}">
+                <a16:creationId xmlns:a16="http://schemas.microsoft.com/office/drawing/2014/main" id="{8ACD1095-2AD0-43CB-82B7-6804A8520F2A}"/>
+              </a:ext>
+            </a:extLst>
+          </p:cNvPr>
+          <p:cNvSpPr txBox="1"/>
+          <p:nvPr/>
+        </p:nvSpPr>
+        <p:spPr>
+          <a:xfrm>
+            <a:off x="6796455" y="1375296"/>
+            <a:ext cx="4979946" cy="1569660"/>
+          </a:xfrm>
+          <a:prstGeom prst="rect">
+            <a:avLst/>
+          </a:prstGeom>
+          <a:noFill/>
+        </p:spPr>
+        <p:txBody>
+          <a:bodyPr wrap="square" rtlCol="0">
+            <a:spAutoFit/>
+          </a:bodyPr>
+          <a:lstStyle/>
+          <a:p>
+            <a:pPr marL="457200" indent="-457200">
+              <a:buFontTx/>
+              <a:buAutoNum type="arabicParenR"/>
+            </a:pPr>
+            <a:r>
+              <a:rPr lang="ru-RU" sz="2400" dirty="0" smtClean="0"/>
+              <a:t>Поиск для </a:t>
+            </a:r>
+            <a:r>
+              <a:rPr lang="ru-RU" sz="2400" b="1" dirty="0"/>
+              <a:t>172</a:t>
+            </a:r>
+            <a:r>
+              <a:rPr lang="en-US" sz="2400" b="1" dirty="0" smtClean="0"/>
+              <a:t>.20.20.201</a:t>
+            </a:r>
+            <a:r>
+              <a:rPr lang="ru-RU" sz="2400" b="1" dirty="0" smtClean="0"/>
+              <a:t>. </a:t>
+            </a:r>
+            <a:r>
+              <a:rPr lang="ru-RU" sz="2400" dirty="0" smtClean="0"/>
+              <a:t>Находим подходящую строк, адрес следующего перехода – </a:t>
+            </a:r>
+            <a:r>
+              <a:rPr lang="ru-RU" sz="2400" b="1" dirty="0" smtClean="0"/>
+              <a:t>10.10.10.1</a:t>
+            </a:r>
+            <a:endParaRPr lang="ru-RU" sz="2400" b="1" dirty="0"/>
+          </a:p>
+        </p:txBody>
+      </p:sp>
+      <p:cxnSp>
+        <p:nvCxnSpPr>
+          <p:cNvPr id="7" name="Прямая со стрелкой 6">
+            <a:extLst>
+              <a:ext uri="{FF2B5EF4-FFF2-40B4-BE49-F238E27FC236}">
+                <a16:creationId xmlns:a16="http://schemas.microsoft.com/office/drawing/2014/main" id="{6AD62E56-A1E2-4CC3-A06F-FACE00E7056B}"/>
+              </a:ext>
+            </a:extLst>
+          </p:cNvPr>
+          <p:cNvCxnSpPr>
+            <a:cxnSpLocks/>
+          </p:cNvCxnSpPr>
+          <p:nvPr/>
+        </p:nvCxnSpPr>
+        <p:spPr>
+          <a:xfrm flipH="1">
+            <a:off x="5874727" y="1828948"/>
+            <a:ext cx="921727" cy="888415"/>
+          </a:xfrm>
+          <a:prstGeom prst="straightConnector1">
+            <a:avLst/>
+          </a:prstGeom>
+          <a:ln>
+            <a:solidFill>
+              <a:srgbClr val="0070C0"/>
+            </a:solidFill>
+            <a:tailEnd type="triangle"/>
+          </a:ln>
+        </p:spPr>
+        <p:style>
+          <a:lnRef idx="1">
+            <a:schemeClr val="accent1"/>
+          </a:lnRef>
+          <a:fillRef idx="0">
+            <a:schemeClr val="accent1"/>
+          </a:fillRef>
+          <a:effectRef idx="0">
+            <a:schemeClr val="accent1"/>
+          </a:effectRef>
+          <a:fontRef idx="minor">
+            <a:schemeClr val="tx1"/>
+          </a:fontRef>
+        </p:style>
+      </p:cxnSp>
+      <p:sp>
+        <p:nvSpPr>
+          <p:cNvPr id="11" name="TextBox 10">
+            <a:extLst>
+              <a:ext uri="{FF2B5EF4-FFF2-40B4-BE49-F238E27FC236}">
+                <a16:creationId xmlns:a16="http://schemas.microsoft.com/office/drawing/2014/main" id="{8ACD1095-2AD0-43CB-82B7-6804A8520F2A}"/>
+              </a:ext>
+            </a:extLst>
+          </p:cNvPr>
+          <p:cNvSpPr txBox="1"/>
+          <p:nvPr/>
+        </p:nvSpPr>
+        <p:spPr>
+          <a:xfrm>
+            <a:off x="6653580" y="4125457"/>
+            <a:ext cx="5265696" cy="1200329"/>
+          </a:xfrm>
+          <a:prstGeom prst="rect">
+            <a:avLst/>
+          </a:prstGeom>
+          <a:noFill/>
+        </p:spPr>
+        <p:txBody>
+          <a:bodyPr wrap="square" rtlCol="0">
+            <a:spAutoFit/>
+          </a:bodyPr>
+          <a:lstStyle/>
+          <a:p>
+            <a:r>
+              <a:rPr lang="en-US" sz="2400" dirty="0"/>
+              <a:t>2</a:t>
+            </a:r>
+            <a:r>
+              <a:rPr lang="ru-RU" sz="2400" dirty="0" smtClean="0"/>
+              <a:t>) Снова поиск – теперь для </a:t>
+            </a:r>
+            <a:r>
+              <a:rPr lang="ru-RU" sz="2400" b="1" dirty="0" smtClean="0"/>
+              <a:t>10.10.10.1</a:t>
+            </a:r>
+            <a:r>
+              <a:rPr lang="ru-RU" sz="2400" dirty="0" smtClean="0"/>
+              <a:t>. Подходящий маршрут через </a:t>
+            </a:r>
+            <a:r>
+              <a:rPr lang="ru-RU" sz="2400" b="1" dirty="0" smtClean="0"/>
+              <a:t>192.168.10.1</a:t>
+            </a:r>
+            <a:endParaRPr lang="ru-RU" sz="2400" b="1" dirty="0"/>
+          </a:p>
+        </p:txBody>
+      </p:sp>
+      <p:cxnSp>
+        <p:nvCxnSpPr>
+          <p:cNvPr id="12" name="Прямая со стрелкой 11">
+            <a:extLst>
+              <a:ext uri="{FF2B5EF4-FFF2-40B4-BE49-F238E27FC236}">
+                <a16:creationId xmlns:a16="http://schemas.microsoft.com/office/drawing/2014/main" id="{6AD62E56-A1E2-4CC3-A06F-FACE00E7056B}"/>
+              </a:ext>
+            </a:extLst>
+          </p:cNvPr>
+          <p:cNvCxnSpPr>
+            <a:cxnSpLocks/>
+          </p:cNvCxnSpPr>
+          <p:nvPr/>
+        </p:nvCxnSpPr>
+        <p:spPr>
+          <a:xfrm flipH="1" flipV="1">
+            <a:off x="6224954" y="1986539"/>
+            <a:ext cx="571500" cy="2049130"/>
+          </a:xfrm>
+          <a:prstGeom prst="straightConnector1">
+            <a:avLst/>
+          </a:prstGeom>
+          <a:ln>
+            <a:tailEnd type="triangle"/>
+          </a:ln>
+        </p:spPr>
+        <p:style>
+          <a:lnRef idx="1">
+            <a:schemeClr val="accent1"/>
+          </a:lnRef>
+          <a:fillRef idx="0">
+            <a:schemeClr val="accent1"/>
+          </a:fillRef>
+          <a:effectRef idx="0">
+            <a:schemeClr val="accent1"/>
+          </a:effectRef>
+          <a:fontRef idx="minor">
+            <a:schemeClr val="tx1"/>
+          </a:fontRef>
+        </p:style>
+      </p:cxnSp>
+      <p:sp>
+        <p:nvSpPr>
+          <p:cNvPr id="15" name="TextBox 14">
+            <a:extLst>
+              <a:ext uri="{FF2B5EF4-FFF2-40B4-BE49-F238E27FC236}">
+                <a16:creationId xmlns:a16="http://schemas.microsoft.com/office/drawing/2014/main" id="{8ACD1095-2AD0-43CB-82B7-6804A8520F2A}"/>
+              </a:ext>
+            </a:extLst>
+          </p:cNvPr>
+          <p:cNvSpPr txBox="1"/>
+          <p:nvPr/>
+        </p:nvSpPr>
+        <p:spPr>
+          <a:xfrm>
+            <a:off x="959258" y="4125457"/>
+            <a:ext cx="5265696" cy="1569660"/>
+          </a:xfrm>
+          <a:prstGeom prst="rect">
+            <a:avLst/>
+          </a:prstGeom>
+          <a:noFill/>
+        </p:spPr>
+        <p:txBody>
+          <a:bodyPr wrap="square" rtlCol="0">
+            <a:spAutoFit/>
+          </a:bodyPr>
+          <a:lstStyle/>
+          <a:p>
+            <a:r>
+              <a:rPr lang="ru-RU" sz="2400" dirty="0" smtClean="0"/>
+              <a:t>3) Теперь поиск для </a:t>
+            </a:r>
+            <a:r>
+              <a:rPr lang="ru-RU" sz="2400" b="1" dirty="0" smtClean="0"/>
+              <a:t>192.168.10.1</a:t>
+            </a:r>
+            <a:r>
+              <a:rPr lang="ru-RU" sz="2400" dirty="0" smtClean="0"/>
+              <a:t>. Подходящий маршрут ведет в интерфейс. Завершение рекурсивного поиска.</a:t>
+            </a:r>
+            <a:endParaRPr lang="ru-RU" sz="2400" dirty="0"/>
+          </a:p>
+        </p:txBody>
+      </p:sp>
+      <p:cxnSp>
+        <p:nvCxnSpPr>
+          <p:cNvPr id="16" name="Прямая со стрелкой 15">
+            <a:extLst>
+              <a:ext uri="{FF2B5EF4-FFF2-40B4-BE49-F238E27FC236}">
+                <a16:creationId xmlns:a16="http://schemas.microsoft.com/office/drawing/2014/main" id="{6AD62E56-A1E2-4CC3-A06F-FACE00E7056B}"/>
+              </a:ext>
+            </a:extLst>
+          </p:cNvPr>
+          <p:cNvCxnSpPr>
+            <a:cxnSpLocks/>
+          </p:cNvCxnSpPr>
+          <p:nvPr/>
+        </p:nvCxnSpPr>
+        <p:spPr>
+          <a:xfrm flipH="1" flipV="1">
+            <a:off x="5548495" y="2373923"/>
+            <a:ext cx="176396" cy="1661746"/>
+          </a:xfrm>
+          <a:prstGeom prst="straightConnector1">
+            <a:avLst/>
+          </a:prstGeom>
+          <a:ln>
+            <a:solidFill>
+              <a:schemeClr val="accent4">
+                <a:lumMod val="75000"/>
+              </a:schemeClr>
+            </a:solidFill>
+            <a:tailEnd type="triangle"/>
+          </a:ln>
+        </p:spPr>
+        <p:style>
+          <a:lnRef idx="1">
+            <a:schemeClr val="accent1"/>
+          </a:lnRef>
+          <a:fillRef idx="0">
+            <a:schemeClr val="accent1"/>
+          </a:fillRef>
+          <a:effectRef idx="0">
+            <a:schemeClr val="accent1"/>
+          </a:effectRef>
+          <a:fontRef idx="minor">
+            <a:schemeClr val="tx1"/>
+          </a:fontRef>
+        </p:style>
+      </p:cxnSp>
+    </p:spTree>
+    <p:extLst>
+      <p:ext uri="{BB962C8B-B14F-4D97-AF65-F5344CB8AC3E}">
+        <p14:creationId xmlns:p14="http://schemas.microsoft.com/office/powerpoint/2010/main" val="2080748610"/>
       </p:ext>
     </p:extLst>
   </p:cSld>
@@ -27229,678 +27866,130 @@
           <a:p>
             <a:r>
               <a:rPr lang="ru-RU" dirty="0" smtClean="0"/>
-              <a:t>Рекурсивная маршрутизация</a:t>
+              <a:t>Выбор лучшего маршрута</a:t>
             </a:r>
             <a:endParaRPr lang="ru-RU" dirty="0"/>
           </a:p>
         </p:txBody>
       </p:sp>
-      <p:graphicFrame>
-        <p:nvGraphicFramePr>
-          <p:cNvPr id="4" name="Таблица 3">
-            <a:extLst>
-              <a:ext uri="{FF2B5EF4-FFF2-40B4-BE49-F238E27FC236}">
-                <a16:creationId xmlns:a16="http://schemas.microsoft.com/office/drawing/2014/main" id="{0EA89000-41E3-4BAE-9E14-C9E85237F2C4}"/>
-              </a:ext>
-            </a:extLst>
-          </p:cNvPr>
-          <p:cNvGraphicFramePr>
-            <a:graphicFrameLocks noGrp="1"/>
-          </p:cNvGraphicFramePr>
-          <p:nvPr>
-            <p:extLst>
-              <p:ext uri="{D42A27DB-BD31-4B8C-83A1-F6EECF244321}">
-                <p14:modId xmlns:p14="http://schemas.microsoft.com/office/powerpoint/2010/main" val="2701208118"/>
-              </p:ext>
-            </p:extLst>
-          </p:nvPr>
-        </p:nvGraphicFramePr>
-        <p:xfrm>
-          <a:off x="415600" y="1465007"/>
-          <a:ext cx="5680400" cy="1765215"/>
-        </p:xfrm>
-        <a:graphic>
-          <a:graphicData uri="http://schemas.openxmlformats.org/drawingml/2006/table">
-            <a:tbl>
-              <a:tblPr firstRow="1" bandRow="1">
-                <a:tableStyleId>{5C22544A-7EE6-4342-B048-85BDC9FD1C3A}</a:tableStyleId>
-              </a:tblPr>
-              <a:tblGrid>
-                <a:gridCol w="1887880">
-                  <a:extLst>
-                    <a:ext uri="{9D8B030D-6E8A-4147-A177-3AD203B41FA5}">
-                      <a16:colId xmlns:a16="http://schemas.microsoft.com/office/drawing/2014/main" val="3472456190"/>
-                    </a:ext>
-                  </a:extLst>
-                </a:gridCol>
-                <a:gridCol w="1896260">
-                  <a:extLst>
-                    <a:ext uri="{9D8B030D-6E8A-4147-A177-3AD203B41FA5}">
-                      <a16:colId xmlns:a16="http://schemas.microsoft.com/office/drawing/2014/main" val="984340672"/>
-                    </a:ext>
-                  </a:extLst>
-                </a:gridCol>
-                <a:gridCol w="1896260">
-                  <a:extLst>
-                    <a:ext uri="{9D8B030D-6E8A-4147-A177-3AD203B41FA5}">
-                      <a16:colId xmlns:a16="http://schemas.microsoft.com/office/drawing/2014/main" val="4087065278"/>
-                    </a:ext>
-                  </a:extLst>
-                </a:gridCol>
-              </a:tblGrid>
-              <a:tr h="353043">
-                <a:tc>
-                  <a:txBody>
-                    <a:bodyPr/>
-                    <a:lstStyle/>
-                    <a:p>
-                      <a:r>
-                        <a:rPr lang="ru-RU" sz="1700" b="1" dirty="0"/>
-                        <a:t>Адрес сети</a:t>
-                      </a:r>
-                    </a:p>
-                  </a:txBody>
-                  <a:tcPr marL="88884" marR="88884" marT="44441" marB="44441"/>
-                </a:tc>
-                <a:tc>
-                  <a:txBody>
-                    <a:bodyPr/>
-                    <a:lstStyle/>
-                    <a:p>
-                      <a:r>
-                        <a:rPr lang="ru-RU" sz="1700" b="1" dirty="0"/>
-                        <a:t>Маска сети</a:t>
-                      </a:r>
-                    </a:p>
-                  </a:txBody>
-                  <a:tcPr marL="88884" marR="88884" marT="44441" marB="44441"/>
-                </a:tc>
-                <a:tc>
-                  <a:txBody>
-                    <a:bodyPr/>
-                    <a:lstStyle/>
-                    <a:p>
-                      <a:r>
-                        <a:rPr lang="ru-RU" sz="1700" b="1" dirty="0"/>
-                        <a:t>Шлюз</a:t>
-                      </a:r>
-                    </a:p>
-                  </a:txBody>
-                  <a:tcPr marL="88884" marR="88884" marT="44441" marB="44441"/>
-                </a:tc>
-                <a:extLst>
-                  <a:ext uri="{0D108BD9-81ED-4DB2-BD59-A6C34878D82A}">
-                    <a16:rowId xmlns:a16="http://schemas.microsoft.com/office/drawing/2014/main" val="3356922305"/>
-                  </a:ext>
-                </a:extLst>
-              </a:tr>
-              <a:tr h="353043">
-                <a:tc>
-                  <a:txBody>
-                    <a:bodyPr/>
-                    <a:lstStyle/>
-                    <a:p>
-                      <a:r>
-                        <a:rPr lang="en-US" sz="1700" b="1" dirty="0" smtClean="0"/>
-                        <a:t>10.10.10.1</a:t>
-                      </a:r>
-                      <a:endParaRPr lang="ru-RU" sz="1700" b="1" dirty="0"/>
-                    </a:p>
-                  </a:txBody>
-                  <a:tcPr marL="88884" marR="88884" marT="44441" marB="44441"/>
-                </a:tc>
-                <a:tc>
-                  <a:txBody>
-                    <a:bodyPr/>
-                    <a:lstStyle/>
-                    <a:p>
-                      <a:r>
-                        <a:rPr lang="en-US" sz="1700" b="1" dirty="0" smtClean="0"/>
-                        <a:t>255.255.255.255</a:t>
-                      </a:r>
-                      <a:endParaRPr lang="ru-RU" sz="1700" b="1" dirty="0"/>
-                    </a:p>
-                  </a:txBody>
-                  <a:tcPr marL="88884" marR="88884" marT="44441" marB="44441"/>
-                </a:tc>
-                <a:tc>
-                  <a:txBody>
-                    <a:bodyPr/>
-                    <a:lstStyle/>
-                    <a:p>
-                      <a:pPr marL="0" marR="0" lvl="0" indent="0" algn="l" defTabSz="914400" rtl="0" eaLnBrk="1" fontAlgn="auto" latinLnBrk="0" hangingPunct="1">
-                        <a:lnSpc>
-                          <a:spcPct val="100000"/>
-                        </a:lnSpc>
-                        <a:spcBef>
-                          <a:spcPts val="0"/>
-                        </a:spcBef>
-                        <a:spcAft>
-                          <a:spcPts val="0"/>
-                        </a:spcAft>
-                        <a:buClrTx/>
-                        <a:buSzTx/>
-                        <a:buFontTx/>
-                        <a:buNone/>
-                        <a:tabLst/>
-                        <a:defRPr/>
-                      </a:pPr>
-                      <a:r>
-                        <a:rPr lang="en-US" sz="1700" b="1" dirty="0" smtClean="0"/>
-                        <a:t>192.168.10.1</a:t>
-                      </a:r>
-                      <a:endParaRPr lang="ru-RU" sz="1700" b="1" dirty="0" smtClean="0"/>
-                    </a:p>
-                  </a:txBody>
-                  <a:tcPr marL="88884" marR="88884" marT="44441" marB="44441"/>
-                </a:tc>
-                <a:extLst>
-                  <a:ext uri="{0D108BD9-81ED-4DB2-BD59-A6C34878D82A}">
-                    <a16:rowId xmlns:a16="http://schemas.microsoft.com/office/drawing/2014/main" val="4204986752"/>
-                  </a:ext>
-                </a:extLst>
-              </a:tr>
-              <a:tr h="353043">
-                <a:tc>
-                  <a:txBody>
-                    <a:bodyPr/>
-                    <a:lstStyle/>
-                    <a:p>
-                      <a:r>
-                        <a:rPr lang="en-US" sz="1700" b="1" dirty="0"/>
-                        <a:t>192.168.10.0</a:t>
-                      </a:r>
-                      <a:endParaRPr lang="ru-RU" sz="1700" b="1" dirty="0"/>
-                    </a:p>
-                  </a:txBody>
-                  <a:tcPr marL="88884" marR="88884" marT="44441" marB="44441"/>
-                </a:tc>
-                <a:tc>
-                  <a:txBody>
-                    <a:bodyPr/>
-                    <a:lstStyle/>
-                    <a:p>
-                      <a:r>
-                        <a:rPr lang="en-US" sz="1700" b="1" dirty="0"/>
-                        <a:t>255.255.255.0</a:t>
-                      </a:r>
-                      <a:endParaRPr lang="ru-RU" sz="1700" b="1" dirty="0"/>
-                    </a:p>
-                  </a:txBody>
-                  <a:tcPr marL="88884" marR="88884" marT="44441" marB="44441"/>
-                </a:tc>
-                <a:tc>
-                  <a:txBody>
-                    <a:bodyPr/>
-                    <a:lstStyle/>
-                    <a:p>
-                      <a:r>
-                        <a:rPr lang="en-US" sz="1700" b="1" dirty="0"/>
-                        <a:t>On-Link</a:t>
-                      </a:r>
-                      <a:endParaRPr lang="ru-RU" sz="1700" b="1" dirty="0"/>
-                    </a:p>
-                  </a:txBody>
-                  <a:tcPr marL="88884" marR="88884" marT="44441" marB="44441"/>
-                </a:tc>
-                <a:extLst>
-                  <a:ext uri="{0D108BD9-81ED-4DB2-BD59-A6C34878D82A}">
-                    <a16:rowId xmlns:a16="http://schemas.microsoft.com/office/drawing/2014/main" val="1294112736"/>
-                  </a:ext>
-                </a:extLst>
-              </a:tr>
-              <a:tr h="353043">
-                <a:tc>
-                  <a:txBody>
-                    <a:bodyPr/>
-                    <a:lstStyle/>
-                    <a:p>
-                      <a:r>
-                        <a:rPr lang="en-US" sz="1700" b="1" dirty="0"/>
-                        <a:t>172.20.20.0</a:t>
-                      </a:r>
-                      <a:endParaRPr lang="ru-RU" sz="1700" b="1" dirty="0"/>
-                    </a:p>
-                  </a:txBody>
-                  <a:tcPr marL="88884" marR="88884" marT="44441" marB="44441"/>
-                </a:tc>
-                <a:tc>
-                  <a:txBody>
-                    <a:bodyPr/>
-                    <a:lstStyle/>
-                    <a:p>
-                      <a:r>
-                        <a:rPr lang="en-US" sz="1700" b="1" dirty="0"/>
-                        <a:t>255.255.240.0</a:t>
-                      </a:r>
-                      <a:endParaRPr lang="ru-RU" sz="1700" b="1" dirty="0"/>
-                    </a:p>
-                  </a:txBody>
-                  <a:tcPr marL="88884" marR="88884" marT="44441" marB="44441"/>
-                </a:tc>
-                <a:tc>
-                  <a:txBody>
-                    <a:bodyPr/>
-                    <a:lstStyle/>
-                    <a:p>
-                      <a:r>
-                        <a:rPr lang="en-US" sz="1700" b="1" dirty="0" smtClean="0"/>
-                        <a:t>10.10.10.1</a:t>
-                      </a:r>
-                      <a:endParaRPr lang="ru-RU" sz="1700" b="1" dirty="0"/>
-                    </a:p>
-                  </a:txBody>
-                  <a:tcPr marL="88884" marR="88884" marT="44441" marB="44441"/>
-                </a:tc>
-                <a:extLst>
-                  <a:ext uri="{0D108BD9-81ED-4DB2-BD59-A6C34878D82A}">
-                    <a16:rowId xmlns:a16="http://schemas.microsoft.com/office/drawing/2014/main" val="945439413"/>
-                  </a:ext>
-                </a:extLst>
-              </a:tr>
-              <a:tr h="353043">
-                <a:tc>
-                  <a:txBody>
-                    <a:bodyPr/>
-                    <a:lstStyle/>
-                    <a:p>
-                      <a:r>
-                        <a:rPr lang="ru-RU" sz="1700" b="1" dirty="0"/>
-                        <a:t>0</a:t>
-                      </a:r>
-                      <a:r>
-                        <a:rPr lang="en-US" sz="1700" b="1" dirty="0"/>
-                        <a:t>.0.0.0</a:t>
-                      </a:r>
-                      <a:endParaRPr lang="ru-RU" sz="1700" b="1" dirty="0"/>
-                    </a:p>
-                  </a:txBody>
-                  <a:tcPr marL="88884" marR="88884" marT="44441" marB="44441"/>
-                </a:tc>
-                <a:tc>
-                  <a:txBody>
-                    <a:bodyPr/>
-                    <a:lstStyle/>
-                    <a:p>
-                      <a:pPr marL="0" marR="0" lvl="0" indent="0" algn="l" defTabSz="914400" rtl="0" eaLnBrk="1" fontAlgn="auto" latinLnBrk="0" hangingPunct="1">
-                        <a:lnSpc>
-                          <a:spcPct val="100000"/>
-                        </a:lnSpc>
-                        <a:spcBef>
-                          <a:spcPts val="0"/>
-                        </a:spcBef>
-                        <a:spcAft>
-                          <a:spcPts val="0"/>
-                        </a:spcAft>
-                        <a:buClr>
-                          <a:srgbClr val="000000"/>
-                        </a:buClr>
-                        <a:buSzTx/>
-                        <a:buFont typeface="Arial"/>
-                        <a:buNone/>
-                        <a:tabLst/>
-                        <a:defRPr/>
-                      </a:pPr>
-                      <a:r>
-                        <a:rPr lang="ru-RU" sz="1700" b="1" dirty="0"/>
-                        <a:t>0</a:t>
-                      </a:r>
-                      <a:r>
-                        <a:rPr lang="en-US" sz="1700" b="1" dirty="0"/>
-                        <a:t>.0.0.0</a:t>
-                      </a:r>
-                      <a:endParaRPr lang="ru-RU" sz="1700" b="1" dirty="0"/>
-                    </a:p>
-                  </a:txBody>
-                  <a:tcPr marL="88884" marR="88884" marT="44441" marB="44441"/>
-                </a:tc>
-                <a:tc>
-                  <a:txBody>
-                    <a:bodyPr/>
-                    <a:lstStyle/>
-                    <a:p>
-                      <a:pPr marL="0" marR="0" lvl="0" indent="0" algn="l" defTabSz="914400" rtl="0" eaLnBrk="1" fontAlgn="auto" latinLnBrk="0" hangingPunct="1">
-                        <a:lnSpc>
-                          <a:spcPct val="100000"/>
-                        </a:lnSpc>
-                        <a:spcBef>
-                          <a:spcPts val="0"/>
-                        </a:spcBef>
-                        <a:spcAft>
-                          <a:spcPts val="0"/>
-                        </a:spcAft>
-                        <a:buClr>
-                          <a:srgbClr val="000000"/>
-                        </a:buClr>
-                        <a:buSzTx/>
-                        <a:buFont typeface="Arial"/>
-                        <a:buNone/>
-                        <a:tabLst/>
-                        <a:defRPr/>
-                      </a:pPr>
-                      <a:r>
-                        <a:rPr lang="en-US" sz="1700" b="1" dirty="0"/>
-                        <a:t>192.168.10.1</a:t>
-                      </a:r>
-                      <a:endParaRPr lang="ru-RU" sz="1700" b="1" dirty="0"/>
-                    </a:p>
-                  </a:txBody>
-                  <a:tcPr marL="88884" marR="88884" marT="44441" marB="44441"/>
-                </a:tc>
-                <a:extLst>
-                  <a:ext uri="{0D108BD9-81ED-4DB2-BD59-A6C34878D82A}">
-                    <a16:rowId xmlns:a16="http://schemas.microsoft.com/office/drawing/2014/main" val="3352960580"/>
-                  </a:ext>
-                </a:extLst>
-              </a:tr>
-            </a:tbl>
-          </a:graphicData>
-        </a:graphic>
-      </p:graphicFrame>
       <p:sp>
         <p:nvSpPr>
-          <p:cNvPr id="5" name="TextBox 4">
-            <a:extLst>
-              <a:ext uri="{FF2B5EF4-FFF2-40B4-BE49-F238E27FC236}">
-                <a16:creationId xmlns:a16="http://schemas.microsoft.com/office/drawing/2014/main" id="{8ACD1095-2AD0-43CB-82B7-6804A8520F2A}"/>
-              </a:ext>
-            </a:extLst>
-          </p:cNvPr>
-          <p:cNvSpPr txBox="1"/>
-          <p:nvPr/>
+          <p:cNvPr id="3" name="Текст 2"/>
+          <p:cNvSpPr>
+            <a:spLocks noGrp="1"/>
+          </p:cNvSpPr>
+          <p:nvPr>
+            <p:ph type="body" idx="1"/>
+          </p:nvPr>
         </p:nvSpPr>
         <p:spPr>
           <a:xfrm>
-            <a:off x="6796455" y="1375296"/>
-            <a:ext cx="4979946" cy="1569660"/>
+            <a:off x="415600" y="2626879"/>
+            <a:ext cx="11360800" cy="2868313"/>
           </a:xfrm>
-          <a:prstGeom prst="rect">
-            <a:avLst/>
-          </a:prstGeom>
-          <a:noFill/>
         </p:spPr>
         <p:txBody>
-          <a:bodyPr wrap="square" rtlCol="0">
-            <a:spAutoFit/>
-          </a:bodyPr>
+          <a:bodyPr/>
           <a:lstStyle/>
           <a:p>
-            <a:pPr marL="457200" indent="-457200">
-              <a:buFontTx/>
-              <a:buAutoNum type="arabicParenR"/>
+            <a:pPr marL="609596" indent="-457200">
+              <a:buFont typeface="+mj-lt"/>
+              <a:buAutoNum type="arabicPeriod"/>
             </a:pPr>
             <a:r>
-              <a:rPr lang="ru-RU" sz="2400" dirty="0" smtClean="0"/>
-              <a:t>Поиск для </a:t>
-            </a:r>
-            <a:r>
-              <a:rPr lang="ru-RU" sz="2400" b="1" dirty="0"/>
-              <a:t>172</a:t>
-            </a:r>
-            <a:r>
-              <a:rPr lang="en-US" sz="2400" b="1" dirty="0" smtClean="0"/>
-              <a:t>.20.20.201</a:t>
-            </a:r>
-            <a:r>
-              <a:rPr lang="ru-RU" sz="2400" b="1" dirty="0" smtClean="0"/>
-              <a:t>. </a:t>
-            </a:r>
-            <a:r>
-              <a:rPr lang="ru-RU" sz="2400" dirty="0" smtClean="0"/>
-              <a:t>Находим подходящую строк, адрес следующего перехода – </a:t>
-            </a:r>
-            <a:r>
-              <a:rPr lang="ru-RU" sz="2400" b="1" dirty="0" smtClean="0"/>
-              <a:t>10.10.10.1</a:t>
-            </a:r>
-            <a:endParaRPr lang="ru-RU" sz="2400" b="1" dirty="0"/>
+              <a:rPr lang="af-ZA" b="1" dirty="0"/>
+              <a:t>Longest Prefix </a:t>
+            </a:r>
+            <a:r>
+              <a:rPr lang="af-ZA" b="1" dirty="0" smtClean="0"/>
+              <a:t>Match </a:t>
+            </a:r>
+            <a:r>
+              <a:rPr lang="ru-RU" dirty="0" smtClean="0"/>
+              <a:t>– самый длинный префикс.</a:t>
+            </a:r>
+            <a:endParaRPr lang="ru-RU" b="1" dirty="0" smtClean="0"/>
+          </a:p>
+          <a:p>
+            <a:pPr marL="609596" indent="-457200">
+              <a:buFont typeface="+mj-lt"/>
+              <a:buAutoNum type="arabicPeriod"/>
+            </a:pPr>
+            <a:r>
+              <a:rPr lang="af-ZA" b="1" dirty="0"/>
+              <a:t>Administrative Distance (AD)</a:t>
+            </a:r>
+            <a:r>
+              <a:rPr lang="af-ZA" dirty="0"/>
+              <a:t> </a:t>
+            </a:r>
+            <a:r>
+              <a:rPr lang="ru-RU" dirty="0" smtClean="0"/>
+              <a:t>- степень доверия к источнику маршрута:</a:t>
+            </a:r>
+          </a:p>
+          <a:p>
+            <a:pPr marL="1253047" lvl="1" indent="-457200">
+              <a:buFont typeface="+mj-lt"/>
+              <a:buAutoNum type="arabicPeriod"/>
+            </a:pPr>
+            <a:r>
+              <a:rPr lang="en-US" dirty="0" smtClean="0"/>
+              <a:t>Connected</a:t>
+            </a:r>
+          </a:p>
+          <a:p>
+            <a:pPr marL="1253047" lvl="1" indent="-457200">
+              <a:buFont typeface="+mj-lt"/>
+              <a:buAutoNum type="arabicPeriod"/>
+            </a:pPr>
+            <a:r>
+              <a:rPr lang="en-US" dirty="0" smtClean="0"/>
+              <a:t>Static</a:t>
+            </a:r>
+          </a:p>
+          <a:p>
+            <a:pPr marL="1253047" lvl="1" indent="-457200">
+              <a:buFont typeface="+mj-lt"/>
+              <a:buAutoNum type="arabicPeriod"/>
+            </a:pPr>
+            <a:r>
+              <a:rPr lang="en-US" dirty="0" smtClean="0"/>
+              <a:t>Dynamic</a:t>
+            </a:r>
+            <a:endParaRPr lang="ru-RU" dirty="0" smtClean="0"/>
+          </a:p>
+          <a:p>
+            <a:pPr marL="609596" indent="-457200">
+              <a:buFont typeface="+mj-lt"/>
+              <a:buAutoNum type="arabicPeriod"/>
+            </a:pPr>
+            <a:r>
+              <a:rPr lang="en-US" b="1" dirty="0" smtClean="0"/>
+              <a:t>Metric </a:t>
+            </a:r>
+            <a:r>
+              <a:rPr lang="en-US" dirty="0" smtClean="0"/>
+              <a:t>– </a:t>
+            </a:r>
+            <a:r>
+              <a:rPr lang="ru-RU" dirty="0" smtClean="0"/>
+              <a:t>стоимость маршрута внутри источника.</a:t>
+            </a:r>
+            <a:endParaRPr lang="ru-RU" b="1" dirty="0"/>
           </a:p>
         </p:txBody>
       </p:sp>
-      <p:cxnSp>
-        <p:nvCxnSpPr>
-          <p:cNvPr id="7" name="Прямая со стрелкой 6">
-            <a:extLst>
-              <a:ext uri="{FF2B5EF4-FFF2-40B4-BE49-F238E27FC236}">
-                <a16:creationId xmlns:a16="http://schemas.microsoft.com/office/drawing/2014/main" id="{6AD62E56-A1E2-4CC3-A06F-FACE00E7056B}"/>
-              </a:ext>
-            </a:extLst>
-          </p:cNvPr>
-          <p:cNvCxnSpPr>
-            <a:cxnSpLocks/>
-          </p:cNvCxnSpPr>
-          <p:nvPr/>
-        </p:nvCxnSpPr>
-        <p:spPr>
-          <a:xfrm flipH="1">
-            <a:off x="5874727" y="1828948"/>
-            <a:ext cx="921727" cy="888415"/>
-          </a:xfrm>
-          <a:prstGeom prst="straightConnector1">
-            <a:avLst/>
-          </a:prstGeom>
-          <a:ln>
-            <a:solidFill>
-              <a:srgbClr val="0070C0"/>
-            </a:solidFill>
-            <a:tailEnd type="triangle"/>
-          </a:ln>
-        </p:spPr>
-        <p:style>
-          <a:lnRef idx="1">
-            <a:schemeClr val="accent1"/>
-          </a:lnRef>
-          <a:fillRef idx="0">
-            <a:schemeClr val="accent1"/>
-          </a:fillRef>
-          <a:effectRef idx="0">
-            <a:schemeClr val="accent1"/>
-          </a:effectRef>
-          <a:fontRef idx="minor">
-            <a:schemeClr val="tx1"/>
-          </a:fontRef>
-        </p:style>
-      </p:cxnSp>
-      <p:sp>
-        <p:nvSpPr>
-          <p:cNvPr id="11" name="TextBox 10">
-            <a:extLst>
-              <a:ext uri="{FF2B5EF4-FFF2-40B4-BE49-F238E27FC236}">
-                <a16:creationId xmlns:a16="http://schemas.microsoft.com/office/drawing/2014/main" id="{8ACD1095-2AD0-43CB-82B7-6804A8520F2A}"/>
-              </a:ext>
-            </a:extLst>
-          </p:cNvPr>
-          <p:cNvSpPr txBox="1"/>
-          <p:nvPr/>
-        </p:nvSpPr>
-        <p:spPr>
-          <a:xfrm>
-            <a:off x="6653580" y="4125457"/>
-            <a:ext cx="5265696" cy="1200329"/>
-          </a:xfrm>
-          <a:prstGeom prst="rect">
-            <a:avLst/>
-          </a:prstGeom>
-          <a:noFill/>
-        </p:spPr>
-        <p:txBody>
-          <a:bodyPr wrap="square" rtlCol="0">
-            <a:spAutoFit/>
-          </a:bodyPr>
-          <a:lstStyle/>
-          <a:p>
-            <a:r>
-              <a:rPr lang="en-US" sz="2400" dirty="0"/>
-              <a:t>2</a:t>
-            </a:r>
-            <a:r>
-              <a:rPr lang="ru-RU" sz="2400" dirty="0" smtClean="0"/>
-              <a:t>) Снова поиск – теперь для </a:t>
-            </a:r>
-            <a:r>
-              <a:rPr lang="ru-RU" sz="2400" b="1" dirty="0" smtClean="0"/>
-              <a:t>10.10.10.1</a:t>
-            </a:r>
-            <a:r>
-              <a:rPr lang="ru-RU" sz="2400" dirty="0" smtClean="0"/>
-              <a:t>. Подходящий маршрут через </a:t>
-            </a:r>
-            <a:r>
-              <a:rPr lang="ru-RU" sz="2400" b="1" dirty="0" smtClean="0"/>
-              <a:t>192.168.10.1</a:t>
-            </a:r>
-            <a:endParaRPr lang="ru-RU" sz="2400" b="1" dirty="0"/>
-          </a:p>
-        </p:txBody>
-      </p:sp>
-      <p:cxnSp>
-        <p:nvCxnSpPr>
-          <p:cNvPr id="12" name="Прямая со стрелкой 11">
-            <a:extLst>
-              <a:ext uri="{FF2B5EF4-FFF2-40B4-BE49-F238E27FC236}">
-                <a16:creationId xmlns:a16="http://schemas.microsoft.com/office/drawing/2014/main" id="{6AD62E56-A1E2-4CC3-A06F-FACE00E7056B}"/>
-              </a:ext>
-            </a:extLst>
-          </p:cNvPr>
-          <p:cNvCxnSpPr>
-            <a:cxnSpLocks/>
-          </p:cNvCxnSpPr>
-          <p:nvPr/>
-        </p:nvCxnSpPr>
-        <p:spPr>
-          <a:xfrm flipH="1" flipV="1">
-            <a:off x="6224954" y="1986539"/>
-            <a:ext cx="571500" cy="2049130"/>
-          </a:xfrm>
-          <a:prstGeom prst="straightConnector1">
-            <a:avLst/>
-          </a:prstGeom>
-          <a:ln>
-            <a:tailEnd type="triangle"/>
-          </a:ln>
-        </p:spPr>
-        <p:style>
-          <a:lnRef idx="1">
-            <a:schemeClr val="accent1"/>
-          </a:lnRef>
-          <a:fillRef idx="0">
-            <a:schemeClr val="accent1"/>
-          </a:fillRef>
-          <a:effectRef idx="0">
-            <a:schemeClr val="accent1"/>
-          </a:effectRef>
-          <a:fontRef idx="minor">
-            <a:schemeClr val="tx1"/>
-          </a:fontRef>
-        </p:style>
-      </p:cxnSp>
-      <p:sp>
-        <p:nvSpPr>
-          <p:cNvPr id="15" name="TextBox 14">
-            <a:extLst>
-              <a:ext uri="{FF2B5EF4-FFF2-40B4-BE49-F238E27FC236}">
-                <a16:creationId xmlns:a16="http://schemas.microsoft.com/office/drawing/2014/main" id="{8ACD1095-2AD0-43CB-82B7-6804A8520F2A}"/>
-              </a:ext>
-            </a:extLst>
-          </p:cNvPr>
-          <p:cNvSpPr txBox="1"/>
-          <p:nvPr/>
-        </p:nvSpPr>
-        <p:spPr>
-          <a:xfrm>
-            <a:off x="959258" y="4125457"/>
-            <a:ext cx="5265696" cy="1569660"/>
-          </a:xfrm>
-          <a:prstGeom prst="rect">
-            <a:avLst/>
-          </a:prstGeom>
-          <a:noFill/>
-        </p:spPr>
-        <p:txBody>
-          <a:bodyPr wrap="square" rtlCol="0">
-            <a:spAutoFit/>
-          </a:bodyPr>
-          <a:lstStyle/>
-          <a:p>
-            <a:r>
-              <a:rPr lang="ru-RU" sz="2400" dirty="0" smtClean="0"/>
-              <a:t>3) Теперь поиск для </a:t>
-            </a:r>
-            <a:r>
-              <a:rPr lang="ru-RU" sz="2400" b="1" dirty="0" smtClean="0"/>
-              <a:t>192.168.10.1</a:t>
-            </a:r>
-            <a:r>
-              <a:rPr lang="ru-RU" sz="2400" dirty="0" smtClean="0"/>
-              <a:t>. Подходящий маршрут ведет в интерфейс. Завершение рекурсивного поиска.</a:t>
-            </a:r>
-            <a:endParaRPr lang="ru-RU" sz="2400" dirty="0"/>
-          </a:p>
-        </p:txBody>
-      </p:sp>
-      <p:cxnSp>
-        <p:nvCxnSpPr>
-          <p:cNvPr id="16" name="Прямая со стрелкой 15">
-            <a:extLst>
-              <a:ext uri="{FF2B5EF4-FFF2-40B4-BE49-F238E27FC236}">
-                <a16:creationId xmlns:a16="http://schemas.microsoft.com/office/drawing/2014/main" id="{6AD62E56-A1E2-4CC3-A06F-FACE00E7056B}"/>
-              </a:ext>
-            </a:extLst>
-          </p:cNvPr>
-          <p:cNvCxnSpPr>
-            <a:cxnSpLocks/>
-          </p:cNvCxnSpPr>
-          <p:nvPr/>
-        </p:nvCxnSpPr>
-        <p:spPr>
-          <a:xfrm flipH="1" flipV="1">
-            <a:off x="5548495" y="2373923"/>
-            <a:ext cx="176396" cy="1661746"/>
-          </a:xfrm>
-          <a:prstGeom prst="straightConnector1">
-            <a:avLst/>
-          </a:prstGeom>
-          <a:ln>
-            <a:solidFill>
-              <a:schemeClr val="accent4">
-                <a:lumMod val="75000"/>
-              </a:schemeClr>
-            </a:solidFill>
-            <a:tailEnd type="triangle"/>
-          </a:ln>
-        </p:spPr>
-        <p:style>
-          <a:lnRef idx="1">
-            <a:schemeClr val="accent1"/>
-          </a:lnRef>
-          <a:fillRef idx="0">
-            <a:schemeClr val="accent1"/>
-          </a:fillRef>
-          <a:effectRef idx="0">
-            <a:schemeClr val="accent1"/>
-          </a:effectRef>
-          <a:fontRef idx="minor">
-            <a:schemeClr val="tx1"/>
-          </a:fontRef>
-        </p:style>
-      </p:cxnSp>
     </p:spTree>
     <p:extLst>
       <p:ext uri="{BB962C8B-B14F-4D97-AF65-F5344CB8AC3E}">
-        <p14:creationId xmlns:p14="http://schemas.microsoft.com/office/powerpoint/2010/main" val="2080748610"/>
+        <p14:creationId xmlns:p14="http://schemas.microsoft.com/office/powerpoint/2010/main" val="1842315263"/>
       </p:ext>
     </p:extLst>
   </p:cSld>
   <p:clrMapOvr>
     <a:masterClrMapping/>
   </p:clrMapOvr>
-  <p:timing>
-    <p:tnLst>
-      <p:par>
-        <p:cTn id="1" dur="indefinite" restart="never" nodeType="tmRoot"/>
-      </p:par>
-    </p:tnLst>
-  </p:timing>
 </p:sld>
 </file>
 
@@ -28021,14 +28110,23 @@
             <p:ph type="title"/>
           </p:nvPr>
         </p:nvSpPr>
-        <p:spPr/>
+        <p:spPr>
+          <a:xfrm>
+            <a:off x="1141412" y="293203"/>
+            <a:ext cx="9905998" cy="1478570"/>
+          </a:xfrm>
+        </p:spPr>
         <p:txBody>
           <a:bodyPr/>
           <a:lstStyle/>
           <a:p>
             <a:r>
               <a:rPr lang="ru-RU" dirty="0" smtClean="0"/>
-              <a:t>Агрегация маршрутов</a:t>
+              <a:t>Агрегация (суммирование) маршрутов - </a:t>
+            </a:r>
+            <a:r>
+              <a:rPr lang="af-ZA" dirty="0"/>
+              <a:t>route aggregation</a:t>
             </a:r>
             <a:endParaRPr lang="ru-RU" dirty="0"/>
           </a:p>
@@ -28052,14 +28150,42 @@
         </p:blipFill>
         <p:spPr>
           <a:xfrm>
-            <a:off x="2257666" y="1845041"/>
-            <a:ext cx="7673491" cy="4577979"/>
+            <a:off x="2776110" y="2778273"/>
+            <a:ext cx="6639780" cy="3961270"/>
           </a:xfrm>
           <a:prstGeom prst="rect">
             <a:avLst/>
           </a:prstGeom>
         </p:spPr>
       </p:pic>
+      <p:sp>
+        <p:nvSpPr>
+          <p:cNvPr id="4" name="Прямоугольник 3"/>
+          <p:cNvSpPr/>
+          <p:nvPr/>
+        </p:nvSpPr>
+        <p:spPr>
+          <a:xfrm>
+            <a:off x="1141412" y="1850506"/>
+            <a:ext cx="10490811" cy="646331"/>
+          </a:xfrm>
+          <a:prstGeom prst="rect">
+            <a:avLst/>
+          </a:prstGeom>
+        </p:spPr>
+        <p:txBody>
+          <a:bodyPr wrap="square">
+            <a:spAutoFit/>
+          </a:bodyPr>
+          <a:lstStyle/>
+          <a:p>
+            <a:r>
+              <a:rPr lang="ru-RU" dirty="0"/>
+              <a:t>Агрегация маршрутов (суммирование) — это метод объединения нескольких конкретных сетевых подсетей в одну общую запись для уменьшения размера таблицы маршрутизации.</a:t>
+            </a:r>
+          </a:p>
+        </p:txBody>
+      </p:sp>
     </p:spTree>
     <p:extLst>
       <p:ext uri="{BB962C8B-B14F-4D97-AF65-F5344CB8AC3E}">
@@ -28074,6 +28200,92 @@
 </file>
 
 <file path=ppt/slides/slide51.xml><?xml version="1.0" encoding="utf-8"?>
+<p:sld xmlns:a="http://schemas.openxmlformats.org/drawingml/2006/main" xmlns:r="http://schemas.openxmlformats.org/officeDocument/2006/relationships" xmlns:p="http://schemas.openxmlformats.org/presentationml/2006/main">
+  <p:cSld>
+    <p:spTree>
+      <p:nvGrpSpPr>
+        <p:cNvPr id="1" name=""/>
+        <p:cNvGrpSpPr/>
+        <p:nvPr/>
+      </p:nvGrpSpPr>
+      <p:grpSpPr>
+        <a:xfrm>
+          <a:off x="0" y="0"/>
+          <a:ext cx="0" cy="0"/>
+          <a:chOff x="0" y="0"/>
+          <a:chExt cx="0" cy="0"/>
+        </a:xfrm>
+      </p:grpSpPr>
+      <p:sp>
+        <p:nvSpPr>
+          <p:cNvPr id="2" name="Заголовок 1"/>
+          <p:cNvSpPr>
+            <a:spLocks noGrp="1"/>
+          </p:cNvSpPr>
+          <p:nvPr>
+            <p:ph type="title"/>
+          </p:nvPr>
+        </p:nvSpPr>
+        <p:spPr/>
+        <p:txBody>
+          <a:bodyPr/>
+          <a:lstStyle/>
+          <a:p>
+            <a:r>
+              <a:rPr lang="en-US" dirty="0" smtClean="0"/>
+              <a:t>TTL – Time to live</a:t>
+            </a:r>
+            <a:endParaRPr lang="ru-RU" dirty="0"/>
+          </a:p>
+        </p:txBody>
+      </p:sp>
+      <p:pic>
+        <p:nvPicPr>
+          <p:cNvPr id="4" name="Объект 3"/>
+          <p:cNvPicPr>
+            <a:picLocks noGrp="1" noChangeAspect="1"/>
+          </p:cNvPicPr>
+          <p:nvPr>
+            <p:ph idx="1"/>
+          </p:nvPr>
+        </p:nvPicPr>
+        <p:blipFill>
+          <a:blip r:embed="rId2"/>
+          <a:stretch>
+            <a:fillRect/>
+          </a:stretch>
+        </p:blipFill>
+        <p:spPr>
+          <a:xfrm>
+            <a:off x="2289743" y="2249488"/>
+            <a:ext cx="7609339" cy="3541712"/>
+          </a:xfrm>
+          <a:prstGeom prst="rect">
+            <a:avLst/>
+          </a:prstGeom>
+        </p:spPr>
+      </p:pic>
+    </p:spTree>
+    <p:extLst>
+      <p:ext uri="{BB962C8B-B14F-4D97-AF65-F5344CB8AC3E}">
+        <p14:creationId xmlns:p14="http://schemas.microsoft.com/office/powerpoint/2010/main" val="662635192"/>
+      </p:ext>
+    </p:extLst>
+  </p:cSld>
+  <p:clrMapOvr>
+    <a:masterClrMapping/>
+  </p:clrMapOvr>
+  <p:timing>
+    <p:tnLst>
+      <p:par>
+        <p:cTn id="1" dur="indefinite" restart="never" nodeType="tmRoot"/>
+      </p:par>
+    </p:tnLst>
+  </p:timing>
+</p:sld>
+</file>
+
+<file path=ppt/slides/slide52.xml><?xml version="1.0" encoding="utf-8"?>
 <p:sld xmlns:a="http://schemas.openxmlformats.org/drawingml/2006/main" xmlns:r="http://schemas.openxmlformats.org/officeDocument/2006/relationships" xmlns:p="http://schemas.openxmlformats.org/presentationml/2006/main">
   <p:cSld>
     <p:spTree>
@@ -28176,7 +28388,7 @@
 </p:sld>
 </file>
 
-<file path=ppt/slides/slide52.xml><?xml version="1.0" encoding="utf-8"?>
+<file path=ppt/slides/slide53.xml><?xml version="1.0" encoding="utf-8"?>
 <p:sld xmlns:a="http://schemas.openxmlformats.org/drawingml/2006/main" xmlns:r="http://schemas.openxmlformats.org/officeDocument/2006/relationships" xmlns:p="http://schemas.openxmlformats.org/presentationml/2006/main">
   <p:cSld>
     <p:spTree>
@@ -28255,7 +28467,7 @@
 </p:sld>
 </file>
 
-<file path=ppt/slides/slide53.xml><?xml version="1.0" encoding="utf-8"?>
+<file path=ppt/slides/slide54.xml><?xml version="1.0" encoding="utf-8"?>
 <p:sld xmlns:a="http://schemas.openxmlformats.org/drawingml/2006/main" xmlns:r="http://schemas.openxmlformats.org/officeDocument/2006/relationships" xmlns:p="http://schemas.openxmlformats.org/presentationml/2006/main">
   <p:cSld>
     <p:spTree>
@@ -28338,7 +28550,7 @@
 </p:sld>
 </file>
 
-<file path=ppt/slides/slide54.xml><?xml version="1.0" encoding="utf-8"?>
+<file path=ppt/slides/slide55.xml><?xml version="1.0" encoding="utf-8"?>
 <p:sld xmlns:a="http://schemas.openxmlformats.org/drawingml/2006/main" xmlns:r="http://schemas.openxmlformats.org/officeDocument/2006/relationships" xmlns:p="http://schemas.openxmlformats.org/presentationml/2006/main">
   <p:cSld>
     <p:spTree>
@@ -28421,7 +28633,7 @@
 </p:sld>
 </file>
 
-<file path=ppt/slides/slide55.xml><?xml version="1.0" encoding="utf-8"?>
+<file path=ppt/slides/slide56.xml><?xml version="1.0" encoding="utf-8"?>
 <p:sld xmlns:a="http://schemas.openxmlformats.org/drawingml/2006/main" xmlns:r="http://schemas.openxmlformats.org/officeDocument/2006/relationships" xmlns:p="http://schemas.openxmlformats.org/presentationml/2006/main">
   <p:cSld>
     <p:spTree>
@@ -28504,7 +28716,7 @@
 </p:sld>
 </file>
 
-<file path=ppt/slides/slide56.xml><?xml version="1.0" encoding="utf-8"?>
+<file path=ppt/slides/slide57.xml><?xml version="1.0" encoding="utf-8"?>
 <p:sld xmlns:a="http://schemas.openxmlformats.org/drawingml/2006/main" xmlns:r="http://schemas.openxmlformats.org/officeDocument/2006/relationships" xmlns:p="http://schemas.openxmlformats.org/presentationml/2006/main">
   <p:cSld>
     <p:spTree>
@@ -28587,7 +28799,7 @@
 </p:sld>
 </file>
 
-<file path=ppt/slides/slide57.xml><?xml version="1.0" encoding="utf-8"?>
+<file path=ppt/slides/slide58.xml><?xml version="1.0" encoding="utf-8"?>
 <p:sld xmlns:a="http://schemas.openxmlformats.org/drawingml/2006/main" xmlns:r="http://schemas.openxmlformats.org/officeDocument/2006/relationships" xmlns:p="http://schemas.openxmlformats.org/presentationml/2006/main">
   <p:cSld>
     <p:spTree>
@@ -28666,102 +28878,6 @@
 </p:sld>
 </file>
 
-<file path=ppt/slides/slide58.xml><?xml version="1.0" encoding="utf-8"?>
-<p:sld xmlns:a="http://schemas.openxmlformats.org/drawingml/2006/main" xmlns:r="http://schemas.openxmlformats.org/officeDocument/2006/relationships" xmlns:p="http://schemas.openxmlformats.org/presentationml/2006/main">
-  <p:cSld>
-    <p:spTree>
-      <p:nvGrpSpPr>
-        <p:cNvPr id="1" name=""/>
-        <p:cNvGrpSpPr/>
-        <p:nvPr/>
-      </p:nvGrpSpPr>
-      <p:grpSpPr>
-        <a:xfrm>
-          <a:off x="0" y="0"/>
-          <a:ext cx="0" cy="0"/>
-          <a:chOff x="0" y="0"/>
-          <a:chExt cx="0" cy="0"/>
-        </a:xfrm>
-      </p:grpSpPr>
-      <p:sp>
-        <p:nvSpPr>
-          <p:cNvPr id="2" name="Заголовок 1"/>
-          <p:cNvSpPr>
-            <a:spLocks noGrp="1"/>
-          </p:cNvSpPr>
-          <p:nvPr>
-            <p:ph type="title"/>
-          </p:nvPr>
-        </p:nvSpPr>
-        <p:spPr/>
-        <p:txBody>
-          <a:bodyPr/>
-          <a:lstStyle/>
-          <a:p>
-            <a:r>
-              <a:rPr lang="ru-RU" b="1" dirty="0"/>
-              <a:t>Протокол ARP (Связка L3 и L2)</a:t>
-            </a:r>
-            <a:endParaRPr lang="ru-RU" dirty="0"/>
-          </a:p>
-        </p:txBody>
-      </p:sp>
-      <p:pic>
-        <p:nvPicPr>
-          <p:cNvPr id="1026" name="Picture 2" descr="ARP (Address Resolution Protocol) explained"/>
-          <p:cNvPicPr>
-            <a:picLocks noGrp="1" noChangeAspect="1" noChangeArrowheads="1"/>
-          </p:cNvPicPr>
-          <p:nvPr>
-            <p:ph idx="1"/>
-          </p:nvPr>
-        </p:nvPicPr>
-        <p:blipFill>
-          <a:blip r:embed="rId2">
-            <a:extLst>
-              <a:ext uri="{28A0092B-C50C-407E-A947-70E740481C1C}">
-                <a14:useLocalDpi xmlns:a14="http://schemas.microsoft.com/office/drawing/2010/main" val="0"/>
-              </a:ext>
-            </a:extLst>
-          </a:blip>
-          <a:srcRect/>
-          <a:stretch>
-            <a:fillRect/>
-          </a:stretch>
-        </p:blipFill>
-        <p:spPr bwMode="auto">
-          <a:xfrm>
-            <a:off x="3618828" y="1724452"/>
-            <a:ext cx="4954344" cy="4725475"/>
-          </a:xfrm>
-          <a:prstGeom prst="rect">
-            <a:avLst/>
-          </a:prstGeom>
-          <a:noFill/>
-          <a:extLst>
-            <a:ext uri="{909E8E84-426E-40DD-AFC4-6F175D3DCCD1}">
-              <a14:hiddenFill xmlns:a14="http://schemas.microsoft.com/office/drawing/2010/main">
-                <a:solidFill>
-                  <a:srgbClr val="FFFFFF"/>
-                </a:solidFill>
-              </a14:hiddenFill>
-            </a:ext>
-          </a:extLst>
-        </p:spPr>
-      </p:pic>
-    </p:spTree>
-    <p:extLst>
-      <p:ext uri="{BB962C8B-B14F-4D97-AF65-F5344CB8AC3E}">
-        <p14:creationId xmlns:p14="http://schemas.microsoft.com/office/powerpoint/2010/main" val="2500466163"/>
-      </p:ext>
-    </p:extLst>
-  </p:cSld>
-  <p:clrMapOvr>
-    <a:masterClrMapping/>
-  </p:clrMapOvr>
-</p:sld>
-</file>
-
 <file path=ppt/slides/slide59.xml><?xml version="1.0" encoding="utf-8"?>
 <p:sld xmlns:a="http://schemas.openxmlformats.org/drawingml/2006/main" xmlns:r="http://schemas.openxmlformats.org/officeDocument/2006/relationships" xmlns:p="http://schemas.openxmlformats.org/presentationml/2006/main">
   <p:cSld>
@@ -28804,34 +28920,129 @@
       </p:sp>
       <p:pic>
         <p:nvPicPr>
-          <p:cNvPr id="6" name="Объект 5"/>
+          <p:cNvPr id="1026" name="Picture 2" descr="ARP (Address Resolution Protocol) explained"/>
           <p:cNvPicPr>
-            <a:picLocks noGrp="1" noChangeAspect="1"/>
+            <a:picLocks noGrp="1" noChangeAspect="1" noChangeArrowheads="1"/>
           </p:cNvPicPr>
           <p:nvPr>
             <p:ph idx="1"/>
           </p:nvPr>
         </p:nvPicPr>
         <p:blipFill>
-          <a:blip r:embed="rId2"/>
+          <a:blip r:embed="rId2">
+            <a:extLst>
+              <a:ext uri="{28A0092B-C50C-407E-A947-70E740481C1C}">
+                <a14:useLocalDpi xmlns:a14="http://schemas.microsoft.com/office/drawing/2010/main" val="0"/>
+              </a:ext>
+            </a:extLst>
+          </a:blip>
+          <a:srcRect/>
           <a:stretch>
             <a:fillRect/>
           </a:stretch>
         </p:blipFill>
+        <p:spPr bwMode="auto">
+          <a:xfrm>
+            <a:off x="1140068" y="1790953"/>
+            <a:ext cx="4954344" cy="4725475"/>
+          </a:xfrm>
+          <a:prstGeom prst="rect">
+            <a:avLst/>
+          </a:prstGeom>
+          <a:noFill/>
+          <a:extLst>
+            <a:ext uri="{909E8E84-426E-40DD-AFC4-6F175D3DCCD1}">
+              <a14:hiddenFill xmlns:a14="http://schemas.microsoft.com/office/drawing/2010/main">
+                <a:solidFill>
+                  <a:srgbClr val="FFFFFF"/>
+                </a:solidFill>
+              </a14:hiddenFill>
+            </a:ext>
+          </a:extLst>
+        </p:spPr>
+      </p:pic>
+      <p:sp>
+        <p:nvSpPr>
+          <p:cNvPr id="4" name="Прямоугольник 3"/>
+          <p:cNvSpPr/>
+          <p:nvPr/>
+        </p:nvSpPr>
         <p:spPr>
           <a:xfrm>
-            <a:off x="3331653" y="2029680"/>
-            <a:ext cx="5528693" cy="4424794"/>
+            <a:off x="6239608" y="1706868"/>
+            <a:ext cx="5621216" cy="4893647"/>
           </a:xfrm>
           <a:prstGeom prst="rect">
             <a:avLst/>
           </a:prstGeom>
         </p:spPr>
-      </p:pic>
+        <p:txBody>
+          <a:bodyPr wrap="square">
+            <a:spAutoFit/>
+          </a:bodyPr>
+          <a:lstStyle/>
+          <a:p>
+            <a:pPr marL="285750" indent="-285750">
+              <a:buFont typeface="Arial" panose="020B0604020202020204" pitchFamily="34" charset="0"/>
+              <a:buChar char="•"/>
+            </a:pPr>
+            <a:r>
+              <a:rPr lang="ru-RU" sz="2400" dirty="0"/>
+              <a:t>Устройство, отправляющее запрос, проверяет свой ARP-</a:t>
+            </a:r>
+            <a:r>
+              <a:rPr lang="ru-RU" sz="2400" dirty="0" err="1"/>
+              <a:t>кеш</a:t>
+            </a:r>
+            <a:r>
+              <a:rPr lang="ru-RU" sz="2400" dirty="0"/>
+              <a:t> на наличие соответствия.</a:t>
+            </a:r>
+          </a:p>
+          <a:p>
+            <a:pPr marL="285750" indent="-285750">
+              <a:buFont typeface="Arial" panose="020B0604020202020204" pitchFamily="34" charset="0"/>
+              <a:buChar char="•"/>
+            </a:pPr>
+            <a:r>
+              <a:rPr lang="ru-RU" sz="2400" dirty="0"/>
+              <a:t>Если запись не найдена, в сеть рассылается ARP-запрос с запросом о MAC-адресе, связанном с целевым IP-адресом.</a:t>
+            </a:r>
+          </a:p>
+          <a:p>
+            <a:pPr marL="285750" indent="-285750">
+              <a:buFont typeface="Arial" panose="020B0604020202020204" pitchFamily="34" charset="0"/>
+              <a:buChar char="•"/>
+            </a:pPr>
+            <a:r>
+              <a:rPr lang="ru-RU" sz="2400" dirty="0"/>
+              <a:t>Устройство с соответствующим IP-адресом отвечает ARP-ответом, содержащим его MAC-адрес.</a:t>
+            </a:r>
+          </a:p>
+          <a:p>
+            <a:pPr marL="285750" indent="-285750">
+              <a:buFont typeface="Arial" panose="020B0604020202020204" pitchFamily="34" charset="0"/>
+              <a:buChar char="•"/>
+            </a:pPr>
+            <a:r>
+              <a:rPr lang="ru-RU" sz="2400" dirty="0"/>
+              <a:t>Запрашивающее устройство сохраняет эту информацию в своём ARP-</a:t>
+            </a:r>
+            <a:r>
+              <a:rPr lang="ru-RU" sz="2400" dirty="0" err="1"/>
+              <a:t>кеше</a:t>
+            </a:r>
+            <a:r>
+              <a:rPr lang="ru-RU" sz="2400" dirty="0"/>
+              <a:t> для будущей связи.</a:t>
+            </a:r>
+          </a:p>
+        </p:txBody>
+      </p:sp>
     </p:spTree>
     <p:extLst>
       <p:ext uri="{BB962C8B-B14F-4D97-AF65-F5344CB8AC3E}">
-        <p14:creationId xmlns:p14="http://schemas.microsoft.com/office/powerpoint/2010/main" val="952751798"/>
+        <p14:creationId xmlns:p14="http://schemas.microsoft.com/office/powerpoint/2010/main" val="2500466163"/>
       </p:ext>
     </p:extLst>
   </p:cSld>
@@ -28964,102 +29175,43 @@
           <a:lstStyle/>
           <a:p>
             <a:r>
-              <a:rPr lang="af-ZA" b="1" dirty="0"/>
-              <a:t>Gratuitous </a:t>
-            </a:r>
-            <a:r>
-              <a:rPr lang="af-ZA" b="1" dirty="0" smtClean="0"/>
-              <a:t>ARP</a:t>
+              <a:rPr lang="ru-RU" b="1" dirty="0"/>
+              <a:t>Протокол ARP (Связка L3 и L2)</a:t>
             </a:r>
             <a:endParaRPr lang="ru-RU" dirty="0"/>
           </a:p>
         </p:txBody>
       </p:sp>
-      <p:sp>
-        <p:nvSpPr>
-          <p:cNvPr id="3" name="Объект 2"/>
-          <p:cNvSpPr>
-            <a:spLocks noGrp="1"/>
-          </p:cNvSpPr>
+      <p:pic>
+        <p:nvPicPr>
+          <p:cNvPr id="6" name="Объект 5"/>
+          <p:cNvPicPr>
+            <a:picLocks noGrp="1" noChangeAspect="1"/>
+          </p:cNvPicPr>
           <p:nvPr>
             <p:ph idx="1"/>
           </p:nvPr>
-        </p:nvSpPr>
-        <p:spPr/>
-        <p:txBody>
-          <a:bodyPr>
-            <a:normAutofit/>
-          </a:bodyPr>
-          <a:lstStyle/>
-          <a:p>
-            <a:r>
-              <a:rPr lang="ru-RU" dirty="0"/>
-              <a:t>Д</a:t>
-            </a:r>
-            <a:r>
-              <a:rPr lang="ru-RU" dirty="0" smtClean="0"/>
-              <a:t>ля </a:t>
-            </a:r>
-            <a:r>
-              <a:rPr lang="ru-RU" dirty="0"/>
-              <a:t>проверки дублирования адресов в сети. </a:t>
-            </a:r>
-            <a:endParaRPr lang="ru-RU" dirty="0" smtClean="0"/>
-          </a:p>
-          <a:p>
-            <a:r>
-              <a:rPr lang="ru-RU" dirty="0" smtClean="0"/>
-              <a:t>Чтобы </a:t>
-            </a:r>
-            <a:r>
-              <a:rPr lang="ru-RU" dirty="0"/>
-              <a:t>объявить свой новый идентификатор канальной среды. </a:t>
-            </a:r>
-            <a:endParaRPr lang="ru-RU" dirty="0" smtClean="0"/>
-          </a:p>
-          <a:p>
-            <a:r>
-              <a:rPr lang="ru-RU" dirty="0" err="1" smtClean="0"/>
-              <a:t>Hot</a:t>
-            </a:r>
-            <a:r>
-              <a:rPr lang="ru-RU" dirty="0" smtClean="0"/>
-              <a:t> </a:t>
-            </a:r>
-            <a:r>
-              <a:rPr lang="ru-RU" dirty="0" err="1"/>
-              <a:t>Standby</a:t>
-            </a:r>
-            <a:r>
-              <a:rPr lang="ru-RU" dirty="0"/>
-              <a:t> </a:t>
-            </a:r>
-            <a:r>
-              <a:rPr lang="ru-RU" dirty="0" err="1"/>
-              <a:t>Router</a:t>
-            </a:r>
-            <a:r>
-              <a:rPr lang="ru-RU" dirty="0"/>
-              <a:t> </a:t>
-            </a:r>
-            <a:r>
-              <a:rPr lang="ru-RU" dirty="0" err="1"/>
-              <a:t>Protocol</a:t>
-            </a:r>
-            <a:r>
-              <a:rPr lang="ru-RU" dirty="0"/>
-              <a:t> (HSRP).</a:t>
-            </a:r>
-          </a:p>
-          <a:p>
-            <a:endParaRPr lang="ru-RU" dirty="0"/>
-          </a:p>
-        </p:txBody>
-      </p:sp>
+        </p:nvPicPr>
+        <p:blipFill>
+          <a:blip r:embed="rId2"/>
+          <a:stretch>
+            <a:fillRect/>
+          </a:stretch>
+        </p:blipFill>
+        <p:spPr>
+          <a:xfrm>
+            <a:off x="3330065" y="1982788"/>
+            <a:ext cx="5528693" cy="4424794"/>
+          </a:xfrm>
+          <a:prstGeom prst="rect">
+            <a:avLst/>
+          </a:prstGeom>
+        </p:spPr>
+      </p:pic>
     </p:spTree>
     <p:extLst>
       <p:ext uri="{BB962C8B-B14F-4D97-AF65-F5344CB8AC3E}">
-        <p14:creationId xmlns:p14="http://schemas.microsoft.com/office/powerpoint/2010/main" val="2514396938"/>
+        <p14:creationId xmlns:p14="http://schemas.microsoft.com/office/powerpoint/2010/main" val="952751798"/>
       </p:ext>
     </p:extLst>
   </p:cSld>
@@ -29102,6 +29254,154 @@
           <a:lstStyle/>
           <a:p>
             <a:r>
+              <a:rPr lang="af-ZA" b="1" dirty="0"/>
+              <a:t>Gratuitous </a:t>
+            </a:r>
+            <a:r>
+              <a:rPr lang="af-ZA" b="1" dirty="0" smtClean="0"/>
+              <a:t>ARP</a:t>
+            </a:r>
+            <a:endParaRPr lang="ru-RU" dirty="0"/>
+          </a:p>
+        </p:txBody>
+      </p:sp>
+      <p:sp>
+        <p:nvSpPr>
+          <p:cNvPr id="3" name="Объект 2"/>
+          <p:cNvSpPr>
+            <a:spLocks noGrp="1"/>
+          </p:cNvSpPr>
+          <p:nvPr>
+            <p:ph idx="1"/>
+          </p:nvPr>
+        </p:nvSpPr>
+        <p:spPr>
+          <a:xfrm>
+            <a:off x="1141412" y="2249487"/>
+            <a:ext cx="9905999" cy="1838936"/>
+          </a:xfrm>
+        </p:spPr>
+        <p:txBody>
+          <a:bodyPr>
+            <a:normAutofit/>
+          </a:bodyPr>
+          <a:lstStyle/>
+          <a:p>
+            <a:r>
+              <a:rPr lang="ru-RU" dirty="0"/>
+              <a:t>Д</a:t>
+            </a:r>
+            <a:r>
+              <a:rPr lang="ru-RU" dirty="0" smtClean="0"/>
+              <a:t>ля </a:t>
+            </a:r>
+            <a:r>
+              <a:rPr lang="ru-RU" dirty="0"/>
+              <a:t>проверки дублирования адресов в сети. </a:t>
+            </a:r>
+            <a:endParaRPr lang="ru-RU" dirty="0" smtClean="0"/>
+          </a:p>
+          <a:p>
+            <a:r>
+              <a:rPr lang="ru-RU" dirty="0" smtClean="0"/>
+              <a:t>Чтобы </a:t>
+            </a:r>
+            <a:r>
+              <a:rPr lang="ru-RU" dirty="0"/>
+              <a:t>объявить свой новый идентификатор канальной среды. </a:t>
+            </a:r>
+            <a:endParaRPr lang="ru-RU" dirty="0" smtClean="0"/>
+          </a:p>
+          <a:p>
+            <a:r>
+              <a:rPr lang="ru-RU" dirty="0" err="1" smtClean="0"/>
+              <a:t>Hot</a:t>
+            </a:r>
+            <a:r>
+              <a:rPr lang="ru-RU" dirty="0" smtClean="0"/>
+              <a:t> </a:t>
+            </a:r>
+            <a:r>
+              <a:rPr lang="ru-RU" dirty="0" err="1"/>
+              <a:t>Standby</a:t>
+            </a:r>
+            <a:r>
+              <a:rPr lang="ru-RU" dirty="0"/>
+              <a:t> </a:t>
+            </a:r>
+            <a:r>
+              <a:rPr lang="ru-RU" dirty="0" err="1"/>
+              <a:t>Router</a:t>
+            </a:r>
+            <a:r>
+              <a:rPr lang="ru-RU" dirty="0"/>
+              <a:t> </a:t>
+            </a:r>
+            <a:r>
+              <a:rPr lang="ru-RU" dirty="0" err="1"/>
+              <a:t>Protocol</a:t>
+            </a:r>
+            <a:r>
+              <a:rPr lang="ru-RU" dirty="0"/>
+              <a:t> (HSRP).</a:t>
+            </a:r>
+          </a:p>
+          <a:p>
+            <a:endParaRPr lang="ru-RU" dirty="0"/>
+          </a:p>
+        </p:txBody>
+      </p:sp>
+    </p:spTree>
+    <p:extLst>
+      <p:ext uri="{BB962C8B-B14F-4D97-AF65-F5344CB8AC3E}">
+        <p14:creationId xmlns:p14="http://schemas.microsoft.com/office/powerpoint/2010/main" val="2514396938"/>
+      </p:ext>
+    </p:extLst>
+  </p:cSld>
+  <p:clrMapOvr>
+    <a:masterClrMapping/>
+  </p:clrMapOvr>
+</p:sld>
+</file>
+
+<file path=ppt/slides/slide62.xml><?xml version="1.0" encoding="utf-8"?>
+<p:sld xmlns:a="http://schemas.openxmlformats.org/drawingml/2006/main" xmlns:r="http://schemas.openxmlformats.org/officeDocument/2006/relationships" xmlns:p="http://schemas.openxmlformats.org/presentationml/2006/main">
+  <p:cSld>
+    <p:spTree>
+      <p:nvGrpSpPr>
+        <p:cNvPr id="1" name=""/>
+        <p:cNvGrpSpPr/>
+        <p:nvPr/>
+      </p:nvGrpSpPr>
+      <p:grpSpPr>
+        <a:xfrm>
+          <a:off x="0" y="0"/>
+          <a:ext cx="0" cy="0"/>
+          <a:chOff x="0" y="0"/>
+          <a:chExt cx="0" cy="0"/>
+        </a:xfrm>
+      </p:grpSpPr>
+      <p:sp>
+        <p:nvSpPr>
+          <p:cNvPr id="2" name="Заголовок 1"/>
+          <p:cNvSpPr>
+            <a:spLocks noGrp="1"/>
+          </p:cNvSpPr>
+          <p:nvPr>
+            <p:ph type="title"/>
+          </p:nvPr>
+        </p:nvSpPr>
+        <p:spPr>
+          <a:xfrm>
+            <a:off x="1079866" y="-84867"/>
+            <a:ext cx="9905998" cy="1478570"/>
+          </a:xfrm>
+        </p:spPr>
+        <p:txBody>
+          <a:bodyPr/>
+          <a:lstStyle/>
+          <a:p>
+            <a:r>
               <a:rPr lang="ru-RU" b="1" dirty="0"/>
               <a:t>Протокол ICMP и утилиты </a:t>
             </a:r>
@@ -29147,8 +29447,8 @@
         </p:nvSpPr>
         <p:spPr>
           <a:xfrm>
-            <a:off x="1141412" y="1669618"/>
-            <a:ext cx="8960949" cy="646331"/>
+            <a:off x="1079866" y="1080534"/>
+            <a:ext cx="10631488" cy="1200329"/>
           </a:xfrm>
           <a:prstGeom prst="rect">
             <a:avLst/>
@@ -29161,8 +29461,55 @@
           <a:lstStyle/>
           <a:p>
             <a:r>
+              <a:rPr lang="ru-RU" b="1" dirty="0"/>
+              <a:t>ICMP (</a:t>
+            </a:r>
+            <a:r>
+              <a:rPr lang="ru-RU" b="1" dirty="0" err="1"/>
+              <a:t>Internet</a:t>
+            </a:r>
+            <a:r>
+              <a:rPr lang="ru-RU" b="1" dirty="0"/>
+              <a:t> </a:t>
+            </a:r>
+            <a:r>
+              <a:rPr lang="ru-RU" b="1" dirty="0" err="1"/>
+              <a:t>Control</a:t>
+            </a:r>
+            <a:r>
+              <a:rPr lang="ru-RU" b="1" dirty="0"/>
+              <a:t> </a:t>
+            </a:r>
+            <a:r>
+              <a:rPr lang="ru-RU" b="1" dirty="0" err="1"/>
+              <a:t>Message</a:t>
+            </a:r>
+            <a:r>
+              <a:rPr lang="ru-RU" b="1" dirty="0"/>
+              <a:t> </a:t>
+            </a:r>
+            <a:r>
+              <a:rPr lang="ru-RU" b="1" dirty="0" err="1"/>
+              <a:t>Protocol</a:t>
+            </a:r>
+            <a:r>
+              <a:rPr lang="ru-RU" b="1" dirty="0"/>
+              <a:t>)</a:t>
+            </a:r>
+            <a:r>
               <a:rPr lang="ru-RU" dirty="0"/>
-              <a:t>Роль: обратная связь, сообщения об ошибках сетевого уровня (</a:t>
+              <a:t> — это протокол, предназначенный для отправки сообщений об ошибках и передачи служебной информации, которая указывает на успех или неудачу при обмене данными с другим IP-адресом.</a:t>
+            </a:r>
+            <a:endParaRPr lang="en-US" dirty="0" smtClean="0"/>
+          </a:p>
+          <a:p>
+            <a:r>
+              <a:rPr lang="ru-RU" dirty="0" smtClean="0"/>
+              <a:t>Роль</a:t>
+            </a:r>
+            <a:r>
+              <a:rPr lang="ru-RU" dirty="0"/>
+              <a:t>: обратная связь, сообщения об ошибках сетевого уровня (</a:t>
             </a:r>
             <a:r>
               <a:rPr lang="ru-RU" dirty="0" err="1"/>
@@ -29204,7 +29551,7 @@
 </p:sld>
 </file>
 
-<file path=ppt/slides/slide62.xml><?xml version="1.0" encoding="utf-8"?>
+<file path=ppt/slides/slide63.xml><?xml version="1.0" encoding="utf-8"?>
 <p:sld xmlns:a="http://schemas.openxmlformats.org/drawingml/2006/main" xmlns:r="http://schemas.openxmlformats.org/officeDocument/2006/relationships" xmlns:p="http://schemas.openxmlformats.org/presentationml/2006/main">
   <p:cSld>
     <p:spTree>
@@ -29231,7 +29578,12 @@
             <p:ph type="title"/>
           </p:nvPr>
         </p:nvSpPr>
-        <p:spPr/>
+        <p:spPr>
+          <a:xfrm>
+            <a:off x="1143001" y="337164"/>
+            <a:ext cx="9905998" cy="805836"/>
+          </a:xfrm>
+        </p:spPr>
         <p:txBody>
           <a:bodyPr/>
           <a:lstStyle/>
@@ -29262,7 +29614,7 @@
         </p:blipFill>
         <p:spPr>
           <a:xfrm>
-            <a:off x="2129437" y="2003303"/>
+            <a:off x="2129437" y="1554894"/>
             <a:ext cx="7933126" cy="4537586"/>
           </a:xfrm>
           <a:prstGeom prst="rect">
@@ -29283,7 +29635,7 @@
 </p:sld>
 </file>
 
-<file path=ppt/slides/slide63.xml><?xml version="1.0" encoding="utf-8"?>
+<file path=ppt/slides/slide64.xml><?xml version="1.0" encoding="utf-8"?>
 <p:sld xmlns:a="http://schemas.openxmlformats.org/drawingml/2006/main" xmlns:r="http://schemas.openxmlformats.org/officeDocument/2006/relationships" xmlns:p="http://schemas.openxmlformats.org/presentationml/2006/main">
   <p:cSld>
     <p:spTree>
@@ -29403,7 +29755,7 @@
 </p:sld>
 </file>
 
-<file path=ppt/slides/slide64.xml><?xml version="1.0" encoding="utf-8"?>
+<file path=ppt/slides/slide65.xml><?xml version="1.0" encoding="utf-8"?>
 <p:sld xmlns:a="http://schemas.openxmlformats.org/drawingml/2006/main" xmlns:r="http://schemas.openxmlformats.org/officeDocument/2006/relationships" xmlns:p="http://schemas.openxmlformats.org/presentationml/2006/main">
   <p:cSld>
     <p:spTree>
@@ -29564,194 +29916,6 @@
     <p:extLst>
       <p:ext uri="{BB962C8B-B14F-4D97-AF65-F5344CB8AC3E}">
         <p14:creationId xmlns:p14="http://schemas.microsoft.com/office/powerpoint/2010/main" val="1226142773"/>
-      </p:ext>
-    </p:extLst>
-  </p:cSld>
-  <p:clrMapOvr>
-    <a:masterClrMapping/>
-  </p:clrMapOvr>
-</p:sld>
-</file>
-
-<file path=ppt/slides/slide65.xml><?xml version="1.0" encoding="utf-8"?>
-<p:sld xmlns:a="http://schemas.openxmlformats.org/drawingml/2006/main" xmlns:r="http://schemas.openxmlformats.org/officeDocument/2006/relationships" xmlns:p="http://schemas.openxmlformats.org/presentationml/2006/main">
-  <p:cSld>
-    <p:spTree>
-      <p:nvGrpSpPr>
-        <p:cNvPr id="1" name=""/>
-        <p:cNvGrpSpPr/>
-        <p:nvPr/>
-      </p:nvGrpSpPr>
-      <p:grpSpPr>
-        <a:xfrm>
-          <a:off x="0" y="0"/>
-          <a:ext cx="0" cy="0"/>
-          <a:chOff x="0" y="0"/>
-          <a:chExt cx="0" cy="0"/>
-        </a:xfrm>
-      </p:grpSpPr>
-      <p:sp>
-        <p:nvSpPr>
-          <p:cNvPr id="2" name="Заголовок 1"/>
-          <p:cNvSpPr>
-            <a:spLocks noGrp="1"/>
-          </p:cNvSpPr>
-          <p:nvPr>
-            <p:ph type="title"/>
-          </p:nvPr>
-        </p:nvSpPr>
-        <p:spPr/>
-        <p:txBody>
-          <a:bodyPr>
-            <a:normAutofit/>
-          </a:bodyPr>
-          <a:lstStyle/>
-          <a:p>
-            <a:r>
-              <a:rPr lang="ru-RU" b="1" dirty="0"/>
-              <a:t>Автоматическая настройка: Протокол </a:t>
-            </a:r>
-            <a:r>
-              <a:rPr lang="af-ZA" b="1" dirty="0" smtClean="0"/>
-              <a:t>DHCP</a:t>
-            </a:r>
-            <a:endParaRPr lang="ru-RU" dirty="0"/>
-          </a:p>
-        </p:txBody>
-      </p:sp>
-      <p:sp>
-        <p:nvSpPr>
-          <p:cNvPr id="3" name="Объект 2"/>
-          <p:cNvSpPr>
-            <a:spLocks noGrp="1"/>
-          </p:cNvSpPr>
-          <p:nvPr>
-            <p:ph sz="half" idx="1"/>
-          </p:nvPr>
-        </p:nvSpPr>
-        <p:spPr/>
-        <p:txBody>
-          <a:bodyPr>
-            <a:normAutofit fontScale="92500" lnSpcReduction="10000"/>
-          </a:bodyPr>
-          <a:lstStyle/>
-          <a:p>
-            <a:r>
-              <a:rPr lang="ru-RU" dirty="0" smtClean="0"/>
-              <a:t>Динамическая конфигурация узла.</a:t>
-            </a:r>
-          </a:p>
-          <a:p>
-            <a:r>
-              <a:rPr lang="ru-RU" dirty="0" smtClean="0"/>
-              <a:t>Широковещательные запросы.</a:t>
-            </a:r>
-          </a:p>
-          <a:p>
-            <a:r>
-              <a:rPr lang="ru-RU" dirty="0" smtClean="0"/>
-              <a:t>Клиент-серверная модель. </a:t>
-            </a:r>
-          </a:p>
-          <a:p>
-            <a:r>
-              <a:rPr lang="en-US" dirty="0" smtClean="0"/>
-              <a:t>UDP</a:t>
-            </a:r>
-            <a:r>
-              <a:rPr lang="ru-RU" dirty="0" smtClean="0"/>
-              <a:t>, порт 67</a:t>
-            </a:r>
-            <a:endParaRPr lang="ru-RU" dirty="0"/>
-          </a:p>
-        </p:txBody>
-      </p:sp>
-      <p:sp>
-        <p:nvSpPr>
-          <p:cNvPr id="4" name="Объект 3"/>
-          <p:cNvSpPr>
-            <a:spLocks noGrp="1"/>
-          </p:cNvSpPr>
-          <p:nvPr>
-            <p:ph sz="half" idx="2"/>
-          </p:nvPr>
-        </p:nvSpPr>
-        <p:spPr/>
-        <p:txBody>
-          <a:bodyPr>
-            <a:normAutofit fontScale="92500" lnSpcReduction="10000"/>
-          </a:bodyPr>
-          <a:lstStyle/>
-          <a:p>
-            <a:pPr marL="0" indent="0">
-              <a:buNone/>
-            </a:pPr>
-            <a:r>
-              <a:rPr lang="ru-RU" dirty="0" smtClean="0"/>
-              <a:t>Типы распределения адресов:</a:t>
-            </a:r>
-          </a:p>
-          <a:p>
-            <a:r>
-              <a:rPr lang="ru-RU" dirty="0" smtClean="0"/>
-              <a:t>Ручное —</a:t>
-            </a:r>
-            <a:r>
-              <a:rPr lang="ru-RU" dirty="0"/>
-              <a:t> </a:t>
-            </a:r>
-            <a:r>
-              <a:rPr lang="en-US" dirty="0" smtClean="0"/>
-              <a:t>MAC </a:t>
-            </a:r>
-            <a:r>
-              <a:rPr lang="ru-RU" dirty="0" smtClean="0"/>
-              <a:t>вручную привязываются к </a:t>
-            </a:r>
-            <a:r>
-              <a:rPr lang="en-US" dirty="0" smtClean="0"/>
-              <a:t>IP </a:t>
-            </a:r>
-            <a:r>
-              <a:rPr lang="ru-RU" dirty="0" smtClean="0"/>
-              <a:t>на сервере.</a:t>
-            </a:r>
-          </a:p>
-          <a:p>
-            <a:r>
-              <a:rPr lang="ru-RU" dirty="0" smtClean="0"/>
-              <a:t>Автоматическое – </a:t>
-            </a:r>
-            <a:r>
-              <a:rPr lang="en-US" dirty="0" smtClean="0"/>
-              <a:t>DHCP</a:t>
-            </a:r>
-            <a:r>
-              <a:rPr lang="ru-RU" dirty="0" smtClean="0"/>
-              <a:t> сервер присваивает устройство постоянный адрес, понятие аренды отсутствует.</a:t>
-            </a:r>
-          </a:p>
-          <a:p>
-            <a:r>
-              <a:rPr lang="ru-RU" dirty="0" smtClean="0"/>
-              <a:t>Динамическое – </a:t>
-            </a:r>
-            <a:r>
-              <a:rPr lang="en-US" dirty="0" smtClean="0"/>
-              <a:t>DHCP </a:t>
-            </a:r>
-            <a:r>
-              <a:rPr lang="ru-RU" dirty="0" smtClean="0"/>
-              <a:t>сервер выдаёт адрес устройствам на время.</a:t>
-            </a:r>
-            <a:endParaRPr lang="ru-RU" dirty="0"/>
-          </a:p>
-        </p:txBody>
-      </p:sp>
-    </p:spTree>
-    <p:extLst>
-      <p:ext uri="{BB962C8B-B14F-4D97-AF65-F5344CB8AC3E}">
-        <p14:creationId xmlns:p14="http://schemas.microsoft.com/office/powerpoint/2010/main" val="127688575"/>
       </p:ext>
     </p:extLst>
   </p:cSld>
@@ -29790,77 +29954,156 @@
         </p:nvSpPr>
         <p:spPr/>
         <p:txBody>
-          <a:bodyPr/>
+          <a:bodyPr>
+            <a:normAutofit/>
+          </a:bodyPr>
           <a:lstStyle/>
           <a:p>
             <a:r>
-              <a:rPr lang="en-US" dirty="0" smtClean="0"/>
-              <a:t>DCHP</a:t>
-            </a:r>
-            <a:r>
-              <a:rPr lang="ru-RU" dirty="0" smtClean="0"/>
-              <a:t>: получение адреса</a:t>
+              <a:rPr lang="ru-RU" b="1" dirty="0"/>
+              <a:t>Автоматическая настройка: Протокол </a:t>
+            </a:r>
+            <a:r>
+              <a:rPr lang="af-ZA" b="1" dirty="0" smtClean="0"/>
+              <a:t>DHCP</a:t>
             </a:r>
             <a:endParaRPr lang="ru-RU" dirty="0"/>
           </a:p>
         </p:txBody>
       </p:sp>
-      <p:pic>
-        <p:nvPicPr>
-          <p:cNvPr id="5" name="Объект 4"/>
-          <p:cNvPicPr>
-            <a:picLocks noGrp="1" noChangeAspect="1"/>
-          </p:cNvPicPr>
+      <p:sp>
+        <p:nvSpPr>
+          <p:cNvPr id="3" name="Объект 2"/>
+          <p:cNvSpPr>
+            <a:spLocks noGrp="1"/>
+          </p:cNvSpPr>
           <p:nvPr>
             <p:ph sz="half" idx="1"/>
           </p:nvPr>
-        </p:nvPicPr>
-        <p:blipFill>
-          <a:blip r:embed="rId2"/>
-          <a:stretch>
-            <a:fillRect/>
-          </a:stretch>
-        </p:blipFill>
-        <p:spPr>
-          <a:xfrm>
-            <a:off x="1141413" y="2313947"/>
-            <a:ext cx="4878387" cy="3412794"/>
-          </a:xfrm>
-          <a:prstGeom prst="rect">
-            <a:avLst/>
-          </a:prstGeom>
-        </p:spPr>
-      </p:pic>
-      <p:pic>
-        <p:nvPicPr>
-          <p:cNvPr id="6" name="Объект 5"/>
-          <p:cNvPicPr>
-            <a:picLocks noGrp="1" noChangeAspect="1"/>
-          </p:cNvPicPr>
+        </p:nvSpPr>
+        <p:spPr/>
+        <p:txBody>
+          <a:bodyPr>
+            <a:normAutofit fontScale="92500" lnSpcReduction="10000"/>
+          </a:bodyPr>
+          <a:lstStyle/>
+          <a:p>
+            <a:r>
+              <a:rPr lang="ru-RU" dirty="0" smtClean="0"/>
+              <a:t>Динамическая конфигурация узла.</a:t>
+            </a:r>
+          </a:p>
+          <a:p>
+            <a:r>
+              <a:rPr lang="ru-RU" dirty="0" smtClean="0"/>
+              <a:t>Широковещательные запросы.</a:t>
+            </a:r>
+          </a:p>
+          <a:p>
+            <a:r>
+              <a:rPr lang="ru-RU" dirty="0" smtClean="0"/>
+              <a:t>Клиент-серверная модель. </a:t>
+            </a:r>
+          </a:p>
+          <a:p>
+            <a:r>
+              <a:rPr lang="en-US" dirty="0" smtClean="0"/>
+              <a:t>UDP</a:t>
+            </a:r>
+            <a:r>
+              <a:rPr lang="ru-RU" dirty="0" smtClean="0"/>
+              <a:t>, порт 67</a:t>
+            </a:r>
+            <a:endParaRPr lang="ru-RU" dirty="0"/>
+          </a:p>
+        </p:txBody>
+      </p:sp>
+      <p:sp>
+        <p:nvSpPr>
+          <p:cNvPr id="4" name="Объект 3"/>
+          <p:cNvSpPr>
+            <a:spLocks noGrp="1"/>
+          </p:cNvSpPr>
           <p:nvPr>
             <p:ph sz="half" idx="2"/>
           </p:nvPr>
-        </p:nvPicPr>
-        <p:blipFill>
-          <a:blip r:embed="rId3"/>
-          <a:stretch>
-            <a:fillRect/>
-          </a:stretch>
-        </p:blipFill>
-        <p:spPr>
-          <a:xfrm>
-            <a:off x="6172200" y="2321533"/>
-            <a:ext cx="4875213" cy="3397622"/>
-          </a:xfrm>
-          <a:prstGeom prst="rect">
-            <a:avLst/>
-          </a:prstGeom>
-        </p:spPr>
-      </p:pic>
+        </p:nvSpPr>
+        <p:spPr/>
+        <p:txBody>
+          <a:bodyPr>
+            <a:normAutofit fontScale="92500" lnSpcReduction="10000"/>
+          </a:bodyPr>
+          <a:lstStyle/>
+          <a:p>
+            <a:pPr marL="0" indent="0">
+              <a:buNone/>
+            </a:pPr>
+            <a:r>
+              <a:rPr lang="ru-RU" dirty="0" smtClean="0"/>
+              <a:t>Типы распределения адресов:</a:t>
+            </a:r>
+          </a:p>
+          <a:p>
+            <a:r>
+              <a:rPr lang="ru-RU" dirty="0" smtClean="0"/>
+              <a:t>Ручное —</a:t>
+            </a:r>
+            <a:r>
+              <a:rPr lang="ru-RU" dirty="0"/>
+              <a:t> </a:t>
+            </a:r>
+            <a:r>
+              <a:rPr lang="en-US" dirty="0" smtClean="0"/>
+              <a:t>MAC </a:t>
+            </a:r>
+            <a:r>
+              <a:rPr lang="ru-RU" dirty="0" smtClean="0"/>
+              <a:t>вручную привязываются к </a:t>
+            </a:r>
+            <a:r>
+              <a:rPr lang="en-US" dirty="0" smtClean="0"/>
+              <a:t>IP </a:t>
+            </a:r>
+            <a:r>
+              <a:rPr lang="ru-RU" dirty="0" smtClean="0"/>
+              <a:t>на сервере.</a:t>
+            </a:r>
+          </a:p>
+          <a:p>
+            <a:r>
+              <a:rPr lang="ru-RU" dirty="0" smtClean="0"/>
+              <a:t>Автоматическое – </a:t>
+            </a:r>
+            <a:r>
+              <a:rPr lang="en-US" dirty="0" smtClean="0"/>
+              <a:t>DHCP</a:t>
+            </a:r>
+            <a:r>
+              <a:rPr lang="ru-RU" dirty="0" smtClean="0"/>
+              <a:t> сервер присваивает устройство постоянный адрес, понятие аренды отсутствует.</a:t>
+            </a:r>
+          </a:p>
+          <a:p>
+            <a:r>
+              <a:rPr lang="ru-RU" dirty="0" smtClean="0"/>
+              <a:t>Динамическое – </a:t>
+            </a:r>
+            <a:r>
+              <a:rPr lang="en-US" dirty="0" smtClean="0"/>
+              <a:t>DHCP </a:t>
+            </a:r>
+            <a:r>
+              <a:rPr lang="ru-RU" dirty="0" smtClean="0"/>
+              <a:t>сервер выдаёт адрес устройствам на время.</a:t>
+            </a:r>
+            <a:endParaRPr lang="ru-RU" dirty="0"/>
+          </a:p>
+        </p:txBody>
+      </p:sp>
     </p:spTree>
     <p:extLst>
       <p:ext uri="{BB962C8B-B14F-4D97-AF65-F5344CB8AC3E}">
-        <p14:creationId xmlns:p14="http://schemas.microsoft.com/office/powerpoint/2010/main" val="2740891351"/>
+        <p14:creationId xmlns:p14="http://schemas.microsoft.com/office/powerpoint/2010/main" val="127688575"/>
       </p:ext>
     </p:extLst>
   </p:cSld>
@@ -29916,7 +30159,7 @@
       </p:sp>
       <p:pic>
         <p:nvPicPr>
-          <p:cNvPr id="8" name="Объект 7"/>
+          <p:cNvPr id="5" name="Объект 4"/>
           <p:cNvPicPr>
             <a:picLocks noGrp="1" noChangeAspect="1"/>
           </p:cNvPicPr>
@@ -29932,8 +30175,8 @@
         </p:blipFill>
         <p:spPr>
           <a:xfrm>
-            <a:off x="1141413" y="2326228"/>
-            <a:ext cx="4878387" cy="3388231"/>
+            <a:off x="0" y="1802786"/>
+            <a:ext cx="6082432" cy="4255113"/>
           </a:xfrm>
           <a:prstGeom prst="rect">
             <a:avLst/>
@@ -29942,7 +30185,7 @@
       </p:pic>
       <p:pic>
         <p:nvPicPr>
-          <p:cNvPr id="9" name="Объект 8"/>
+          <p:cNvPr id="6" name="Объект 5"/>
           <p:cNvPicPr>
             <a:picLocks noGrp="1" noChangeAspect="1"/>
           </p:cNvPicPr>
@@ -29958,8 +30201,8 @@
         </p:blipFill>
         <p:spPr>
           <a:xfrm>
-            <a:off x="6172200" y="2318383"/>
-            <a:ext cx="4875213" cy="3403921"/>
+            <a:off x="6136915" y="1840215"/>
+            <a:ext cx="6051910" cy="4217683"/>
           </a:xfrm>
           <a:prstGeom prst="rect">
             <a:avLst/>
@@ -29969,7 +30212,7 @@
     </p:spTree>
     <p:extLst>
       <p:ext uri="{BB962C8B-B14F-4D97-AF65-F5344CB8AC3E}">
-        <p14:creationId xmlns:p14="http://schemas.microsoft.com/office/powerpoint/2010/main" val="3966033741"/>
+        <p14:creationId xmlns:p14="http://schemas.microsoft.com/office/powerpoint/2010/main" val="2740891351"/>
       </p:ext>
     </p:extLst>
   </p:cSld>
@@ -29980,94 +30223,6 @@
 </file>
 
 <file path=ppt/slides/slide68.xml><?xml version="1.0" encoding="utf-8"?>
-<p:sld xmlns:a="http://schemas.openxmlformats.org/drawingml/2006/main" xmlns:r="http://schemas.openxmlformats.org/officeDocument/2006/relationships" xmlns:p="http://schemas.openxmlformats.org/presentationml/2006/main">
-  <p:cSld>
-    <p:spTree>
-      <p:nvGrpSpPr>
-        <p:cNvPr id="1" name=""/>
-        <p:cNvGrpSpPr/>
-        <p:nvPr/>
-      </p:nvGrpSpPr>
-      <p:grpSpPr>
-        <a:xfrm>
-          <a:off x="0" y="0"/>
-          <a:ext cx="0" cy="0"/>
-          <a:chOff x="0" y="0"/>
-          <a:chExt cx="0" cy="0"/>
-        </a:xfrm>
-      </p:grpSpPr>
-      <p:sp>
-        <p:nvSpPr>
-          <p:cNvPr id="5" name="Заголовок 4"/>
-          <p:cNvSpPr>
-            <a:spLocks noGrp="1"/>
-          </p:cNvSpPr>
-          <p:nvPr>
-            <p:ph type="title"/>
-          </p:nvPr>
-        </p:nvSpPr>
-        <p:spPr>
-          <a:xfrm>
-            <a:off x="1143001" y="0"/>
-            <a:ext cx="9905998" cy="1478570"/>
-          </a:xfrm>
-        </p:spPr>
-        <p:txBody>
-          <a:bodyPr/>
-          <a:lstStyle/>
-          <a:p>
-            <a:r>
-              <a:rPr lang="en-US" dirty="0" smtClean="0"/>
-              <a:t>DHCP:</a:t>
-            </a:r>
-            <a:r>
-              <a:rPr lang="ru-RU" dirty="0" smtClean="0"/>
-              <a:t> формат сообщения</a:t>
-            </a:r>
-            <a:endParaRPr lang="ru-RU" dirty="0"/>
-          </a:p>
-        </p:txBody>
-      </p:sp>
-      <p:pic>
-        <p:nvPicPr>
-          <p:cNvPr id="7" name="Объект 6"/>
-          <p:cNvPicPr>
-            <a:picLocks noGrp="1" noChangeAspect="1"/>
-          </p:cNvPicPr>
-          <p:nvPr>
-            <p:ph idx="1"/>
-          </p:nvPr>
-        </p:nvPicPr>
-        <p:blipFill>
-          <a:blip r:embed="rId2"/>
-          <a:stretch>
-            <a:fillRect/>
-          </a:stretch>
-        </p:blipFill>
-        <p:spPr>
-          <a:xfrm>
-            <a:off x="3233400" y="1160310"/>
-            <a:ext cx="5725200" cy="5521269"/>
-          </a:xfrm>
-          <a:prstGeom prst="rect">
-            <a:avLst/>
-          </a:prstGeom>
-        </p:spPr>
-      </p:pic>
-    </p:spTree>
-    <p:extLst>
-      <p:ext uri="{BB962C8B-B14F-4D97-AF65-F5344CB8AC3E}">
-        <p14:creationId xmlns:p14="http://schemas.microsoft.com/office/powerpoint/2010/main" val="735845782"/>
-      </p:ext>
-    </p:extLst>
-  </p:cSld>
-  <p:clrMapOvr>
-    <a:masterClrMapping/>
-  </p:clrMapOvr>
-</p:sld>
-</file>
-
-<file path=ppt/slides/slide69.xml><?xml version="1.0" encoding="utf-8"?>
 <p:sld xmlns:a="http://schemas.openxmlformats.org/drawingml/2006/main" xmlns:r="http://schemas.openxmlformats.org/officeDocument/2006/relationships" xmlns:p="http://schemas.openxmlformats.org/presentationml/2006/main">
   <p:cSld>
     <p:spTree>
@@ -30101,88 +30256,160 @@
           <a:p>
             <a:r>
               <a:rPr lang="en-US" dirty="0" smtClean="0"/>
-              <a:t>DHCP: timers</a:t>
+              <a:t>DCHP</a:t>
+            </a:r>
+            <a:r>
+              <a:rPr lang="ru-RU" dirty="0" smtClean="0"/>
+              <a:t>: получение адреса</a:t>
             </a:r>
             <a:endParaRPr lang="ru-RU" dirty="0"/>
           </a:p>
         </p:txBody>
       </p:sp>
+      <p:pic>
+        <p:nvPicPr>
+          <p:cNvPr id="8" name="Объект 7"/>
+          <p:cNvPicPr>
+            <a:picLocks noGrp="1" noChangeAspect="1"/>
+          </p:cNvPicPr>
+          <p:nvPr>
+            <p:ph sz="half" idx="1"/>
+          </p:nvPr>
+        </p:nvPicPr>
+        <p:blipFill>
+          <a:blip r:embed="rId2"/>
+          <a:stretch>
+            <a:fillRect/>
+          </a:stretch>
+        </p:blipFill>
+        <p:spPr>
+          <a:xfrm>
+            <a:off x="0" y="1734884"/>
+            <a:ext cx="6085043" cy="4226301"/>
+          </a:xfrm>
+          <a:prstGeom prst="rect">
+            <a:avLst/>
+          </a:prstGeom>
+        </p:spPr>
+      </p:pic>
+      <p:pic>
+        <p:nvPicPr>
+          <p:cNvPr id="9" name="Объект 8"/>
+          <p:cNvPicPr>
+            <a:picLocks noGrp="1" noChangeAspect="1"/>
+          </p:cNvPicPr>
+          <p:nvPr>
+            <p:ph sz="half" idx="2"/>
+          </p:nvPr>
+        </p:nvPicPr>
+        <p:blipFill>
+          <a:blip r:embed="rId3"/>
+          <a:stretch>
+            <a:fillRect/>
+          </a:stretch>
+        </p:blipFill>
+        <p:spPr>
+          <a:xfrm>
+            <a:off x="6116474" y="1734884"/>
+            <a:ext cx="6075526" cy="4241991"/>
+          </a:xfrm>
+          <a:prstGeom prst="rect">
+            <a:avLst/>
+          </a:prstGeom>
+        </p:spPr>
+      </p:pic>
+    </p:spTree>
+    <p:extLst>
+      <p:ext uri="{BB962C8B-B14F-4D97-AF65-F5344CB8AC3E}">
+        <p14:creationId xmlns:p14="http://schemas.microsoft.com/office/powerpoint/2010/main" val="3966033741"/>
+      </p:ext>
+    </p:extLst>
+  </p:cSld>
+  <p:clrMapOvr>
+    <a:masterClrMapping/>
+  </p:clrMapOvr>
+</p:sld>
+</file>
+
+<file path=ppt/slides/slide69.xml><?xml version="1.0" encoding="utf-8"?>
+<p:sld xmlns:a="http://schemas.openxmlformats.org/drawingml/2006/main" xmlns:r="http://schemas.openxmlformats.org/officeDocument/2006/relationships" xmlns:p="http://schemas.openxmlformats.org/presentationml/2006/main">
+  <p:cSld>
+    <p:spTree>
+      <p:nvGrpSpPr>
+        <p:cNvPr id="1" name=""/>
+        <p:cNvGrpSpPr/>
+        <p:nvPr/>
+      </p:nvGrpSpPr>
+      <p:grpSpPr>
+        <a:xfrm>
+          <a:off x="0" y="0"/>
+          <a:ext cx="0" cy="0"/>
+          <a:chOff x="0" y="0"/>
+          <a:chExt cx="0" cy="0"/>
+        </a:xfrm>
+      </p:grpSpPr>
       <p:sp>
         <p:nvSpPr>
-          <p:cNvPr id="3" name="Объект 2"/>
+          <p:cNvPr id="5" name="Заголовок 4"/>
           <p:cNvSpPr>
             <a:spLocks noGrp="1"/>
           </p:cNvSpPr>
           <p:nvPr>
+            <p:ph type="title"/>
+          </p:nvPr>
+        </p:nvSpPr>
+        <p:spPr>
+          <a:xfrm>
+            <a:off x="1238129" y="150932"/>
+            <a:ext cx="9905998" cy="870438"/>
+          </a:xfrm>
+        </p:spPr>
+        <p:txBody>
+          <a:bodyPr/>
+          <a:lstStyle/>
+          <a:p>
+            <a:r>
+              <a:rPr lang="en-US" dirty="0" smtClean="0"/>
+              <a:t>DHCP:</a:t>
+            </a:r>
+            <a:r>
+              <a:rPr lang="ru-RU" dirty="0" smtClean="0"/>
+              <a:t> формат сообщения</a:t>
+            </a:r>
+            <a:endParaRPr lang="ru-RU" dirty="0"/>
+          </a:p>
+        </p:txBody>
+      </p:sp>
+      <p:pic>
+        <p:nvPicPr>
+          <p:cNvPr id="7" name="Объект 6"/>
+          <p:cNvPicPr>
+            <a:picLocks noGrp="1" noChangeAspect="1"/>
+          </p:cNvPicPr>
+          <p:nvPr>
             <p:ph idx="1"/>
           </p:nvPr>
-        </p:nvSpPr>
-        <p:spPr/>
-        <p:txBody>
-          <a:bodyPr>
-            <a:normAutofit fontScale="92500"/>
-          </a:bodyPr>
-          <a:lstStyle/>
-          <a:p>
-            <a:r>
-              <a:rPr lang="ru-RU" dirty="0"/>
-              <a:t>DHCP-адрес выдаётся сроком на </a:t>
-            </a:r>
-            <a:r>
-              <a:rPr lang="ru-RU" dirty="0" err="1"/>
-              <a:t>Lease</a:t>
-            </a:r>
-            <a:r>
-              <a:rPr lang="ru-RU" dirty="0"/>
-              <a:t> </a:t>
-            </a:r>
-            <a:r>
-              <a:rPr lang="ru-RU" dirty="0" err="1"/>
-              <a:t>Time</a:t>
-            </a:r>
-            <a:r>
-              <a:rPr lang="ru-RU" dirty="0"/>
-              <a:t> (время аренды). От этого значения рассчитываются два таймера: T1 и T2. T1 (</a:t>
-            </a:r>
-            <a:r>
-              <a:rPr lang="ru-RU" dirty="0" err="1"/>
-              <a:t>Renewal</a:t>
-            </a:r>
-            <a:r>
-              <a:rPr lang="ru-RU" dirty="0"/>
-              <a:t>) — 50% от времени аренды; по истечении T1 устройство отправляет DHCPREQUEST именно тому серверу, который выдал адрес. T2 (</a:t>
-            </a:r>
-            <a:r>
-              <a:rPr lang="ru-RU" dirty="0" err="1"/>
-              <a:t>Rebinding</a:t>
-            </a:r>
-            <a:r>
-              <a:rPr lang="ru-RU" dirty="0"/>
-              <a:t>) — 7/8 от времени аренды; если первый сервер не ответил, устройство рассылает широковещательный запрос, чтобы продлить аренду или получить новый адрес. Если </a:t>
-            </a:r>
-            <a:r>
-              <a:rPr lang="ru-RU" dirty="0" err="1"/>
-              <a:t>Lease</a:t>
-            </a:r>
-            <a:r>
-              <a:rPr lang="ru-RU" dirty="0"/>
-              <a:t> </a:t>
-            </a:r>
-            <a:r>
-              <a:rPr lang="ru-RU" dirty="0" err="1"/>
-              <a:t>Time</a:t>
-            </a:r>
-            <a:r>
-              <a:rPr lang="ru-RU" dirty="0"/>
-              <a:t> истёк и никто не продлил адрес, устройство отказывается от него и начинает процедуру получения нового с нуля.</a:t>
-            </a:r>
-          </a:p>
-        </p:txBody>
-      </p:sp>
+        </p:nvPicPr>
+        <p:blipFill>
+          <a:blip r:embed="rId2"/>
+          <a:stretch>
+            <a:fillRect/>
+          </a:stretch>
+        </p:blipFill>
+        <p:spPr>
+          <a:xfrm>
+            <a:off x="3097571" y="1003785"/>
+            <a:ext cx="5993681" cy="5780186"/>
+          </a:xfrm>
+          <a:prstGeom prst="rect">
+            <a:avLst/>
+          </a:prstGeom>
+        </p:spPr>
+      </p:pic>
     </p:spTree>
     <p:extLst>
       <p:ext uri="{BB962C8B-B14F-4D97-AF65-F5344CB8AC3E}">
-        <p14:creationId xmlns:p14="http://schemas.microsoft.com/office/powerpoint/2010/main" val="3026360222"/>
+        <p14:creationId xmlns:p14="http://schemas.microsoft.com/office/powerpoint/2010/main" val="735845782"/>
       </p:ext>
     </p:extLst>
   </p:cSld>
@@ -30326,6 +30553,2917 @@
             <p:ph type="title"/>
           </p:nvPr>
         </p:nvSpPr>
+        <p:spPr>
+          <a:xfrm>
+            <a:off x="1143001" y="214072"/>
+            <a:ext cx="9905998" cy="779459"/>
+          </a:xfrm>
+        </p:spPr>
+        <p:txBody>
+          <a:bodyPr/>
+          <a:lstStyle/>
+          <a:p>
+            <a:r>
+              <a:rPr lang="en-US" dirty="0" smtClean="0"/>
+              <a:t>DHCP options</a:t>
+            </a:r>
+            <a:endParaRPr lang="ru-RU" dirty="0"/>
+          </a:p>
+        </p:txBody>
+      </p:sp>
+      <p:graphicFrame>
+        <p:nvGraphicFramePr>
+          <p:cNvPr id="4" name="Объект 3"/>
+          <p:cNvGraphicFramePr>
+            <a:graphicFrameLocks noGrp="1"/>
+          </p:cNvGraphicFramePr>
+          <p:nvPr>
+            <p:ph idx="1"/>
+            <p:extLst>
+              <p:ext uri="{D42A27DB-BD31-4B8C-83A1-F6EECF244321}">
+                <p14:modId xmlns:p14="http://schemas.microsoft.com/office/powerpoint/2010/main" val="1238292982"/>
+              </p:ext>
+            </p:extLst>
+          </p:nvPr>
+        </p:nvGraphicFramePr>
+        <p:xfrm>
+          <a:off x="1143001" y="1098551"/>
+          <a:ext cx="10005644" cy="5125905"/>
+        </p:xfrm>
+        <a:graphic>
+          <a:graphicData uri="http://schemas.openxmlformats.org/drawingml/2006/table">
+            <a:tbl>
+              <a:tblPr/>
+              <a:tblGrid>
+                <a:gridCol w="2501411">
+                  <a:extLst>
+                    <a:ext uri="{9D8B030D-6E8A-4147-A177-3AD203B41FA5}">
+                      <a16:colId xmlns:a16="http://schemas.microsoft.com/office/drawing/2014/main" val="2328037731"/>
+                    </a:ext>
+                  </a:extLst>
+                </a:gridCol>
+                <a:gridCol w="2501411">
+                  <a:extLst>
+                    <a:ext uri="{9D8B030D-6E8A-4147-A177-3AD203B41FA5}">
+                      <a16:colId xmlns:a16="http://schemas.microsoft.com/office/drawing/2014/main" val="1986193264"/>
+                    </a:ext>
+                  </a:extLst>
+                </a:gridCol>
+                <a:gridCol w="2501411">
+                  <a:extLst>
+                    <a:ext uri="{9D8B030D-6E8A-4147-A177-3AD203B41FA5}">
+                      <a16:colId xmlns:a16="http://schemas.microsoft.com/office/drawing/2014/main" val="2706894913"/>
+                    </a:ext>
+                  </a:extLst>
+                </a:gridCol>
+                <a:gridCol w="2501411">
+                  <a:extLst>
+                    <a:ext uri="{9D8B030D-6E8A-4147-A177-3AD203B41FA5}">
+                      <a16:colId xmlns:a16="http://schemas.microsoft.com/office/drawing/2014/main" val="964456829"/>
+                    </a:ext>
+                  </a:extLst>
+                </a:gridCol>
+              </a:tblGrid>
+              <a:tr h="209570">
+                <a:tc>
+                  <a:txBody>
+                    <a:bodyPr/>
+                    <a:lstStyle/>
+                    <a:p>
+                      <a:pPr algn="l"/>
+                      <a:r>
+                        <a:rPr lang="ru-RU" sz="1400" b="1" dirty="0">
+                          <a:effectLst/>
+                        </a:rPr>
+                        <a:t>Код опции</a:t>
+                      </a:r>
+                    </a:p>
+                  </a:txBody>
+                  <a:tcPr marL="54013" marR="54013" marT="27007" marB="27007" anchor="ctr">
+                    <a:lnL w="12700" cap="flat" cmpd="sng" algn="ctr">
+                      <a:solidFill>
+                        <a:schemeClr val="tx1"/>
+                      </a:solidFill>
+                      <a:prstDash val="solid"/>
+                      <a:round/>
+                      <a:headEnd type="none" w="med" len="med"/>
+                      <a:tailEnd type="none" w="med" len="med"/>
+                    </a:lnL>
+                    <a:lnR w="12700" cap="flat" cmpd="sng" algn="ctr">
+                      <a:solidFill>
+                        <a:schemeClr val="tx1"/>
+                      </a:solidFill>
+                      <a:prstDash val="solid"/>
+                      <a:round/>
+                      <a:headEnd type="none" w="med" len="med"/>
+                      <a:tailEnd type="none" w="med" len="med"/>
+                    </a:lnR>
+                    <a:lnT w="12700" cap="flat" cmpd="sng" algn="ctr">
+                      <a:solidFill>
+                        <a:schemeClr val="tx1"/>
+                      </a:solidFill>
+                      <a:prstDash val="solid"/>
+                      <a:round/>
+                      <a:headEnd type="none" w="med" len="med"/>
+                      <a:tailEnd type="none" w="med" len="med"/>
+                    </a:lnT>
+                    <a:lnB w="12700" cap="flat" cmpd="sng" algn="ctr">
+                      <a:solidFill>
+                        <a:schemeClr val="tx1"/>
+                      </a:solidFill>
+                      <a:prstDash val="solid"/>
+                      <a:round/>
+                      <a:headEnd type="none" w="med" len="med"/>
+                      <a:tailEnd type="none" w="med" len="med"/>
+                    </a:lnB>
+                  </a:tcPr>
+                </a:tc>
+                <a:tc>
+                  <a:txBody>
+                    <a:bodyPr/>
+                    <a:lstStyle/>
+                    <a:p>
+                      <a:pPr algn="l"/>
+                      <a:r>
+                        <a:rPr lang="ru-RU" sz="1400" b="1" dirty="0">
+                          <a:effectLst/>
+                        </a:rPr>
+                        <a:t>Название</a:t>
+                      </a:r>
+                    </a:p>
+                  </a:txBody>
+                  <a:tcPr marL="54013" marR="54013" marT="27007" marB="27007" anchor="ctr">
+                    <a:lnL w="12700" cap="flat" cmpd="sng" algn="ctr">
+                      <a:solidFill>
+                        <a:schemeClr val="tx1"/>
+                      </a:solidFill>
+                      <a:prstDash val="solid"/>
+                      <a:round/>
+                      <a:headEnd type="none" w="med" len="med"/>
+                      <a:tailEnd type="none" w="med" len="med"/>
+                    </a:lnL>
+                    <a:lnR w="12700" cap="flat" cmpd="sng" algn="ctr">
+                      <a:solidFill>
+                        <a:schemeClr val="tx1"/>
+                      </a:solidFill>
+                      <a:prstDash val="solid"/>
+                      <a:round/>
+                      <a:headEnd type="none" w="med" len="med"/>
+                      <a:tailEnd type="none" w="med" len="med"/>
+                    </a:lnR>
+                    <a:lnT w="12700" cap="flat" cmpd="sng" algn="ctr">
+                      <a:solidFill>
+                        <a:schemeClr val="tx1"/>
+                      </a:solidFill>
+                      <a:prstDash val="solid"/>
+                      <a:round/>
+                      <a:headEnd type="none" w="med" len="med"/>
+                      <a:tailEnd type="none" w="med" len="med"/>
+                    </a:lnT>
+                    <a:lnB w="12700" cap="flat" cmpd="sng" algn="ctr">
+                      <a:solidFill>
+                        <a:schemeClr val="tx1"/>
+                      </a:solidFill>
+                      <a:prstDash val="solid"/>
+                      <a:round/>
+                      <a:headEnd type="none" w="med" len="med"/>
+                      <a:tailEnd type="none" w="med" len="med"/>
+                    </a:lnB>
+                  </a:tcPr>
+                </a:tc>
+                <a:tc>
+                  <a:txBody>
+                    <a:bodyPr/>
+                    <a:lstStyle/>
+                    <a:p>
+                      <a:pPr algn="l"/>
+                      <a:r>
+                        <a:rPr lang="ru-RU" sz="1400" b="1" dirty="0">
+                          <a:effectLst/>
+                        </a:rPr>
+                        <a:t>Описание</a:t>
+                      </a:r>
+                    </a:p>
+                  </a:txBody>
+                  <a:tcPr marL="54013" marR="54013" marT="27007" marB="27007" anchor="ctr">
+                    <a:lnL w="12700" cap="flat" cmpd="sng" algn="ctr">
+                      <a:solidFill>
+                        <a:schemeClr val="tx1"/>
+                      </a:solidFill>
+                      <a:prstDash val="solid"/>
+                      <a:round/>
+                      <a:headEnd type="none" w="med" len="med"/>
+                      <a:tailEnd type="none" w="med" len="med"/>
+                    </a:lnL>
+                    <a:lnR w="12700" cap="flat" cmpd="sng" algn="ctr">
+                      <a:solidFill>
+                        <a:schemeClr val="tx1"/>
+                      </a:solidFill>
+                      <a:prstDash val="solid"/>
+                      <a:round/>
+                      <a:headEnd type="none" w="med" len="med"/>
+                      <a:tailEnd type="none" w="med" len="med"/>
+                    </a:lnR>
+                    <a:lnT w="12700" cap="flat" cmpd="sng" algn="ctr">
+                      <a:solidFill>
+                        <a:schemeClr val="tx1"/>
+                      </a:solidFill>
+                      <a:prstDash val="solid"/>
+                      <a:round/>
+                      <a:headEnd type="none" w="med" len="med"/>
+                      <a:tailEnd type="none" w="med" len="med"/>
+                    </a:lnT>
+                    <a:lnB w="12700" cap="flat" cmpd="sng" algn="ctr">
+                      <a:solidFill>
+                        <a:schemeClr val="tx1"/>
+                      </a:solidFill>
+                      <a:prstDash val="solid"/>
+                      <a:round/>
+                      <a:headEnd type="none" w="med" len="med"/>
+                      <a:tailEnd type="none" w="med" len="med"/>
+                    </a:lnB>
+                  </a:tcPr>
+                </a:tc>
+                <a:tc>
+                  <a:txBody>
+                    <a:bodyPr/>
+                    <a:lstStyle/>
+                    <a:p>
+                      <a:pPr algn="l"/>
+                      <a:r>
+                        <a:rPr lang="ru-RU" sz="1400" b="1" dirty="0">
+                          <a:effectLst/>
+                        </a:rPr>
+                        <a:t>Пример значения</a:t>
+                      </a:r>
+                    </a:p>
+                  </a:txBody>
+                  <a:tcPr marL="54013" marR="54013" marT="27007" marB="27007" anchor="ctr">
+                    <a:lnL w="12700" cap="flat" cmpd="sng" algn="ctr">
+                      <a:solidFill>
+                        <a:schemeClr val="tx1"/>
+                      </a:solidFill>
+                      <a:prstDash val="solid"/>
+                      <a:round/>
+                      <a:headEnd type="none" w="med" len="med"/>
+                      <a:tailEnd type="none" w="med" len="med"/>
+                    </a:lnL>
+                    <a:lnR w="12700" cap="flat" cmpd="sng" algn="ctr">
+                      <a:solidFill>
+                        <a:schemeClr val="tx1"/>
+                      </a:solidFill>
+                      <a:prstDash val="solid"/>
+                      <a:round/>
+                      <a:headEnd type="none" w="med" len="med"/>
+                      <a:tailEnd type="none" w="med" len="med"/>
+                    </a:lnR>
+                    <a:lnT w="12700" cap="flat" cmpd="sng" algn="ctr">
+                      <a:solidFill>
+                        <a:schemeClr val="tx1"/>
+                      </a:solidFill>
+                      <a:prstDash val="solid"/>
+                      <a:round/>
+                      <a:headEnd type="none" w="med" len="med"/>
+                      <a:tailEnd type="none" w="med" len="med"/>
+                    </a:lnT>
+                    <a:lnB w="12700" cap="flat" cmpd="sng" algn="ctr">
+                      <a:solidFill>
+                        <a:schemeClr val="tx1"/>
+                      </a:solidFill>
+                      <a:prstDash val="solid"/>
+                      <a:round/>
+                      <a:headEnd type="none" w="med" len="med"/>
+                      <a:tailEnd type="none" w="med" len="med"/>
+                    </a:lnB>
+                  </a:tcPr>
+                </a:tc>
+                <a:extLst>
+                  <a:ext uri="{0D108BD9-81ED-4DB2-BD59-A6C34878D82A}">
+                    <a16:rowId xmlns:a16="http://schemas.microsoft.com/office/drawing/2014/main" val="1969397811"/>
+                  </a:ext>
+                </a:extLst>
+              </a:tr>
+              <a:tr h="365128">
+                <a:tc>
+                  <a:txBody>
+                    <a:bodyPr/>
+                    <a:lstStyle/>
+                    <a:p>
+                      <a:r>
+                        <a:rPr lang="ru-RU" sz="1400" b="1" dirty="0">
+                          <a:effectLst/>
+                        </a:rPr>
+                        <a:t>1</a:t>
+                      </a:r>
+                      <a:endParaRPr lang="ru-RU" sz="1400" dirty="0">
+                        <a:effectLst/>
+                      </a:endParaRPr>
+                    </a:p>
+                  </a:txBody>
+                  <a:tcPr marL="54013" marR="54013" marT="27007" marB="27007" anchor="ctr">
+                    <a:lnL w="12700" cap="flat" cmpd="sng" algn="ctr">
+                      <a:solidFill>
+                        <a:schemeClr val="tx1"/>
+                      </a:solidFill>
+                      <a:prstDash val="solid"/>
+                      <a:round/>
+                      <a:headEnd type="none" w="med" len="med"/>
+                      <a:tailEnd type="none" w="med" len="med"/>
+                    </a:lnL>
+                    <a:lnR w="12700" cap="flat" cmpd="sng" algn="ctr">
+                      <a:solidFill>
+                        <a:schemeClr val="tx1"/>
+                      </a:solidFill>
+                      <a:prstDash val="solid"/>
+                      <a:round/>
+                      <a:headEnd type="none" w="med" len="med"/>
+                      <a:tailEnd type="none" w="med" len="med"/>
+                    </a:lnR>
+                    <a:lnT w="12700" cap="flat" cmpd="sng" algn="ctr">
+                      <a:solidFill>
+                        <a:schemeClr val="tx1"/>
+                      </a:solidFill>
+                      <a:prstDash val="solid"/>
+                      <a:round/>
+                      <a:headEnd type="none" w="med" len="med"/>
+                      <a:tailEnd type="none" w="med" len="med"/>
+                    </a:lnT>
+                    <a:lnB w="12700" cap="flat" cmpd="sng" algn="ctr">
+                      <a:solidFill>
+                        <a:schemeClr val="tx1"/>
+                      </a:solidFill>
+                      <a:prstDash val="solid"/>
+                      <a:round/>
+                      <a:headEnd type="none" w="med" len="med"/>
+                      <a:tailEnd type="none" w="med" len="med"/>
+                    </a:lnB>
+                  </a:tcPr>
+                </a:tc>
+                <a:tc>
+                  <a:txBody>
+                    <a:bodyPr/>
+                    <a:lstStyle/>
+                    <a:p>
+                      <a:r>
+                        <a:rPr lang="af-ZA" sz="1400">
+                          <a:effectLst/>
+                        </a:rPr>
+                        <a:t>Subnet Mask</a:t>
+                      </a:r>
+                    </a:p>
+                  </a:txBody>
+                  <a:tcPr marL="54013" marR="54013" marT="27007" marB="27007" anchor="ctr">
+                    <a:lnL w="12700" cap="flat" cmpd="sng" algn="ctr">
+                      <a:solidFill>
+                        <a:schemeClr val="tx1"/>
+                      </a:solidFill>
+                      <a:prstDash val="solid"/>
+                      <a:round/>
+                      <a:headEnd type="none" w="med" len="med"/>
+                      <a:tailEnd type="none" w="med" len="med"/>
+                    </a:lnL>
+                    <a:lnR w="12700" cap="flat" cmpd="sng" algn="ctr">
+                      <a:solidFill>
+                        <a:schemeClr val="tx1"/>
+                      </a:solidFill>
+                      <a:prstDash val="solid"/>
+                      <a:round/>
+                      <a:headEnd type="none" w="med" len="med"/>
+                      <a:tailEnd type="none" w="med" len="med"/>
+                    </a:lnR>
+                    <a:lnT w="12700" cap="flat" cmpd="sng" algn="ctr">
+                      <a:solidFill>
+                        <a:schemeClr val="tx1"/>
+                      </a:solidFill>
+                      <a:prstDash val="solid"/>
+                      <a:round/>
+                      <a:headEnd type="none" w="med" len="med"/>
+                      <a:tailEnd type="none" w="med" len="med"/>
+                    </a:lnT>
+                    <a:lnB w="12700" cap="flat" cmpd="sng" algn="ctr">
+                      <a:solidFill>
+                        <a:schemeClr val="tx1"/>
+                      </a:solidFill>
+                      <a:prstDash val="solid"/>
+                      <a:round/>
+                      <a:headEnd type="none" w="med" len="med"/>
+                      <a:tailEnd type="none" w="med" len="med"/>
+                    </a:lnB>
+                  </a:tcPr>
+                </a:tc>
+                <a:tc>
+                  <a:txBody>
+                    <a:bodyPr/>
+                    <a:lstStyle/>
+                    <a:p>
+                      <a:r>
+                        <a:rPr lang="ru-RU" sz="1400">
+                          <a:effectLst/>
+                        </a:rPr>
+                        <a:t>Маска подсети клиента</a:t>
+                      </a:r>
+                    </a:p>
+                  </a:txBody>
+                  <a:tcPr marL="54013" marR="54013" marT="27007" marB="27007" anchor="ctr">
+                    <a:lnL w="12700" cap="flat" cmpd="sng" algn="ctr">
+                      <a:solidFill>
+                        <a:schemeClr val="tx1"/>
+                      </a:solidFill>
+                      <a:prstDash val="solid"/>
+                      <a:round/>
+                      <a:headEnd type="none" w="med" len="med"/>
+                      <a:tailEnd type="none" w="med" len="med"/>
+                    </a:lnL>
+                    <a:lnR w="12700" cap="flat" cmpd="sng" algn="ctr">
+                      <a:solidFill>
+                        <a:schemeClr val="tx1"/>
+                      </a:solidFill>
+                      <a:prstDash val="solid"/>
+                      <a:round/>
+                      <a:headEnd type="none" w="med" len="med"/>
+                      <a:tailEnd type="none" w="med" len="med"/>
+                    </a:lnR>
+                    <a:lnT w="12700" cap="flat" cmpd="sng" algn="ctr">
+                      <a:solidFill>
+                        <a:schemeClr val="tx1"/>
+                      </a:solidFill>
+                      <a:prstDash val="solid"/>
+                      <a:round/>
+                      <a:headEnd type="none" w="med" len="med"/>
+                      <a:tailEnd type="none" w="med" len="med"/>
+                    </a:lnT>
+                    <a:lnB w="12700" cap="flat" cmpd="sng" algn="ctr">
+                      <a:solidFill>
+                        <a:schemeClr val="tx1"/>
+                      </a:solidFill>
+                      <a:prstDash val="solid"/>
+                      <a:round/>
+                      <a:headEnd type="none" w="med" len="med"/>
+                      <a:tailEnd type="none" w="med" len="med"/>
+                    </a:lnB>
+                  </a:tcPr>
+                </a:tc>
+                <a:tc>
+                  <a:txBody>
+                    <a:bodyPr/>
+                    <a:lstStyle/>
+                    <a:p>
+                      <a:r>
+                        <a:rPr lang="ru-RU" sz="1400">
+                          <a:effectLst/>
+                        </a:rPr>
+                        <a:t>255.255.255.0</a:t>
+                      </a:r>
+                    </a:p>
+                  </a:txBody>
+                  <a:tcPr marL="54013" marR="54013" marT="27007" marB="27007" anchor="ctr">
+                    <a:lnL w="12700" cap="flat" cmpd="sng" algn="ctr">
+                      <a:solidFill>
+                        <a:schemeClr val="tx1"/>
+                      </a:solidFill>
+                      <a:prstDash val="solid"/>
+                      <a:round/>
+                      <a:headEnd type="none" w="med" len="med"/>
+                      <a:tailEnd type="none" w="med" len="med"/>
+                    </a:lnL>
+                    <a:lnR w="12700" cap="flat" cmpd="sng" algn="ctr">
+                      <a:solidFill>
+                        <a:schemeClr val="tx1"/>
+                      </a:solidFill>
+                      <a:prstDash val="solid"/>
+                      <a:round/>
+                      <a:headEnd type="none" w="med" len="med"/>
+                      <a:tailEnd type="none" w="med" len="med"/>
+                    </a:lnR>
+                    <a:lnT w="12700" cap="flat" cmpd="sng" algn="ctr">
+                      <a:solidFill>
+                        <a:schemeClr val="tx1"/>
+                      </a:solidFill>
+                      <a:prstDash val="solid"/>
+                      <a:round/>
+                      <a:headEnd type="none" w="med" len="med"/>
+                      <a:tailEnd type="none" w="med" len="med"/>
+                    </a:lnT>
+                    <a:lnB w="12700" cap="flat" cmpd="sng" algn="ctr">
+                      <a:solidFill>
+                        <a:schemeClr val="tx1"/>
+                      </a:solidFill>
+                      <a:prstDash val="solid"/>
+                      <a:round/>
+                      <a:headEnd type="none" w="med" len="med"/>
+                      <a:tailEnd type="none" w="med" len="med"/>
+                    </a:lnB>
+                  </a:tcPr>
+                </a:tc>
+                <a:extLst>
+                  <a:ext uri="{0D108BD9-81ED-4DB2-BD59-A6C34878D82A}">
+                    <a16:rowId xmlns:a16="http://schemas.microsoft.com/office/drawing/2014/main" val="2741991131"/>
+                  </a:ext>
+                </a:extLst>
+              </a:tr>
+              <a:tr h="365128">
+                <a:tc>
+                  <a:txBody>
+                    <a:bodyPr/>
+                    <a:lstStyle/>
+                    <a:p>
+                      <a:r>
+                        <a:rPr lang="ru-RU" sz="1400" b="1" dirty="0">
+                          <a:effectLst/>
+                        </a:rPr>
+                        <a:t>3</a:t>
+                      </a:r>
+                      <a:endParaRPr lang="ru-RU" sz="1400" dirty="0">
+                        <a:effectLst/>
+                      </a:endParaRPr>
+                    </a:p>
+                  </a:txBody>
+                  <a:tcPr marL="54013" marR="54013" marT="27007" marB="27007" anchor="ctr">
+                    <a:lnL w="12700" cap="flat" cmpd="sng" algn="ctr">
+                      <a:solidFill>
+                        <a:schemeClr val="tx1"/>
+                      </a:solidFill>
+                      <a:prstDash val="solid"/>
+                      <a:round/>
+                      <a:headEnd type="none" w="med" len="med"/>
+                      <a:tailEnd type="none" w="med" len="med"/>
+                    </a:lnL>
+                    <a:lnR w="12700" cap="flat" cmpd="sng" algn="ctr">
+                      <a:solidFill>
+                        <a:schemeClr val="tx1"/>
+                      </a:solidFill>
+                      <a:prstDash val="solid"/>
+                      <a:round/>
+                      <a:headEnd type="none" w="med" len="med"/>
+                      <a:tailEnd type="none" w="med" len="med"/>
+                    </a:lnR>
+                    <a:lnT w="12700" cap="flat" cmpd="sng" algn="ctr">
+                      <a:solidFill>
+                        <a:schemeClr val="tx1"/>
+                      </a:solidFill>
+                      <a:prstDash val="solid"/>
+                      <a:round/>
+                      <a:headEnd type="none" w="med" len="med"/>
+                      <a:tailEnd type="none" w="med" len="med"/>
+                    </a:lnT>
+                    <a:lnB w="12700" cap="flat" cmpd="sng" algn="ctr">
+                      <a:solidFill>
+                        <a:schemeClr val="tx1"/>
+                      </a:solidFill>
+                      <a:prstDash val="solid"/>
+                      <a:round/>
+                      <a:headEnd type="none" w="med" len="med"/>
+                      <a:tailEnd type="none" w="med" len="med"/>
+                    </a:lnB>
+                  </a:tcPr>
+                </a:tc>
+                <a:tc>
+                  <a:txBody>
+                    <a:bodyPr/>
+                    <a:lstStyle/>
+                    <a:p>
+                      <a:r>
+                        <a:rPr lang="af-ZA" sz="1400">
+                          <a:effectLst/>
+                        </a:rPr>
+                        <a:t>Router (Default Gateway)</a:t>
+                      </a:r>
+                    </a:p>
+                  </a:txBody>
+                  <a:tcPr marL="54013" marR="54013" marT="27007" marB="27007" anchor="ctr">
+                    <a:lnL w="12700" cap="flat" cmpd="sng" algn="ctr">
+                      <a:solidFill>
+                        <a:schemeClr val="tx1"/>
+                      </a:solidFill>
+                      <a:prstDash val="solid"/>
+                      <a:round/>
+                      <a:headEnd type="none" w="med" len="med"/>
+                      <a:tailEnd type="none" w="med" len="med"/>
+                    </a:lnL>
+                    <a:lnR w="12700" cap="flat" cmpd="sng" algn="ctr">
+                      <a:solidFill>
+                        <a:schemeClr val="tx1"/>
+                      </a:solidFill>
+                      <a:prstDash val="solid"/>
+                      <a:round/>
+                      <a:headEnd type="none" w="med" len="med"/>
+                      <a:tailEnd type="none" w="med" len="med"/>
+                    </a:lnR>
+                    <a:lnT w="12700" cap="flat" cmpd="sng" algn="ctr">
+                      <a:solidFill>
+                        <a:schemeClr val="tx1"/>
+                      </a:solidFill>
+                      <a:prstDash val="solid"/>
+                      <a:round/>
+                      <a:headEnd type="none" w="med" len="med"/>
+                      <a:tailEnd type="none" w="med" len="med"/>
+                    </a:lnT>
+                    <a:lnB w="12700" cap="flat" cmpd="sng" algn="ctr">
+                      <a:solidFill>
+                        <a:schemeClr val="tx1"/>
+                      </a:solidFill>
+                      <a:prstDash val="solid"/>
+                      <a:round/>
+                      <a:headEnd type="none" w="med" len="med"/>
+                      <a:tailEnd type="none" w="med" len="med"/>
+                    </a:lnB>
+                  </a:tcPr>
+                </a:tc>
+                <a:tc>
+                  <a:txBody>
+                    <a:bodyPr/>
+                    <a:lstStyle/>
+                    <a:p>
+                      <a:r>
+                        <a:rPr lang="af-ZA" sz="1400">
+                          <a:effectLst/>
+                        </a:rPr>
+                        <a:t>IP-</a:t>
+                      </a:r>
+                      <a:r>
+                        <a:rPr lang="ru-RU" sz="1400">
+                          <a:effectLst/>
+                        </a:rPr>
+                        <a:t>адрес шлюза по умолчанию</a:t>
+                      </a:r>
+                    </a:p>
+                  </a:txBody>
+                  <a:tcPr marL="54013" marR="54013" marT="27007" marB="27007" anchor="ctr">
+                    <a:lnL w="12700" cap="flat" cmpd="sng" algn="ctr">
+                      <a:solidFill>
+                        <a:schemeClr val="tx1"/>
+                      </a:solidFill>
+                      <a:prstDash val="solid"/>
+                      <a:round/>
+                      <a:headEnd type="none" w="med" len="med"/>
+                      <a:tailEnd type="none" w="med" len="med"/>
+                    </a:lnL>
+                    <a:lnR w="12700" cap="flat" cmpd="sng" algn="ctr">
+                      <a:solidFill>
+                        <a:schemeClr val="tx1"/>
+                      </a:solidFill>
+                      <a:prstDash val="solid"/>
+                      <a:round/>
+                      <a:headEnd type="none" w="med" len="med"/>
+                      <a:tailEnd type="none" w="med" len="med"/>
+                    </a:lnR>
+                    <a:lnT w="12700" cap="flat" cmpd="sng" algn="ctr">
+                      <a:solidFill>
+                        <a:schemeClr val="tx1"/>
+                      </a:solidFill>
+                      <a:prstDash val="solid"/>
+                      <a:round/>
+                      <a:headEnd type="none" w="med" len="med"/>
+                      <a:tailEnd type="none" w="med" len="med"/>
+                    </a:lnT>
+                    <a:lnB w="12700" cap="flat" cmpd="sng" algn="ctr">
+                      <a:solidFill>
+                        <a:schemeClr val="tx1"/>
+                      </a:solidFill>
+                      <a:prstDash val="solid"/>
+                      <a:round/>
+                      <a:headEnd type="none" w="med" len="med"/>
+                      <a:tailEnd type="none" w="med" len="med"/>
+                    </a:lnB>
+                  </a:tcPr>
+                </a:tc>
+                <a:tc>
+                  <a:txBody>
+                    <a:bodyPr/>
+                    <a:lstStyle/>
+                    <a:p>
+                      <a:r>
+                        <a:rPr lang="ru-RU" sz="1400">
+                          <a:effectLst/>
+                        </a:rPr>
+                        <a:t>192.168.1.1</a:t>
+                      </a:r>
+                    </a:p>
+                  </a:txBody>
+                  <a:tcPr marL="54013" marR="54013" marT="27007" marB="27007" anchor="ctr">
+                    <a:lnL w="12700" cap="flat" cmpd="sng" algn="ctr">
+                      <a:solidFill>
+                        <a:schemeClr val="tx1"/>
+                      </a:solidFill>
+                      <a:prstDash val="solid"/>
+                      <a:round/>
+                      <a:headEnd type="none" w="med" len="med"/>
+                      <a:tailEnd type="none" w="med" len="med"/>
+                    </a:lnL>
+                    <a:lnR w="12700" cap="flat" cmpd="sng" algn="ctr">
+                      <a:solidFill>
+                        <a:schemeClr val="tx1"/>
+                      </a:solidFill>
+                      <a:prstDash val="solid"/>
+                      <a:round/>
+                      <a:headEnd type="none" w="med" len="med"/>
+                      <a:tailEnd type="none" w="med" len="med"/>
+                    </a:lnR>
+                    <a:lnT w="12700" cap="flat" cmpd="sng" algn="ctr">
+                      <a:solidFill>
+                        <a:schemeClr val="tx1"/>
+                      </a:solidFill>
+                      <a:prstDash val="solid"/>
+                      <a:round/>
+                      <a:headEnd type="none" w="med" len="med"/>
+                      <a:tailEnd type="none" w="med" len="med"/>
+                    </a:lnT>
+                    <a:lnB w="12700" cap="flat" cmpd="sng" algn="ctr">
+                      <a:solidFill>
+                        <a:schemeClr val="tx1"/>
+                      </a:solidFill>
+                      <a:prstDash val="solid"/>
+                      <a:round/>
+                      <a:headEnd type="none" w="med" len="med"/>
+                      <a:tailEnd type="none" w="med" len="med"/>
+                    </a:lnB>
+                  </a:tcPr>
+                </a:tc>
+                <a:extLst>
+                  <a:ext uri="{0D108BD9-81ED-4DB2-BD59-A6C34878D82A}">
+                    <a16:rowId xmlns:a16="http://schemas.microsoft.com/office/drawing/2014/main" val="2266215212"/>
+                  </a:ext>
+                </a:extLst>
+              </a:tr>
+              <a:tr h="209570">
+                <a:tc>
+                  <a:txBody>
+                    <a:bodyPr/>
+                    <a:lstStyle/>
+                    <a:p>
+                      <a:r>
+                        <a:rPr lang="ru-RU" sz="1400" b="1" dirty="0">
+                          <a:effectLst/>
+                        </a:rPr>
+                        <a:t>6</a:t>
+                      </a:r>
+                      <a:endParaRPr lang="ru-RU" sz="1400" dirty="0">
+                        <a:effectLst/>
+                      </a:endParaRPr>
+                    </a:p>
+                  </a:txBody>
+                  <a:tcPr marL="54013" marR="54013" marT="27007" marB="27007" anchor="ctr">
+                    <a:lnL w="12700" cap="flat" cmpd="sng" algn="ctr">
+                      <a:solidFill>
+                        <a:schemeClr val="tx1"/>
+                      </a:solidFill>
+                      <a:prstDash val="solid"/>
+                      <a:round/>
+                      <a:headEnd type="none" w="med" len="med"/>
+                      <a:tailEnd type="none" w="med" len="med"/>
+                    </a:lnL>
+                    <a:lnR w="12700" cap="flat" cmpd="sng" algn="ctr">
+                      <a:solidFill>
+                        <a:schemeClr val="tx1"/>
+                      </a:solidFill>
+                      <a:prstDash val="solid"/>
+                      <a:round/>
+                      <a:headEnd type="none" w="med" len="med"/>
+                      <a:tailEnd type="none" w="med" len="med"/>
+                    </a:lnR>
+                    <a:lnT w="12700" cap="flat" cmpd="sng" algn="ctr">
+                      <a:solidFill>
+                        <a:schemeClr val="tx1"/>
+                      </a:solidFill>
+                      <a:prstDash val="solid"/>
+                      <a:round/>
+                      <a:headEnd type="none" w="med" len="med"/>
+                      <a:tailEnd type="none" w="med" len="med"/>
+                    </a:lnT>
+                    <a:lnB w="12700" cap="flat" cmpd="sng" algn="ctr">
+                      <a:solidFill>
+                        <a:schemeClr val="tx1"/>
+                      </a:solidFill>
+                      <a:prstDash val="solid"/>
+                      <a:round/>
+                      <a:headEnd type="none" w="med" len="med"/>
+                      <a:tailEnd type="none" w="med" len="med"/>
+                    </a:lnB>
+                  </a:tcPr>
+                </a:tc>
+                <a:tc>
+                  <a:txBody>
+                    <a:bodyPr/>
+                    <a:lstStyle/>
+                    <a:p>
+                      <a:r>
+                        <a:rPr lang="af-ZA" sz="1400" dirty="0">
+                          <a:effectLst/>
+                        </a:rPr>
+                        <a:t>DNS Servers</a:t>
+                      </a:r>
+                    </a:p>
+                  </a:txBody>
+                  <a:tcPr marL="54013" marR="54013" marT="27007" marB="27007" anchor="ctr">
+                    <a:lnL w="12700" cap="flat" cmpd="sng" algn="ctr">
+                      <a:solidFill>
+                        <a:schemeClr val="tx1"/>
+                      </a:solidFill>
+                      <a:prstDash val="solid"/>
+                      <a:round/>
+                      <a:headEnd type="none" w="med" len="med"/>
+                      <a:tailEnd type="none" w="med" len="med"/>
+                    </a:lnL>
+                    <a:lnR w="12700" cap="flat" cmpd="sng" algn="ctr">
+                      <a:solidFill>
+                        <a:schemeClr val="tx1"/>
+                      </a:solidFill>
+                      <a:prstDash val="solid"/>
+                      <a:round/>
+                      <a:headEnd type="none" w="med" len="med"/>
+                      <a:tailEnd type="none" w="med" len="med"/>
+                    </a:lnR>
+                    <a:lnT w="12700" cap="flat" cmpd="sng" algn="ctr">
+                      <a:solidFill>
+                        <a:schemeClr val="tx1"/>
+                      </a:solidFill>
+                      <a:prstDash val="solid"/>
+                      <a:round/>
+                      <a:headEnd type="none" w="med" len="med"/>
+                      <a:tailEnd type="none" w="med" len="med"/>
+                    </a:lnT>
+                    <a:lnB w="12700" cap="flat" cmpd="sng" algn="ctr">
+                      <a:solidFill>
+                        <a:schemeClr val="tx1"/>
+                      </a:solidFill>
+                      <a:prstDash val="solid"/>
+                      <a:round/>
+                      <a:headEnd type="none" w="med" len="med"/>
+                      <a:tailEnd type="none" w="med" len="med"/>
+                    </a:lnB>
+                  </a:tcPr>
+                </a:tc>
+                <a:tc>
+                  <a:txBody>
+                    <a:bodyPr/>
+                    <a:lstStyle/>
+                    <a:p>
+                      <a:r>
+                        <a:rPr lang="ru-RU" sz="1400">
+                          <a:effectLst/>
+                        </a:rPr>
+                        <a:t>Список </a:t>
+                      </a:r>
+                      <a:r>
+                        <a:rPr lang="af-ZA" sz="1400">
+                          <a:effectLst/>
+                        </a:rPr>
+                        <a:t>DNS-</a:t>
+                      </a:r>
+                      <a:r>
+                        <a:rPr lang="ru-RU" sz="1400">
+                          <a:effectLst/>
+                        </a:rPr>
+                        <a:t>серверов</a:t>
+                      </a:r>
+                    </a:p>
+                  </a:txBody>
+                  <a:tcPr marL="54013" marR="54013" marT="27007" marB="27007" anchor="ctr">
+                    <a:lnL w="12700" cap="flat" cmpd="sng" algn="ctr">
+                      <a:solidFill>
+                        <a:schemeClr val="tx1"/>
+                      </a:solidFill>
+                      <a:prstDash val="solid"/>
+                      <a:round/>
+                      <a:headEnd type="none" w="med" len="med"/>
+                      <a:tailEnd type="none" w="med" len="med"/>
+                    </a:lnL>
+                    <a:lnR w="12700" cap="flat" cmpd="sng" algn="ctr">
+                      <a:solidFill>
+                        <a:schemeClr val="tx1"/>
+                      </a:solidFill>
+                      <a:prstDash val="solid"/>
+                      <a:round/>
+                      <a:headEnd type="none" w="med" len="med"/>
+                      <a:tailEnd type="none" w="med" len="med"/>
+                    </a:lnR>
+                    <a:lnT w="12700" cap="flat" cmpd="sng" algn="ctr">
+                      <a:solidFill>
+                        <a:schemeClr val="tx1"/>
+                      </a:solidFill>
+                      <a:prstDash val="solid"/>
+                      <a:round/>
+                      <a:headEnd type="none" w="med" len="med"/>
+                      <a:tailEnd type="none" w="med" len="med"/>
+                    </a:lnT>
+                    <a:lnB w="12700" cap="flat" cmpd="sng" algn="ctr">
+                      <a:solidFill>
+                        <a:schemeClr val="tx1"/>
+                      </a:solidFill>
+                      <a:prstDash val="solid"/>
+                      <a:round/>
+                      <a:headEnd type="none" w="med" len="med"/>
+                      <a:tailEnd type="none" w="med" len="med"/>
+                    </a:lnB>
+                  </a:tcPr>
+                </a:tc>
+                <a:tc>
+                  <a:txBody>
+                    <a:bodyPr/>
+                    <a:lstStyle/>
+                    <a:p>
+                      <a:r>
+                        <a:rPr lang="ru-RU" sz="1400">
+                          <a:effectLst/>
+                        </a:rPr>
+                        <a:t>8.8.8.8, 1.1.1.1</a:t>
+                      </a:r>
+                    </a:p>
+                  </a:txBody>
+                  <a:tcPr marL="54013" marR="54013" marT="27007" marB="27007" anchor="ctr">
+                    <a:lnL w="12700" cap="flat" cmpd="sng" algn="ctr">
+                      <a:solidFill>
+                        <a:schemeClr val="tx1"/>
+                      </a:solidFill>
+                      <a:prstDash val="solid"/>
+                      <a:round/>
+                      <a:headEnd type="none" w="med" len="med"/>
+                      <a:tailEnd type="none" w="med" len="med"/>
+                    </a:lnL>
+                    <a:lnR w="12700" cap="flat" cmpd="sng" algn="ctr">
+                      <a:solidFill>
+                        <a:schemeClr val="tx1"/>
+                      </a:solidFill>
+                      <a:prstDash val="solid"/>
+                      <a:round/>
+                      <a:headEnd type="none" w="med" len="med"/>
+                      <a:tailEnd type="none" w="med" len="med"/>
+                    </a:lnR>
+                    <a:lnT w="12700" cap="flat" cmpd="sng" algn="ctr">
+                      <a:solidFill>
+                        <a:schemeClr val="tx1"/>
+                      </a:solidFill>
+                      <a:prstDash val="solid"/>
+                      <a:round/>
+                      <a:headEnd type="none" w="med" len="med"/>
+                      <a:tailEnd type="none" w="med" len="med"/>
+                    </a:lnT>
+                    <a:lnB w="12700" cap="flat" cmpd="sng" algn="ctr">
+                      <a:solidFill>
+                        <a:schemeClr val="tx1"/>
+                      </a:solidFill>
+                      <a:prstDash val="solid"/>
+                      <a:round/>
+                      <a:headEnd type="none" w="med" len="med"/>
+                      <a:tailEnd type="none" w="med" len="med"/>
+                    </a:lnB>
+                  </a:tcPr>
+                </a:tc>
+                <a:extLst>
+                  <a:ext uri="{0D108BD9-81ED-4DB2-BD59-A6C34878D82A}">
+                    <a16:rowId xmlns:a16="http://schemas.microsoft.com/office/drawing/2014/main" val="2313001324"/>
+                  </a:ext>
+                </a:extLst>
+              </a:tr>
+              <a:tr h="209570">
+                <a:tc>
+                  <a:txBody>
+                    <a:bodyPr/>
+                    <a:lstStyle/>
+                    <a:p>
+                      <a:r>
+                        <a:rPr lang="ru-RU" sz="1400" b="1">
+                          <a:effectLst/>
+                        </a:rPr>
+                        <a:t>15</a:t>
+                      </a:r>
+                      <a:endParaRPr lang="ru-RU" sz="1400">
+                        <a:effectLst/>
+                      </a:endParaRPr>
+                    </a:p>
+                  </a:txBody>
+                  <a:tcPr marL="54013" marR="54013" marT="27007" marB="27007" anchor="ctr">
+                    <a:lnL w="12700" cap="flat" cmpd="sng" algn="ctr">
+                      <a:solidFill>
+                        <a:schemeClr val="tx1"/>
+                      </a:solidFill>
+                      <a:prstDash val="solid"/>
+                      <a:round/>
+                      <a:headEnd type="none" w="med" len="med"/>
+                      <a:tailEnd type="none" w="med" len="med"/>
+                    </a:lnL>
+                    <a:lnR w="12700" cap="flat" cmpd="sng" algn="ctr">
+                      <a:solidFill>
+                        <a:schemeClr val="tx1"/>
+                      </a:solidFill>
+                      <a:prstDash val="solid"/>
+                      <a:round/>
+                      <a:headEnd type="none" w="med" len="med"/>
+                      <a:tailEnd type="none" w="med" len="med"/>
+                    </a:lnR>
+                    <a:lnT w="12700" cap="flat" cmpd="sng" algn="ctr">
+                      <a:solidFill>
+                        <a:schemeClr val="tx1"/>
+                      </a:solidFill>
+                      <a:prstDash val="solid"/>
+                      <a:round/>
+                      <a:headEnd type="none" w="med" len="med"/>
+                      <a:tailEnd type="none" w="med" len="med"/>
+                    </a:lnT>
+                    <a:lnB w="12700" cap="flat" cmpd="sng" algn="ctr">
+                      <a:solidFill>
+                        <a:schemeClr val="tx1"/>
+                      </a:solidFill>
+                      <a:prstDash val="solid"/>
+                      <a:round/>
+                      <a:headEnd type="none" w="med" len="med"/>
+                      <a:tailEnd type="none" w="med" len="med"/>
+                    </a:lnB>
+                  </a:tcPr>
+                </a:tc>
+                <a:tc>
+                  <a:txBody>
+                    <a:bodyPr/>
+                    <a:lstStyle/>
+                    <a:p>
+                      <a:r>
+                        <a:rPr lang="af-ZA" sz="1400" dirty="0">
+                          <a:effectLst/>
+                        </a:rPr>
+                        <a:t>Domain Name</a:t>
+                      </a:r>
+                    </a:p>
+                  </a:txBody>
+                  <a:tcPr marL="54013" marR="54013" marT="27007" marB="27007" anchor="ctr">
+                    <a:lnL w="12700" cap="flat" cmpd="sng" algn="ctr">
+                      <a:solidFill>
+                        <a:schemeClr val="tx1"/>
+                      </a:solidFill>
+                      <a:prstDash val="solid"/>
+                      <a:round/>
+                      <a:headEnd type="none" w="med" len="med"/>
+                      <a:tailEnd type="none" w="med" len="med"/>
+                    </a:lnL>
+                    <a:lnR w="12700" cap="flat" cmpd="sng" algn="ctr">
+                      <a:solidFill>
+                        <a:schemeClr val="tx1"/>
+                      </a:solidFill>
+                      <a:prstDash val="solid"/>
+                      <a:round/>
+                      <a:headEnd type="none" w="med" len="med"/>
+                      <a:tailEnd type="none" w="med" len="med"/>
+                    </a:lnR>
+                    <a:lnT w="12700" cap="flat" cmpd="sng" algn="ctr">
+                      <a:solidFill>
+                        <a:schemeClr val="tx1"/>
+                      </a:solidFill>
+                      <a:prstDash val="solid"/>
+                      <a:round/>
+                      <a:headEnd type="none" w="med" len="med"/>
+                      <a:tailEnd type="none" w="med" len="med"/>
+                    </a:lnT>
+                    <a:lnB w="12700" cap="flat" cmpd="sng" algn="ctr">
+                      <a:solidFill>
+                        <a:schemeClr val="tx1"/>
+                      </a:solidFill>
+                      <a:prstDash val="solid"/>
+                      <a:round/>
+                      <a:headEnd type="none" w="med" len="med"/>
+                      <a:tailEnd type="none" w="med" len="med"/>
+                    </a:lnB>
+                  </a:tcPr>
+                </a:tc>
+                <a:tc>
+                  <a:txBody>
+                    <a:bodyPr/>
+                    <a:lstStyle/>
+                    <a:p>
+                      <a:r>
+                        <a:rPr lang="af-ZA" sz="1400">
+                          <a:effectLst/>
+                        </a:rPr>
+                        <a:t>DNS-</a:t>
+                      </a:r>
+                      <a:r>
+                        <a:rPr lang="ru-RU" sz="1400">
+                          <a:effectLst/>
+                        </a:rPr>
+                        <a:t>домен клиента</a:t>
+                      </a:r>
+                    </a:p>
+                  </a:txBody>
+                  <a:tcPr marL="54013" marR="54013" marT="27007" marB="27007" anchor="ctr">
+                    <a:lnL w="12700" cap="flat" cmpd="sng" algn="ctr">
+                      <a:solidFill>
+                        <a:schemeClr val="tx1"/>
+                      </a:solidFill>
+                      <a:prstDash val="solid"/>
+                      <a:round/>
+                      <a:headEnd type="none" w="med" len="med"/>
+                      <a:tailEnd type="none" w="med" len="med"/>
+                    </a:lnL>
+                    <a:lnR w="12700" cap="flat" cmpd="sng" algn="ctr">
+                      <a:solidFill>
+                        <a:schemeClr val="tx1"/>
+                      </a:solidFill>
+                      <a:prstDash val="solid"/>
+                      <a:round/>
+                      <a:headEnd type="none" w="med" len="med"/>
+                      <a:tailEnd type="none" w="med" len="med"/>
+                    </a:lnR>
+                    <a:lnT w="12700" cap="flat" cmpd="sng" algn="ctr">
+                      <a:solidFill>
+                        <a:schemeClr val="tx1"/>
+                      </a:solidFill>
+                      <a:prstDash val="solid"/>
+                      <a:round/>
+                      <a:headEnd type="none" w="med" len="med"/>
+                      <a:tailEnd type="none" w="med" len="med"/>
+                    </a:lnT>
+                    <a:lnB w="12700" cap="flat" cmpd="sng" algn="ctr">
+                      <a:solidFill>
+                        <a:schemeClr val="tx1"/>
+                      </a:solidFill>
+                      <a:prstDash val="solid"/>
+                      <a:round/>
+                      <a:headEnd type="none" w="med" len="med"/>
+                      <a:tailEnd type="none" w="med" len="med"/>
+                    </a:lnB>
+                  </a:tcPr>
+                </a:tc>
+                <a:tc>
+                  <a:txBody>
+                    <a:bodyPr/>
+                    <a:lstStyle/>
+                    <a:p>
+                      <a:r>
+                        <a:rPr lang="af-ZA" sz="1400">
+                          <a:effectLst/>
+                        </a:rPr>
+                        <a:t>company.local</a:t>
+                      </a:r>
+                    </a:p>
+                  </a:txBody>
+                  <a:tcPr marL="54013" marR="54013" marT="27007" marB="27007" anchor="ctr">
+                    <a:lnL w="12700" cap="flat" cmpd="sng" algn="ctr">
+                      <a:solidFill>
+                        <a:schemeClr val="tx1"/>
+                      </a:solidFill>
+                      <a:prstDash val="solid"/>
+                      <a:round/>
+                      <a:headEnd type="none" w="med" len="med"/>
+                      <a:tailEnd type="none" w="med" len="med"/>
+                    </a:lnL>
+                    <a:lnR w="12700" cap="flat" cmpd="sng" algn="ctr">
+                      <a:solidFill>
+                        <a:schemeClr val="tx1"/>
+                      </a:solidFill>
+                      <a:prstDash val="solid"/>
+                      <a:round/>
+                      <a:headEnd type="none" w="med" len="med"/>
+                      <a:tailEnd type="none" w="med" len="med"/>
+                    </a:lnR>
+                    <a:lnT w="12700" cap="flat" cmpd="sng" algn="ctr">
+                      <a:solidFill>
+                        <a:schemeClr val="tx1"/>
+                      </a:solidFill>
+                      <a:prstDash val="solid"/>
+                      <a:round/>
+                      <a:headEnd type="none" w="med" len="med"/>
+                      <a:tailEnd type="none" w="med" len="med"/>
+                    </a:lnT>
+                    <a:lnB w="12700" cap="flat" cmpd="sng" algn="ctr">
+                      <a:solidFill>
+                        <a:schemeClr val="tx1"/>
+                      </a:solidFill>
+                      <a:prstDash val="solid"/>
+                      <a:round/>
+                      <a:headEnd type="none" w="med" len="med"/>
+                      <a:tailEnd type="none" w="med" len="med"/>
+                    </a:lnB>
+                  </a:tcPr>
+                </a:tc>
+                <a:extLst>
+                  <a:ext uri="{0D108BD9-81ED-4DB2-BD59-A6C34878D82A}">
+                    <a16:rowId xmlns:a16="http://schemas.microsoft.com/office/drawing/2014/main" val="1318182717"/>
+                  </a:ext>
+                </a:extLst>
+              </a:tr>
+              <a:tr h="520685">
+                <a:tc>
+                  <a:txBody>
+                    <a:bodyPr/>
+                    <a:lstStyle/>
+                    <a:p>
+                      <a:r>
+                        <a:rPr lang="ru-RU" sz="1400" b="1">
+                          <a:effectLst/>
+                        </a:rPr>
+                        <a:t>42</a:t>
+                      </a:r>
+                      <a:endParaRPr lang="ru-RU" sz="1400">
+                        <a:effectLst/>
+                      </a:endParaRPr>
+                    </a:p>
+                  </a:txBody>
+                  <a:tcPr marL="54013" marR="54013" marT="27007" marB="27007" anchor="ctr">
+                    <a:lnL w="12700" cap="flat" cmpd="sng" algn="ctr">
+                      <a:solidFill>
+                        <a:schemeClr val="tx1"/>
+                      </a:solidFill>
+                      <a:prstDash val="solid"/>
+                      <a:round/>
+                      <a:headEnd type="none" w="med" len="med"/>
+                      <a:tailEnd type="none" w="med" len="med"/>
+                    </a:lnL>
+                    <a:lnR w="12700" cap="flat" cmpd="sng" algn="ctr">
+                      <a:solidFill>
+                        <a:schemeClr val="tx1"/>
+                      </a:solidFill>
+                      <a:prstDash val="solid"/>
+                      <a:round/>
+                      <a:headEnd type="none" w="med" len="med"/>
+                      <a:tailEnd type="none" w="med" len="med"/>
+                    </a:lnR>
+                    <a:lnT w="12700" cap="flat" cmpd="sng" algn="ctr">
+                      <a:solidFill>
+                        <a:schemeClr val="tx1"/>
+                      </a:solidFill>
+                      <a:prstDash val="solid"/>
+                      <a:round/>
+                      <a:headEnd type="none" w="med" len="med"/>
+                      <a:tailEnd type="none" w="med" len="med"/>
+                    </a:lnT>
+                    <a:lnB w="12700" cap="flat" cmpd="sng" algn="ctr">
+                      <a:solidFill>
+                        <a:schemeClr val="tx1"/>
+                      </a:solidFill>
+                      <a:prstDash val="solid"/>
+                      <a:round/>
+                      <a:headEnd type="none" w="med" len="med"/>
+                      <a:tailEnd type="none" w="med" len="med"/>
+                    </a:lnB>
+                  </a:tcPr>
+                </a:tc>
+                <a:tc>
+                  <a:txBody>
+                    <a:bodyPr/>
+                    <a:lstStyle/>
+                    <a:p>
+                      <a:r>
+                        <a:rPr lang="af-ZA" sz="1400" dirty="0">
+                          <a:effectLst/>
+                        </a:rPr>
+                        <a:t>NTP Servers</a:t>
+                      </a:r>
+                    </a:p>
+                  </a:txBody>
+                  <a:tcPr marL="54013" marR="54013" marT="27007" marB="27007" anchor="ctr">
+                    <a:lnL w="12700" cap="flat" cmpd="sng" algn="ctr">
+                      <a:solidFill>
+                        <a:schemeClr val="tx1"/>
+                      </a:solidFill>
+                      <a:prstDash val="solid"/>
+                      <a:round/>
+                      <a:headEnd type="none" w="med" len="med"/>
+                      <a:tailEnd type="none" w="med" len="med"/>
+                    </a:lnL>
+                    <a:lnR w="12700" cap="flat" cmpd="sng" algn="ctr">
+                      <a:solidFill>
+                        <a:schemeClr val="tx1"/>
+                      </a:solidFill>
+                      <a:prstDash val="solid"/>
+                      <a:round/>
+                      <a:headEnd type="none" w="med" len="med"/>
+                      <a:tailEnd type="none" w="med" len="med"/>
+                    </a:lnR>
+                    <a:lnT w="12700" cap="flat" cmpd="sng" algn="ctr">
+                      <a:solidFill>
+                        <a:schemeClr val="tx1"/>
+                      </a:solidFill>
+                      <a:prstDash val="solid"/>
+                      <a:round/>
+                      <a:headEnd type="none" w="med" len="med"/>
+                      <a:tailEnd type="none" w="med" len="med"/>
+                    </a:lnT>
+                    <a:lnB w="12700" cap="flat" cmpd="sng" algn="ctr">
+                      <a:solidFill>
+                        <a:schemeClr val="tx1"/>
+                      </a:solidFill>
+                      <a:prstDash val="solid"/>
+                      <a:round/>
+                      <a:headEnd type="none" w="med" len="med"/>
+                      <a:tailEnd type="none" w="med" len="med"/>
+                    </a:lnB>
+                  </a:tcPr>
+                </a:tc>
+                <a:tc>
+                  <a:txBody>
+                    <a:bodyPr/>
+                    <a:lstStyle/>
+                    <a:p>
+                      <a:r>
+                        <a:rPr lang="ru-RU" sz="1400">
+                          <a:effectLst/>
+                        </a:rPr>
+                        <a:t>Серверы синхронизации времени</a:t>
+                      </a:r>
+                    </a:p>
+                  </a:txBody>
+                  <a:tcPr marL="54013" marR="54013" marT="27007" marB="27007" anchor="ctr">
+                    <a:lnL w="12700" cap="flat" cmpd="sng" algn="ctr">
+                      <a:solidFill>
+                        <a:schemeClr val="tx1"/>
+                      </a:solidFill>
+                      <a:prstDash val="solid"/>
+                      <a:round/>
+                      <a:headEnd type="none" w="med" len="med"/>
+                      <a:tailEnd type="none" w="med" len="med"/>
+                    </a:lnL>
+                    <a:lnR w="12700" cap="flat" cmpd="sng" algn="ctr">
+                      <a:solidFill>
+                        <a:schemeClr val="tx1"/>
+                      </a:solidFill>
+                      <a:prstDash val="solid"/>
+                      <a:round/>
+                      <a:headEnd type="none" w="med" len="med"/>
+                      <a:tailEnd type="none" w="med" len="med"/>
+                    </a:lnR>
+                    <a:lnT w="12700" cap="flat" cmpd="sng" algn="ctr">
+                      <a:solidFill>
+                        <a:schemeClr val="tx1"/>
+                      </a:solidFill>
+                      <a:prstDash val="solid"/>
+                      <a:round/>
+                      <a:headEnd type="none" w="med" len="med"/>
+                      <a:tailEnd type="none" w="med" len="med"/>
+                    </a:lnT>
+                    <a:lnB w="12700" cap="flat" cmpd="sng" algn="ctr">
+                      <a:solidFill>
+                        <a:schemeClr val="tx1"/>
+                      </a:solidFill>
+                      <a:prstDash val="solid"/>
+                      <a:round/>
+                      <a:headEnd type="none" w="med" len="med"/>
+                      <a:tailEnd type="none" w="med" len="med"/>
+                    </a:lnB>
+                  </a:tcPr>
+                </a:tc>
+                <a:tc>
+                  <a:txBody>
+                    <a:bodyPr/>
+                    <a:lstStyle/>
+                    <a:p>
+                      <a:r>
+                        <a:rPr lang="ru-RU" sz="1400">
+                          <a:effectLst/>
+                        </a:rPr>
+                        <a:t>192.168.1.10</a:t>
+                      </a:r>
+                    </a:p>
+                  </a:txBody>
+                  <a:tcPr marL="54013" marR="54013" marT="27007" marB="27007" anchor="ctr">
+                    <a:lnL w="12700" cap="flat" cmpd="sng" algn="ctr">
+                      <a:solidFill>
+                        <a:schemeClr val="tx1"/>
+                      </a:solidFill>
+                      <a:prstDash val="solid"/>
+                      <a:round/>
+                      <a:headEnd type="none" w="med" len="med"/>
+                      <a:tailEnd type="none" w="med" len="med"/>
+                    </a:lnL>
+                    <a:lnR w="12700" cap="flat" cmpd="sng" algn="ctr">
+                      <a:solidFill>
+                        <a:schemeClr val="tx1"/>
+                      </a:solidFill>
+                      <a:prstDash val="solid"/>
+                      <a:round/>
+                      <a:headEnd type="none" w="med" len="med"/>
+                      <a:tailEnd type="none" w="med" len="med"/>
+                    </a:lnR>
+                    <a:lnT w="12700" cap="flat" cmpd="sng" algn="ctr">
+                      <a:solidFill>
+                        <a:schemeClr val="tx1"/>
+                      </a:solidFill>
+                      <a:prstDash val="solid"/>
+                      <a:round/>
+                      <a:headEnd type="none" w="med" len="med"/>
+                      <a:tailEnd type="none" w="med" len="med"/>
+                    </a:lnT>
+                    <a:lnB w="12700" cap="flat" cmpd="sng" algn="ctr">
+                      <a:solidFill>
+                        <a:schemeClr val="tx1"/>
+                      </a:solidFill>
+                      <a:prstDash val="solid"/>
+                      <a:round/>
+                      <a:headEnd type="none" w="med" len="med"/>
+                      <a:tailEnd type="none" w="med" len="med"/>
+                    </a:lnB>
+                  </a:tcPr>
+                </a:tc>
+                <a:extLst>
+                  <a:ext uri="{0D108BD9-81ED-4DB2-BD59-A6C34878D82A}">
+                    <a16:rowId xmlns:a16="http://schemas.microsoft.com/office/drawing/2014/main" val="569648509"/>
+                  </a:ext>
+                </a:extLst>
+              </a:tr>
+              <a:tr h="365128">
+                <a:tc>
+                  <a:txBody>
+                    <a:bodyPr/>
+                    <a:lstStyle/>
+                    <a:p>
+                      <a:r>
+                        <a:rPr lang="ru-RU" sz="1400" b="1">
+                          <a:effectLst/>
+                        </a:rPr>
+                        <a:t>51</a:t>
+                      </a:r>
+                      <a:endParaRPr lang="ru-RU" sz="1400">
+                        <a:effectLst/>
+                      </a:endParaRPr>
+                    </a:p>
+                  </a:txBody>
+                  <a:tcPr marL="54013" marR="54013" marT="27007" marB="27007" anchor="ctr">
+                    <a:lnL w="12700" cap="flat" cmpd="sng" algn="ctr">
+                      <a:solidFill>
+                        <a:schemeClr val="tx1"/>
+                      </a:solidFill>
+                      <a:prstDash val="solid"/>
+                      <a:round/>
+                      <a:headEnd type="none" w="med" len="med"/>
+                      <a:tailEnd type="none" w="med" len="med"/>
+                    </a:lnL>
+                    <a:lnR w="12700" cap="flat" cmpd="sng" algn="ctr">
+                      <a:solidFill>
+                        <a:schemeClr val="tx1"/>
+                      </a:solidFill>
+                      <a:prstDash val="solid"/>
+                      <a:round/>
+                      <a:headEnd type="none" w="med" len="med"/>
+                      <a:tailEnd type="none" w="med" len="med"/>
+                    </a:lnR>
+                    <a:lnT w="12700" cap="flat" cmpd="sng" algn="ctr">
+                      <a:solidFill>
+                        <a:schemeClr val="tx1"/>
+                      </a:solidFill>
+                      <a:prstDash val="solid"/>
+                      <a:round/>
+                      <a:headEnd type="none" w="med" len="med"/>
+                      <a:tailEnd type="none" w="med" len="med"/>
+                    </a:lnT>
+                    <a:lnB w="12700" cap="flat" cmpd="sng" algn="ctr">
+                      <a:solidFill>
+                        <a:schemeClr val="tx1"/>
+                      </a:solidFill>
+                      <a:prstDash val="solid"/>
+                      <a:round/>
+                      <a:headEnd type="none" w="med" len="med"/>
+                      <a:tailEnd type="none" w="med" len="med"/>
+                    </a:lnB>
+                  </a:tcPr>
+                </a:tc>
+                <a:tc>
+                  <a:txBody>
+                    <a:bodyPr/>
+                    <a:lstStyle/>
+                    <a:p>
+                      <a:r>
+                        <a:rPr lang="af-ZA" sz="1400" dirty="0">
+                          <a:effectLst/>
+                        </a:rPr>
+                        <a:t>IP Address Lease Time</a:t>
+                      </a:r>
+                    </a:p>
+                  </a:txBody>
+                  <a:tcPr marL="54013" marR="54013" marT="27007" marB="27007" anchor="ctr">
+                    <a:lnL w="12700" cap="flat" cmpd="sng" algn="ctr">
+                      <a:solidFill>
+                        <a:schemeClr val="tx1"/>
+                      </a:solidFill>
+                      <a:prstDash val="solid"/>
+                      <a:round/>
+                      <a:headEnd type="none" w="med" len="med"/>
+                      <a:tailEnd type="none" w="med" len="med"/>
+                    </a:lnL>
+                    <a:lnR w="12700" cap="flat" cmpd="sng" algn="ctr">
+                      <a:solidFill>
+                        <a:schemeClr val="tx1"/>
+                      </a:solidFill>
+                      <a:prstDash val="solid"/>
+                      <a:round/>
+                      <a:headEnd type="none" w="med" len="med"/>
+                      <a:tailEnd type="none" w="med" len="med"/>
+                    </a:lnR>
+                    <a:lnT w="12700" cap="flat" cmpd="sng" algn="ctr">
+                      <a:solidFill>
+                        <a:schemeClr val="tx1"/>
+                      </a:solidFill>
+                      <a:prstDash val="solid"/>
+                      <a:round/>
+                      <a:headEnd type="none" w="med" len="med"/>
+                      <a:tailEnd type="none" w="med" len="med"/>
+                    </a:lnT>
+                    <a:lnB w="12700" cap="flat" cmpd="sng" algn="ctr">
+                      <a:solidFill>
+                        <a:schemeClr val="tx1"/>
+                      </a:solidFill>
+                      <a:prstDash val="solid"/>
+                      <a:round/>
+                      <a:headEnd type="none" w="med" len="med"/>
+                      <a:tailEnd type="none" w="med" len="med"/>
+                    </a:lnB>
+                  </a:tcPr>
+                </a:tc>
+                <a:tc>
+                  <a:txBody>
+                    <a:bodyPr/>
+                    <a:lstStyle/>
+                    <a:p>
+                      <a:r>
+                        <a:rPr lang="ru-RU" sz="1400">
+                          <a:effectLst/>
+                        </a:rPr>
+                        <a:t>Время аренды </a:t>
+                      </a:r>
+                      <a:r>
+                        <a:rPr lang="af-ZA" sz="1400">
+                          <a:effectLst/>
+                        </a:rPr>
+                        <a:t>IP-</a:t>
+                      </a:r>
+                      <a:r>
+                        <a:rPr lang="ru-RU" sz="1400">
+                          <a:effectLst/>
+                        </a:rPr>
+                        <a:t>адреса</a:t>
+                      </a:r>
+                    </a:p>
+                  </a:txBody>
+                  <a:tcPr marL="54013" marR="54013" marT="27007" marB="27007" anchor="ctr">
+                    <a:lnL w="12700" cap="flat" cmpd="sng" algn="ctr">
+                      <a:solidFill>
+                        <a:schemeClr val="tx1"/>
+                      </a:solidFill>
+                      <a:prstDash val="solid"/>
+                      <a:round/>
+                      <a:headEnd type="none" w="med" len="med"/>
+                      <a:tailEnd type="none" w="med" len="med"/>
+                    </a:lnL>
+                    <a:lnR w="12700" cap="flat" cmpd="sng" algn="ctr">
+                      <a:solidFill>
+                        <a:schemeClr val="tx1"/>
+                      </a:solidFill>
+                      <a:prstDash val="solid"/>
+                      <a:round/>
+                      <a:headEnd type="none" w="med" len="med"/>
+                      <a:tailEnd type="none" w="med" len="med"/>
+                    </a:lnR>
+                    <a:lnT w="12700" cap="flat" cmpd="sng" algn="ctr">
+                      <a:solidFill>
+                        <a:schemeClr val="tx1"/>
+                      </a:solidFill>
+                      <a:prstDash val="solid"/>
+                      <a:round/>
+                      <a:headEnd type="none" w="med" len="med"/>
+                      <a:tailEnd type="none" w="med" len="med"/>
+                    </a:lnT>
+                    <a:lnB w="12700" cap="flat" cmpd="sng" algn="ctr">
+                      <a:solidFill>
+                        <a:schemeClr val="tx1"/>
+                      </a:solidFill>
+                      <a:prstDash val="solid"/>
+                      <a:round/>
+                      <a:headEnd type="none" w="med" len="med"/>
+                      <a:tailEnd type="none" w="med" len="med"/>
+                    </a:lnB>
+                  </a:tcPr>
+                </a:tc>
+                <a:tc>
+                  <a:txBody>
+                    <a:bodyPr/>
+                    <a:lstStyle/>
+                    <a:p>
+                      <a:r>
+                        <a:rPr lang="ru-RU" sz="1400">
+                          <a:effectLst/>
+                        </a:rPr>
+                        <a:t>86400 (24 часа)</a:t>
+                      </a:r>
+                    </a:p>
+                  </a:txBody>
+                  <a:tcPr marL="54013" marR="54013" marT="27007" marB="27007" anchor="ctr">
+                    <a:lnL w="12700" cap="flat" cmpd="sng" algn="ctr">
+                      <a:solidFill>
+                        <a:schemeClr val="tx1"/>
+                      </a:solidFill>
+                      <a:prstDash val="solid"/>
+                      <a:round/>
+                      <a:headEnd type="none" w="med" len="med"/>
+                      <a:tailEnd type="none" w="med" len="med"/>
+                    </a:lnL>
+                    <a:lnR w="12700" cap="flat" cmpd="sng" algn="ctr">
+                      <a:solidFill>
+                        <a:schemeClr val="tx1"/>
+                      </a:solidFill>
+                      <a:prstDash val="solid"/>
+                      <a:round/>
+                      <a:headEnd type="none" w="med" len="med"/>
+                      <a:tailEnd type="none" w="med" len="med"/>
+                    </a:lnR>
+                    <a:lnT w="12700" cap="flat" cmpd="sng" algn="ctr">
+                      <a:solidFill>
+                        <a:schemeClr val="tx1"/>
+                      </a:solidFill>
+                      <a:prstDash val="solid"/>
+                      <a:round/>
+                      <a:headEnd type="none" w="med" len="med"/>
+                      <a:tailEnd type="none" w="med" len="med"/>
+                    </a:lnT>
+                    <a:lnB w="12700" cap="flat" cmpd="sng" algn="ctr">
+                      <a:solidFill>
+                        <a:schemeClr val="tx1"/>
+                      </a:solidFill>
+                      <a:prstDash val="solid"/>
+                      <a:round/>
+                      <a:headEnd type="none" w="med" len="med"/>
+                      <a:tailEnd type="none" w="med" len="med"/>
+                    </a:lnB>
+                  </a:tcPr>
+                </a:tc>
+                <a:extLst>
+                  <a:ext uri="{0D108BD9-81ED-4DB2-BD59-A6C34878D82A}">
+                    <a16:rowId xmlns:a16="http://schemas.microsoft.com/office/drawing/2014/main" val="497979280"/>
+                  </a:ext>
+                </a:extLst>
+              </a:tr>
+              <a:tr h="209570">
+                <a:tc>
+                  <a:txBody>
+                    <a:bodyPr/>
+                    <a:lstStyle/>
+                    <a:p>
+                      <a:r>
+                        <a:rPr lang="ru-RU" sz="1400" b="1">
+                          <a:effectLst/>
+                        </a:rPr>
+                        <a:t>54</a:t>
+                      </a:r>
+                      <a:endParaRPr lang="ru-RU" sz="1400">
+                        <a:effectLst/>
+                      </a:endParaRPr>
+                    </a:p>
+                  </a:txBody>
+                  <a:tcPr marL="54013" marR="54013" marT="27007" marB="27007" anchor="ctr">
+                    <a:lnL w="12700" cap="flat" cmpd="sng" algn="ctr">
+                      <a:solidFill>
+                        <a:schemeClr val="tx1"/>
+                      </a:solidFill>
+                      <a:prstDash val="solid"/>
+                      <a:round/>
+                      <a:headEnd type="none" w="med" len="med"/>
+                      <a:tailEnd type="none" w="med" len="med"/>
+                    </a:lnL>
+                    <a:lnR w="12700" cap="flat" cmpd="sng" algn="ctr">
+                      <a:solidFill>
+                        <a:schemeClr val="tx1"/>
+                      </a:solidFill>
+                      <a:prstDash val="solid"/>
+                      <a:round/>
+                      <a:headEnd type="none" w="med" len="med"/>
+                      <a:tailEnd type="none" w="med" len="med"/>
+                    </a:lnR>
+                    <a:lnT w="12700" cap="flat" cmpd="sng" algn="ctr">
+                      <a:solidFill>
+                        <a:schemeClr val="tx1"/>
+                      </a:solidFill>
+                      <a:prstDash val="solid"/>
+                      <a:round/>
+                      <a:headEnd type="none" w="med" len="med"/>
+                      <a:tailEnd type="none" w="med" len="med"/>
+                    </a:lnT>
+                    <a:lnB w="12700" cap="flat" cmpd="sng" algn="ctr">
+                      <a:solidFill>
+                        <a:schemeClr val="tx1"/>
+                      </a:solidFill>
+                      <a:prstDash val="solid"/>
+                      <a:round/>
+                      <a:headEnd type="none" w="med" len="med"/>
+                      <a:tailEnd type="none" w="med" len="med"/>
+                    </a:lnB>
+                  </a:tcPr>
+                </a:tc>
+                <a:tc>
+                  <a:txBody>
+                    <a:bodyPr/>
+                    <a:lstStyle/>
+                    <a:p>
+                      <a:r>
+                        <a:rPr lang="af-ZA" sz="1400" dirty="0">
+                          <a:effectLst/>
+                        </a:rPr>
+                        <a:t>DHCP Server Identifier</a:t>
+                      </a:r>
+                    </a:p>
+                  </a:txBody>
+                  <a:tcPr marL="54013" marR="54013" marT="27007" marB="27007" anchor="ctr">
+                    <a:lnL w="12700" cap="flat" cmpd="sng" algn="ctr">
+                      <a:solidFill>
+                        <a:schemeClr val="tx1"/>
+                      </a:solidFill>
+                      <a:prstDash val="solid"/>
+                      <a:round/>
+                      <a:headEnd type="none" w="med" len="med"/>
+                      <a:tailEnd type="none" w="med" len="med"/>
+                    </a:lnL>
+                    <a:lnR w="12700" cap="flat" cmpd="sng" algn="ctr">
+                      <a:solidFill>
+                        <a:schemeClr val="tx1"/>
+                      </a:solidFill>
+                      <a:prstDash val="solid"/>
+                      <a:round/>
+                      <a:headEnd type="none" w="med" len="med"/>
+                      <a:tailEnd type="none" w="med" len="med"/>
+                    </a:lnR>
+                    <a:lnT w="12700" cap="flat" cmpd="sng" algn="ctr">
+                      <a:solidFill>
+                        <a:schemeClr val="tx1"/>
+                      </a:solidFill>
+                      <a:prstDash val="solid"/>
+                      <a:round/>
+                      <a:headEnd type="none" w="med" len="med"/>
+                      <a:tailEnd type="none" w="med" len="med"/>
+                    </a:lnT>
+                    <a:lnB w="12700" cap="flat" cmpd="sng" algn="ctr">
+                      <a:solidFill>
+                        <a:schemeClr val="tx1"/>
+                      </a:solidFill>
+                      <a:prstDash val="solid"/>
+                      <a:round/>
+                      <a:headEnd type="none" w="med" len="med"/>
+                      <a:tailEnd type="none" w="med" len="med"/>
+                    </a:lnB>
+                  </a:tcPr>
+                </a:tc>
+                <a:tc>
+                  <a:txBody>
+                    <a:bodyPr/>
+                    <a:lstStyle/>
+                    <a:p>
+                      <a:r>
+                        <a:rPr lang="af-ZA" sz="1400">
+                          <a:effectLst/>
+                        </a:rPr>
+                        <a:t>IP-</a:t>
+                      </a:r>
+                      <a:r>
+                        <a:rPr lang="ru-RU" sz="1400">
+                          <a:effectLst/>
+                        </a:rPr>
+                        <a:t>адрес </a:t>
+                      </a:r>
+                      <a:r>
+                        <a:rPr lang="af-ZA" sz="1400">
+                          <a:effectLst/>
+                        </a:rPr>
+                        <a:t>DHCP-</a:t>
+                      </a:r>
+                      <a:r>
+                        <a:rPr lang="ru-RU" sz="1400">
+                          <a:effectLst/>
+                        </a:rPr>
+                        <a:t>сервера</a:t>
+                      </a:r>
+                    </a:p>
+                  </a:txBody>
+                  <a:tcPr marL="54013" marR="54013" marT="27007" marB="27007" anchor="ctr">
+                    <a:lnL w="12700" cap="flat" cmpd="sng" algn="ctr">
+                      <a:solidFill>
+                        <a:schemeClr val="tx1"/>
+                      </a:solidFill>
+                      <a:prstDash val="solid"/>
+                      <a:round/>
+                      <a:headEnd type="none" w="med" len="med"/>
+                      <a:tailEnd type="none" w="med" len="med"/>
+                    </a:lnL>
+                    <a:lnR w="12700" cap="flat" cmpd="sng" algn="ctr">
+                      <a:solidFill>
+                        <a:schemeClr val="tx1"/>
+                      </a:solidFill>
+                      <a:prstDash val="solid"/>
+                      <a:round/>
+                      <a:headEnd type="none" w="med" len="med"/>
+                      <a:tailEnd type="none" w="med" len="med"/>
+                    </a:lnR>
+                    <a:lnT w="12700" cap="flat" cmpd="sng" algn="ctr">
+                      <a:solidFill>
+                        <a:schemeClr val="tx1"/>
+                      </a:solidFill>
+                      <a:prstDash val="solid"/>
+                      <a:round/>
+                      <a:headEnd type="none" w="med" len="med"/>
+                      <a:tailEnd type="none" w="med" len="med"/>
+                    </a:lnT>
+                    <a:lnB w="12700" cap="flat" cmpd="sng" algn="ctr">
+                      <a:solidFill>
+                        <a:schemeClr val="tx1"/>
+                      </a:solidFill>
+                      <a:prstDash val="solid"/>
+                      <a:round/>
+                      <a:headEnd type="none" w="med" len="med"/>
+                      <a:tailEnd type="none" w="med" len="med"/>
+                    </a:lnB>
+                  </a:tcPr>
+                </a:tc>
+                <a:tc>
+                  <a:txBody>
+                    <a:bodyPr/>
+                    <a:lstStyle/>
+                    <a:p>
+                      <a:r>
+                        <a:rPr lang="ru-RU" sz="1400">
+                          <a:effectLst/>
+                        </a:rPr>
+                        <a:t>192.168.1.2</a:t>
+                      </a:r>
+                    </a:p>
+                  </a:txBody>
+                  <a:tcPr marL="54013" marR="54013" marT="27007" marB="27007" anchor="ctr">
+                    <a:lnL w="12700" cap="flat" cmpd="sng" algn="ctr">
+                      <a:solidFill>
+                        <a:schemeClr val="tx1"/>
+                      </a:solidFill>
+                      <a:prstDash val="solid"/>
+                      <a:round/>
+                      <a:headEnd type="none" w="med" len="med"/>
+                      <a:tailEnd type="none" w="med" len="med"/>
+                    </a:lnL>
+                    <a:lnR w="12700" cap="flat" cmpd="sng" algn="ctr">
+                      <a:solidFill>
+                        <a:schemeClr val="tx1"/>
+                      </a:solidFill>
+                      <a:prstDash val="solid"/>
+                      <a:round/>
+                      <a:headEnd type="none" w="med" len="med"/>
+                      <a:tailEnd type="none" w="med" len="med"/>
+                    </a:lnR>
+                    <a:lnT w="12700" cap="flat" cmpd="sng" algn="ctr">
+                      <a:solidFill>
+                        <a:schemeClr val="tx1"/>
+                      </a:solidFill>
+                      <a:prstDash val="solid"/>
+                      <a:round/>
+                      <a:headEnd type="none" w="med" len="med"/>
+                      <a:tailEnd type="none" w="med" len="med"/>
+                    </a:lnT>
+                    <a:lnB w="12700" cap="flat" cmpd="sng" algn="ctr">
+                      <a:solidFill>
+                        <a:schemeClr val="tx1"/>
+                      </a:solidFill>
+                      <a:prstDash val="solid"/>
+                      <a:round/>
+                      <a:headEnd type="none" w="med" len="med"/>
+                      <a:tailEnd type="none" w="med" len="med"/>
+                    </a:lnB>
+                  </a:tcPr>
+                </a:tc>
+                <a:extLst>
+                  <a:ext uri="{0D108BD9-81ED-4DB2-BD59-A6C34878D82A}">
+                    <a16:rowId xmlns:a16="http://schemas.microsoft.com/office/drawing/2014/main" val="3941755085"/>
+                  </a:ext>
+                </a:extLst>
+              </a:tr>
+              <a:tr h="365128">
+                <a:tc>
+                  <a:txBody>
+                    <a:bodyPr/>
+                    <a:lstStyle/>
+                    <a:p>
+                      <a:r>
+                        <a:rPr lang="ru-RU" sz="1400" b="1">
+                          <a:effectLst/>
+                        </a:rPr>
+                        <a:t>58</a:t>
+                      </a:r>
+                      <a:endParaRPr lang="ru-RU" sz="1400">
+                        <a:effectLst/>
+                      </a:endParaRPr>
+                    </a:p>
+                  </a:txBody>
+                  <a:tcPr marL="54013" marR="54013" marT="27007" marB="27007" anchor="ctr">
+                    <a:lnL w="12700" cap="flat" cmpd="sng" algn="ctr">
+                      <a:solidFill>
+                        <a:schemeClr val="tx1"/>
+                      </a:solidFill>
+                      <a:prstDash val="solid"/>
+                      <a:round/>
+                      <a:headEnd type="none" w="med" len="med"/>
+                      <a:tailEnd type="none" w="med" len="med"/>
+                    </a:lnL>
+                    <a:lnR w="12700" cap="flat" cmpd="sng" algn="ctr">
+                      <a:solidFill>
+                        <a:schemeClr val="tx1"/>
+                      </a:solidFill>
+                      <a:prstDash val="solid"/>
+                      <a:round/>
+                      <a:headEnd type="none" w="med" len="med"/>
+                      <a:tailEnd type="none" w="med" len="med"/>
+                    </a:lnR>
+                    <a:lnT w="12700" cap="flat" cmpd="sng" algn="ctr">
+                      <a:solidFill>
+                        <a:schemeClr val="tx1"/>
+                      </a:solidFill>
+                      <a:prstDash val="solid"/>
+                      <a:round/>
+                      <a:headEnd type="none" w="med" len="med"/>
+                      <a:tailEnd type="none" w="med" len="med"/>
+                    </a:lnT>
+                    <a:lnB w="12700" cap="flat" cmpd="sng" algn="ctr">
+                      <a:solidFill>
+                        <a:schemeClr val="tx1"/>
+                      </a:solidFill>
+                      <a:prstDash val="solid"/>
+                      <a:round/>
+                      <a:headEnd type="none" w="med" len="med"/>
+                      <a:tailEnd type="none" w="med" len="med"/>
+                    </a:lnB>
+                  </a:tcPr>
+                </a:tc>
+                <a:tc>
+                  <a:txBody>
+                    <a:bodyPr/>
+                    <a:lstStyle/>
+                    <a:p>
+                      <a:r>
+                        <a:rPr lang="af-ZA" sz="1400" dirty="0">
+                          <a:effectLst/>
+                        </a:rPr>
+                        <a:t>Renewal Time (T1)</a:t>
+                      </a:r>
+                    </a:p>
+                  </a:txBody>
+                  <a:tcPr marL="54013" marR="54013" marT="27007" marB="27007" anchor="ctr">
+                    <a:lnL w="12700" cap="flat" cmpd="sng" algn="ctr">
+                      <a:solidFill>
+                        <a:schemeClr val="tx1"/>
+                      </a:solidFill>
+                      <a:prstDash val="solid"/>
+                      <a:round/>
+                      <a:headEnd type="none" w="med" len="med"/>
+                      <a:tailEnd type="none" w="med" len="med"/>
+                    </a:lnL>
+                    <a:lnR w="12700" cap="flat" cmpd="sng" algn="ctr">
+                      <a:solidFill>
+                        <a:schemeClr val="tx1"/>
+                      </a:solidFill>
+                      <a:prstDash val="solid"/>
+                      <a:round/>
+                      <a:headEnd type="none" w="med" len="med"/>
+                      <a:tailEnd type="none" w="med" len="med"/>
+                    </a:lnR>
+                    <a:lnT w="12700" cap="flat" cmpd="sng" algn="ctr">
+                      <a:solidFill>
+                        <a:schemeClr val="tx1"/>
+                      </a:solidFill>
+                      <a:prstDash val="solid"/>
+                      <a:round/>
+                      <a:headEnd type="none" w="med" len="med"/>
+                      <a:tailEnd type="none" w="med" len="med"/>
+                    </a:lnT>
+                    <a:lnB w="12700" cap="flat" cmpd="sng" algn="ctr">
+                      <a:solidFill>
+                        <a:schemeClr val="tx1"/>
+                      </a:solidFill>
+                      <a:prstDash val="solid"/>
+                      <a:round/>
+                      <a:headEnd type="none" w="med" len="med"/>
+                      <a:tailEnd type="none" w="med" len="med"/>
+                    </a:lnB>
+                  </a:tcPr>
+                </a:tc>
+                <a:tc>
+                  <a:txBody>
+                    <a:bodyPr/>
+                    <a:lstStyle/>
+                    <a:p>
+                      <a:r>
+                        <a:rPr lang="ru-RU" sz="1400" dirty="0">
+                          <a:effectLst/>
+                        </a:rPr>
+                        <a:t>Время первой попытки продления аренды</a:t>
+                      </a:r>
+                    </a:p>
+                  </a:txBody>
+                  <a:tcPr marL="54013" marR="54013" marT="27007" marB="27007" anchor="ctr">
+                    <a:lnL w="12700" cap="flat" cmpd="sng" algn="ctr">
+                      <a:solidFill>
+                        <a:schemeClr val="tx1"/>
+                      </a:solidFill>
+                      <a:prstDash val="solid"/>
+                      <a:round/>
+                      <a:headEnd type="none" w="med" len="med"/>
+                      <a:tailEnd type="none" w="med" len="med"/>
+                    </a:lnL>
+                    <a:lnR w="12700" cap="flat" cmpd="sng" algn="ctr">
+                      <a:solidFill>
+                        <a:schemeClr val="tx1"/>
+                      </a:solidFill>
+                      <a:prstDash val="solid"/>
+                      <a:round/>
+                      <a:headEnd type="none" w="med" len="med"/>
+                      <a:tailEnd type="none" w="med" len="med"/>
+                    </a:lnR>
+                    <a:lnT w="12700" cap="flat" cmpd="sng" algn="ctr">
+                      <a:solidFill>
+                        <a:schemeClr val="tx1"/>
+                      </a:solidFill>
+                      <a:prstDash val="solid"/>
+                      <a:round/>
+                      <a:headEnd type="none" w="med" len="med"/>
+                      <a:tailEnd type="none" w="med" len="med"/>
+                    </a:lnT>
+                    <a:lnB w="12700" cap="flat" cmpd="sng" algn="ctr">
+                      <a:solidFill>
+                        <a:schemeClr val="tx1"/>
+                      </a:solidFill>
+                      <a:prstDash val="solid"/>
+                      <a:round/>
+                      <a:headEnd type="none" w="med" len="med"/>
+                      <a:tailEnd type="none" w="med" len="med"/>
+                    </a:lnB>
+                  </a:tcPr>
+                </a:tc>
+                <a:tc>
+                  <a:txBody>
+                    <a:bodyPr/>
+                    <a:lstStyle/>
+                    <a:p>
+                      <a:r>
+                        <a:rPr lang="ru-RU" sz="1400">
+                          <a:effectLst/>
+                        </a:rPr>
+                        <a:t>43200</a:t>
+                      </a:r>
+                    </a:p>
+                  </a:txBody>
+                  <a:tcPr marL="54013" marR="54013" marT="27007" marB="27007" anchor="ctr">
+                    <a:lnL w="12700" cap="flat" cmpd="sng" algn="ctr">
+                      <a:solidFill>
+                        <a:schemeClr val="tx1"/>
+                      </a:solidFill>
+                      <a:prstDash val="solid"/>
+                      <a:round/>
+                      <a:headEnd type="none" w="med" len="med"/>
+                      <a:tailEnd type="none" w="med" len="med"/>
+                    </a:lnL>
+                    <a:lnR w="12700" cap="flat" cmpd="sng" algn="ctr">
+                      <a:solidFill>
+                        <a:schemeClr val="tx1"/>
+                      </a:solidFill>
+                      <a:prstDash val="solid"/>
+                      <a:round/>
+                      <a:headEnd type="none" w="med" len="med"/>
+                      <a:tailEnd type="none" w="med" len="med"/>
+                    </a:lnR>
+                    <a:lnT w="12700" cap="flat" cmpd="sng" algn="ctr">
+                      <a:solidFill>
+                        <a:schemeClr val="tx1"/>
+                      </a:solidFill>
+                      <a:prstDash val="solid"/>
+                      <a:round/>
+                      <a:headEnd type="none" w="med" len="med"/>
+                      <a:tailEnd type="none" w="med" len="med"/>
+                    </a:lnT>
+                    <a:lnB w="12700" cap="flat" cmpd="sng" algn="ctr">
+                      <a:solidFill>
+                        <a:schemeClr val="tx1"/>
+                      </a:solidFill>
+                      <a:prstDash val="solid"/>
+                      <a:round/>
+                      <a:headEnd type="none" w="med" len="med"/>
+                      <a:tailEnd type="none" w="med" len="med"/>
+                    </a:lnB>
+                  </a:tcPr>
+                </a:tc>
+                <a:extLst>
+                  <a:ext uri="{0D108BD9-81ED-4DB2-BD59-A6C34878D82A}">
+                    <a16:rowId xmlns:a16="http://schemas.microsoft.com/office/drawing/2014/main" val="1985384362"/>
+                  </a:ext>
+                </a:extLst>
+              </a:tr>
+              <a:tr h="520685">
+                <a:tc>
+                  <a:txBody>
+                    <a:bodyPr/>
+                    <a:lstStyle/>
+                    <a:p>
+                      <a:r>
+                        <a:rPr lang="ru-RU" sz="1400" b="1">
+                          <a:effectLst/>
+                        </a:rPr>
+                        <a:t>59</a:t>
+                      </a:r>
+                      <a:endParaRPr lang="ru-RU" sz="1400">
+                        <a:effectLst/>
+                      </a:endParaRPr>
+                    </a:p>
+                  </a:txBody>
+                  <a:tcPr marL="54013" marR="54013" marT="27007" marB="27007" anchor="ctr">
+                    <a:lnL w="12700" cap="flat" cmpd="sng" algn="ctr">
+                      <a:solidFill>
+                        <a:schemeClr val="tx1"/>
+                      </a:solidFill>
+                      <a:prstDash val="solid"/>
+                      <a:round/>
+                      <a:headEnd type="none" w="med" len="med"/>
+                      <a:tailEnd type="none" w="med" len="med"/>
+                    </a:lnL>
+                    <a:lnR w="12700" cap="flat" cmpd="sng" algn="ctr">
+                      <a:solidFill>
+                        <a:schemeClr val="tx1"/>
+                      </a:solidFill>
+                      <a:prstDash val="solid"/>
+                      <a:round/>
+                      <a:headEnd type="none" w="med" len="med"/>
+                      <a:tailEnd type="none" w="med" len="med"/>
+                    </a:lnR>
+                    <a:lnT w="12700" cap="flat" cmpd="sng" algn="ctr">
+                      <a:solidFill>
+                        <a:schemeClr val="tx1"/>
+                      </a:solidFill>
+                      <a:prstDash val="solid"/>
+                      <a:round/>
+                      <a:headEnd type="none" w="med" len="med"/>
+                      <a:tailEnd type="none" w="med" len="med"/>
+                    </a:lnT>
+                    <a:lnB w="12700" cap="flat" cmpd="sng" algn="ctr">
+                      <a:solidFill>
+                        <a:schemeClr val="tx1"/>
+                      </a:solidFill>
+                      <a:prstDash val="solid"/>
+                      <a:round/>
+                      <a:headEnd type="none" w="med" len="med"/>
+                      <a:tailEnd type="none" w="med" len="med"/>
+                    </a:lnB>
+                  </a:tcPr>
+                </a:tc>
+                <a:tc>
+                  <a:txBody>
+                    <a:bodyPr/>
+                    <a:lstStyle/>
+                    <a:p>
+                      <a:r>
+                        <a:rPr lang="af-ZA" sz="1400">
+                          <a:effectLst/>
+                        </a:rPr>
+                        <a:t>Rebinding Time (T2)</a:t>
+                      </a:r>
+                    </a:p>
+                  </a:txBody>
+                  <a:tcPr marL="54013" marR="54013" marT="27007" marB="27007" anchor="ctr">
+                    <a:lnL w="12700" cap="flat" cmpd="sng" algn="ctr">
+                      <a:solidFill>
+                        <a:schemeClr val="tx1"/>
+                      </a:solidFill>
+                      <a:prstDash val="solid"/>
+                      <a:round/>
+                      <a:headEnd type="none" w="med" len="med"/>
+                      <a:tailEnd type="none" w="med" len="med"/>
+                    </a:lnL>
+                    <a:lnR w="12700" cap="flat" cmpd="sng" algn="ctr">
+                      <a:solidFill>
+                        <a:schemeClr val="tx1"/>
+                      </a:solidFill>
+                      <a:prstDash val="solid"/>
+                      <a:round/>
+                      <a:headEnd type="none" w="med" len="med"/>
+                      <a:tailEnd type="none" w="med" len="med"/>
+                    </a:lnR>
+                    <a:lnT w="12700" cap="flat" cmpd="sng" algn="ctr">
+                      <a:solidFill>
+                        <a:schemeClr val="tx1"/>
+                      </a:solidFill>
+                      <a:prstDash val="solid"/>
+                      <a:round/>
+                      <a:headEnd type="none" w="med" len="med"/>
+                      <a:tailEnd type="none" w="med" len="med"/>
+                    </a:lnT>
+                    <a:lnB w="12700" cap="flat" cmpd="sng" algn="ctr">
+                      <a:solidFill>
+                        <a:schemeClr val="tx1"/>
+                      </a:solidFill>
+                      <a:prstDash val="solid"/>
+                      <a:round/>
+                      <a:headEnd type="none" w="med" len="med"/>
+                      <a:tailEnd type="none" w="med" len="med"/>
+                    </a:lnB>
+                  </a:tcPr>
+                </a:tc>
+                <a:tc>
+                  <a:txBody>
+                    <a:bodyPr/>
+                    <a:lstStyle/>
+                    <a:p>
+                      <a:r>
+                        <a:rPr lang="ru-RU" sz="1400" dirty="0">
+                          <a:effectLst/>
+                        </a:rPr>
+                        <a:t>Время повторной попытки продления аренды</a:t>
+                      </a:r>
+                    </a:p>
+                  </a:txBody>
+                  <a:tcPr marL="54013" marR="54013" marT="27007" marB="27007" anchor="ctr">
+                    <a:lnL w="12700" cap="flat" cmpd="sng" algn="ctr">
+                      <a:solidFill>
+                        <a:schemeClr val="tx1"/>
+                      </a:solidFill>
+                      <a:prstDash val="solid"/>
+                      <a:round/>
+                      <a:headEnd type="none" w="med" len="med"/>
+                      <a:tailEnd type="none" w="med" len="med"/>
+                    </a:lnL>
+                    <a:lnR w="12700" cap="flat" cmpd="sng" algn="ctr">
+                      <a:solidFill>
+                        <a:schemeClr val="tx1"/>
+                      </a:solidFill>
+                      <a:prstDash val="solid"/>
+                      <a:round/>
+                      <a:headEnd type="none" w="med" len="med"/>
+                      <a:tailEnd type="none" w="med" len="med"/>
+                    </a:lnR>
+                    <a:lnT w="12700" cap="flat" cmpd="sng" algn="ctr">
+                      <a:solidFill>
+                        <a:schemeClr val="tx1"/>
+                      </a:solidFill>
+                      <a:prstDash val="solid"/>
+                      <a:round/>
+                      <a:headEnd type="none" w="med" len="med"/>
+                      <a:tailEnd type="none" w="med" len="med"/>
+                    </a:lnT>
+                    <a:lnB w="12700" cap="flat" cmpd="sng" algn="ctr">
+                      <a:solidFill>
+                        <a:schemeClr val="tx1"/>
+                      </a:solidFill>
+                      <a:prstDash val="solid"/>
+                      <a:round/>
+                      <a:headEnd type="none" w="med" len="med"/>
+                      <a:tailEnd type="none" w="med" len="med"/>
+                    </a:lnB>
+                  </a:tcPr>
+                </a:tc>
+                <a:tc>
+                  <a:txBody>
+                    <a:bodyPr/>
+                    <a:lstStyle/>
+                    <a:p>
+                      <a:r>
+                        <a:rPr lang="ru-RU" sz="1400">
+                          <a:effectLst/>
+                        </a:rPr>
+                        <a:t>75600</a:t>
+                      </a:r>
+                    </a:p>
+                  </a:txBody>
+                  <a:tcPr marL="54013" marR="54013" marT="27007" marB="27007" anchor="ctr">
+                    <a:lnL w="12700" cap="flat" cmpd="sng" algn="ctr">
+                      <a:solidFill>
+                        <a:schemeClr val="tx1"/>
+                      </a:solidFill>
+                      <a:prstDash val="solid"/>
+                      <a:round/>
+                      <a:headEnd type="none" w="med" len="med"/>
+                      <a:tailEnd type="none" w="med" len="med"/>
+                    </a:lnL>
+                    <a:lnR w="12700" cap="flat" cmpd="sng" algn="ctr">
+                      <a:solidFill>
+                        <a:schemeClr val="tx1"/>
+                      </a:solidFill>
+                      <a:prstDash val="solid"/>
+                      <a:round/>
+                      <a:headEnd type="none" w="med" len="med"/>
+                      <a:tailEnd type="none" w="med" len="med"/>
+                    </a:lnR>
+                    <a:lnT w="12700" cap="flat" cmpd="sng" algn="ctr">
+                      <a:solidFill>
+                        <a:schemeClr val="tx1"/>
+                      </a:solidFill>
+                      <a:prstDash val="solid"/>
+                      <a:round/>
+                      <a:headEnd type="none" w="med" len="med"/>
+                      <a:tailEnd type="none" w="med" len="med"/>
+                    </a:lnT>
+                    <a:lnB w="12700" cap="flat" cmpd="sng" algn="ctr">
+                      <a:solidFill>
+                        <a:schemeClr val="tx1"/>
+                      </a:solidFill>
+                      <a:prstDash val="solid"/>
+                      <a:round/>
+                      <a:headEnd type="none" w="med" len="med"/>
+                      <a:tailEnd type="none" w="med" len="med"/>
+                    </a:lnB>
+                  </a:tcPr>
+                </a:tc>
+                <a:extLst>
+                  <a:ext uri="{0D108BD9-81ED-4DB2-BD59-A6C34878D82A}">
+                    <a16:rowId xmlns:a16="http://schemas.microsoft.com/office/drawing/2014/main" val="4197942457"/>
+                  </a:ext>
+                </a:extLst>
+              </a:tr>
+              <a:tr h="744827">
+                <a:tc>
+                  <a:txBody>
+                    <a:bodyPr/>
+                    <a:lstStyle/>
+                    <a:p>
+                      <a:r>
+                        <a:rPr lang="ru-RU" sz="1400" b="1">
+                          <a:effectLst/>
+                        </a:rPr>
+                        <a:t>66</a:t>
+                      </a:r>
+                      <a:endParaRPr lang="ru-RU" sz="1400">
+                        <a:effectLst/>
+                      </a:endParaRPr>
+                    </a:p>
+                  </a:txBody>
+                  <a:tcPr marL="54013" marR="54013" marT="27007" marB="27007" anchor="ctr">
+                    <a:lnL w="12700" cap="flat" cmpd="sng" algn="ctr">
+                      <a:solidFill>
+                        <a:schemeClr val="tx1"/>
+                      </a:solidFill>
+                      <a:prstDash val="solid"/>
+                      <a:round/>
+                      <a:headEnd type="none" w="med" len="med"/>
+                      <a:tailEnd type="none" w="med" len="med"/>
+                    </a:lnL>
+                    <a:lnR w="12700" cap="flat" cmpd="sng" algn="ctr">
+                      <a:solidFill>
+                        <a:schemeClr val="tx1"/>
+                      </a:solidFill>
+                      <a:prstDash val="solid"/>
+                      <a:round/>
+                      <a:headEnd type="none" w="med" len="med"/>
+                      <a:tailEnd type="none" w="med" len="med"/>
+                    </a:lnR>
+                    <a:lnT w="12700" cap="flat" cmpd="sng" algn="ctr">
+                      <a:solidFill>
+                        <a:schemeClr val="tx1"/>
+                      </a:solidFill>
+                      <a:prstDash val="solid"/>
+                      <a:round/>
+                      <a:headEnd type="none" w="med" len="med"/>
+                      <a:tailEnd type="none" w="med" len="med"/>
+                    </a:lnT>
+                    <a:lnB w="12700" cap="flat" cmpd="sng" algn="ctr">
+                      <a:solidFill>
+                        <a:schemeClr val="tx1"/>
+                      </a:solidFill>
+                      <a:prstDash val="solid"/>
+                      <a:round/>
+                      <a:headEnd type="none" w="med" len="med"/>
+                      <a:tailEnd type="none" w="med" len="med"/>
+                    </a:lnB>
+                  </a:tcPr>
+                </a:tc>
+                <a:tc>
+                  <a:txBody>
+                    <a:bodyPr/>
+                    <a:lstStyle/>
+                    <a:p>
+                      <a:r>
+                        <a:rPr lang="af-ZA" sz="1400">
+                          <a:effectLst/>
+                        </a:rPr>
+                        <a:t>TFTP Server Name</a:t>
+                      </a:r>
+                    </a:p>
+                  </a:txBody>
+                  <a:tcPr marL="54013" marR="54013" marT="27007" marB="27007" anchor="ctr">
+                    <a:lnL w="12700" cap="flat" cmpd="sng" algn="ctr">
+                      <a:solidFill>
+                        <a:schemeClr val="tx1"/>
+                      </a:solidFill>
+                      <a:prstDash val="solid"/>
+                      <a:round/>
+                      <a:headEnd type="none" w="med" len="med"/>
+                      <a:tailEnd type="none" w="med" len="med"/>
+                    </a:lnL>
+                    <a:lnR w="12700" cap="flat" cmpd="sng" algn="ctr">
+                      <a:solidFill>
+                        <a:schemeClr val="tx1"/>
+                      </a:solidFill>
+                      <a:prstDash val="solid"/>
+                      <a:round/>
+                      <a:headEnd type="none" w="med" len="med"/>
+                      <a:tailEnd type="none" w="med" len="med"/>
+                    </a:lnR>
+                    <a:lnT w="12700" cap="flat" cmpd="sng" algn="ctr">
+                      <a:solidFill>
+                        <a:schemeClr val="tx1"/>
+                      </a:solidFill>
+                      <a:prstDash val="solid"/>
+                      <a:round/>
+                      <a:headEnd type="none" w="med" len="med"/>
+                      <a:tailEnd type="none" w="med" len="med"/>
+                    </a:lnT>
+                    <a:lnB w="12700" cap="flat" cmpd="sng" algn="ctr">
+                      <a:solidFill>
+                        <a:schemeClr val="tx1"/>
+                      </a:solidFill>
+                      <a:prstDash val="solid"/>
+                      <a:round/>
+                      <a:headEnd type="none" w="med" len="med"/>
+                      <a:tailEnd type="none" w="med" len="med"/>
+                    </a:lnB>
+                  </a:tcPr>
+                </a:tc>
+                <a:tc>
+                  <a:txBody>
+                    <a:bodyPr/>
+                    <a:lstStyle/>
+                    <a:p>
+                      <a:r>
+                        <a:rPr lang="ru-RU" sz="1400" dirty="0">
+                          <a:effectLst/>
+                        </a:rPr>
+                        <a:t>Имя или IP TFTP-сервера (часто используется при PXE-загрузке)</a:t>
+                      </a:r>
+                    </a:p>
+                  </a:txBody>
+                  <a:tcPr marL="54013" marR="54013" marT="27007" marB="27007" anchor="ctr">
+                    <a:lnL w="12700" cap="flat" cmpd="sng" algn="ctr">
+                      <a:solidFill>
+                        <a:schemeClr val="tx1"/>
+                      </a:solidFill>
+                      <a:prstDash val="solid"/>
+                      <a:round/>
+                      <a:headEnd type="none" w="med" len="med"/>
+                      <a:tailEnd type="none" w="med" len="med"/>
+                    </a:lnL>
+                    <a:lnR w="12700" cap="flat" cmpd="sng" algn="ctr">
+                      <a:solidFill>
+                        <a:schemeClr val="tx1"/>
+                      </a:solidFill>
+                      <a:prstDash val="solid"/>
+                      <a:round/>
+                      <a:headEnd type="none" w="med" len="med"/>
+                      <a:tailEnd type="none" w="med" len="med"/>
+                    </a:lnR>
+                    <a:lnT w="12700" cap="flat" cmpd="sng" algn="ctr">
+                      <a:solidFill>
+                        <a:schemeClr val="tx1"/>
+                      </a:solidFill>
+                      <a:prstDash val="solid"/>
+                      <a:round/>
+                      <a:headEnd type="none" w="med" len="med"/>
+                      <a:tailEnd type="none" w="med" len="med"/>
+                    </a:lnT>
+                    <a:lnB w="12700" cap="flat" cmpd="sng" algn="ctr">
+                      <a:solidFill>
+                        <a:schemeClr val="tx1"/>
+                      </a:solidFill>
+                      <a:prstDash val="solid"/>
+                      <a:round/>
+                      <a:headEnd type="none" w="med" len="med"/>
+                      <a:tailEnd type="none" w="med" len="med"/>
+                    </a:lnB>
+                  </a:tcPr>
+                </a:tc>
+                <a:tc>
+                  <a:txBody>
+                    <a:bodyPr/>
+                    <a:lstStyle/>
+                    <a:p>
+                      <a:r>
+                        <a:rPr lang="ru-RU" sz="1400">
+                          <a:effectLst/>
+                        </a:rPr>
+                        <a:t>192.168.1.20</a:t>
+                      </a:r>
+                    </a:p>
+                  </a:txBody>
+                  <a:tcPr marL="54013" marR="54013" marT="27007" marB="27007" anchor="ctr">
+                    <a:lnL w="12700" cap="flat" cmpd="sng" algn="ctr">
+                      <a:solidFill>
+                        <a:schemeClr val="tx1"/>
+                      </a:solidFill>
+                      <a:prstDash val="solid"/>
+                      <a:round/>
+                      <a:headEnd type="none" w="med" len="med"/>
+                      <a:tailEnd type="none" w="med" len="med"/>
+                    </a:lnL>
+                    <a:lnR w="12700" cap="flat" cmpd="sng" algn="ctr">
+                      <a:solidFill>
+                        <a:schemeClr val="tx1"/>
+                      </a:solidFill>
+                      <a:prstDash val="solid"/>
+                      <a:round/>
+                      <a:headEnd type="none" w="med" len="med"/>
+                      <a:tailEnd type="none" w="med" len="med"/>
+                    </a:lnR>
+                    <a:lnT w="12700" cap="flat" cmpd="sng" algn="ctr">
+                      <a:solidFill>
+                        <a:schemeClr val="tx1"/>
+                      </a:solidFill>
+                      <a:prstDash val="solid"/>
+                      <a:round/>
+                      <a:headEnd type="none" w="med" len="med"/>
+                      <a:tailEnd type="none" w="med" len="med"/>
+                    </a:lnT>
+                    <a:lnB w="12700" cap="flat" cmpd="sng" algn="ctr">
+                      <a:solidFill>
+                        <a:schemeClr val="tx1"/>
+                      </a:solidFill>
+                      <a:prstDash val="solid"/>
+                      <a:round/>
+                      <a:headEnd type="none" w="med" len="med"/>
+                      <a:tailEnd type="none" w="med" len="med"/>
+                    </a:lnB>
+                  </a:tcPr>
+                </a:tc>
+                <a:extLst>
+                  <a:ext uri="{0D108BD9-81ED-4DB2-BD59-A6C34878D82A}">
+                    <a16:rowId xmlns:a16="http://schemas.microsoft.com/office/drawing/2014/main" val="464493895"/>
+                  </a:ext>
+                </a:extLst>
+              </a:tr>
+              <a:tr h="676243">
+                <a:tc>
+                  <a:txBody>
+                    <a:bodyPr/>
+                    <a:lstStyle/>
+                    <a:p>
+                      <a:r>
+                        <a:rPr lang="ru-RU" sz="1400" b="1">
+                          <a:effectLst/>
+                        </a:rPr>
+                        <a:t>55</a:t>
+                      </a:r>
+                      <a:endParaRPr lang="ru-RU" sz="1400">
+                        <a:effectLst/>
+                      </a:endParaRPr>
+                    </a:p>
+                  </a:txBody>
+                  <a:tcPr marL="54013" marR="54013" marT="27007" marB="27007" anchor="ctr">
+                    <a:lnL w="12700" cap="flat" cmpd="sng" algn="ctr">
+                      <a:solidFill>
+                        <a:schemeClr val="tx1"/>
+                      </a:solidFill>
+                      <a:prstDash val="solid"/>
+                      <a:round/>
+                      <a:headEnd type="none" w="med" len="med"/>
+                      <a:tailEnd type="none" w="med" len="med"/>
+                    </a:lnL>
+                    <a:lnR w="12700" cap="flat" cmpd="sng" algn="ctr">
+                      <a:solidFill>
+                        <a:schemeClr val="tx1"/>
+                      </a:solidFill>
+                      <a:prstDash val="solid"/>
+                      <a:round/>
+                      <a:headEnd type="none" w="med" len="med"/>
+                      <a:tailEnd type="none" w="med" len="med"/>
+                    </a:lnR>
+                    <a:lnT w="12700" cap="flat" cmpd="sng" algn="ctr">
+                      <a:solidFill>
+                        <a:schemeClr val="tx1"/>
+                      </a:solidFill>
+                      <a:prstDash val="solid"/>
+                      <a:round/>
+                      <a:headEnd type="none" w="med" len="med"/>
+                      <a:tailEnd type="none" w="med" len="med"/>
+                    </a:lnT>
+                    <a:lnB w="12700" cap="flat" cmpd="sng" algn="ctr">
+                      <a:solidFill>
+                        <a:schemeClr val="tx1"/>
+                      </a:solidFill>
+                      <a:prstDash val="solid"/>
+                      <a:round/>
+                      <a:headEnd type="none" w="med" len="med"/>
+                      <a:tailEnd type="none" w="med" len="med"/>
+                    </a:lnB>
+                  </a:tcPr>
+                </a:tc>
+                <a:tc>
+                  <a:txBody>
+                    <a:bodyPr/>
+                    <a:lstStyle/>
+                    <a:p>
+                      <a:r>
+                        <a:rPr lang="af-ZA" sz="1400">
+                          <a:effectLst/>
+                        </a:rPr>
+                        <a:t>Requested Parameters</a:t>
+                      </a:r>
+                    </a:p>
+                  </a:txBody>
+                  <a:tcPr marL="54013" marR="54013" marT="27007" marB="27007" anchor="ctr">
+                    <a:lnL w="12700" cap="flat" cmpd="sng" algn="ctr">
+                      <a:solidFill>
+                        <a:schemeClr val="tx1"/>
+                      </a:solidFill>
+                      <a:prstDash val="solid"/>
+                      <a:round/>
+                      <a:headEnd type="none" w="med" len="med"/>
+                      <a:tailEnd type="none" w="med" len="med"/>
+                    </a:lnL>
+                    <a:lnR w="12700" cap="flat" cmpd="sng" algn="ctr">
+                      <a:solidFill>
+                        <a:schemeClr val="tx1"/>
+                      </a:solidFill>
+                      <a:prstDash val="solid"/>
+                      <a:round/>
+                      <a:headEnd type="none" w="med" len="med"/>
+                      <a:tailEnd type="none" w="med" len="med"/>
+                    </a:lnR>
+                    <a:lnT w="12700" cap="flat" cmpd="sng" algn="ctr">
+                      <a:solidFill>
+                        <a:schemeClr val="tx1"/>
+                      </a:solidFill>
+                      <a:prstDash val="solid"/>
+                      <a:round/>
+                      <a:headEnd type="none" w="med" len="med"/>
+                      <a:tailEnd type="none" w="med" len="med"/>
+                    </a:lnT>
+                    <a:lnB w="12700" cap="flat" cmpd="sng" algn="ctr">
+                      <a:solidFill>
+                        <a:schemeClr val="tx1"/>
+                      </a:solidFill>
+                      <a:prstDash val="solid"/>
+                      <a:round/>
+                      <a:headEnd type="none" w="med" len="med"/>
+                      <a:tailEnd type="none" w="med" len="med"/>
+                    </a:lnB>
+                  </a:tcPr>
+                </a:tc>
+                <a:tc>
+                  <a:txBody>
+                    <a:bodyPr/>
+                    <a:lstStyle/>
+                    <a:p>
+                      <a:r>
+                        <a:rPr lang="ru-RU" sz="1400">
+                          <a:effectLst/>
+                        </a:rPr>
+                        <a:t>Список запрашиваемых параметров (байт — параметр)</a:t>
+                      </a:r>
+                    </a:p>
+                  </a:txBody>
+                  <a:tcPr marL="54013" marR="54013" marT="27007" marB="27007" anchor="ctr">
+                    <a:lnL w="12700" cap="flat" cmpd="sng" algn="ctr">
+                      <a:solidFill>
+                        <a:schemeClr val="tx1"/>
+                      </a:solidFill>
+                      <a:prstDash val="solid"/>
+                      <a:round/>
+                      <a:headEnd type="none" w="med" len="med"/>
+                      <a:tailEnd type="none" w="med" len="med"/>
+                    </a:lnL>
+                    <a:lnR w="12700" cap="flat" cmpd="sng" algn="ctr">
+                      <a:solidFill>
+                        <a:schemeClr val="tx1"/>
+                      </a:solidFill>
+                      <a:prstDash val="solid"/>
+                      <a:round/>
+                      <a:headEnd type="none" w="med" len="med"/>
+                      <a:tailEnd type="none" w="med" len="med"/>
+                    </a:lnR>
+                    <a:lnT w="12700" cap="flat" cmpd="sng" algn="ctr">
+                      <a:solidFill>
+                        <a:schemeClr val="tx1"/>
+                      </a:solidFill>
+                      <a:prstDash val="solid"/>
+                      <a:round/>
+                      <a:headEnd type="none" w="med" len="med"/>
+                      <a:tailEnd type="none" w="med" len="med"/>
+                    </a:lnT>
+                    <a:lnB w="12700" cap="flat" cmpd="sng" algn="ctr">
+                      <a:solidFill>
+                        <a:schemeClr val="tx1"/>
+                      </a:solidFill>
+                      <a:prstDash val="solid"/>
+                      <a:round/>
+                      <a:headEnd type="none" w="med" len="med"/>
+                      <a:tailEnd type="none" w="med" len="med"/>
+                    </a:lnB>
+                  </a:tcPr>
+                </a:tc>
+                <a:tc>
+                  <a:txBody>
+                    <a:bodyPr/>
+                    <a:lstStyle/>
+                    <a:p>
+                      <a:r>
+                        <a:rPr lang="ru-RU" sz="1400" dirty="0">
+                          <a:effectLst/>
+                        </a:rPr>
+                        <a:t>1,3,6,42</a:t>
+                      </a:r>
+                    </a:p>
+                  </a:txBody>
+                  <a:tcPr marL="54013" marR="54013" marT="27007" marB="27007" anchor="ctr">
+                    <a:lnL w="12700" cap="flat" cmpd="sng" algn="ctr">
+                      <a:solidFill>
+                        <a:schemeClr val="tx1"/>
+                      </a:solidFill>
+                      <a:prstDash val="solid"/>
+                      <a:round/>
+                      <a:headEnd type="none" w="med" len="med"/>
+                      <a:tailEnd type="none" w="med" len="med"/>
+                    </a:lnL>
+                    <a:lnR w="12700" cap="flat" cmpd="sng" algn="ctr">
+                      <a:solidFill>
+                        <a:schemeClr val="tx1"/>
+                      </a:solidFill>
+                      <a:prstDash val="solid"/>
+                      <a:round/>
+                      <a:headEnd type="none" w="med" len="med"/>
+                      <a:tailEnd type="none" w="med" len="med"/>
+                    </a:lnR>
+                    <a:lnT w="12700" cap="flat" cmpd="sng" algn="ctr">
+                      <a:solidFill>
+                        <a:schemeClr val="tx1"/>
+                      </a:solidFill>
+                      <a:prstDash val="solid"/>
+                      <a:round/>
+                      <a:headEnd type="none" w="med" len="med"/>
+                      <a:tailEnd type="none" w="med" len="med"/>
+                    </a:lnT>
+                    <a:lnB w="12700" cap="flat" cmpd="sng" algn="ctr">
+                      <a:solidFill>
+                        <a:schemeClr val="tx1"/>
+                      </a:solidFill>
+                      <a:prstDash val="solid"/>
+                      <a:round/>
+                      <a:headEnd type="none" w="med" len="med"/>
+                      <a:tailEnd type="none" w="med" len="med"/>
+                    </a:lnB>
+                  </a:tcPr>
+                </a:tc>
+                <a:extLst>
+                  <a:ext uri="{0D108BD9-81ED-4DB2-BD59-A6C34878D82A}">
+                    <a16:rowId xmlns:a16="http://schemas.microsoft.com/office/drawing/2014/main" val="1922169602"/>
+                  </a:ext>
+                </a:extLst>
+              </a:tr>
+            </a:tbl>
+          </a:graphicData>
+        </a:graphic>
+      </p:graphicFrame>
+    </p:spTree>
+    <p:extLst>
+      <p:ext uri="{BB962C8B-B14F-4D97-AF65-F5344CB8AC3E}">
+        <p14:creationId xmlns:p14="http://schemas.microsoft.com/office/powerpoint/2010/main" val="3381796700"/>
+      </p:ext>
+    </p:extLst>
+  </p:cSld>
+  <p:clrMapOvr>
+    <a:masterClrMapping/>
+  </p:clrMapOvr>
+</p:sld>
+</file>
+
+<file path=ppt/slides/slide71.xml><?xml version="1.0" encoding="utf-8"?>
+<p:sld xmlns:a="http://schemas.openxmlformats.org/drawingml/2006/main" xmlns:r="http://schemas.openxmlformats.org/officeDocument/2006/relationships" xmlns:p="http://schemas.openxmlformats.org/presentationml/2006/main">
+  <p:cSld>
+    <p:spTree>
+      <p:nvGrpSpPr>
+        <p:cNvPr id="1" name=""/>
+        <p:cNvGrpSpPr/>
+        <p:nvPr/>
+      </p:nvGrpSpPr>
+      <p:grpSpPr>
+        <a:xfrm>
+          <a:off x="0" y="0"/>
+          <a:ext cx="0" cy="0"/>
+          <a:chOff x="0" y="0"/>
+          <a:chExt cx="0" cy="0"/>
+        </a:xfrm>
+      </p:grpSpPr>
+      <p:sp>
+        <p:nvSpPr>
+          <p:cNvPr id="2" name="Заголовок 1"/>
+          <p:cNvSpPr>
+            <a:spLocks noGrp="1"/>
+          </p:cNvSpPr>
+          <p:nvPr>
+            <p:ph type="title"/>
+          </p:nvPr>
+        </p:nvSpPr>
+        <p:spPr/>
+        <p:txBody>
+          <a:bodyPr/>
+          <a:lstStyle/>
+          <a:p>
+            <a:r>
+              <a:rPr lang="en-US" dirty="0" smtClean="0"/>
+              <a:t>DHCP: timers</a:t>
+            </a:r>
+            <a:endParaRPr lang="ru-RU" dirty="0"/>
+          </a:p>
+        </p:txBody>
+      </p:sp>
+      <p:sp>
+        <p:nvSpPr>
+          <p:cNvPr id="3" name="Объект 2"/>
+          <p:cNvSpPr>
+            <a:spLocks noGrp="1"/>
+          </p:cNvSpPr>
+          <p:nvPr>
+            <p:ph idx="1"/>
+          </p:nvPr>
+        </p:nvSpPr>
+        <p:spPr/>
+        <p:txBody>
+          <a:bodyPr>
+            <a:normAutofit fontScale="92500"/>
+          </a:bodyPr>
+          <a:lstStyle/>
+          <a:p>
+            <a:r>
+              <a:rPr lang="ru-RU" dirty="0"/>
+              <a:t>DHCP-адрес выдаётся сроком на </a:t>
+            </a:r>
+            <a:r>
+              <a:rPr lang="ru-RU" dirty="0" err="1"/>
+              <a:t>Lease</a:t>
+            </a:r>
+            <a:r>
+              <a:rPr lang="ru-RU" dirty="0"/>
+              <a:t> </a:t>
+            </a:r>
+            <a:r>
+              <a:rPr lang="ru-RU" dirty="0" err="1"/>
+              <a:t>Time</a:t>
+            </a:r>
+            <a:r>
+              <a:rPr lang="ru-RU" dirty="0"/>
+              <a:t> (время аренды). От этого значения рассчитываются два таймера: T1 и T2. T1 (</a:t>
+            </a:r>
+            <a:r>
+              <a:rPr lang="ru-RU" dirty="0" err="1"/>
+              <a:t>Renewal</a:t>
+            </a:r>
+            <a:r>
+              <a:rPr lang="ru-RU" dirty="0"/>
+              <a:t>) — 50% от времени аренды; по истечении T1 устройство отправляет DHCPREQUEST именно тому серверу, который выдал адрес. T2 (</a:t>
+            </a:r>
+            <a:r>
+              <a:rPr lang="ru-RU" dirty="0" err="1"/>
+              <a:t>Rebinding</a:t>
+            </a:r>
+            <a:r>
+              <a:rPr lang="ru-RU" dirty="0"/>
+              <a:t>) — 7/8 от времени аренды; если первый сервер не ответил, устройство рассылает широковещательный запрос, чтобы продлить аренду или получить новый адрес. Если </a:t>
+            </a:r>
+            <a:r>
+              <a:rPr lang="ru-RU" dirty="0" err="1"/>
+              <a:t>Lease</a:t>
+            </a:r>
+            <a:r>
+              <a:rPr lang="ru-RU" dirty="0"/>
+              <a:t> </a:t>
+            </a:r>
+            <a:r>
+              <a:rPr lang="ru-RU" dirty="0" err="1"/>
+              <a:t>Time</a:t>
+            </a:r>
+            <a:r>
+              <a:rPr lang="ru-RU" dirty="0"/>
+              <a:t> истёк и никто не продлил адрес, устройство отказывается от него и начинает процедуру получения нового с нуля.</a:t>
+            </a:r>
+          </a:p>
+        </p:txBody>
+      </p:sp>
+    </p:spTree>
+    <p:extLst>
+      <p:ext uri="{BB962C8B-B14F-4D97-AF65-F5344CB8AC3E}">
+        <p14:creationId xmlns:p14="http://schemas.microsoft.com/office/powerpoint/2010/main" val="3026360222"/>
+      </p:ext>
+    </p:extLst>
+  </p:cSld>
+  <p:clrMapOvr>
+    <a:masterClrMapping/>
+  </p:clrMapOvr>
+</p:sld>
+</file>
+
+<file path=ppt/slides/slide72.xml><?xml version="1.0" encoding="utf-8"?>
+<p:sld xmlns:a="http://schemas.openxmlformats.org/drawingml/2006/main" xmlns:r="http://schemas.openxmlformats.org/officeDocument/2006/relationships" xmlns:p="http://schemas.openxmlformats.org/presentationml/2006/main">
+  <p:cSld>
+    <p:spTree>
+      <p:nvGrpSpPr>
+        <p:cNvPr id="1" name=""/>
+        <p:cNvGrpSpPr/>
+        <p:nvPr/>
+      </p:nvGrpSpPr>
+      <p:grpSpPr>
+        <a:xfrm>
+          <a:off x="0" y="0"/>
+          <a:ext cx="0" cy="0"/>
+          <a:chOff x="0" y="0"/>
+          <a:chExt cx="0" cy="0"/>
+        </a:xfrm>
+      </p:grpSpPr>
+      <p:sp>
+        <p:nvSpPr>
+          <p:cNvPr id="2" name="Заголовок 1"/>
+          <p:cNvSpPr>
+            <a:spLocks noGrp="1"/>
+          </p:cNvSpPr>
+          <p:nvPr>
+            <p:ph type="title"/>
+          </p:nvPr>
+        </p:nvSpPr>
         <p:spPr/>
         <p:txBody>
           <a:bodyPr/>
@@ -30504,7 +33642,7 @@
 </p:sld>
 </file>
 
-<file path=ppt/slides/slide71.xml><?xml version="1.0" encoding="utf-8"?>
+<file path=ppt/slides/slide73.xml><?xml version="1.0" encoding="utf-8"?>
 <p:sld xmlns:a="http://schemas.openxmlformats.org/drawingml/2006/main" xmlns:r="http://schemas.openxmlformats.org/officeDocument/2006/relationships" xmlns:p="http://schemas.openxmlformats.org/presentationml/2006/main">
   <p:cSld>
     <p:spTree>
@@ -30566,7 +33704,6 @@
               <a:rPr lang="ru-RU" dirty="0"/>
               <a:t>почему?</a:t>
             </a:r>
-            <a:endParaRPr lang="ru-RU" dirty="0"/>
           </a:p>
         </p:txBody>
       </p:sp>
@@ -30632,7 +33769,7 @@
 </p:sld>
 </file>
 
-<file path=ppt/slides/slide72.xml><?xml version="1.0" encoding="utf-8"?>
+<file path=ppt/slides/slide74.xml><?xml version="1.0" encoding="utf-8"?>
 <p:sld xmlns:a="http://schemas.openxmlformats.org/drawingml/2006/main" xmlns:r="http://schemas.openxmlformats.org/officeDocument/2006/relationships" xmlns:p="http://schemas.openxmlformats.org/presentationml/2006/main">
   <p:cSld>
     <p:spTree>
@@ -30835,7 +33972,7 @@
 </p:sld>
 </file>
 
-<file path=ppt/slides/slide73.xml><?xml version="1.0" encoding="utf-8"?>
+<file path=ppt/slides/slide75.xml><?xml version="1.0" encoding="utf-8"?>
 <p:sld xmlns:a="http://schemas.openxmlformats.org/drawingml/2006/main" xmlns:r="http://schemas.openxmlformats.org/officeDocument/2006/relationships" xmlns:p="http://schemas.openxmlformats.org/presentationml/2006/main">
   <p:cSld>
     <p:spTree>
@@ -30956,7 +34093,7 @@
 </p:sld>
 </file>
 
-<file path=ppt/slides/slide74.xml><?xml version="1.0" encoding="utf-8"?>
+<file path=ppt/slides/slide76.xml><?xml version="1.0" encoding="utf-8"?>
 <p:sld xmlns:a="http://schemas.openxmlformats.org/drawingml/2006/main" xmlns:r="http://schemas.openxmlformats.org/officeDocument/2006/relationships" xmlns:p="http://schemas.openxmlformats.org/presentationml/2006/main">
   <p:cSld>
     <p:spTree>
@@ -30994,7 +34131,6 @@
               <a:rPr lang="ru-RU" dirty="0"/>
               <a:t>Расставьте события жизненного цикла IP-адреса в хронологическом порядке (от 1 до 6):</a:t>
             </a:r>
-            <a:endParaRPr lang="ru-RU" dirty="0"/>
           </a:p>
         </p:txBody>
       </p:sp>
@@ -31144,7 +34280,7 @@
 </p:sld>
 </file>
 
-<file path=ppt/slides/slide75.xml><?xml version="1.0" encoding="utf-8"?>
+<file path=ppt/slides/slide77.xml><?xml version="1.0" encoding="utf-8"?>
 <p:sld xmlns:a="http://schemas.openxmlformats.org/drawingml/2006/main" xmlns:r="http://schemas.openxmlformats.org/officeDocument/2006/relationships" xmlns:p="http://schemas.openxmlformats.org/presentationml/2006/main">
   <p:cSld>
     <p:spTree>
@@ -31961,7 +35097,7 @@
 </p:sld>
 </file>
 
-<file path=ppt/slides/slide76.xml><?xml version="1.0" encoding="utf-8"?>
+<file path=ppt/slides/slide78.xml><?xml version="1.0" encoding="utf-8"?>
 <p:sld xmlns:a="http://schemas.openxmlformats.org/drawingml/2006/main" xmlns:r="http://schemas.openxmlformats.org/officeDocument/2006/relationships" xmlns:p="http://schemas.openxmlformats.org/presentationml/2006/main">
   <p:cSld>
     <p:spTree>
@@ -31997,11 +35133,11 @@
           <a:p>
             <a:r>
               <a:rPr lang="ru-RU" dirty="0"/>
-              <a:t>Для каждой ситуации определите, какой тип ARP-сообщения будет сгенерирован (</a:t>
+              <a:t>Для каждой ситуации определите, какой тип ARP-сообщения будет сгенерирован (Обычный</a:t>
             </a:r>
             <a:r>
               <a:rPr lang="ru-RU" b="1" dirty="0"/>
-              <a:t>Обычный ARP </a:t>
+              <a:t> ARP </a:t>
             </a:r>
             <a:r>
               <a:rPr lang="ru-RU" b="1" dirty="0" err="1"/>
@@ -32023,7 +35159,6 @@
               <a:rPr lang="ru-RU" dirty="0"/>
               <a:t>):</a:t>
             </a:r>
-            <a:endParaRPr lang="ru-RU" dirty="0"/>
           </a:p>
         </p:txBody>
       </p:sp>
@@ -32103,281 +35238,6 @@
     <p:extLst>
       <p:ext uri="{BB962C8B-B14F-4D97-AF65-F5344CB8AC3E}">
         <p14:creationId xmlns:p14="http://schemas.microsoft.com/office/powerpoint/2010/main" val="3302600423"/>
-      </p:ext>
-    </p:extLst>
-  </p:cSld>
-  <p:clrMapOvr>
-    <a:masterClrMapping/>
-  </p:clrMapOvr>
-</p:sld>
-</file>
-
-<file path=ppt/slides/slide77.xml><?xml version="1.0" encoding="utf-8"?>
-<p:sld xmlns:a="http://schemas.openxmlformats.org/drawingml/2006/main" xmlns:r="http://schemas.openxmlformats.org/officeDocument/2006/relationships" xmlns:p="http://schemas.openxmlformats.org/presentationml/2006/main">
-  <p:cSld>
-    <p:spTree>
-      <p:nvGrpSpPr>
-        <p:cNvPr id="1" name=""/>
-        <p:cNvGrpSpPr/>
-        <p:nvPr/>
-      </p:nvGrpSpPr>
-      <p:grpSpPr>
-        <a:xfrm>
-          <a:off x="0" y="0"/>
-          <a:ext cx="0" cy="0"/>
-          <a:chOff x="0" y="0"/>
-          <a:chExt cx="0" cy="0"/>
-        </a:xfrm>
-      </p:grpSpPr>
-      <p:sp>
-        <p:nvSpPr>
-          <p:cNvPr id="2" name="Заголовок 1"/>
-          <p:cNvSpPr>
-            <a:spLocks noGrp="1"/>
-          </p:cNvSpPr>
-          <p:nvPr>
-            <p:ph type="title"/>
-          </p:nvPr>
-        </p:nvSpPr>
-        <p:spPr/>
-        <p:txBody>
-          <a:bodyPr>
-            <a:normAutofit fontScale="90000"/>
-          </a:bodyPr>
-          <a:lstStyle/>
-          <a:p>
-            <a:r>
-              <a:rPr lang="ru-RU" b="1" dirty="0"/>
-              <a:t>Маршрутизатор получил пакет общего размера 3000 байт (заголовок IP = 20 байт, полезная нагрузка = 2980 байт).</a:t>
-            </a:r>
-            <a:br>
-              <a:rPr lang="ru-RU" b="1" dirty="0"/>
-            </a:br>
-            <a:r>
-              <a:rPr lang="ru-RU" b="1" dirty="0"/>
-              <a:t>Следующий канал связи имеет MTU = 1500 байт.</a:t>
-            </a:r>
-          </a:p>
-        </p:txBody>
-      </p:sp>
-      <p:sp>
-        <p:nvSpPr>
-          <p:cNvPr id="3" name="Объект 2"/>
-          <p:cNvSpPr>
-            <a:spLocks noGrp="1"/>
-          </p:cNvSpPr>
-          <p:nvPr>
-            <p:ph idx="1"/>
-          </p:nvPr>
-        </p:nvSpPr>
-        <p:spPr>
-          <a:xfrm>
-            <a:off x="1143000" y="2636349"/>
-            <a:ext cx="9905999" cy="3541714"/>
-          </a:xfrm>
-        </p:spPr>
-        <p:txBody>
-          <a:bodyPr>
-            <a:normAutofit lnSpcReduction="10000"/>
-          </a:bodyPr>
-          <a:lstStyle/>
-          <a:p>
-            <a:pPr marL="0" indent="0">
-              <a:buNone/>
-            </a:pPr>
-            <a:r>
-              <a:rPr lang="ru-RU" dirty="0"/>
-              <a:t>Ответьте на вопросы</a:t>
-            </a:r>
-            <a:r>
-              <a:rPr lang="ru-RU" dirty="0" smtClean="0"/>
-              <a:t>:</a:t>
-            </a:r>
-            <a:endParaRPr lang="ru-RU" dirty="0"/>
-          </a:p>
-          <a:p>
-            <a:r>
-              <a:rPr lang="ru-RU" dirty="0"/>
-              <a:t>На сколько фрагментов маршрутизатор разобьёт этот пакет?</a:t>
-            </a:r>
-          </a:p>
-          <a:p>
-            <a:r>
-              <a:rPr lang="ru-RU" dirty="0"/>
-              <a:t>Какое значение флага MF (</a:t>
-            </a:r>
-            <a:r>
-              <a:rPr lang="ru-RU" dirty="0" err="1"/>
-              <a:t>More</a:t>
-            </a:r>
-            <a:r>
-              <a:rPr lang="ru-RU" dirty="0"/>
-              <a:t> </a:t>
-            </a:r>
-            <a:r>
-              <a:rPr lang="ru-RU" dirty="0" err="1"/>
-              <a:t>Fragments</a:t>
-            </a:r>
-            <a:r>
-              <a:rPr lang="ru-RU" dirty="0"/>
-              <a:t>) будет у первого фрагмента (0 или 1)?</a:t>
-            </a:r>
-          </a:p>
-          <a:p>
-            <a:r>
-              <a:rPr lang="ru-RU" dirty="0"/>
-              <a:t>Какое значение флага MF будет у последнего фрагмента (0 или 1)?</a:t>
-            </a:r>
-          </a:p>
-          <a:p>
-            <a:r>
-              <a:rPr lang="ru-RU" dirty="0"/>
-              <a:t>Что произойдёт с пакетом, если в его заголовке изначально был установлен флаг DF = 1 (</a:t>
-            </a:r>
-            <a:r>
-              <a:rPr lang="ru-RU" dirty="0" err="1"/>
-              <a:t>Do</a:t>
-            </a:r>
-            <a:r>
-              <a:rPr lang="ru-RU" dirty="0"/>
-              <a:t> </a:t>
-            </a:r>
-            <a:r>
-              <a:rPr lang="ru-RU" dirty="0" err="1"/>
-              <a:t>not</a:t>
-            </a:r>
-            <a:r>
-              <a:rPr lang="ru-RU" dirty="0"/>
-              <a:t> </a:t>
-            </a:r>
-            <a:r>
-              <a:rPr lang="ru-RU" dirty="0" err="1"/>
-              <a:t>Fragment</a:t>
-            </a:r>
-            <a:r>
-              <a:rPr lang="ru-RU" dirty="0"/>
-              <a:t>)?</a:t>
-            </a:r>
-          </a:p>
-        </p:txBody>
-      </p:sp>
-    </p:spTree>
-    <p:extLst>
-      <p:ext uri="{BB962C8B-B14F-4D97-AF65-F5344CB8AC3E}">
-        <p14:creationId xmlns:p14="http://schemas.microsoft.com/office/powerpoint/2010/main" val="2982011540"/>
-      </p:ext>
-    </p:extLst>
-  </p:cSld>
-  <p:clrMapOvr>
-    <a:masterClrMapping/>
-  </p:clrMapOvr>
-</p:sld>
-</file>
-
-<file path=ppt/slides/slide78.xml><?xml version="1.0" encoding="utf-8"?>
-<p:sld xmlns:a="http://schemas.openxmlformats.org/drawingml/2006/main" xmlns:r="http://schemas.openxmlformats.org/officeDocument/2006/relationships" xmlns:p="http://schemas.openxmlformats.org/presentationml/2006/main">
-  <p:cSld>
-    <p:spTree>
-      <p:nvGrpSpPr>
-        <p:cNvPr id="1" name=""/>
-        <p:cNvGrpSpPr/>
-        <p:nvPr/>
-      </p:nvGrpSpPr>
-      <p:grpSpPr>
-        <a:xfrm>
-          <a:off x="0" y="0"/>
-          <a:ext cx="0" cy="0"/>
-          <a:chOff x="0" y="0"/>
-          <a:chExt cx="0" cy="0"/>
-        </a:xfrm>
-      </p:grpSpPr>
-      <p:sp>
-        <p:nvSpPr>
-          <p:cNvPr id="2" name="Заголовок 1"/>
-          <p:cNvSpPr>
-            <a:spLocks noGrp="1"/>
-          </p:cNvSpPr>
-          <p:nvPr>
-            <p:ph type="title"/>
-          </p:nvPr>
-        </p:nvSpPr>
-        <p:spPr>
-          <a:xfrm>
-            <a:off x="1143000" y="970210"/>
-            <a:ext cx="9905998" cy="1478570"/>
-          </a:xfrm>
-        </p:spPr>
-        <p:txBody>
-          <a:bodyPr>
-            <a:normAutofit fontScale="90000"/>
-          </a:bodyPr>
-          <a:lstStyle/>
-          <a:p>
-            <a:r>
-              <a:rPr lang="ru-RU" dirty="0"/>
-              <a:t>Какой </a:t>
-            </a:r>
-            <a:r>
-              <a:rPr lang="ru-RU" b="1" dirty="0"/>
-              <a:t>одной</a:t>
-            </a:r>
-            <a:r>
-              <a:rPr lang="ru-RU" dirty="0"/>
-              <a:t> агрегированной записью (адрес сети и префикс маски) центральный маршрутизатор может описать все четыре подсети сразу, чтобы минимизировать размер таблицы маршрутизации?</a:t>
-            </a:r>
-            <a:endParaRPr lang="ru-RU" dirty="0"/>
-          </a:p>
-        </p:txBody>
-      </p:sp>
-      <p:sp>
-        <p:nvSpPr>
-          <p:cNvPr id="3" name="Объект 2"/>
-          <p:cNvSpPr>
-            <a:spLocks noGrp="1"/>
-          </p:cNvSpPr>
-          <p:nvPr>
-            <p:ph idx="1"/>
-          </p:nvPr>
-        </p:nvSpPr>
-        <p:spPr>
-          <a:xfrm>
-            <a:off x="1143000" y="3190263"/>
-            <a:ext cx="9905999" cy="2656621"/>
-          </a:xfrm>
-        </p:spPr>
-        <p:txBody>
-          <a:bodyPr/>
-          <a:lstStyle/>
-          <a:p>
-            <a:r>
-              <a:rPr lang="ru-RU" dirty="0"/>
-              <a:t>10.20.0.0/24</a:t>
-            </a:r>
-          </a:p>
-          <a:p>
-            <a:r>
-              <a:rPr lang="ru-RU" dirty="0"/>
-              <a:t>10.20.1.0/24</a:t>
-            </a:r>
-          </a:p>
-          <a:p>
-            <a:r>
-              <a:rPr lang="ru-RU" dirty="0"/>
-              <a:t>10.20.2.0/24</a:t>
-            </a:r>
-          </a:p>
-          <a:p>
-            <a:r>
-              <a:rPr lang="ru-RU" dirty="0"/>
-              <a:t>10.20.3.0/24</a:t>
-            </a:r>
-          </a:p>
-        </p:txBody>
-      </p:sp>
-    </p:spTree>
-    <p:extLst>
-      <p:ext uri="{BB962C8B-B14F-4D97-AF65-F5344CB8AC3E}">
-        <p14:creationId xmlns:p14="http://schemas.microsoft.com/office/powerpoint/2010/main" val="1062254496"/>
       </p:ext>
     </p:extLst>
   </p:cSld>
@@ -32422,26 +35282,16 @@
           <a:lstStyle/>
           <a:p>
             <a:r>
-              <a:rPr lang="ru-RU" dirty="0"/>
-              <a:t>Распределите устройства по двум группам (</a:t>
-            </a:r>
-            <a:r>
               <a:rPr lang="ru-RU" b="1" dirty="0"/>
-              <a:t>Группа А: Только статический IP</a:t>
-            </a:r>
-            <a:r>
-              <a:rPr lang="ru-RU" dirty="0"/>
-              <a:t> / </a:t>
-            </a:r>
-            <a:r>
+              <a:t>Маршрутизатор получил пакет общего размера 3000 байт (заголовок IP = 20 байт, полезная нагрузка = 2980 байт).</a:t>
+            </a:r>
+            <a:br>
               <a:rPr lang="ru-RU" b="1" dirty="0"/>
-              <a:t>Группа Б: Рекомендуется DHCP</a:t>
-            </a:r>
-            <a:r>
-              <a:rPr lang="ru-RU" dirty="0"/>
-              <a:t>):</a:t>
-            </a:r>
-            <a:endParaRPr lang="ru-RU" dirty="0"/>
+            </a:br>
+            <a:r>
+              <a:rPr lang="ru-RU" b="1" dirty="0"/>
+              <a:t>Следующий канал связи имеет MTU = 1500 байт.</a:t>
+            </a:r>
           </a:p>
         </p:txBody>
       </p:sp>
@@ -32455,56 +35305,101 @@
             <p:ph idx="1"/>
           </p:nvPr>
         </p:nvSpPr>
-        <p:spPr/>
+        <p:spPr>
+          <a:xfrm>
+            <a:off x="1143000" y="2636349"/>
+            <a:ext cx="9905999" cy="3541714"/>
+          </a:xfrm>
+        </p:spPr>
         <p:txBody>
-          <a:bodyPr/>
+          <a:bodyPr>
+            <a:normAutofit lnSpcReduction="10000"/>
+          </a:bodyPr>
           <a:lstStyle/>
           <a:p>
+            <a:pPr marL="0" indent="0">
+              <a:buNone/>
+            </a:pPr>
             <a:r>
               <a:rPr lang="ru-RU" dirty="0"/>
-              <a:t>Сетевое хранилище компании (NAS с базами данных)</a:t>
-            </a:r>
+              <a:t>Ответьте на вопросы</a:t>
+            </a:r>
+            <a:r>
+              <a:rPr lang="ru-RU" dirty="0" smtClean="0"/>
+              <a:t>:</a:t>
+            </a:r>
+            <a:endParaRPr lang="ru-RU" dirty="0"/>
           </a:p>
           <a:p>
             <a:r>
               <a:rPr lang="ru-RU" dirty="0"/>
-              <a:t>Смартфон посетителя в гостевом </a:t>
+              <a:t>На сколько фрагментов маршрутизатор разобьёт этот пакет?</a:t>
+            </a:r>
+          </a:p>
+          <a:p>
+            <a:r>
+              <a:rPr lang="ru-RU" dirty="0"/>
+              <a:t>Какое значение флага MF (</a:t>
             </a:r>
             <a:r>
               <a:rPr lang="ru-RU" dirty="0" err="1"/>
-              <a:t>Wi-Fi</a:t>
-            </a:r>
-            <a:endParaRPr lang="ru-RU" dirty="0"/>
-          </a:p>
-          <a:p>
+              <a:t>More</a:t>
+            </a:r>
             <a:r>
               <a:rPr lang="ru-RU" dirty="0"/>
-              <a:t>Основной офисный сетевой принтер/МФУ</a:t>
-            </a:r>
-          </a:p>
-          <a:p>
+              <a:t> </a:t>
+            </a:r>
+            <a:r>
+              <a:rPr lang="ru-RU" dirty="0" err="1"/>
+              <a:t>Fragments</a:t>
+            </a:r>
             <a:r>
               <a:rPr lang="ru-RU" dirty="0"/>
-              <a:t>Ноутбук менеджера по продажам</a:t>
+              <a:t>) будет у первого фрагмента (0 или 1)?</a:t>
             </a:r>
           </a:p>
           <a:p>
             <a:r>
               <a:rPr lang="ru-RU" dirty="0"/>
-              <a:t>Камера видеонаблюдения, пишущая поток на </a:t>
-            </a:r>
-            <a:r>
-              <a:rPr lang="ru-RU" dirty="0" smtClean="0"/>
-              <a:t>видеорегистратор</a:t>
-            </a:r>
-            <a:endParaRPr lang="ru-RU" dirty="0"/>
+              <a:t>Какое значение флага MF будет у последнего фрагмента (0 или 1)?</a:t>
+            </a:r>
+          </a:p>
+          <a:p>
+            <a:r>
+              <a:rPr lang="ru-RU" dirty="0"/>
+              <a:t>Что произойдёт с пакетом, если в его заголовке изначально был установлен флаг DF = 1 (</a:t>
+            </a:r>
+            <a:r>
+              <a:rPr lang="ru-RU" dirty="0" err="1"/>
+              <a:t>Do</a:t>
+            </a:r>
+            <a:r>
+              <a:rPr lang="ru-RU" dirty="0"/>
+              <a:t> </a:t>
+            </a:r>
+            <a:r>
+              <a:rPr lang="ru-RU" dirty="0" err="1"/>
+              <a:t>not</a:t>
+            </a:r>
+            <a:r>
+              <a:rPr lang="ru-RU" dirty="0"/>
+              <a:t> </a:t>
+            </a:r>
+            <a:r>
+              <a:rPr lang="ru-RU" dirty="0" err="1"/>
+              <a:t>Fragment</a:t>
+            </a:r>
+            <a:r>
+              <a:rPr lang="ru-RU" dirty="0"/>
+              <a:t>)?</a:t>
+            </a:r>
           </a:p>
         </p:txBody>
       </p:sp>
     </p:spTree>
     <p:extLst>
       <p:ext uri="{BB962C8B-B14F-4D97-AF65-F5344CB8AC3E}">
-        <p14:creationId xmlns:p14="http://schemas.microsoft.com/office/powerpoint/2010/main" val="170768346"/>
+        <p14:creationId xmlns:p14="http://schemas.microsoft.com/office/powerpoint/2010/main" val="2982011540"/>
       </p:ext>
     </p:extLst>
   </p:cSld>
@@ -32644,6 +35539,244 @@
       </p:par>
     </p:tnLst>
   </p:timing>
+</p:sld>
+</file>
+
+<file path=ppt/slides/slide80.xml><?xml version="1.0" encoding="utf-8"?>
+<p:sld xmlns:a="http://schemas.openxmlformats.org/drawingml/2006/main" xmlns:r="http://schemas.openxmlformats.org/officeDocument/2006/relationships" xmlns:p="http://schemas.openxmlformats.org/presentationml/2006/main">
+  <p:cSld>
+    <p:spTree>
+      <p:nvGrpSpPr>
+        <p:cNvPr id="1" name=""/>
+        <p:cNvGrpSpPr/>
+        <p:nvPr/>
+      </p:nvGrpSpPr>
+      <p:grpSpPr>
+        <a:xfrm>
+          <a:off x="0" y="0"/>
+          <a:ext cx="0" cy="0"/>
+          <a:chOff x="0" y="0"/>
+          <a:chExt cx="0" cy="0"/>
+        </a:xfrm>
+      </p:grpSpPr>
+      <p:sp>
+        <p:nvSpPr>
+          <p:cNvPr id="2" name="Заголовок 1"/>
+          <p:cNvSpPr>
+            <a:spLocks noGrp="1"/>
+          </p:cNvSpPr>
+          <p:nvPr>
+            <p:ph type="title"/>
+          </p:nvPr>
+        </p:nvSpPr>
+        <p:spPr>
+          <a:xfrm>
+            <a:off x="1143000" y="970210"/>
+            <a:ext cx="9905998" cy="1478570"/>
+          </a:xfrm>
+        </p:spPr>
+        <p:txBody>
+          <a:bodyPr>
+            <a:normAutofit fontScale="90000"/>
+          </a:bodyPr>
+          <a:lstStyle/>
+          <a:p>
+            <a:r>
+              <a:rPr lang="ru-RU" dirty="0"/>
+              <a:t>Какой </a:t>
+            </a:r>
+            <a:r>
+              <a:rPr lang="ru-RU" b="1" dirty="0"/>
+              <a:t>одной</a:t>
+            </a:r>
+            <a:r>
+              <a:rPr lang="ru-RU" dirty="0"/>
+              <a:t> агрегированной записью (адрес сети и префикс маски) центральный маршрутизатор может описать все четыре подсети сразу, чтобы минимизировать размер таблицы маршрутизации?</a:t>
+            </a:r>
+          </a:p>
+        </p:txBody>
+      </p:sp>
+      <p:sp>
+        <p:nvSpPr>
+          <p:cNvPr id="3" name="Объект 2"/>
+          <p:cNvSpPr>
+            <a:spLocks noGrp="1"/>
+          </p:cNvSpPr>
+          <p:nvPr>
+            <p:ph idx="1"/>
+          </p:nvPr>
+        </p:nvSpPr>
+        <p:spPr>
+          <a:xfrm>
+            <a:off x="1143000" y="3190263"/>
+            <a:ext cx="9905999" cy="2656621"/>
+          </a:xfrm>
+        </p:spPr>
+        <p:txBody>
+          <a:bodyPr/>
+          <a:lstStyle/>
+          <a:p>
+            <a:r>
+              <a:rPr lang="ru-RU" dirty="0"/>
+              <a:t>10.20.0.0/24</a:t>
+            </a:r>
+          </a:p>
+          <a:p>
+            <a:r>
+              <a:rPr lang="ru-RU" dirty="0"/>
+              <a:t>10.20.1.0/24</a:t>
+            </a:r>
+          </a:p>
+          <a:p>
+            <a:r>
+              <a:rPr lang="ru-RU" dirty="0"/>
+              <a:t>10.20.2.0/24</a:t>
+            </a:r>
+          </a:p>
+          <a:p>
+            <a:r>
+              <a:rPr lang="ru-RU" dirty="0"/>
+              <a:t>10.20.3.0/24</a:t>
+            </a:r>
+          </a:p>
+        </p:txBody>
+      </p:sp>
+    </p:spTree>
+    <p:extLst>
+      <p:ext uri="{BB962C8B-B14F-4D97-AF65-F5344CB8AC3E}">
+        <p14:creationId xmlns:p14="http://schemas.microsoft.com/office/powerpoint/2010/main" val="1062254496"/>
+      </p:ext>
+    </p:extLst>
+  </p:cSld>
+  <p:clrMapOvr>
+    <a:masterClrMapping/>
+  </p:clrMapOvr>
+</p:sld>
+</file>
+
+<file path=ppt/slides/slide81.xml><?xml version="1.0" encoding="utf-8"?>
+<p:sld xmlns:a="http://schemas.openxmlformats.org/drawingml/2006/main" xmlns:r="http://schemas.openxmlformats.org/officeDocument/2006/relationships" xmlns:p="http://schemas.openxmlformats.org/presentationml/2006/main">
+  <p:cSld>
+    <p:spTree>
+      <p:nvGrpSpPr>
+        <p:cNvPr id="1" name=""/>
+        <p:cNvGrpSpPr/>
+        <p:nvPr/>
+      </p:nvGrpSpPr>
+      <p:grpSpPr>
+        <a:xfrm>
+          <a:off x="0" y="0"/>
+          <a:ext cx="0" cy="0"/>
+          <a:chOff x="0" y="0"/>
+          <a:chExt cx="0" cy="0"/>
+        </a:xfrm>
+      </p:grpSpPr>
+      <p:sp>
+        <p:nvSpPr>
+          <p:cNvPr id="2" name="Заголовок 1"/>
+          <p:cNvSpPr>
+            <a:spLocks noGrp="1"/>
+          </p:cNvSpPr>
+          <p:nvPr>
+            <p:ph type="title"/>
+          </p:nvPr>
+        </p:nvSpPr>
+        <p:spPr/>
+        <p:txBody>
+          <a:bodyPr>
+            <a:normAutofit fontScale="90000"/>
+          </a:bodyPr>
+          <a:lstStyle/>
+          <a:p>
+            <a:r>
+              <a:rPr lang="ru-RU" dirty="0"/>
+              <a:t>Распределите устройства по двум группам (</a:t>
+            </a:r>
+            <a:r>
+              <a:rPr lang="ru-RU" b="1" dirty="0"/>
+              <a:t>Группа А: Только статический IP</a:t>
+            </a:r>
+            <a:r>
+              <a:rPr lang="ru-RU" dirty="0"/>
+              <a:t> / </a:t>
+            </a:r>
+            <a:r>
+              <a:rPr lang="ru-RU" b="1" dirty="0"/>
+              <a:t>Группа Б: Рекомендуется DHCP</a:t>
+            </a:r>
+            <a:r>
+              <a:rPr lang="ru-RU" dirty="0"/>
+              <a:t>):</a:t>
+            </a:r>
+          </a:p>
+        </p:txBody>
+      </p:sp>
+      <p:sp>
+        <p:nvSpPr>
+          <p:cNvPr id="3" name="Объект 2"/>
+          <p:cNvSpPr>
+            <a:spLocks noGrp="1"/>
+          </p:cNvSpPr>
+          <p:nvPr>
+            <p:ph idx="1"/>
+          </p:nvPr>
+        </p:nvSpPr>
+        <p:spPr/>
+        <p:txBody>
+          <a:bodyPr/>
+          <a:lstStyle/>
+          <a:p>
+            <a:r>
+              <a:rPr lang="ru-RU" dirty="0"/>
+              <a:t>Сетевое хранилище компании (NAS с базами данных)</a:t>
+            </a:r>
+          </a:p>
+          <a:p>
+            <a:r>
+              <a:rPr lang="ru-RU" dirty="0"/>
+              <a:t>Смартфон посетителя в гостевом </a:t>
+            </a:r>
+            <a:r>
+              <a:rPr lang="ru-RU" dirty="0" err="1"/>
+              <a:t>Wi-Fi</a:t>
+            </a:r>
+            <a:endParaRPr lang="ru-RU" dirty="0"/>
+          </a:p>
+          <a:p>
+            <a:r>
+              <a:rPr lang="ru-RU" dirty="0"/>
+              <a:t>Основной офисный сетевой принтер/МФУ</a:t>
+            </a:r>
+          </a:p>
+          <a:p>
+            <a:r>
+              <a:rPr lang="ru-RU" dirty="0"/>
+              <a:t>Ноутбук менеджера по продажам</a:t>
+            </a:r>
+          </a:p>
+          <a:p>
+            <a:r>
+              <a:rPr lang="ru-RU" dirty="0"/>
+              <a:t>Камера видеонаблюдения, пишущая поток на </a:t>
+            </a:r>
+            <a:r>
+              <a:rPr lang="ru-RU" dirty="0" smtClean="0"/>
+              <a:t>видеорегистратор</a:t>
+            </a:r>
+            <a:endParaRPr lang="ru-RU" dirty="0"/>
+          </a:p>
+        </p:txBody>
+      </p:sp>
+    </p:spTree>
+    <p:extLst>
+      <p:ext uri="{BB962C8B-B14F-4D97-AF65-F5344CB8AC3E}">
+        <p14:creationId xmlns:p14="http://schemas.microsoft.com/office/powerpoint/2010/main" val="170768346"/>
+      </p:ext>
+    </p:extLst>
+  </p:cSld>
+  <p:clrMapOvr>
+    <a:masterClrMapping/>
+  </p:clrMapOvr>
 </p:sld>
 </file>
 
